--- a/u02d_exceptions/notes/b_Using Exceptions in Defensive Programming.pptx
+++ b/u02d_exceptions/notes/b_Using Exceptions in Defensive Programming.pptx
@@ -13,31 +13,33 @@
     <p:sldMasterId id="2147483818" r:id="rId9"/>
   </p:sldMasterIdLst>
   <p:notesMasterIdLst>
-    <p:notesMasterId r:id="rId29"/>
+    <p:notesMasterId r:id="rId31"/>
   </p:notesMasterIdLst>
   <p:handoutMasterIdLst>
-    <p:handoutMasterId r:id="rId30"/>
+    <p:handoutMasterId r:id="rId32"/>
   </p:handoutMasterIdLst>
   <p:sldIdLst>
     <p:sldId id="661" r:id="rId10"/>
     <p:sldId id="662" r:id="rId11"/>
     <p:sldId id="663" r:id="rId12"/>
-    <p:sldId id="664" r:id="rId13"/>
-    <p:sldId id="433" r:id="rId14"/>
-    <p:sldId id="434" r:id="rId15"/>
-    <p:sldId id="435" r:id="rId16"/>
-    <p:sldId id="621" r:id="rId17"/>
-    <p:sldId id="633" r:id="rId18"/>
-    <p:sldId id="635" r:id="rId19"/>
-    <p:sldId id="640" r:id="rId20"/>
-    <p:sldId id="647" r:id="rId21"/>
-    <p:sldId id="641" r:id="rId22"/>
-    <p:sldId id="642" r:id="rId23"/>
-    <p:sldId id="643" r:id="rId24"/>
-    <p:sldId id="644" r:id="rId25"/>
-    <p:sldId id="645" r:id="rId26"/>
-    <p:sldId id="646" r:id="rId27"/>
-    <p:sldId id="665" r:id="rId28"/>
+    <p:sldId id="668" r:id="rId13"/>
+    <p:sldId id="667" r:id="rId14"/>
+    <p:sldId id="666" r:id="rId15"/>
+    <p:sldId id="433" r:id="rId16"/>
+    <p:sldId id="434" r:id="rId17"/>
+    <p:sldId id="435" r:id="rId18"/>
+    <p:sldId id="621" r:id="rId19"/>
+    <p:sldId id="633" r:id="rId20"/>
+    <p:sldId id="635" r:id="rId21"/>
+    <p:sldId id="640" r:id="rId22"/>
+    <p:sldId id="647" r:id="rId23"/>
+    <p:sldId id="641" r:id="rId24"/>
+    <p:sldId id="642" r:id="rId25"/>
+    <p:sldId id="643" r:id="rId26"/>
+    <p:sldId id="644" r:id="rId27"/>
+    <p:sldId id="645" r:id="rId28"/>
+    <p:sldId id="646" r:id="rId29"/>
+    <p:sldId id="665" r:id="rId30"/>
   </p:sldIdLst>
   <p:sldSz cx="9144000" cy="6858000" type="screen4x3"/>
   <p:notesSz cx="6858000" cy="9144000"/>
@@ -775,6 +777,602 @@
       </p:grpSpPr>
       <p:sp>
         <p:nvSpPr>
+          <p:cNvPr id="107522" name="Rectangle 7">
+            <a:extLst>
+              <a:ext uri="{FF2B5EF4-FFF2-40B4-BE49-F238E27FC236}">
+                <a16:creationId xmlns:a16="http://schemas.microsoft.com/office/drawing/2014/main" id="{13F6C81E-7993-D228-E5C3-EAE6A0A9AE0A}"/>
+              </a:ext>
+            </a:extLst>
+          </p:cNvPr>
+          <p:cNvSpPr>
+            <a:spLocks noGrp="1" noChangeArrowheads="1"/>
+          </p:cNvSpPr>
+          <p:nvPr>
+            <p:ph type="sldNum" sz="quarter" idx="4294967295"/>
+          </p:nvPr>
+        </p:nvSpPr>
+        <p:spPr bwMode="auto">
+          <a:xfrm>
+            <a:off x="4135438" y="9105900"/>
+            <a:ext cx="3163887" cy="479425"/>
+          </a:xfrm>
+          <a:prstGeom prst="rect">
+            <a:avLst/>
+          </a:prstGeom>
+          <a:noFill/>
+          <a:extLst>
+            <a:ext uri="{909E8E84-426E-40DD-AFC4-6F175D3DCCD1}">
+              <a14:hiddenFill xmlns:a14="http://schemas.microsoft.com/office/drawing/2010/main">
+                <a:solidFill>
+                  <a:srgbClr val="FFFFFF"/>
+                </a:solidFill>
+              </a14:hiddenFill>
+            </a:ext>
+            <a:ext uri="{91240B29-F687-4F45-9708-019B960494DF}">
+              <a14:hiddenLine xmlns:a14="http://schemas.microsoft.com/office/drawing/2010/main" w="9525">
+                <a:solidFill>
+                  <a:srgbClr val="000000"/>
+                </a:solidFill>
+                <a:miter lim="800000"/>
+                <a:headEnd/>
+                <a:tailEnd/>
+              </a14:hiddenLine>
+            </a:ext>
+          </a:extLst>
+        </p:spPr>
+        <p:txBody>
+          <a:bodyPr lIns="96497" tIns="48248" rIns="96497" bIns="48248"/>
+          <a:lstStyle>
+            <a:lvl1pPr eaLnBrk="0" hangingPunct="0">
+              <a:defRPr sz="1600">
+                <a:solidFill>
+                  <a:schemeClr val="tx1"/>
+                </a:solidFill>
+                <a:latin typeface="Tahoma" panose="020B0604030504040204" pitchFamily="34" charset="0"/>
+                <a:ea typeface="SimSun" panose="02010600030101010101" pitchFamily="2" charset="-122"/>
+              </a:defRPr>
+            </a:lvl1pPr>
+            <a:lvl2pPr marL="742950" indent="-285750" eaLnBrk="0" hangingPunct="0">
+              <a:defRPr sz="1600">
+                <a:solidFill>
+                  <a:schemeClr val="tx1"/>
+                </a:solidFill>
+                <a:latin typeface="Tahoma" panose="020B0604030504040204" pitchFamily="34" charset="0"/>
+                <a:ea typeface="SimSun" panose="02010600030101010101" pitchFamily="2" charset="-122"/>
+              </a:defRPr>
+            </a:lvl2pPr>
+            <a:lvl3pPr marL="1143000" indent="-228600" eaLnBrk="0" hangingPunct="0">
+              <a:defRPr sz="1600">
+                <a:solidFill>
+                  <a:schemeClr val="tx1"/>
+                </a:solidFill>
+                <a:latin typeface="Tahoma" panose="020B0604030504040204" pitchFamily="34" charset="0"/>
+                <a:ea typeface="SimSun" panose="02010600030101010101" pitchFamily="2" charset="-122"/>
+              </a:defRPr>
+            </a:lvl3pPr>
+            <a:lvl4pPr marL="1600200" indent="-228600" eaLnBrk="0" hangingPunct="0">
+              <a:defRPr sz="1600">
+                <a:solidFill>
+                  <a:schemeClr val="tx1"/>
+                </a:solidFill>
+                <a:latin typeface="Tahoma" panose="020B0604030504040204" pitchFamily="34" charset="0"/>
+                <a:ea typeface="SimSun" panose="02010600030101010101" pitchFamily="2" charset="-122"/>
+              </a:defRPr>
+            </a:lvl4pPr>
+            <a:lvl5pPr marL="2057400" indent="-228600" eaLnBrk="0" hangingPunct="0">
+              <a:defRPr sz="1600">
+                <a:solidFill>
+                  <a:schemeClr val="tx1"/>
+                </a:solidFill>
+                <a:latin typeface="Tahoma" panose="020B0604030504040204" pitchFamily="34" charset="0"/>
+                <a:ea typeface="SimSun" panose="02010600030101010101" pitchFamily="2" charset="-122"/>
+              </a:defRPr>
+            </a:lvl5pPr>
+            <a:lvl6pPr marL="2514600" indent="-228600" algn="ctr" eaLnBrk="0" fontAlgn="base" hangingPunct="0">
+              <a:spcBef>
+                <a:spcPct val="0"/>
+              </a:spcBef>
+              <a:spcAft>
+                <a:spcPct val="0"/>
+              </a:spcAft>
+              <a:defRPr sz="1600">
+                <a:solidFill>
+                  <a:schemeClr val="tx1"/>
+                </a:solidFill>
+                <a:latin typeface="Tahoma" panose="020B0604030504040204" pitchFamily="34" charset="0"/>
+                <a:ea typeface="SimSun" panose="02010600030101010101" pitchFamily="2" charset="-122"/>
+              </a:defRPr>
+            </a:lvl6pPr>
+            <a:lvl7pPr marL="2971800" indent="-228600" algn="ctr" eaLnBrk="0" fontAlgn="base" hangingPunct="0">
+              <a:spcBef>
+                <a:spcPct val="0"/>
+              </a:spcBef>
+              <a:spcAft>
+                <a:spcPct val="0"/>
+              </a:spcAft>
+              <a:defRPr sz="1600">
+                <a:solidFill>
+                  <a:schemeClr val="tx1"/>
+                </a:solidFill>
+                <a:latin typeface="Tahoma" panose="020B0604030504040204" pitchFamily="34" charset="0"/>
+                <a:ea typeface="SimSun" panose="02010600030101010101" pitchFamily="2" charset="-122"/>
+              </a:defRPr>
+            </a:lvl7pPr>
+            <a:lvl8pPr marL="3429000" indent="-228600" algn="ctr" eaLnBrk="0" fontAlgn="base" hangingPunct="0">
+              <a:spcBef>
+                <a:spcPct val="0"/>
+              </a:spcBef>
+              <a:spcAft>
+                <a:spcPct val="0"/>
+              </a:spcAft>
+              <a:defRPr sz="1600">
+                <a:solidFill>
+                  <a:schemeClr val="tx1"/>
+                </a:solidFill>
+                <a:latin typeface="Tahoma" panose="020B0604030504040204" pitchFamily="34" charset="0"/>
+                <a:ea typeface="SimSun" panose="02010600030101010101" pitchFamily="2" charset="-122"/>
+              </a:defRPr>
+            </a:lvl8pPr>
+            <a:lvl9pPr marL="3886200" indent="-228600" algn="ctr" eaLnBrk="0" fontAlgn="base" hangingPunct="0">
+              <a:spcBef>
+                <a:spcPct val="0"/>
+              </a:spcBef>
+              <a:spcAft>
+                <a:spcPct val="0"/>
+              </a:spcAft>
+              <a:defRPr sz="1600">
+                <a:solidFill>
+                  <a:schemeClr val="tx1"/>
+                </a:solidFill>
+                <a:latin typeface="Tahoma" panose="020B0604030504040204" pitchFamily="34" charset="0"/>
+                <a:ea typeface="SimSun" panose="02010600030101010101" pitchFamily="2" charset="-122"/>
+              </a:defRPr>
+            </a:lvl9pPr>
+          </a:lstStyle>
+          <a:p>
+            <a:pPr marL="0" marR="0" lvl="0" indent="0" algn="ctr" defTabSz="914400" rtl="0" eaLnBrk="1" fontAlgn="base" latinLnBrk="0" hangingPunct="1">
+              <a:lnSpc>
+                <a:spcPct val="100000"/>
+              </a:lnSpc>
+              <a:spcBef>
+                <a:spcPct val="0"/>
+              </a:spcBef>
+              <a:spcAft>
+                <a:spcPct val="0"/>
+              </a:spcAft>
+              <a:buClrTx/>
+              <a:buSzTx/>
+              <a:buFontTx/>
+              <a:buNone/>
+              <a:tabLst/>
+              <a:defRPr/>
+            </a:pPr>
+            <a:fld id="{DB2E3854-F04B-4A5E-882A-84F3C9A85562}" type="slidenum">
+              <a:rPr kumimoji="0" lang="en-US" altLang="en-US" sz="1600" b="0" i="0" u="none" strike="noStrike" kern="1200" cap="none" spc="0" normalizeH="0" baseline="0" noProof="0">
+                <a:ln>
+                  <a:noFill/>
+                </a:ln>
+                <a:solidFill>
+                  <a:srgbClr val="000000"/>
+                </a:solidFill>
+                <a:effectLst/>
+                <a:uLnTx/>
+                <a:uFillTx/>
+                <a:latin typeface="Arial" panose="020B0604020202020204" pitchFamily="34" charset="0"/>
+                <a:ea typeface="SimSun" panose="02010600030101010101" pitchFamily="2" charset="-122"/>
+                <a:cs typeface="+mn-cs"/>
+              </a:rPr>
+              <a:pPr marL="0" marR="0" lvl="0" indent="0" algn="ctr" defTabSz="914400" rtl="0" eaLnBrk="1" fontAlgn="base" latinLnBrk="0" hangingPunct="1">
+                <a:lnSpc>
+                  <a:spcPct val="100000"/>
+                </a:lnSpc>
+                <a:spcBef>
+                  <a:spcPct val="0"/>
+                </a:spcBef>
+                <a:spcAft>
+                  <a:spcPct val="0"/>
+                </a:spcAft>
+                <a:buClrTx/>
+                <a:buSzTx/>
+                <a:buFontTx/>
+                <a:buNone/>
+                <a:tabLst/>
+                <a:defRPr/>
+              </a:pPr>
+              <a:t>13</a:t>
+            </a:fld>
+            <a:endParaRPr kumimoji="0" lang="en-US" altLang="en-US" sz="1600" b="0" i="0" u="none" strike="noStrike" kern="1200" cap="none" spc="0" normalizeH="0" baseline="0" noProof="0">
+              <a:ln>
+                <a:noFill/>
+              </a:ln>
+              <a:solidFill>
+                <a:srgbClr val="000000"/>
+              </a:solidFill>
+              <a:effectLst/>
+              <a:uLnTx/>
+              <a:uFillTx/>
+              <a:latin typeface="Arial" panose="020B0604020202020204" pitchFamily="34" charset="0"/>
+              <a:ea typeface="SimSun" panose="02010600030101010101" pitchFamily="2" charset="-122"/>
+              <a:cs typeface="+mn-cs"/>
+            </a:endParaRPr>
+          </a:p>
+        </p:txBody>
+      </p:sp>
+      <p:sp>
+        <p:nvSpPr>
+          <p:cNvPr id="107523" name="Rectangle 2">
+            <a:extLst>
+              <a:ext uri="{FF2B5EF4-FFF2-40B4-BE49-F238E27FC236}">
+                <a16:creationId xmlns:a16="http://schemas.microsoft.com/office/drawing/2014/main" id="{DF952123-AED2-07B2-8058-49597E5B2685}"/>
+              </a:ext>
+            </a:extLst>
+          </p:cNvPr>
+          <p:cNvSpPr>
+            <a:spLocks noGrp="1" noRot="1" noChangeAspect="1" noChangeArrowheads="1" noTextEdit="1"/>
+          </p:cNvSpPr>
+          <p:nvPr>
+            <p:ph type="sldImg"/>
+          </p:nvPr>
+        </p:nvSpPr>
+        <p:spPr>
+          <a:ln/>
+        </p:spPr>
+      </p:sp>
+      <p:sp>
+        <p:nvSpPr>
+          <p:cNvPr id="107524" name="Rectangle 3">
+            <a:extLst>
+              <a:ext uri="{FF2B5EF4-FFF2-40B4-BE49-F238E27FC236}">
+                <a16:creationId xmlns:a16="http://schemas.microsoft.com/office/drawing/2014/main" id="{A04531B2-630E-F819-2C03-20ECEEA706A4}"/>
+              </a:ext>
+            </a:extLst>
+          </p:cNvPr>
+          <p:cNvSpPr>
+            <a:spLocks noGrp="1" noChangeArrowheads="1"/>
+          </p:cNvSpPr>
+          <p:nvPr>
+            <p:ph type="body" idx="1"/>
+          </p:nvPr>
+        </p:nvSpPr>
+        <p:spPr>
+          <a:noFill/>
+        </p:spPr>
+        <p:txBody>
+          <a:bodyPr/>
+          <a:lstStyle/>
+          <a:p>
+            <a:pPr eaLnBrk="1" hangingPunct="1"/>
+            <a:endParaRPr lang="en-US" altLang="en-US">
+              <a:latin typeface="Arial" panose="020B0604020202020204" pitchFamily="34" charset="0"/>
+            </a:endParaRPr>
+          </a:p>
+        </p:txBody>
+      </p:sp>
+    </p:spTree>
+  </p:cSld>
+  <p:clrMapOvr>
+    <a:masterClrMapping/>
+  </p:clrMapOvr>
+</p:notes>
+</file>
+
+<file path=ppt/notesSlides/notesSlide11.xml><?xml version="1.0" encoding="utf-8"?>
+<p:notes xmlns:a="http://schemas.openxmlformats.org/drawingml/2006/main" xmlns:r="http://schemas.openxmlformats.org/officeDocument/2006/relationships" xmlns:p="http://schemas.openxmlformats.org/presentationml/2006/main">
+  <p:cSld>
+    <p:spTree>
+      <p:nvGrpSpPr>
+        <p:cNvPr id="1" name=""/>
+        <p:cNvGrpSpPr/>
+        <p:nvPr/>
+      </p:nvGrpSpPr>
+      <p:grpSpPr>
+        <a:xfrm>
+          <a:off x="0" y="0"/>
+          <a:ext cx="0" cy="0"/>
+          <a:chOff x="0" y="0"/>
+          <a:chExt cx="0" cy="0"/>
+        </a:xfrm>
+      </p:grpSpPr>
+      <p:sp>
+        <p:nvSpPr>
+          <p:cNvPr id="108546" name="Rectangle 7">
+            <a:extLst>
+              <a:ext uri="{FF2B5EF4-FFF2-40B4-BE49-F238E27FC236}">
+                <a16:creationId xmlns:a16="http://schemas.microsoft.com/office/drawing/2014/main" id="{E85A9EC2-53CE-32DE-9CA0-6D6FB8BE2F74}"/>
+              </a:ext>
+            </a:extLst>
+          </p:cNvPr>
+          <p:cNvSpPr>
+            <a:spLocks noGrp="1" noChangeArrowheads="1"/>
+          </p:cNvSpPr>
+          <p:nvPr>
+            <p:ph type="sldNum" sz="quarter" idx="4294967295"/>
+          </p:nvPr>
+        </p:nvSpPr>
+        <p:spPr bwMode="auto">
+          <a:xfrm>
+            <a:off x="4135438" y="9105900"/>
+            <a:ext cx="3163887" cy="479425"/>
+          </a:xfrm>
+          <a:prstGeom prst="rect">
+            <a:avLst/>
+          </a:prstGeom>
+          <a:noFill/>
+          <a:extLst>
+            <a:ext uri="{909E8E84-426E-40DD-AFC4-6F175D3DCCD1}">
+              <a14:hiddenFill xmlns:a14="http://schemas.microsoft.com/office/drawing/2010/main">
+                <a:solidFill>
+                  <a:srgbClr val="FFFFFF"/>
+                </a:solidFill>
+              </a14:hiddenFill>
+            </a:ext>
+            <a:ext uri="{91240B29-F687-4F45-9708-019B960494DF}">
+              <a14:hiddenLine xmlns:a14="http://schemas.microsoft.com/office/drawing/2010/main" w="9525">
+                <a:solidFill>
+                  <a:srgbClr val="000000"/>
+                </a:solidFill>
+                <a:miter lim="800000"/>
+                <a:headEnd/>
+                <a:tailEnd/>
+              </a14:hiddenLine>
+            </a:ext>
+          </a:extLst>
+        </p:spPr>
+        <p:txBody>
+          <a:bodyPr lIns="96497" tIns="48248" rIns="96497" bIns="48248"/>
+          <a:lstStyle>
+            <a:lvl1pPr eaLnBrk="0" hangingPunct="0">
+              <a:defRPr sz="1600">
+                <a:solidFill>
+                  <a:schemeClr val="tx1"/>
+                </a:solidFill>
+                <a:latin typeface="Tahoma" panose="020B0604030504040204" pitchFamily="34" charset="0"/>
+                <a:ea typeface="SimSun" panose="02010600030101010101" pitchFamily="2" charset="-122"/>
+              </a:defRPr>
+            </a:lvl1pPr>
+            <a:lvl2pPr marL="742950" indent="-285750" eaLnBrk="0" hangingPunct="0">
+              <a:defRPr sz="1600">
+                <a:solidFill>
+                  <a:schemeClr val="tx1"/>
+                </a:solidFill>
+                <a:latin typeface="Tahoma" panose="020B0604030504040204" pitchFamily="34" charset="0"/>
+                <a:ea typeface="SimSun" panose="02010600030101010101" pitchFamily="2" charset="-122"/>
+              </a:defRPr>
+            </a:lvl2pPr>
+            <a:lvl3pPr marL="1143000" indent="-228600" eaLnBrk="0" hangingPunct="0">
+              <a:defRPr sz="1600">
+                <a:solidFill>
+                  <a:schemeClr val="tx1"/>
+                </a:solidFill>
+                <a:latin typeface="Tahoma" panose="020B0604030504040204" pitchFamily="34" charset="0"/>
+                <a:ea typeface="SimSun" panose="02010600030101010101" pitchFamily="2" charset="-122"/>
+              </a:defRPr>
+            </a:lvl3pPr>
+            <a:lvl4pPr marL="1600200" indent="-228600" eaLnBrk="0" hangingPunct="0">
+              <a:defRPr sz="1600">
+                <a:solidFill>
+                  <a:schemeClr val="tx1"/>
+                </a:solidFill>
+                <a:latin typeface="Tahoma" panose="020B0604030504040204" pitchFamily="34" charset="0"/>
+                <a:ea typeface="SimSun" panose="02010600030101010101" pitchFamily="2" charset="-122"/>
+              </a:defRPr>
+            </a:lvl4pPr>
+            <a:lvl5pPr marL="2057400" indent="-228600" eaLnBrk="0" hangingPunct="0">
+              <a:defRPr sz="1600">
+                <a:solidFill>
+                  <a:schemeClr val="tx1"/>
+                </a:solidFill>
+                <a:latin typeface="Tahoma" panose="020B0604030504040204" pitchFamily="34" charset="0"/>
+                <a:ea typeface="SimSun" panose="02010600030101010101" pitchFamily="2" charset="-122"/>
+              </a:defRPr>
+            </a:lvl5pPr>
+            <a:lvl6pPr marL="2514600" indent="-228600" algn="ctr" eaLnBrk="0" fontAlgn="base" hangingPunct="0">
+              <a:spcBef>
+                <a:spcPct val="0"/>
+              </a:spcBef>
+              <a:spcAft>
+                <a:spcPct val="0"/>
+              </a:spcAft>
+              <a:defRPr sz="1600">
+                <a:solidFill>
+                  <a:schemeClr val="tx1"/>
+                </a:solidFill>
+                <a:latin typeface="Tahoma" panose="020B0604030504040204" pitchFamily="34" charset="0"/>
+                <a:ea typeface="SimSun" panose="02010600030101010101" pitchFamily="2" charset="-122"/>
+              </a:defRPr>
+            </a:lvl6pPr>
+            <a:lvl7pPr marL="2971800" indent="-228600" algn="ctr" eaLnBrk="0" fontAlgn="base" hangingPunct="0">
+              <a:spcBef>
+                <a:spcPct val="0"/>
+              </a:spcBef>
+              <a:spcAft>
+                <a:spcPct val="0"/>
+              </a:spcAft>
+              <a:defRPr sz="1600">
+                <a:solidFill>
+                  <a:schemeClr val="tx1"/>
+                </a:solidFill>
+                <a:latin typeface="Tahoma" panose="020B0604030504040204" pitchFamily="34" charset="0"/>
+                <a:ea typeface="SimSun" panose="02010600030101010101" pitchFamily="2" charset="-122"/>
+              </a:defRPr>
+            </a:lvl7pPr>
+            <a:lvl8pPr marL="3429000" indent="-228600" algn="ctr" eaLnBrk="0" fontAlgn="base" hangingPunct="0">
+              <a:spcBef>
+                <a:spcPct val="0"/>
+              </a:spcBef>
+              <a:spcAft>
+                <a:spcPct val="0"/>
+              </a:spcAft>
+              <a:defRPr sz="1600">
+                <a:solidFill>
+                  <a:schemeClr val="tx1"/>
+                </a:solidFill>
+                <a:latin typeface="Tahoma" panose="020B0604030504040204" pitchFamily="34" charset="0"/>
+                <a:ea typeface="SimSun" panose="02010600030101010101" pitchFamily="2" charset="-122"/>
+              </a:defRPr>
+            </a:lvl8pPr>
+            <a:lvl9pPr marL="3886200" indent="-228600" algn="ctr" eaLnBrk="0" fontAlgn="base" hangingPunct="0">
+              <a:spcBef>
+                <a:spcPct val="0"/>
+              </a:spcBef>
+              <a:spcAft>
+                <a:spcPct val="0"/>
+              </a:spcAft>
+              <a:defRPr sz="1600">
+                <a:solidFill>
+                  <a:schemeClr val="tx1"/>
+                </a:solidFill>
+                <a:latin typeface="Tahoma" panose="020B0604030504040204" pitchFamily="34" charset="0"/>
+                <a:ea typeface="SimSun" panose="02010600030101010101" pitchFamily="2" charset="-122"/>
+              </a:defRPr>
+            </a:lvl9pPr>
+          </a:lstStyle>
+          <a:p>
+            <a:pPr marL="0" marR="0" lvl="0" indent="0" algn="ctr" defTabSz="914400" rtl="0" eaLnBrk="1" fontAlgn="base" latinLnBrk="0" hangingPunct="1">
+              <a:lnSpc>
+                <a:spcPct val="100000"/>
+              </a:lnSpc>
+              <a:spcBef>
+                <a:spcPct val="0"/>
+              </a:spcBef>
+              <a:spcAft>
+                <a:spcPct val="0"/>
+              </a:spcAft>
+              <a:buClrTx/>
+              <a:buSzTx/>
+              <a:buFontTx/>
+              <a:buNone/>
+              <a:tabLst/>
+              <a:defRPr/>
+            </a:pPr>
+            <a:fld id="{77E9616C-EF31-458E-83CD-C4F8ADB9455E}" type="slidenum">
+              <a:rPr kumimoji="0" lang="en-US" altLang="en-US" sz="1600" b="0" i="0" u="none" strike="noStrike" kern="1200" cap="none" spc="0" normalizeH="0" baseline="0" noProof="0">
+                <a:ln>
+                  <a:noFill/>
+                </a:ln>
+                <a:solidFill>
+                  <a:srgbClr val="000000"/>
+                </a:solidFill>
+                <a:effectLst/>
+                <a:uLnTx/>
+                <a:uFillTx/>
+                <a:latin typeface="Arial" panose="020B0604020202020204" pitchFamily="34" charset="0"/>
+                <a:ea typeface="SimSun" panose="02010600030101010101" pitchFamily="2" charset="-122"/>
+                <a:cs typeface="+mn-cs"/>
+              </a:rPr>
+              <a:pPr marL="0" marR="0" lvl="0" indent="0" algn="ctr" defTabSz="914400" rtl="0" eaLnBrk="1" fontAlgn="base" latinLnBrk="0" hangingPunct="1">
+                <a:lnSpc>
+                  <a:spcPct val="100000"/>
+                </a:lnSpc>
+                <a:spcBef>
+                  <a:spcPct val="0"/>
+                </a:spcBef>
+                <a:spcAft>
+                  <a:spcPct val="0"/>
+                </a:spcAft>
+                <a:buClrTx/>
+                <a:buSzTx/>
+                <a:buFontTx/>
+                <a:buNone/>
+                <a:tabLst/>
+                <a:defRPr/>
+              </a:pPr>
+              <a:t>14</a:t>
+            </a:fld>
+            <a:endParaRPr kumimoji="0" lang="en-US" altLang="en-US" sz="1600" b="0" i="0" u="none" strike="noStrike" kern="1200" cap="none" spc="0" normalizeH="0" baseline="0" noProof="0">
+              <a:ln>
+                <a:noFill/>
+              </a:ln>
+              <a:solidFill>
+                <a:srgbClr val="000000"/>
+              </a:solidFill>
+              <a:effectLst/>
+              <a:uLnTx/>
+              <a:uFillTx/>
+              <a:latin typeface="Arial" panose="020B0604020202020204" pitchFamily="34" charset="0"/>
+              <a:ea typeface="SimSun" panose="02010600030101010101" pitchFamily="2" charset="-122"/>
+              <a:cs typeface="+mn-cs"/>
+            </a:endParaRPr>
+          </a:p>
+        </p:txBody>
+      </p:sp>
+      <p:sp>
+        <p:nvSpPr>
+          <p:cNvPr id="108547" name="Rectangle 2">
+            <a:extLst>
+              <a:ext uri="{FF2B5EF4-FFF2-40B4-BE49-F238E27FC236}">
+                <a16:creationId xmlns:a16="http://schemas.microsoft.com/office/drawing/2014/main" id="{4271B42B-1A4C-A95E-7E08-BF839A1D5919}"/>
+              </a:ext>
+            </a:extLst>
+          </p:cNvPr>
+          <p:cNvSpPr>
+            <a:spLocks noGrp="1" noRot="1" noChangeAspect="1" noChangeArrowheads="1" noTextEdit="1"/>
+          </p:cNvSpPr>
+          <p:nvPr>
+            <p:ph type="sldImg"/>
+          </p:nvPr>
+        </p:nvSpPr>
+        <p:spPr>
+          <a:ln/>
+        </p:spPr>
+      </p:sp>
+      <p:sp>
+        <p:nvSpPr>
+          <p:cNvPr id="108548" name="Rectangle 3">
+            <a:extLst>
+              <a:ext uri="{FF2B5EF4-FFF2-40B4-BE49-F238E27FC236}">
+                <a16:creationId xmlns:a16="http://schemas.microsoft.com/office/drawing/2014/main" id="{A7C3763B-1FD0-1B8F-0302-9F65C60F753D}"/>
+              </a:ext>
+            </a:extLst>
+          </p:cNvPr>
+          <p:cNvSpPr>
+            <a:spLocks noGrp="1" noChangeArrowheads="1"/>
+          </p:cNvSpPr>
+          <p:nvPr>
+            <p:ph type="body" idx="1"/>
+          </p:nvPr>
+        </p:nvSpPr>
+        <p:spPr>
+          <a:noFill/>
+        </p:spPr>
+        <p:txBody>
+          <a:bodyPr/>
+          <a:lstStyle/>
+          <a:p>
+            <a:pPr eaLnBrk="1" hangingPunct="1"/>
+            <a:endParaRPr lang="en-US" altLang="en-US">
+              <a:latin typeface="Arial" panose="020B0604020202020204" pitchFamily="34" charset="0"/>
+            </a:endParaRPr>
+          </a:p>
+        </p:txBody>
+      </p:sp>
+    </p:spTree>
+  </p:cSld>
+  <p:clrMapOvr>
+    <a:masterClrMapping/>
+  </p:clrMapOvr>
+</p:notes>
+</file>
+
+<file path=ppt/notesSlides/notesSlide12.xml><?xml version="1.0" encoding="utf-8"?>
+<p:notes xmlns:a="http://schemas.openxmlformats.org/drawingml/2006/main" xmlns:r="http://schemas.openxmlformats.org/officeDocument/2006/relationships" xmlns:p="http://schemas.openxmlformats.org/presentationml/2006/main">
+  <p:cSld>
+    <p:spTree>
+      <p:nvGrpSpPr>
+        <p:cNvPr id="1" name=""/>
+        <p:cNvGrpSpPr/>
+        <p:nvPr/>
+      </p:nvGrpSpPr>
+      <p:grpSpPr>
+        <a:xfrm>
+          <a:off x="0" y="0"/>
+          <a:ext cx="0" cy="0"/>
+          <a:chOff x="0" y="0"/>
+          <a:chExt cx="0" cy="0"/>
+        </a:xfrm>
+      </p:grpSpPr>
+      <p:sp>
+        <p:nvSpPr>
           <p:cNvPr id="109570" name="Rectangle 7">
             <a:extLst>
               <a:ext uri="{FF2B5EF4-FFF2-40B4-BE49-F238E27FC236}">
@@ -977,7 +1575,7 @@
                 <a:tabLst/>
                 <a:defRPr/>
               </a:pPr>
-              <a:t>13</a:t>
+              <a:t>15</a:t>
             </a:fld>
             <a:endParaRPr kumimoji="0" lang="en-US" altLang="en-US" sz="1600" b="0" i="0" u="none" strike="noStrike" kern="1200" cap="none" spc="0" normalizeH="0" baseline="0" noProof="0">
               <a:ln>
@@ -1054,7 +1652,7 @@
 </p:notes>
 </file>
 
-<file path=ppt/notesSlides/notesSlide11.xml><?xml version="1.0" encoding="utf-8"?>
+<file path=ppt/notesSlides/notesSlide13.xml><?xml version="1.0" encoding="utf-8"?>
 <p:notes xmlns:a="http://schemas.openxmlformats.org/drawingml/2006/main" xmlns:r="http://schemas.openxmlformats.org/officeDocument/2006/relationships" xmlns:p="http://schemas.openxmlformats.org/presentationml/2006/main">
   <p:cSld>
     <p:spTree>
@@ -1275,7 +1873,7 @@
                 <a:tabLst/>
                 <a:defRPr/>
               </a:pPr>
-              <a:t>14</a:t>
+              <a:t>16</a:t>
             </a:fld>
             <a:endParaRPr kumimoji="0" lang="en-US" altLang="en-US" sz="1600" b="0" i="0" u="none" strike="noStrike" kern="1200" cap="none" spc="0" normalizeH="0" baseline="0" noProof="0">
               <a:ln>
@@ -1352,7 +1950,7 @@
 </p:notes>
 </file>
 
-<file path=ppt/notesSlides/notesSlide12.xml><?xml version="1.0" encoding="utf-8"?>
+<file path=ppt/notesSlides/notesSlide14.xml><?xml version="1.0" encoding="utf-8"?>
 <p:notes xmlns:a="http://schemas.openxmlformats.org/drawingml/2006/main" xmlns:r="http://schemas.openxmlformats.org/officeDocument/2006/relationships" xmlns:p="http://schemas.openxmlformats.org/presentationml/2006/main">
   <p:cSld>
     <p:spTree>
@@ -1573,7 +2171,7 @@
                 <a:tabLst/>
                 <a:defRPr/>
               </a:pPr>
-              <a:t>15</a:t>
+              <a:t>17</a:t>
             </a:fld>
             <a:endParaRPr kumimoji="0" lang="en-US" altLang="en-US" sz="1600" b="0" i="0" u="none" strike="noStrike" kern="1200" cap="none" spc="0" normalizeH="0" baseline="0" noProof="0">
               <a:ln>
@@ -1650,7 +2248,7 @@
 </p:notes>
 </file>
 
-<file path=ppt/notesSlides/notesSlide13.xml><?xml version="1.0" encoding="utf-8"?>
+<file path=ppt/notesSlides/notesSlide15.xml><?xml version="1.0" encoding="utf-8"?>
 <p:notes xmlns:a="http://schemas.openxmlformats.org/drawingml/2006/main" xmlns:r="http://schemas.openxmlformats.org/officeDocument/2006/relationships" xmlns:p="http://schemas.openxmlformats.org/presentationml/2006/main">
   <p:cSld>
     <p:spTree>
@@ -1871,7 +2469,7 @@
                 <a:tabLst/>
                 <a:defRPr/>
               </a:pPr>
-              <a:t>16</a:t>
+              <a:t>18</a:t>
             </a:fld>
             <a:endParaRPr kumimoji="0" lang="en-US" altLang="en-US" sz="1600" b="0" i="0" u="none" strike="noStrike" kern="1200" cap="none" spc="0" normalizeH="0" baseline="0" noProof="0">
               <a:ln>
@@ -1948,7 +2546,7 @@
 </p:notes>
 </file>
 
-<file path=ppt/notesSlides/notesSlide14.xml><?xml version="1.0" encoding="utf-8"?>
+<file path=ppt/notesSlides/notesSlide16.xml><?xml version="1.0" encoding="utf-8"?>
 <p:notes xmlns:a="http://schemas.openxmlformats.org/drawingml/2006/main" xmlns:r="http://schemas.openxmlformats.org/officeDocument/2006/relationships" xmlns:p="http://schemas.openxmlformats.org/presentationml/2006/main">
   <p:cSld>
     <p:spTree>
@@ -2169,7 +2767,7 @@
                 <a:tabLst/>
                 <a:defRPr/>
               </a:pPr>
-              <a:t>17</a:t>
+              <a:t>19</a:t>
             </a:fld>
             <a:endParaRPr kumimoji="0" lang="en-US" altLang="en-US" sz="1600" b="0" i="0" u="none" strike="noStrike" kern="1200" cap="none" spc="0" normalizeH="0" baseline="0" noProof="0">
               <a:ln>
@@ -2246,7 +2844,7 @@
 </p:notes>
 </file>
 
-<file path=ppt/notesSlides/notesSlide15.xml><?xml version="1.0" encoding="utf-8"?>
+<file path=ppt/notesSlides/notesSlide17.xml><?xml version="1.0" encoding="utf-8"?>
 <p:notes xmlns:a="http://schemas.openxmlformats.org/drawingml/2006/main" xmlns:r="http://schemas.openxmlformats.org/officeDocument/2006/relationships" xmlns:p="http://schemas.openxmlformats.org/presentationml/2006/main">
   <p:cSld>
     <p:spTree>
@@ -2467,7 +3065,7 @@
                 <a:tabLst/>
                 <a:defRPr/>
               </a:pPr>
-              <a:t>18</a:t>
+              <a:t>20</a:t>
             </a:fld>
             <a:endParaRPr kumimoji="0" lang="en-US" altLang="en-US" sz="1600" b="0" i="0" u="none" strike="noStrike" kern="1200" cap="none" spc="0" normalizeH="0" baseline="0" noProof="0">
               <a:ln>
@@ -2990,7 +3588,7 @@
     </p:spTree>
     <p:extLst>
       <p:ext uri="{BB962C8B-B14F-4D97-AF65-F5344CB8AC3E}">
-        <p14:creationId xmlns:p14="http://schemas.microsoft.com/office/powerpoint/2010/main" val="238652061"/>
+        <p14:creationId xmlns:p14="http://schemas.microsoft.com/office/powerpoint/2010/main" val="2563348559"/>
       </p:ext>
     </p:extLst>
   </p:cSld>
@@ -3142,7 +3740,7 @@
     </p:spTree>
     <p:extLst>
       <p:ext uri="{BB962C8B-B14F-4D97-AF65-F5344CB8AC3E}">
-        <p14:creationId xmlns:p14="http://schemas.microsoft.com/office/powerpoint/2010/main" val="3188245053"/>
+        <p14:creationId xmlns:p14="http://schemas.microsoft.com/office/powerpoint/2010/main" val="736506165"/>
       </p:ext>
     </p:extLst>
   </p:cSld>
@@ -3294,7 +3892,7 @@
     </p:spTree>
     <p:extLst>
       <p:ext uri="{BB962C8B-B14F-4D97-AF65-F5344CB8AC3E}">
-        <p14:creationId xmlns:p14="http://schemas.microsoft.com/office/powerpoint/2010/main" val="3147365429"/>
+        <p14:creationId xmlns:p14="http://schemas.microsoft.com/office/powerpoint/2010/main" val="2577663778"/>
       </p:ext>
     </p:extLst>
   </p:cSld>
@@ -3418,6 +4016,21 @@
             <a:pPr marL="228600" indent="-228600" algn="l">
               <a:buAutoNum type="arabicParenR"/>
             </a:pPr>
+            <a:r>
+              <a:rPr lang="en-US" b="0" i="0" dirty="0">
+                <a:solidFill>
+                  <a:srgbClr val="000000"/>
+                </a:solidFill>
+                <a:effectLst/>
+                <a:latin typeface="Arial" panose="020B0604020202020204" pitchFamily="34" charset="0"/>
+              </a:rPr>
+              <a:t>Exceptions provide the means to separate the details of what to do when something out of the ordinary happens from the main logic of a program. In traditional programming, error detection, reporting, and handling often lead to confusing spaghetti code. </a:t>
+            </a:r>
+          </a:p>
+          <a:p>
+            <a:pPr marL="228600" indent="-228600" algn="l">
+              <a:buAutoNum type="arabicParenR"/>
+            </a:pPr>
             <a:endParaRPr lang="en-US" b="0" i="0" dirty="0">
               <a:solidFill>
                 <a:srgbClr val="000000"/>
@@ -3431,7 +4044,7 @@
     </p:spTree>
     <p:extLst>
       <p:ext uri="{BB962C8B-B14F-4D97-AF65-F5344CB8AC3E}">
-        <p14:creationId xmlns:p14="http://schemas.microsoft.com/office/powerpoint/2010/main" val="1814595547"/>
+        <p14:creationId xmlns:p14="http://schemas.microsoft.com/office/powerpoint/2010/main" val="3188245053"/>
       </p:ext>
     </p:extLst>
   </p:cSld>
@@ -3460,233 +4073,10 @@
       </p:grpSpPr>
       <p:sp>
         <p:nvSpPr>
-          <p:cNvPr id="107522" name="Rectangle 7">
+          <p:cNvPr id="46082" name="Rectangle 2">
             <a:extLst>
               <a:ext uri="{FF2B5EF4-FFF2-40B4-BE49-F238E27FC236}">
-                <a16:creationId xmlns:a16="http://schemas.microsoft.com/office/drawing/2014/main" id="{13F6C81E-7993-D228-E5C3-EAE6A0A9AE0A}"/>
-              </a:ext>
-            </a:extLst>
-          </p:cNvPr>
-          <p:cNvSpPr>
-            <a:spLocks noGrp="1" noChangeArrowheads="1"/>
-          </p:cNvSpPr>
-          <p:nvPr>
-            <p:ph type="sldNum" sz="quarter" idx="4294967295"/>
-          </p:nvPr>
-        </p:nvSpPr>
-        <p:spPr bwMode="auto">
-          <a:xfrm>
-            <a:off x="4135438" y="9105900"/>
-            <a:ext cx="3163887" cy="479425"/>
-          </a:xfrm>
-          <a:prstGeom prst="rect">
-            <a:avLst/>
-          </a:prstGeom>
-          <a:noFill/>
-          <a:extLst>
-            <a:ext uri="{909E8E84-426E-40DD-AFC4-6F175D3DCCD1}">
-              <a14:hiddenFill xmlns:a14="http://schemas.microsoft.com/office/drawing/2010/main">
-                <a:solidFill>
-                  <a:srgbClr val="FFFFFF"/>
-                </a:solidFill>
-              </a14:hiddenFill>
-            </a:ext>
-            <a:ext uri="{91240B29-F687-4F45-9708-019B960494DF}">
-              <a14:hiddenLine xmlns:a14="http://schemas.microsoft.com/office/drawing/2010/main" w="9525">
-                <a:solidFill>
-                  <a:srgbClr val="000000"/>
-                </a:solidFill>
-                <a:miter lim="800000"/>
-                <a:headEnd/>
-                <a:tailEnd/>
-              </a14:hiddenLine>
-            </a:ext>
-          </a:extLst>
-        </p:spPr>
-        <p:txBody>
-          <a:bodyPr lIns="96497" tIns="48248" rIns="96497" bIns="48248"/>
-          <a:lstStyle>
-            <a:lvl1pPr eaLnBrk="0" hangingPunct="0">
-              <a:defRPr sz="1600">
-                <a:solidFill>
-                  <a:schemeClr val="tx1"/>
-                </a:solidFill>
-                <a:latin typeface="Tahoma" panose="020B0604030504040204" pitchFamily="34" charset="0"/>
-                <a:ea typeface="SimSun" panose="02010600030101010101" pitchFamily="2" charset="-122"/>
-              </a:defRPr>
-            </a:lvl1pPr>
-            <a:lvl2pPr marL="742950" indent="-285750" eaLnBrk="0" hangingPunct="0">
-              <a:defRPr sz="1600">
-                <a:solidFill>
-                  <a:schemeClr val="tx1"/>
-                </a:solidFill>
-                <a:latin typeface="Tahoma" panose="020B0604030504040204" pitchFamily="34" charset="0"/>
-                <a:ea typeface="SimSun" panose="02010600030101010101" pitchFamily="2" charset="-122"/>
-              </a:defRPr>
-            </a:lvl2pPr>
-            <a:lvl3pPr marL="1143000" indent="-228600" eaLnBrk="0" hangingPunct="0">
-              <a:defRPr sz="1600">
-                <a:solidFill>
-                  <a:schemeClr val="tx1"/>
-                </a:solidFill>
-                <a:latin typeface="Tahoma" panose="020B0604030504040204" pitchFamily="34" charset="0"/>
-                <a:ea typeface="SimSun" panose="02010600030101010101" pitchFamily="2" charset="-122"/>
-              </a:defRPr>
-            </a:lvl3pPr>
-            <a:lvl4pPr marL="1600200" indent="-228600" eaLnBrk="0" hangingPunct="0">
-              <a:defRPr sz="1600">
-                <a:solidFill>
-                  <a:schemeClr val="tx1"/>
-                </a:solidFill>
-                <a:latin typeface="Tahoma" panose="020B0604030504040204" pitchFamily="34" charset="0"/>
-                <a:ea typeface="SimSun" panose="02010600030101010101" pitchFamily="2" charset="-122"/>
-              </a:defRPr>
-            </a:lvl4pPr>
-            <a:lvl5pPr marL="2057400" indent="-228600" eaLnBrk="0" hangingPunct="0">
-              <a:defRPr sz="1600">
-                <a:solidFill>
-                  <a:schemeClr val="tx1"/>
-                </a:solidFill>
-                <a:latin typeface="Tahoma" panose="020B0604030504040204" pitchFamily="34" charset="0"/>
-                <a:ea typeface="SimSun" panose="02010600030101010101" pitchFamily="2" charset="-122"/>
-              </a:defRPr>
-            </a:lvl5pPr>
-            <a:lvl6pPr marL="2514600" indent="-228600" algn="ctr" eaLnBrk="0" fontAlgn="base" hangingPunct="0">
-              <a:spcBef>
-                <a:spcPct val="0"/>
-              </a:spcBef>
-              <a:spcAft>
-                <a:spcPct val="0"/>
-              </a:spcAft>
-              <a:defRPr sz="1600">
-                <a:solidFill>
-                  <a:schemeClr val="tx1"/>
-                </a:solidFill>
-                <a:latin typeface="Tahoma" panose="020B0604030504040204" pitchFamily="34" charset="0"/>
-                <a:ea typeface="SimSun" panose="02010600030101010101" pitchFamily="2" charset="-122"/>
-              </a:defRPr>
-            </a:lvl6pPr>
-            <a:lvl7pPr marL="2971800" indent="-228600" algn="ctr" eaLnBrk="0" fontAlgn="base" hangingPunct="0">
-              <a:spcBef>
-                <a:spcPct val="0"/>
-              </a:spcBef>
-              <a:spcAft>
-                <a:spcPct val="0"/>
-              </a:spcAft>
-              <a:defRPr sz="1600">
-                <a:solidFill>
-                  <a:schemeClr val="tx1"/>
-                </a:solidFill>
-                <a:latin typeface="Tahoma" panose="020B0604030504040204" pitchFamily="34" charset="0"/>
-                <a:ea typeface="SimSun" panose="02010600030101010101" pitchFamily="2" charset="-122"/>
-              </a:defRPr>
-            </a:lvl7pPr>
-            <a:lvl8pPr marL="3429000" indent="-228600" algn="ctr" eaLnBrk="0" fontAlgn="base" hangingPunct="0">
-              <a:spcBef>
-                <a:spcPct val="0"/>
-              </a:spcBef>
-              <a:spcAft>
-                <a:spcPct val="0"/>
-              </a:spcAft>
-              <a:defRPr sz="1600">
-                <a:solidFill>
-                  <a:schemeClr val="tx1"/>
-                </a:solidFill>
-                <a:latin typeface="Tahoma" panose="020B0604030504040204" pitchFamily="34" charset="0"/>
-                <a:ea typeface="SimSun" panose="02010600030101010101" pitchFamily="2" charset="-122"/>
-              </a:defRPr>
-            </a:lvl8pPr>
-            <a:lvl9pPr marL="3886200" indent="-228600" algn="ctr" eaLnBrk="0" fontAlgn="base" hangingPunct="0">
-              <a:spcBef>
-                <a:spcPct val="0"/>
-              </a:spcBef>
-              <a:spcAft>
-                <a:spcPct val="0"/>
-              </a:spcAft>
-              <a:defRPr sz="1600">
-                <a:solidFill>
-                  <a:schemeClr val="tx1"/>
-                </a:solidFill>
-                <a:latin typeface="Tahoma" panose="020B0604030504040204" pitchFamily="34" charset="0"/>
-                <a:ea typeface="SimSun" panose="02010600030101010101" pitchFamily="2" charset="-122"/>
-              </a:defRPr>
-            </a:lvl9pPr>
-          </a:lstStyle>
-          <a:p>
-            <a:pPr marL="0" marR="0" lvl="0" indent="0" algn="ctr" defTabSz="914400" rtl="0" eaLnBrk="1" fontAlgn="base" latinLnBrk="0" hangingPunct="1">
-              <a:lnSpc>
-                <a:spcPct val="100000"/>
-              </a:lnSpc>
-              <a:spcBef>
-                <a:spcPct val="0"/>
-              </a:spcBef>
-              <a:spcAft>
-                <a:spcPct val="0"/>
-              </a:spcAft>
-              <a:buClrTx/>
-              <a:buSzTx/>
-              <a:buFontTx/>
-              <a:buNone/>
-              <a:tabLst/>
-              <a:defRPr/>
-            </a:pPr>
-            <a:fld id="{DB2E3854-F04B-4A5E-882A-84F3C9A85562}" type="slidenum">
-              <a:rPr kumimoji="0" lang="en-US" altLang="en-US" sz="1600" b="0" i="0" u="none" strike="noStrike" kern="1200" cap="none" spc="0" normalizeH="0" baseline="0" noProof="0">
-                <a:ln>
-                  <a:noFill/>
-                </a:ln>
-                <a:solidFill>
-                  <a:srgbClr val="000000"/>
-                </a:solidFill>
-                <a:effectLst/>
-                <a:uLnTx/>
-                <a:uFillTx/>
-                <a:latin typeface="Arial" panose="020B0604020202020204" pitchFamily="34" charset="0"/>
-                <a:ea typeface="SimSun" panose="02010600030101010101" pitchFamily="2" charset="-122"/>
-                <a:cs typeface="+mn-cs"/>
-              </a:rPr>
-              <a:pPr marL="0" marR="0" lvl="0" indent="0" algn="ctr" defTabSz="914400" rtl="0" eaLnBrk="1" fontAlgn="base" latinLnBrk="0" hangingPunct="1">
-                <a:lnSpc>
-                  <a:spcPct val="100000"/>
-                </a:lnSpc>
-                <a:spcBef>
-                  <a:spcPct val="0"/>
-                </a:spcBef>
-                <a:spcAft>
-                  <a:spcPct val="0"/>
-                </a:spcAft>
-                <a:buClrTx/>
-                <a:buSzTx/>
-                <a:buFontTx/>
-                <a:buNone/>
-                <a:tabLst/>
-                <a:defRPr/>
-              </a:pPr>
-              <a:t>11</a:t>
-            </a:fld>
-            <a:endParaRPr kumimoji="0" lang="en-US" altLang="en-US" sz="1600" b="0" i="0" u="none" strike="noStrike" kern="1200" cap="none" spc="0" normalizeH="0" baseline="0" noProof="0">
-              <a:ln>
-                <a:noFill/>
-              </a:ln>
-              <a:solidFill>
-                <a:srgbClr val="000000"/>
-              </a:solidFill>
-              <a:effectLst/>
-              <a:uLnTx/>
-              <a:uFillTx/>
-              <a:latin typeface="Arial" panose="020B0604020202020204" pitchFamily="34" charset="0"/>
-              <a:ea typeface="SimSun" panose="02010600030101010101" pitchFamily="2" charset="-122"/>
-              <a:cs typeface="+mn-cs"/>
-            </a:endParaRPr>
-          </a:p>
-        </p:txBody>
-      </p:sp>
-      <p:sp>
-        <p:nvSpPr>
-          <p:cNvPr id="107523" name="Rectangle 2">
-            <a:extLst>
-              <a:ext uri="{FF2B5EF4-FFF2-40B4-BE49-F238E27FC236}">
-                <a16:creationId xmlns:a16="http://schemas.microsoft.com/office/drawing/2014/main" id="{DF952123-AED2-07B2-8058-49597E5B2685}"/>
+                <a16:creationId xmlns:a16="http://schemas.microsoft.com/office/drawing/2014/main" id="{8751BCEF-00EB-4F0D-859A-09EFAF270FBD}"/>
               </a:ext>
             </a:extLst>
           </p:cNvPr>
@@ -3697,16 +4087,40 @@
             <p:ph type="sldImg"/>
           </p:nvPr>
         </p:nvSpPr>
-        <p:spPr>
-          <a:ln/>
+        <p:spPr bwMode="auto">
+          <a:xfrm>
+            <a:off x="1143000" y="685800"/>
+            <a:ext cx="4572000" cy="3429000"/>
+          </a:xfrm>
+          <a:prstGeom prst="rect">
+            <a:avLst/>
+          </a:prstGeom>
+          <a:noFill/>
+          <a:ln>
+            <a:solidFill>
+              <a:srgbClr val="000000"/>
+            </a:solidFill>
+            <a:miter lim="800000"/>
+            <a:headEnd/>
+            <a:tailEnd/>
+          </a:ln>
+          <a:extLst>
+            <a:ext uri="{909E8E84-426E-40DD-AFC4-6F175D3DCCD1}">
+              <a14:hiddenFill xmlns:a14="http://schemas.microsoft.com/office/drawing/2010/main">
+                <a:solidFill>
+                  <a:srgbClr val="FFFFFF"/>
+                </a:solidFill>
+              </a14:hiddenFill>
+            </a:ext>
+          </a:extLst>
         </p:spPr>
       </p:sp>
       <p:sp>
         <p:nvSpPr>
-          <p:cNvPr id="107524" name="Rectangle 3">
+          <p:cNvPr id="46083" name="Rectangle 3">
             <a:extLst>
               <a:ext uri="{FF2B5EF4-FFF2-40B4-BE49-F238E27FC236}">
-                <a16:creationId xmlns:a16="http://schemas.microsoft.com/office/drawing/2014/main" id="{A04531B2-630E-F819-2C03-20ECEEA706A4}"/>
+                <a16:creationId xmlns:a16="http://schemas.microsoft.com/office/drawing/2014/main" id="{6809DC36-00B1-4A54-AEC6-3EEA44659402}"/>
               </a:ext>
             </a:extLst>
           </p:cNvPr>
@@ -3717,21 +4131,74 @@
             <p:ph type="body" idx="1"/>
           </p:nvPr>
         </p:nvSpPr>
-        <p:spPr>
+        <p:spPr bwMode="auto">
+          <a:xfrm>
+            <a:off x="685800" y="4343400"/>
+            <a:ext cx="5486400" cy="4114800"/>
+          </a:xfrm>
+          <a:prstGeom prst="rect">
+            <a:avLst/>
+          </a:prstGeom>
           <a:noFill/>
+          <a:ln/>
+          <a:extLst>
+            <a:ext uri="{909E8E84-426E-40DD-AFC4-6F175D3DCCD1}">
+              <a14:hiddenFill xmlns:a14="http://schemas.microsoft.com/office/drawing/2010/main">
+                <a:solidFill>
+                  <a:srgbClr val="FFFFFF"/>
+                </a:solidFill>
+              </a14:hiddenFill>
+            </a:ext>
+            <a:ext uri="{91240B29-F687-4F45-9708-019B960494DF}">
+              <a14:hiddenLine xmlns:a14="http://schemas.microsoft.com/office/drawing/2010/main" w="9525">
+                <a:solidFill>
+                  <a:srgbClr val="000000"/>
+                </a:solidFill>
+                <a:miter lim="800000"/>
+                <a:headEnd/>
+                <a:tailEnd/>
+              </a14:hiddenLine>
+            </a:ext>
+          </a:extLst>
         </p:spPr>
         <p:txBody>
           <a:bodyPr/>
           <a:lstStyle/>
           <a:p>
-            <a:pPr eaLnBrk="1" hangingPunct="1"/>
-            <a:endParaRPr lang="en-US" altLang="en-US">
+            <a:pPr marL="228600" indent="-228600" algn="l">
+              <a:buAutoNum type="arabicParenR"/>
+            </a:pPr>
+            <a:r>
+              <a:rPr lang="en-US" b="0" i="0" dirty="0">
+                <a:solidFill>
+                  <a:srgbClr val="000000"/>
+                </a:solidFill>
+                <a:effectLst/>
+                <a:latin typeface="Arial" panose="020B0604020202020204" pitchFamily="34" charset="0"/>
+              </a:rPr>
+              <a:t>Exceptions provide the means to separate the details of what to do when something out of the ordinary happens from the main logic of a program. In traditional programming, error detection, reporting, and handling often lead to confusing spaghetti code. </a:t>
+            </a:r>
+          </a:p>
+          <a:p>
+            <a:pPr marL="228600" indent="-228600" algn="l">
+              <a:buAutoNum type="arabicParenR"/>
+            </a:pPr>
+            <a:endParaRPr lang="en-US" b="0" i="0" dirty="0">
+              <a:solidFill>
+                <a:srgbClr val="000000"/>
+              </a:solidFill>
+              <a:effectLst/>
               <a:latin typeface="Arial" panose="020B0604020202020204" pitchFamily="34" charset="0"/>
             </a:endParaRPr>
           </a:p>
         </p:txBody>
       </p:sp>
     </p:spTree>
+    <p:extLst>
+      <p:ext uri="{BB962C8B-B14F-4D97-AF65-F5344CB8AC3E}">
+        <p14:creationId xmlns:p14="http://schemas.microsoft.com/office/powerpoint/2010/main" val="3147365429"/>
+      </p:ext>
+    </p:extLst>
   </p:cSld>
   <p:clrMapOvr>
     <a:masterClrMapping/>
@@ -3758,233 +4225,10 @@
       </p:grpSpPr>
       <p:sp>
         <p:nvSpPr>
-          <p:cNvPr id="108546" name="Rectangle 7">
+          <p:cNvPr id="46082" name="Rectangle 2">
             <a:extLst>
               <a:ext uri="{FF2B5EF4-FFF2-40B4-BE49-F238E27FC236}">
-                <a16:creationId xmlns:a16="http://schemas.microsoft.com/office/drawing/2014/main" id="{E85A9EC2-53CE-32DE-9CA0-6D6FB8BE2F74}"/>
-              </a:ext>
-            </a:extLst>
-          </p:cNvPr>
-          <p:cNvSpPr>
-            <a:spLocks noGrp="1" noChangeArrowheads="1"/>
-          </p:cNvSpPr>
-          <p:nvPr>
-            <p:ph type="sldNum" sz="quarter" idx="4294967295"/>
-          </p:nvPr>
-        </p:nvSpPr>
-        <p:spPr bwMode="auto">
-          <a:xfrm>
-            <a:off x="4135438" y="9105900"/>
-            <a:ext cx="3163887" cy="479425"/>
-          </a:xfrm>
-          <a:prstGeom prst="rect">
-            <a:avLst/>
-          </a:prstGeom>
-          <a:noFill/>
-          <a:extLst>
-            <a:ext uri="{909E8E84-426E-40DD-AFC4-6F175D3DCCD1}">
-              <a14:hiddenFill xmlns:a14="http://schemas.microsoft.com/office/drawing/2010/main">
-                <a:solidFill>
-                  <a:srgbClr val="FFFFFF"/>
-                </a:solidFill>
-              </a14:hiddenFill>
-            </a:ext>
-            <a:ext uri="{91240B29-F687-4F45-9708-019B960494DF}">
-              <a14:hiddenLine xmlns:a14="http://schemas.microsoft.com/office/drawing/2010/main" w="9525">
-                <a:solidFill>
-                  <a:srgbClr val="000000"/>
-                </a:solidFill>
-                <a:miter lim="800000"/>
-                <a:headEnd/>
-                <a:tailEnd/>
-              </a14:hiddenLine>
-            </a:ext>
-          </a:extLst>
-        </p:spPr>
-        <p:txBody>
-          <a:bodyPr lIns="96497" tIns="48248" rIns="96497" bIns="48248"/>
-          <a:lstStyle>
-            <a:lvl1pPr eaLnBrk="0" hangingPunct="0">
-              <a:defRPr sz="1600">
-                <a:solidFill>
-                  <a:schemeClr val="tx1"/>
-                </a:solidFill>
-                <a:latin typeface="Tahoma" panose="020B0604030504040204" pitchFamily="34" charset="0"/>
-                <a:ea typeface="SimSun" panose="02010600030101010101" pitchFamily="2" charset="-122"/>
-              </a:defRPr>
-            </a:lvl1pPr>
-            <a:lvl2pPr marL="742950" indent="-285750" eaLnBrk="0" hangingPunct="0">
-              <a:defRPr sz="1600">
-                <a:solidFill>
-                  <a:schemeClr val="tx1"/>
-                </a:solidFill>
-                <a:latin typeface="Tahoma" panose="020B0604030504040204" pitchFamily="34" charset="0"/>
-                <a:ea typeface="SimSun" panose="02010600030101010101" pitchFamily="2" charset="-122"/>
-              </a:defRPr>
-            </a:lvl2pPr>
-            <a:lvl3pPr marL="1143000" indent="-228600" eaLnBrk="0" hangingPunct="0">
-              <a:defRPr sz="1600">
-                <a:solidFill>
-                  <a:schemeClr val="tx1"/>
-                </a:solidFill>
-                <a:latin typeface="Tahoma" panose="020B0604030504040204" pitchFamily="34" charset="0"/>
-                <a:ea typeface="SimSun" panose="02010600030101010101" pitchFamily="2" charset="-122"/>
-              </a:defRPr>
-            </a:lvl3pPr>
-            <a:lvl4pPr marL="1600200" indent="-228600" eaLnBrk="0" hangingPunct="0">
-              <a:defRPr sz="1600">
-                <a:solidFill>
-                  <a:schemeClr val="tx1"/>
-                </a:solidFill>
-                <a:latin typeface="Tahoma" panose="020B0604030504040204" pitchFamily="34" charset="0"/>
-                <a:ea typeface="SimSun" panose="02010600030101010101" pitchFamily="2" charset="-122"/>
-              </a:defRPr>
-            </a:lvl4pPr>
-            <a:lvl5pPr marL="2057400" indent="-228600" eaLnBrk="0" hangingPunct="0">
-              <a:defRPr sz="1600">
-                <a:solidFill>
-                  <a:schemeClr val="tx1"/>
-                </a:solidFill>
-                <a:latin typeface="Tahoma" panose="020B0604030504040204" pitchFamily="34" charset="0"/>
-                <a:ea typeface="SimSun" panose="02010600030101010101" pitchFamily="2" charset="-122"/>
-              </a:defRPr>
-            </a:lvl5pPr>
-            <a:lvl6pPr marL="2514600" indent="-228600" algn="ctr" eaLnBrk="0" fontAlgn="base" hangingPunct="0">
-              <a:spcBef>
-                <a:spcPct val="0"/>
-              </a:spcBef>
-              <a:spcAft>
-                <a:spcPct val="0"/>
-              </a:spcAft>
-              <a:defRPr sz="1600">
-                <a:solidFill>
-                  <a:schemeClr val="tx1"/>
-                </a:solidFill>
-                <a:latin typeface="Tahoma" panose="020B0604030504040204" pitchFamily="34" charset="0"/>
-                <a:ea typeface="SimSun" panose="02010600030101010101" pitchFamily="2" charset="-122"/>
-              </a:defRPr>
-            </a:lvl6pPr>
-            <a:lvl7pPr marL="2971800" indent="-228600" algn="ctr" eaLnBrk="0" fontAlgn="base" hangingPunct="0">
-              <a:spcBef>
-                <a:spcPct val="0"/>
-              </a:spcBef>
-              <a:spcAft>
-                <a:spcPct val="0"/>
-              </a:spcAft>
-              <a:defRPr sz="1600">
-                <a:solidFill>
-                  <a:schemeClr val="tx1"/>
-                </a:solidFill>
-                <a:latin typeface="Tahoma" panose="020B0604030504040204" pitchFamily="34" charset="0"/>
-                <a:ea typeface="SimSun" panose="02010600030101010101" pitchFamily="2" charset="-122"/>
-              </a:defRPr>
-            </a:lvl7pPr>
-            <a:lvl8pPr marL="3429000" indent="-228600" algn="ctr" eaLnBrk="0" fontAlgn="base" hangingPunct="0">
-              <a:spcBef>
-                <a:spcPct val="0"/>
-              </a:spcBef>
-              <a:spcAft>
-                <a:spcPct val="0"/>
-              </a:spcAft>
-              <a:defRPr sz="1600">
-                <a:solidFill>
-                  <a:schemeClr val="tx1"/>
-                </a:solidFill>
-                <a:latin typeface="Tahoma" panose="020B0604030504040204" pitchFamily="34" charset="0"/>
-                <a:ea typeface="SimSun" panose="02010600030101010101" pitchFamily="2" charset="-122"/>
-              </a:defRPr>
-            </a:lvl8pPr>
-            <a:lvl9pPr marL="3886200" indent="-228600" algn="ctr" eaLnBrk="0" fontAlgn="base" hangingPunct="0">
-              <a:spcBef>
-                <a:spcPct val="0"/>
-              </a:spcBef>
-              <a:spcAft>
-                <a:spcPct val="0"/>
-              </a:spcAft>
-              <a:defRPr sz="1600">
-                <a:solidFill>
-                  <a:schemeClr val="tx1"/>
-                </a:solidFill>
-                <a:latin typeface="Tahoma" panose="020B0604030504040204" pitchFamily="34" charset="0"/>
-                <a:ea typeface="SimSun" panose="02010600030101010101" pitchFamily="2" charset="-122"/>
-              </a:defRPr>
-            </a:lvl9pPr>
-          </a:lstStyle>
-          <a:p>
-            <a:pPr marL="0" marR="0" lvl="0" indent="0" algn="ctr" defTabSz="914400" rtl="0" eaLnBrk="1" fontAlgn="base" latinLnBrk="0" hangingPunct="1">
-              <a:lnSpc>
-                <a:spcPct val="100000"/>
-              </a:lnSpc>
-              <a:spcBef>
-                <a:spcPct val="0"/>
-              </a:spcBef>
-              <a:spcAft>
-                <a:spcPct val="0"/>
-              </a:spcAft>
-              <a:buClrTx/>
-              <a:buSzTx/>
-              <a:buFontTx/>
-              <a:buNone/>
-              <a:tabLst/>
-              <a:defRPr/>
-            </a:pPr>
-            <a:fld id="{77E9616C-EF31-458E-83CD-C4F8ADB9455E}" type="slidenum">
-              <a:rPr kumimoji="0" lang="en-US" altLang="en-US" sz="1600" b="0" i="0" u="none" strike="noStrike" kern="1200" cap="none" spc="0" normalizeH="0" baseline="0" noProof="0">
-                <a:ln>
-                  <a:noFill/>
-                </a:ln>
-                <a:solidFill>
-                  <a:srgbClr val="000000"/>
-                </a:solidFill>
-                <a:effectLst/>
-                <a:uLnTx/>
-                <a:uFillTx/>
-                <a:latin typeface="Arial" panose="020B0604020202020204" pitchFamily="34" charset="0"/>
-                <a:ea typeface="SimSun" panose="02010600030101010101" pitchFamily="2" charset="-122"/>
-                <a:cs typeface="+mn-cs"/>
-              </a:rPr>
-              <a:pPr marL="0" marR="0" lvl="0" indent="0" algn="ctr" defTabSz="914400" rtl="0" eaLnBrk="1" fontAlgn="base" latinLnBrk="0" hangingPunct="1">
-                <a:lnSpc>
-                  <a:spcPct val="100000"/>
-                </a:lnSpc>
-                <a:spcBef>
-                  <a:spcPct val="0"/>
-                </a:spcBef>
-                <a:spcAft>
-                  <a:spcPct val="0"/>
-                </a:spcAft>
-                <a:buClrTx/>
-                <a:buSzTx/>
-                <a:buFontTx/>
-                <a:buNone/>
-                <a:tabLst/>
-                <a:defRPr/>
-              </a:pPr>
-              <a:t>12</a:t>
-            </a:fld>
-            <a:endParaRPr kumimoji="0" lang="en-US" altLang="en-US" sz="1600" b="0" i="0" u="none" strike="noStrike" kern="1200" cap="none" spc="0" normalizeH="0" baseline="0" noProof="0">
-              <a:ln>
-                <a:noFill/>
-              </a:ln>
-              <a:solidFill>
-                <a:srgbClr val="000000"/>
-              </a:solidFill>
-              <a:effectLst/>
-              <a:uLnTx/>
-              <a:uFillTx/>
-              <a:latin typeface="Arial" panose="020B0604020202020204" pitchFamily="34" charset="0"/>
-              <a:ea typeface="SimSun" panose="02010600030101010101" pitchFamily="2" charset="-122"/>
-              <a:cs typeface="+mn-cs"/>
-            </a:endParaRPr>
-          </a:p>
-        </p:txBody>
-      </p:sp>
-      <p:sp>
-        <p:nvSpPr>
-          <p:cNvPr id="108547" name="Rectangle 2">
-            <a:extLst>
-              <a:ext uri="{FF2B5EF4-FFF2-40B4-BE49-F238E27FC236}">
-                <a16:creationId xmlns:a16="http://schemas.microsoft.com/office/drawing/2014/main" id="{4271B42B-1A4C-A95E-7E08-BF839A1D5919}"/>
+                <a16:creationId xmlns:a16="http://schemas.microsoft.com/office/drawing/2014/main" id="{8751BCEF-00EB-4F0D-859A-09EFAF270FBD}"/>
               </a:ext>
             </a:extLst>
           </p:cNvPr>
@@ -3995,16 +4239,40 @@
             <p:ph type="sldImg"/>
           </p:nvPr>
         </p:nvSpPr>
-        <p:spPr>
-          <a:ln/>
+        <p:spPr bwMode="auto">
+          <a:xfrm>
+            <a:off x="1143000" y="685800"/>
+            <a:ext cx="4572000" cy="3429000"/>
+          </a:xfrm>
+          <a:prstGeom prst="rect">
+            <a:avLst/>
+          </a:prstGeom>
+          <a:noFill/>
+          <a:ln>
+            <a:solidFill>
+              <a:srgbClr val="000000"/>
+            </a:solidFill>
+            <a:miter lim="800000"/>
+            <a:headEnd/>
+            <a:tailEnd/>
+          </a:ln>
+          <a:extLst>
+            <a:ext uri="{909E8E84-426E-40DD-AFC4-6F175D3DCCD1}">
+              <a14:hiddenFill xmlns:a14="http://schemas.microsoft.com/office/drawing/2010/main">
+                <a:solidFill>
+                  <a:srgbClr val="FFFFFF"/>
+                </a:solidFill>
+              </a14:hiddenFill>
+            </a:ext>
+          </a:extLst>
         </p:spPr>
       </p:sp>
       <p:sp>
         <p:nvSpPr>
-          <p:cNvPr id="108548" name="Rectangle 3">
+          <p:cNvPr id="46083" name="Rectangle 3">
             <a:extLst>
               <a:ext uri="{FF2B5EF4-FFF2-40B4-BE49-F238E27FC236}">
-                <a16:creationId xmlns:a16="http://schemas.microsoft.com/office/drawing/2014/main" id="{A7C3763B-1FD0-1B8F-0302-9F65C60F753D}"/>
+                <a16:creationId xmlns:a16="http://schemas.microsoft.com/office/drawing/2014/main" id="{6809DC36-00B1-4A54-AEC6-3EEA44659402}"/>
               </a:ext>
             </a:extLst>
           </p:cNvPr>
@@ -4015,21 +4283,59 @@
             <p:ph type="body" idx="1"/>
           </p:nvPr>
         </p:nvSpPr>
-        <p:spPr>
+        <p:spPr bwMode="auto">
+          <a:xfrm>
+            <a:off x="685800" y="4343400"/>
+            <a:ext cx="5486400" cy="4114800"/>
+          </a:xfrm>
+          <a:prstGeom prst="rect">
+            <a:avLst/>
+          </a:prstGeom>
           <a:noFill/>
+          <a:ln/>
+          <a:extLst>
+            <a:ext uri="{909E8E84-426E-40DD-AFC4-6F175D3DCCD1}">
+              <a14:hiddenFill xmlns:a14="http://schemas.microsoft.com/office/drawing/2010/main">
+                <a:solidFill>
+                  <a:srgbClr val="FFFFFF"/>
+                </a:solidFill>
+              </a14:hiddenFill>
+            </a:ext>
+            <a:ext uri="{91240B29-F687-4F45-9708-019B960494DF}">
+              <a14:hiddenLine xmlns:a14="http://schemas.microsoft.com/office/drawing/2010/main" w="9525">
+                <a:solidFill>
+                  <a:srgbClr val="000000"/>
+                </a:solidFill>
+                <a:miter lim="800000"/>
+                <a:headEnd/>
+                <a:tailEnd/>
+              </a14:hiddenLine>
+            </a:ext>
+          </a:extLst>
         </p:spPr>
         <p:txBody>
           <a:bodyPr/>
           <a:lstStyle/>
           <a:p>
-            <a:pPr eaLnBrk="1" hangingPunct="1"/>
-            <a:endParaRPr lang="en-US" altLang="en-US">
+            <a:pPr marL="228600" indent="-228600" algn="l">
+              <a:buAutoNum type="arabicParenR"/>
+            </a:pPr>
+            <a:endParaRPr lang="en-US" b="0" i="0" dirty="0">
+              <a:solidFill>
+                <a:srgbClr val="000000"/>
+              </a:solidFill>
+              <a:effectLst/>
               <a:latin typeface="Arial" panose="020B0604020202020204" pitchFamily="34" charset="0"/>
             </a:endParaRPr>
           </a:p>
         </p:txBody>
       </p:sp>
     </p:spTree>
+    <p:extLst>
+      <p:ext uri="{BB962C8B-B14F-4D97-AF65-F5344CB8AC3E}">
+        <p14:creationId xmlns:p14="http://schemas.microsoft.com/office/powerpoint/2010/main" val="1814595547"/>
+      </p:ext>
+    </p:extLst>
   </p:cSld>
   <p:clrMapOvr>
     <a:masterClrMapping/>
@@ -25377,7 +25683,7 @@
         </p:nvSpPr>
         <p:spPr>
           <a:xfrm>
-            <a:off x="381000" y="2438400"/>
+            <a:off x="381000" y="2286000"/>
             <a:ext cx="8382000" cy="3877985"/>
           </a:xfrm>
           <a:prstGeom prst="rect">
@@ -25464,6 +25770,1472 @@
 </file>
 
 <file path=ppt/slides/slide10.xml><?xml version="1.0" encoding="utf-8"?>
+<p:sld xmlns:a="http://schemas.openxmlformats.org/drawingml/2006/main" xmlns:r="http://schemas.openxmlformats.org/officeDocument/2006/relationships" xmlns:p="http://schemas.openxmlformats.org/presentationml/2006/main">
+  <p:cSld>
+    <p:spTree>
+      <p:nvGrpSpPr>
+        <p:cNvPr id="1" name=""/>
+        <p:cNvGrpSpPr/>
+        <p:nvPr/>
+      </p:nvGrpSpPr>
+      <p:grpSpPr>
+        <a:xfrm>
+          <a:off x="0" y="0"/>
+          <a:ext cx="0" cy="0"/>
+          <a:chOff x="0" y="0"/>
+          <a:chExt cx="0" cy="0"/>
+        </a:xfrm>
+      </p:grpSpPr>
+      <p:sp>
+        <p:nvSpPr>
+          <p:cNvPr id="88066" name="Slide Number Placeholder 3">
+            <a:extLst>
+              <a:ext uri="{FF2B5EF4-FFF2-40B4-BE49-F238E27FC236}">
+                <a16:creationId xmlns:a16="http://schemas.microsoft.com/office/drawing/2014/main" id="{5BBDB527-D5DF-E0E6-B818-3DFB4405023F}"/>
+              </a:ext>
+            </a:extLst>
+          </p:cNvPr>
+          <p:cNvSpPr>
+            <a:spLocks noGrp="1"/>
+          </p:cNvSpPr>
+          <p:nvPr>
+            <p:ph type="sldNum" sz="quarter" idx="10"/>
+          </p:nvPr>
+        </p:nvSpPr>
+        <p:spPr>
+          <a:noFill/>
+        </p:spPr>
+        <p:txBody>
+          <a:bodyPr/>
+          <a:lstStyle>
+            <a:lvl1pPr eaLnBrk="0" hangingPunct="0">
+              <a:defRPr sz="1600">
+                <a:solidFill>
+                  <a:schemeClr val="tx1"/>
+                </a:solidFill>
+                <a:latin typeface="Tahoma" panose="020B0604030504040204" pitchFamily="34" charset="0"/>
+                <a:ea typeface="SimSun" panose="02010600030101010101" pitchFamily="2" charset="-122"/>
+              </a:defRPr>
+            </a:lvl1pPr>
+            <a:lvl2pPr marL="742950" indent="-285750" eaLnBrk="0" hangingPunct="0">
+              <a:defRPr sz="1600">
+                <a:solidFill>
+                  <a:schemeClr val="tx1"/>
+                </a:solidFill>
+                <a:latin typeface="Tahoma" panose="020B0604030504040204" pitchFamily="34" charset="0"/>
+                <a:ea typeface="SimSun" panose="02010600030101010101" pitchFamily="2" charset="-122"/>
+              </a:defRPr>
+            </a:lvl2pPr>
+            <a:lvl3pPr marL="1143000" indent="-228600" eaLnBrk="0" hangingPunct="0">
+              <a:defRPr sz="1600">
+                <a:solidFill>
+                  <a:schemeClr val="tx1"/>
+                </a:solidFill>
+                <a:latin typeface="Tahoma" panose="020B0604030504040204" pitchFamily="34" charset="0"/>
+                <a:ea typeface="SimSun" panose="02010600030101010101" pitchFamily="2" charset="-122"/>
+              </a:defRPr>
+            </a:lvl3pPr>
+            <a:lvl4pPr marL="1600200" indent="-228600" eaLnBrk="0" hangingPunct="0">
+              <a:defRPr sz="1600">
+                <a:solidFill>
+                  <a:schemeClr val="tx1"/>
+                </a:solidFill>
+                <a:latin typeface="Tahoma" panose="020B0604030504040204" pitchFamily="34" charset="0"/>
+                <a:ea typeface="SimSun" panose="02010600030101010101" pitchFamily="2" charset="-122"/>
+              </a:defRPr>
+            </a:lvl4pPr>
+            <a:lvl5pPr marL="2057400" indent="-228600" eaLnBrk="0" hangingPunct="0">
+              <a:defRPr sz="1600">
+                <a:solidFill>
+                  <a:schemeClr val="tx1"/>
+                </a:solidFill>
+                <a:latin typeface="Tahoma" panose="020B0604030504040204" pitchFamily="34" charset="0"/>
+                <a:ea typeface="SimSun" panose="02010600030101010101" pitchFamily="2" charset="-122"/>
+              </a:defRPr>
+            </a:lvl5pPr>
+            <a:lvl6pPr marL="2514600" indent="-228600" algn="ctr" eaLnBrk="0" fontAlgn="base" hangingPunct="0">
+              <a:spcBef>
+                <a:spcPct val="0"/>
+              </a:spcBef>
+              <a:spcAft>
+                <a:spcPct val="0"/>
+              </a:spcAft>
+              <a:defRPr sz="1600">
+                <a:solidFill>
+                  <a:schemeClr val="tx1"/>
+                </a:solidFill>
+                <a:latin typeface="Tahoma" panose="020B0604030504040204" pitchFamily="34" charset="0"/>
+                <a:ea typeface="SimSun" panose="02010600030101010101" pitchFamily="2" charset="-122"/>
+              </a:defRPr>
+            </a:lvl6pPr>
+            <a:lvl7pPr marL="2971800" indent="-228600" algn="ctr" eaLnBrk="0" fontAlgn="base" hangingPunct="0">
+              <a:spcBef>
+                <a:spcPct val="0"/>
+              </a:spcBef>
+              <a:spcAft>
+                <a:spcPct val="0"/>
+              </a:spcAft>
+              <a:defRPr sz="1600">
+                <a:solidFill>
+                  <a:schemeClr val="tx1"/>
+                </a:solidFill>
+                <a:latin typeface="Tahoma" panose="020B0604030504040204" pitchFamily="34" charset="0"/>
+                <a:ea typeface="SimSun" panose="02010600030101010101" pitchFamily="2" charset="-122"/>
+              </a:defRPr>
+            </a:lvl7pPr>
+            <a:lvl8pPr marL="3429000" indent="-228600" algn="ctr" eaLnBrk="0" fontAlgn="base" hangingPunct="0">
+              <a:spcBef>
+                <a:spcPct val="0"/>
+              </a:spcBef>
+              <a:spcAft>
+                <a:spcPct val="0"/>
+              </a:spcAft>
+              <a:defRPr sz="1600">
+                <a:solidFill>
+                  <a:schemeClr val="tx1"/>
+                </a:solidFill>
+                <a:latin typeface="Tahoma" panose="020B0604030504040204" pitchFamily="34" charset="0"/>
+                <a:ea typeface="SimSun" panose="02010600030101010101" pitchFamily="2" charset="-122"/>
+              </a:defRPr>
+            </a:lvl8pPr>
+            <a:lvl9pPr marL="3886200" indent="-228600" algn="ctr" eaLnBrk="0" fontAlgn="base" hangingPunct="0">
+              <a:spcBef>
+                <a:spcPct val="0"/>
+              </a:spcBef>
+              <a:spcAft>
+                <a:spcPct val="0"/>
+              </a:spcAft>
+              <a:defRPr sz="1600">
+                <a:solidFill>
+                  <a:schemeClr val="tx1"/>
+                </a:solidFill>
+                <a:latin typeface="Tahoma" panose="020B0604030504040204" pitchFamily="34" charset="0"/>
+                <a:ea typeface="SimSun" panose="02010600030101010101" pitchFamily="2" charset="-122"/>
+              </a:defRPr>
+            </a:lvl9pPr>
+          </a:lstStyle>
+          <a:p>
+            <a:pPr marL="0" marR="0" lvl="0" indent="0" algn="r" defTabSz="914400" rtl="0" eaLnBrk="1" fontAlgn="base" latinLnBrk="0" hangingPunct="1">
+              <a:lnSpc>
+                <a:spcPct val="100000"/>
+              </a:lnSpc>
+              <a:spcBef>
+                <a:spcPct val="0"/>
+              </a:spcBef>
+              <a:spcAft>
+                <a:spcPct val="0"/>
+              </a:spcAft>
+              <a:buClrTx/>
+              <a:buSzTx/>
+              <a:buFontTx/>
+              <a:buNone/>
+              <a:tabLst/>
+              <a:defRPr/>
+            </a:pPr>
+            <a:fld id="{F8F3E389-CFBC-4E83-949E-FA40F624B7E5}" type="slidenum">
+              <a:rPr kumimoji="0" lang="zh-CN" altLang="en-GB" sz="1400" b="0" i="0" u="none" strike="noStrike" kern="1200" cap="none" spc="0" normalizeH="0" baseline="0" noProof="0">
+                <a:ln>
+                  <a:noFill/>
+                </a:ln>
+                <a:solidFill>
+                  <a:srgbClr val="000000"/>
+                </a:solidFill>
+                <a:effectLst/>
+                <a:uLnTx/>
+                <a:uFillTx/>
+                <a:latin typeface="Tahoma" panose="020B0604030504040204" pitchFamily="34" charset="0"/>
+                <a:ea typeface="SimSun" panose="02010600030101010101" pitchFamily="2" charset="-122"/>
+                <a:cs typeface="+mn-cs"/>
+              </a:rPr>
+              <a:pPr marL="0" marR="0" lvl="0" indent="0" algn="r" defTabSz="914400" rtl="0" eaLnBrk="1" fontAlgn="base" latinLnBrk="0" hangingPunct="1">
+                <a:lnSpc>
+                  <a:spcPct val="100000"/>
+                </a:lnSpc>
+                <a:spcBef>
+                  <a:spcPct val="0"/>
+                </a:spcBef>
+                <a:spcAft>
+                  <a:spcPct val="0"/>
+                </a:spcAft>
+                <a:buClrTx/>
+                <a:buSzTx/>
+                <a:buFontTx/>
+                <a:buNone/>
+                <a:tabLst/>
+                <a:defRPr/>
+              </a:pPr>
+              <a:t>10</a:t>
+            </a:fld>
+            <a:endParaRPr kumimoji="0" lang="en-GB" altLang="zh-CN" sz="1400" b="0" i="0" u="none" strike="noStrike" kern="1200" cap="none" spc="0" normalizeH="0" baseline="0" noProof="0">
+              <a:ln>
+                <a:noFill/>
+              </a:ln>
+              <a:solidFill>
+                <a:srgbClr val="000000"/>
+              </a:solidFill>
+              <a:effectLst/>
+              <a:uLnTx/>
+              <a:uFillTx/>
+              <a:latin typeface="Tahoma" panose="020B0604030504040204" pitchFamily="34" charset="0"/>
+              <a:ea typeface="SimSun" panose="02010600030101010101" pitchFamily="2" charset="-122"/>
+              <a:cs typeface="+mn-cs"/>
+            </a:endParaRPr>
+          </a:p>
+        </p:txBody>
+      </p:sp>
+      <p:sp>
+        <p:nvSpPr>
+          <p:cNvPr id="88067" name="Rectangle 4">
+            <a:extLst>
+              <a:ext uri="{FF2B5EF4-FFF2-40B4-BE49-F238E27FC236}">
+                <a16:creationId xmlns:a16="http://schemas.microsoft.com/office/drawing/2014/main" id="{AF674103-C0F1-A9D4-7768-382304AFC3EE}"/>
+              </a:ext>
+            </a:extLst>
+          </p:cNvPr>
+          <p:cNvSpPr>
+            <a:spLocks noGrp="1" noChangeArrowheads="1"/>
+          </p:cNvSpPr>
+          <p:nvPr/>
+        </p:nvSpPr>
+        <p:spPr bwMode="auto">
+          <a:xfrm>
+            <a:off x="685800" y="304800"/>
+            <a:ext cx="7772400" cy="1143000"/>
+          </a:xfrm>
+          <a:prstGeom prst="rect">
+            <a:avLst/>
+          </a:prstGeom>
+          <a:noFill/>
+          <a:ln>
+            <a:noFill/>
+          </a:ln>
+          <a:effectLst/>
+          <a:extLst>
+            <a:ext uri="{909E8E84-426E-40DD-AFC4-6F175D3DCCD1}">
+              <a14:hiddenFill xmlns:a14="http://schemas.microsoft.com/office/drawing/2010/main">
+                <a:solidFill>
+                  <a:schemeClr val="accent1"/>
+                </a:solidFill>
+              </a14:hiddenFill>
+            </a:ext>
+            <a:ext uri="{91240B29-F687-4F45-9708-019B960494DF}">
+              <a14:hiddenLine xmlns:a14="http://schemas.microsoft.com/office/drawing/2010/main" w="9525">
+                <a:solidFill>
+                  <a:schemeClr val="tx1"/>
+                </a:solidFill>
+                <a:miter lim="800000"/>
+                <a:headEnd/>
+                <a:tailEnd/>
+              </a14:hiddenLine>
+            </a:ext>
+            <a:ext uri="{AF507438-7753-43E0-B8FC-AC1667EBCBE1}">
+              <a14:hiddenEffects xmlns:a14="http://schemas.microsoft.com/office/drawing/2010/main">
+                <a:effectLst>
+                  <a:outerShdw dist="35921" dir="2700000" algn="ctr" rotWithShape="0">
+                    <a:schemeClr val="bg2"/>
+                  </a:outerShdw>
+                </a:effectLst>
+              </a14:hiddenEffects>
+            </a:ext>
+          </a:extLst>
+        </p:spPr>
+        <p:txBody>
+          <a:bodyPr anchor="ctr"/>
+          <a:lstStyle>
+            <a:lvl1pPr eaLnBrk="0" hangingPunct="0">
+              <a:defRPr sz="1600">
+                <a:solidFill>
+                  <a:schemeClr val="tx1"/>
+                </a:solidFill>
+                <a:latin typeface="Tahoma" panose="020B0604030504040204" pitchFamily="34" charset="0"/>
+                <a:ea typeface="SimSun" panose="02010600030101010101" pitchFamily="2" charset="-122"/>
+              </a:defRPr>
+            </a:lvl1pPr>
+            <a:lvl2pPr marL="742950" indent="-285750" eaLnBrk="0" hangingPunct="0">
+              <a:defRPr sz="1600">
+                <a:solidFill>
+                  <a:schemeClr val="tx1"/>
+                </a:solidFill>
+                <a:latin typeface="Tahoma" panose="020B0604030504040204" pitchFamily="34" charset="0"/>
+                <a:ea typeface="SimSun" panose="02010600030101010101" pitchFamily="2" charset="-122"/>
+              </a:defRPr>
+            </a:lvl2pPr>
+            <a:lvl3pPr marL="1143000" indent="-228600" eaLnBrk="0" hangingPunct="0">
+              <a:defRPr sz="1600">
+                <a:solidFill>
+                  <a:schemeClr val="tx1"/>
+                </a:solidFill>
+                <a:latin typeface="Tahoma" panose="020B0604030504040204" pitchFamily="34" charset="0"/>
+                <a:ea typeface="SimSun" panose="02010600030101010101" pitchFamily="2" charset="-122"/>
+              </a:defRPr>
+            </a:lvl3pPr>
+            <a:lvl4pPr marL="1600200" indent="-228600" eaLnBrk="0" hangingPunct="0">
+              <a:defRPr sz="1600">
+                <a:solidFill>
+                  <a:schemeClr val="tx1"/>
+                </a:solidFill>
+                <a:latin typeface="Tahoma" panose="020B0604030504040204" pitchFamily="34" charset="0"/>
+                <a:ea typeface="SimSun" panose="02010600030101010101" pitchFamily="2" charset="-122"/>
+              </a:defRPr>
+            </a:lvl4pPr>
+            <a:lvl5pPr marL="2057400" indent="-228600" eaLnBrk="0" hangingPunct="0">
+              <a:defRPr sz="1600">
+                <a:solidFill>
+                  <a:schemeClr val="tx1"/>
+                </a:solidFill>
+                <a:latin typeface="Tahoma" panose="020B0604030504040204" pitchFamily="34" charset="0"/>
+                <a:ea typeface="SimSun" panose="02010600030101010101" pitchFamily="2" charset="-122"/>
+              </a:defRPr>
+            </a:lvl5pPr>
+            <a:lvl6pPr marL="2514600" indent="-228600" algn="ctr" eaLnBrk="0" fontAlgn="base" hangingPunct="0">
+              <a:spcBef>
+                <a:spcPct val="0"/>
+              </a:spcBef>
+              <a:spcAft>
+                <a:spcPct val="0"/>
+              </a:spcAft>
+              <a:defRPr sz="1600">
+                <a:solidFill>
+                  <a:schemeClr val="tx1"/>
+                </a:solidFill>
+                <a:latin typeface="Tahoma" panose="020B0604030504040204" pitchFamily="34" charset="0"/>
+                <a:ea typeface="SimSun" panose="02010600030101010101" pitchFamily="2" charset="-122"/>
+              </a:defRPr>
+            </a:lvl6pPr>
+            <a:lvl7pPr marL="2971800" indent="-228600" algn="ctr" eaLnBrk="0" fontAlgn="base" hangingPunct="0">
+              <a:spcBef>
+                <a:spcPct val="0"/>
+              </a:spcBef>
+              <a:spcAft>
+                <a:spcPct val="0"/>
+              </a:spcAft>
+              <a:defRPr sz="1600">
+                <a:solidFill>
+                  <a:schemeClr val="tx1"/>
+                </a:solidFill>
+                <a:latin typeface="Tahoma" panose="020B0604030504040204" pitchFamily="34" charset="0"/>
+                <a:ea typeface="SimSun" panose="02010600030101010101" pitchFamily="2" charset="-122"/>
+              </a:defRPr>
+            </a:lvl7pPr>
+            <a:lvl8pPr marL="3429000" indent="-228600" algn="ctr" eaLnBrk="0" fontAlgn="base" hangingPunct="0">
+              <a:spcBef>
+                <a:spcPct val="0"/>
+              </a:spcBef>
+              <a:spcAft>
+                <a:spcPct val="0"/>
+              </a:spcAft>
+              <a:defRPr sz="1600">
+                <a:solidFill>
+                  <a:schemeClr val="tx1"/>
+                </a:solidFill>
+                <a:latin typeface="Tahoma" panose="020B0604030504040204" pitchFamily="34" charset="0"/>
+                <a:ea typeface="SimSun" panose="02010600030101010101" pitchFamily="2" charset="-122"/>
+              </a:defRPr>
+            </a:lvl8pPr>
+            <a:lvl9pPr marL="3886200" indent="-228600" algn="ctr" eaLnBrk="0" fontAlgn="base" hangingPunct="0">
+              <a:spcBef>
+                <a:spcPct val="0"/>
+              </a:spcBef>
+              <a:spcAft>
+                <a:spcPct val="0"/>
+              </a:spcAft>
+              <a:defRPr sz="1600">
+                <a:solidFill>
+                  <a:schemeClr val="tx1"/>
+                </a:solidFill>
+                <a:latin typeface="Tahoma" panose="020B0604030504040204" pitchFamily="34" charset="0"/>
+                <a:ea typeface="SimSun" panose="02010600030101010101" pitchFamily="2" charset="-122"/>
+              </a:defRPr>
+            </a:lvl9pPr>
+          </a:lstStyle>
+          <a:p>
+            <a:pPr marL="0" marR="0" lvl="0" indent="0" algn="ctr" defTabSz="914400" rtl="0" eaLnBrk="1" fontAlgn="base" latinLnBrk="0" hangingPunct="1">
+              <a:lnSpc>
+                <a:spcPct val="100000"/>
+              </a:lnSpc>
+              <a:spcBef>
+                <a:spcPct val="0"/>
+              </a:spcBef>
+              <a:spcAft>
+                <a:spcPct val="0"/>
+              </a:spcAft>
+              <a:buClrTx/>
+              <a:buSzTx/>
+              <a:buFontTx/>
+              <a:buNone/>
+              <a:tabLst/>
+              <a:defRPr/>
+            </a:pPr>
+            <a:r>
+              <a:rPr kumimoji="0" lang="en-US" altLang="en-US" sz="4400" b="1" i="0" u="none" strike="noStrike" kern="1200" cap="none" spc="0" normalizeH="0" baseline="0" noProof="0">
+                <a:ln>
+                  <a:noFill/>
+                </a:ln>
+                <a:solidFill>
+                  <a:srgbClr val="333399"/>
+                </a:solidFill>
+                <a:effectLst/>
+                <a:uLnTx/>
+                <a:uFillTx/>
+                <a:latin typeface="Tahoma" panose="020B0604030504040204" pitchFamily="34" charset="0"/>
+                <a:ea typeface="SimSun" panose="02010600030101010101" pitchFamily="2" charset="-122"/>
+                <a:cs typeface="+mn-cs"/>
+              </a:rPr>
+              <a:t>Some Tips</a:t>
+            </a:r>
+          </a:p>
+        </p:txBody>
+      </p:sp>
+      <p:sp>
+        <p:nvSpPr>
+          <p:cNvPr id="88068" name="Rectangle 5">
+            <a:extLst>
+              <a:ext uri="{FF2B5EF4-FFF2-40B4-BE49-F238E27FC236}">
+                <a16:creationId xmlns:a16="http://schemas.microsoft.com/office/drawing/2014/main" id="{8028C472-940C-C58E-E459-7BEBDC8D6D13}"/>
+              </a:ext>
+            </a:extLst>
+          </p:cNvPr>
+          <p:cNvSpPr>
+            <a:spLocks noGrp="1" noChangeArrowheads="1"/>
+          </p:cNvSpPr>
+          <p:nvPr/>
+        </p:nvSpPr>
+        <p:spPr bwMode="auto">
+          <a:xfrm>
+            <a:off x="720436" y="1676400"/>
+            <a:ext cx="7772400" cy="4114800"/>
+          </a:xfrm>
+          <a:prstGeom prst="rect">
+            <a:avLst/>
+          </a:prstGeom>
+          <a:noFill/>
+          <a:ln>
+            <a:noFill/>
+          </a:ln>
+          <a:effectLst/>
+          <a:extLst>
+            <a:ext uri="{909E8E84-426E-40DD-AFC4-6F175D3DCCD1}">
+              <a14:hiddenFill xmlns:a14="http://schemas.microsoft.com/office/drawing/2010/main">
+                <a:solidFill>
+                  <a:schemeClr val="accent1"/>
+                </a:solidFill>
+              </a14:hiddenFill>
+            </a:ext>
+            <a:ext uri="{91240B29-F687-4F45-9708-019B960494DF}">
+              <a14:hiddenLine xmlns:a14="http://schemas.microsoft.com/office/drawing/2010/main" w="9525">
+                <a:solidFill>
+                  <a:schemeClr val="tx1"/>
+                </a:solidFill>
+                <a:miter lim="800000"/>
+                <a:headEnd/>
+                <a:tailEnd/>
+              </a14:hiddenLine>
+            </a:ext>
+            <a:ext uri="{AF507438-7753-43E0-B8FC-AC1667EBCBE1}">
+              <a14:hiddenEffects xmlns:a14="http://schemas.microsoft.com/office/drawing/2010/main">
+                <a:effectLst>
+                  <a:outerShdw dist="35921" dir="2700000" algn="ctr" rotWithShape="0">
+                    <a:schemeClr val="bg2"/>
+                  </a:outerShdw>
+                </a:effectLst>
+              </a14:hiddenEffects>
+            </a:ext>
+          </a:extLst>
+        </p:spPr>
+        <p:txBody>
+          <a:bodyPr/>
+          <a:lstStyle>
+            <a:lvl1pPr marL="342900" indent="-342900" eaLnBrk="0" hangingPunct="0">
+              <a:defRPr sz="1600">
+                <a:solidFill>
+                  <a:schemeClr val="tx1"/>
+                </a:solidFill>
+                <a:latin typeface="Tahoma" panose="020B0604030504040204" pitchFamily="34" charset="0"/>
+                <a:ea typeface="SimSun" panose="02010600030101010101" pitchFamily="2" charset="-122"/>
+              </a:defRPr>
+            </a:lvl1pPr>
+            <a:lvl2pPr marL="742950" indent="-285750" eaLnBrk="0" hangingPunct="0">
+              <a:defRPr sz="1600">
+                <a:solidFill>
+                  <a:schemeClr val="tx1"/>
+                </a:solidFill>
+                <a:latin typeface="Tahoma" panose="020B0604030504040204" pitchFamily="34" charset="0"/>
+                <a:ea typeface="SimSun" panose="02010600030101010101" pitchFamily="2" charset="-122"/>
+              </a:defRPr>
+            </a:lvl2pPr>
+            <a:lvl3pPr marL="1143000" indent="-228600" eaLnBrk="0" hangingPunct="0">
+              <a:defRPr sz="1600">
+                <a:solidFill>
+                  <a:schemeClr val="tx1"/>
+                </a:solidFill>
+                <a:latin typeface="Tahoma" panose="020B0604030504040204" pitchFamily="34" charset="0"/>
+                <a:ea typeface="SimSun" panose="02010600030101010101" pitchFamily="2" charset="-122"/>
+              </a:defRPr>
+            </a:lvl3pPr>
+            <a:lvl4pPr marL="1600200" indent="-228600" eaLnBrk="0" hangingPunct="0">
+              <a:defRPr sz="1600">
+                <a:solidFill>
+                  <a:schemeClr val="tx1"/>
+                </a:solidFill>
+                <a:latin typeface="Tahoma" panose="020B0604030504040204" pitchFamily="34" charset="0"/>
+                <a:ea typeface="SimSun" panose="02010600030101010101" pitchFamily="2" charset="-122"/>
+              </a:defRPr>
+            </a:lvl4pPr>
+            <a:lvl5pPr marL="2057400" indent="-228600" eaLnBrk="0" hangingPunct="0">
+              <a:defRPr sz="1600">
+                <a:solidFill>
+                  <a:schemeClr val="tx1"/>
+                </a:solidFill>
+                <a:latin typeface="Tahoma" panose="020B0604030504040204" pitchFamily="34" charset="0"/>
+                <a:ea typeface="SimSun" panose="02010600030101010101" pitchFamily="2" charset="-122"/>
+              </a:defRPr>
+            </a:lvl5pPr>
+            <a:lvl6pPr marL="2514600" indent="-228600" algn="ctr" eaLnBrk="0" fontAlgn="base" hangingPunct="0">
+              <a:spcBef>
+                <a:spcPct val="0"/>
+              </a:spcBef>
+              <a:spcAft>
+                <a:spcPct val="0"/>
+              </a:spcAft>
+              <a:defRPr sz="1600">
+                <a:solidFill>
+                  <a:schemeClr val="tx1"/>
+                </a:solidFill>
+                <a:latin typeface="Tahoma" panose="020B0604030504040204" pitchFamily="34" charset="0"/>
+                <a:ea typeface="SimSun" panose="02010600030101010101" pitchFamily="2" charset="-122"/>
+              </a:defRPr>
+            </a:lvl6pPr>
+            <a:lvl7pPr marL="2971800" indent="-228600" algn="ctr" eaLnBrk="0" fontAlgn="base" hangingPunct="0">
+              <a:spcBef>
+                <a:spcPct val="0"/>
+              </a:spcBef>
+              <a:spcAft>
+                <a:spcPct val="0"/>
+              </a:spcAft>
+              <a:defRPr sz="1600">
+                <a:solidFill>
+                  <a:schemeClr val="tx1"/>
+                </a:solidFill>
+                <a:latin typeface="Tahoma" panose="020B0604030504040204" pitchFamily="34" charset="0"/>
+                <a:ea typeface="SimSun" panose="02010600030101010101" pitchFamily="2" charset="-122"/>
+              </a:defRPr>
+            </a:lvl7pPr>
+            <a:lvl8pPr marL="3429000" indent="-228600" algn="ctr" eaLnBrk="0" fontAlgn="base" hangingPunct="0">
+              <a:spcBef>
+                <a:spcPct val="0"/>
+              </a:spcBef>
+              <a:spcAft>
+                <a:spcPct val="0"/>
+              </a:spcAft>
+              <a:defRPr sz="1600">
+                <a:solidFill>
+                  <a:schemeClr val="tx1"/>
+                </a:solidFill>
+                <a:latin typeface="Tahoma" panose="020B0604030504040204" pitchFamily="34" charset="0"/>
+                <a:ea typeface="SimSun" panose="02010600030101010101" pitchFamily="2" charset="-122"/>
+              </a:defRPr>
+            </a:lvl8pPr>
+            <a:lvl9pPr marL="3886200" indent="-228600" algn="ctr" eaLnBrk="0" fontAlgn="base" hangingPunct="0">
+              <a:spcBef>
+                <a:spcPct val="0"/>
+              </a:spcBef>
+              <a:spcAft>
+                <a:spcPct val="0"/>
+              </a:spcAft>
+              <a:defRPr sz="1600">
+                <a:solidFill>
+                  <a:schemeClr val="tx1"/>
+                </a:solidFill>
+                <a:latin typeface="Tahoma" panose="020B0604030504040204" pitchFamily="34" charset="0"/>
+                <a:ea typeface="SimSun" panose="02010600030101010101" pitchFamily="2" charset="-122"/>
+              </a:defRPr>
+            </a:lvl9pPr>
+          </a:lstStyle>
+          <a:p>
+            <a:pPr marL="342900" marR="0" lvl="0" indent="-342900" algn="l" defTabSz="914400" rtl="0" eaLnBrk="1" fontAlgn="base" latinLnBrk="0" hangingPunct="1">
+              <a:lnSpc>
+                <a:spcPct val="100000"/>
+              </a:lnSpc>
+              <a:spcBef>
+                <a:spcPts val="0"/>
+              </a:spcBef>
+              <a:spcAft>
+                <a:spcPts val="1800"/>
+              </a:spcAft>
+              <a:buClrTx/>
+              <a:buSzTx/>
+              <a:buFontTx/>
+              <a:buChar char="•"/>
+              <a:tabLst/>
+              <a:defRPr/>
+            </a:pPr>
+            <a:r>
+              <a:rPr kumimoji="0" lang="en-US" altLang="en-US" sz="3200" b="0" i="0" u="none" strike="noStrike" kern="1200" cap="none" spc="0" normalizeH="0" baseline="0" noProof="0" dirty="0">
+                <a:ln>
+                  <a:noFill/>
+                </a:ln>
+                <a:solidFill>
+                  <a:srgbClr val="000000"/>
+                </a:solidFill>
+                <a:effectLst/>
+                <a:uLnTx/>
+                <a:uFillTx/>
+                <a:latin typeface="Tahoma" panose="020B0604030504040204" pitchFamily="34" charset="0"/>
+                <a:ea typeface="SimSun" panose="02010600030101010101" pitchFamily="2" charset="-122"/>
+                <a:cs typeface="+mn-cs"/>
+              </a:rPr>
+              <a:t>Don’t use exception handling to replace testing – </a:t>
+            </a:r>
+            <a:r>
+              <a:rPr kumimoji="0" lang="en-US" altLang="en-US" sz="3200" b="1" i="0" u="none" strike="noStrike" kern="1200" cap="none" spc="0" normalizeH="0" baseline="0" noProof="0" dirty="0">
+                <a:ln>
+                  <a:noFill/>
+                </a:ln>
+                <a:solidFill>
+                  <a:srgbClr val="000000"/>
+                </a:solidFill>
+                <a:effectLst/>
+                <a:uLnTx/>
+                <a:uFillTx/>
+                <a:latin typeface="Tahoma" panose="020B0604030504040204" pitchFamily="34" charset="0"/>
+                <a:ea typeface="SimSun" panose="02010600030101010101" pitchFamily="2" charset="-122"/>
+                <a:cs typeface="+mn-cs"/>
+              </a:rPr>
+              <a:t>Reason</a:t>
+            </a:r>
+            <a:r>
+              <a:rPr kumimoji="0" lang="en-US" altLang="en-US" sz="3200" b="0" i="0" u="none" strike="noStrike" kern="1200" cap="none" spc="0" normalizeH="0" baseline="0" noProof="0" dirty="0">
+                <a:ln>
+                  <a:noFill/>
+                </a:ln>
+                <a:solidFill>
+                  <a:srgbClr val="000000"/>
+                </a:solidFill>
+                <a:effectLst/>
+                <a:uLnTx/>
+                <a:uFillTx/>
+                <a:latin typeface="Tahoma" panose="020B0604030504040204" pitchFamily="34" charset="0"/>
+                <a:ea typeface="SimSun" panose="02010600030101010101" pitchFamily="2" charset="-122"/>
+                <a:cs typeface="+mn-cs"/>
+              </a:rPr>
+              <a:t>: it’s much slower!</a:t>
+            </a:r>
+          </a:p>
+          <a:p>
+            <a:pPr marL="342900" marR="0" lvl="0" indent="-342900" algn="l" defTabSz="914400" rtl="0" eaLnBrk="1" fontAlgn="base" latinLnBrk="0" hangingPunct="1">
+              <a:lnSpc>
+                <a:spcPct val="100000"/>
+              </a:lnSpc>
+              <a:spcBef>
+                <a:spcPts val="0"/>
+              </a:spcBef>
+              <a:spcAft>
+                <a:spcPts val="1800"/>
+              </a:spcAft>
+              <a:buClrTx/>
+              <a:buSzTx/>
+              <a:buFontTx/>
+              <a:buChar char="•"/>
+              <a:tabLst/>
+              <a:defRPr/>
+            </a:pPr>
+            <a:r>
+              <a:rPr kumimoji="0" lang="en-US" altLang="en-US" sz="3200" b="0" i="0" u="none" strike="noStrike" kern="1200" cap="none" spc="0" normalizeH="0" baseline="0" noProof="0" dirty="0">
+                <a:ln>
+                  <a:noFill/>
+                </a:ln>
+                <a:solidFill>
+                  <a:srgbClr val="000000"/>
+                </a:solidFill>
+                <a:effectLst/>
+                <a:uLnTx/>
+                <a:uFillTx/>
+                <a:latin typeface="Tahoma" panose="020B0604030504040204" pitchFamily="34" charset="0"/>
+                <a:ea typeface="SimSun" panose="02010600030101010101" pitchFamily="2" charset="-122"/>
+                <a:cs typeface="+mn-cs"/>
+              </a:rPr>
+              <a:t>Don’t wrap every code statement in a try block. Put the </a:t>
+            </a:r>
+            <a:r>
+              <a:rPr kumimoji="0" lang="en-US" altLang="en-US" sz="3200" b="1" i="0" u="none" strike="noStrike" kern="1200" cap="none" spc="0" normalizeH="0" baseline="0" noProof="0" dirty="0">
+                <a:ln>
+                  <a:noFill/>
+                </a:ln>
+                <a:solidFill>
+                  <a:srgbClr val="000000"/>
+                </a:solidFill>
+                <a:effectLst/>
+                <a:uLnTx/>
+                <a:uFillTx/>
+                <a:latin typeface="Tahoma" panose="020B0604030504040204" pitchFamily="34" charset="0"/>
+                <a:ea typeface="SimSun" panose="02010600030101010101" pitchFamily="2" charset="-122"/>
+                <a:cs typeface="+mn-cs"/>
+              </a:rPr>
+              <a:t>whole task</a:t>
+            </a:r>
+            <a:r>
+              <a:rPr kumimoji="0" lang="en-US" altLang="en-US" sz="3200" b="0" i="0" u="none" strike="noStrike" kern="1200" cap="none" spc="0" normalizeH="0" baseline="0" noProof="0" dirty="0">
+                <a:ln>
+                  <a:noFill/>
+                </a:ln>
+                <a:solidFill>
+                  <a:srgbClr val="000000"/>
+                </a:solidFill>
+                <a:effectLst/>
+                <a:uLnTx/>
+                <a:uFillTx/>
+                <a:latin typeface="Tahoma" panose="020B0604030504040204" pitchFamily="34" charset="0"/>
+                <a:ea typeface="SimSun" panose="02010600030101010101" pitchFamily="2" charset="-122"/>
+                <a:cs typeface="+mn-cs"/>
+              </a:rPr>
+              <a:t> in a try block.</a:t>
+            </a:r>
+          </a:p>
+          <a:p>
+            <a:pPr marL="342900" marR="0" lvl="0" indent="-342900" algn="l" defTabSz="914400" rtl="0" eaLnBrk="1" fontAlgn="base" latinLnBrk="0" hangingPunct="1">
+              <a:lnSpc>
+                <a:spcPct val="100000"/>
+              </a:lnSpc>
+              <a:spcBef>
+                <a:spcPct val="20000"/>
+              </a:spcBef>
+              <a:spcAft>
+                <a:spcPct val="0"/>
+              </a:spcAft>
+              <a:buClrTx/>
+              <a:buSzTx/>
+              <a:buFontTx/>
+              <a:buChar char="•"/>
+              <a:tabLst/>
+              <a:defRPr/>
+            </a:pPr>
+            <a:r>
+              <a:rPr kumimoji="0" lang="en-US" altLang="en-US" sz="3200" b="0" i="0" u="none" strike="noStrike" kern="1200" cap="none" spc="0" normalizeH="0" baseline="0" noProof="0" dirty="0">
+                <a:ln>
+                  <a:noFill/>
+                </a:ln>
+                <a:solidFill>
+                  <a:srgbClr val="000000"/>
+                </a:solidFill>
+                <a:effectLst/>
+                <a:uLnTx/>
+                <a:uFillTx/>
+                <a:latin typeface="Tahoma" panose="020B0604030504040204" pitchFamily="34" charset="0"/>
+                <a:ea typeface="SimSun" panose="02010600030101010101" pitchFamily="2" charset="-122"/>
+                <a:cs typeface="+mn-cs"/>
+              </a:rPr>
+              <a:t>Don’t </a:t>
+            </a:r>
+            <a:r>
+              <a:rPr kumimoji="0" lang="en-US" altLang="en-US" sz="3200" b="1" i="0" u="none" strike="noStrike" kern="1200" cap="none" spc="0" normalizeH="0" baseline="0" noProof="0" dirty="0">
+                <a:ln>
+                  <a:noFill/>
+                </a:ln>
+                <a:solidFill>
+                  <a:srgbClr val="000000"/>
+                </a:solidFill>
+                <a:effectLst/>
+                <a:uLnTx/>
+                <a:uFillTx/>
+                <a:latin typeface="Tahoma" panose="020B0604030504040204" pitchFamily="34" charset="0"/>
+                <a:ea typeface="SimSun" panose="02010600030101010101" pitchFamily="2" charset="-122"/>
+                <a:cs typeface="+mn-cs"/>
+              </a:rPr>
+              <a:t>ignore</a:t>
+            </a:r>
+            <a:r>
+              <a:rPr kumimoji="0" lang="en-US" altLang="en-US" sz="3200" b="0" i="0" u="none" strike="noStrike" kern="1200" cap="none" spc="0" normalizeH="0" baseline="0" noProof="0" dirty="0">
+                <a:ln>
+                  <a:noFill/>
+                </a:ln>
+                <a:solidFill>
+                  <a:srgbClr val="000000"/>
+                </a:solidFill>
+                <a:effectLst/>
+                <a:uLnTx/>
+                <a:uFillTx/>
+                <a:latin typeface="Tahoma" panose="020B0604030504040204" pitchFamily="34" charset="0"/>
+                <a:ea typeface="SimSun" panose="02010600030101010101" pitchFamily="2" charset="-122"/>
+                <a:cs typeface="+mn-cs"/>
+              </a:rPr>
+              <a:t> exceptions with null actions (just to shut the compiler up). They will come back and bite you!</a:t>
+            </a:r>
+          </a:p>
+        </p:txBody>
+      </p:sp>
+    </p:spTree>
+  </p:cSld>
+  <p:clrMapOvr>
+    <a:masterClrMapping/>
+  </p:clrMapOvr>
+  <p:transition advTm="1000"/>
+</p:sld>
+</file>
+
+<file path=ppt/slides/slide11.xml><?xml version="1.0" encoding="utf-8"?>
+<p:sld xmlns:a="http://schemas.openxmlformats.org/drawingml/2006/main" xmlns:r="http://schemas.openxmlformats.org/officeDocument/2006/relationships" xmlns:p="http://schemas.openxmlformats.org/presentationml/2006/main">
+  <p:cSld>
+    <p:spTree>
+      <p:nvGrpSpPr>
+        <p:cNvPr id="1" name=""/>
+        <p:cNvGrpSpPr/>
+        <p:nvPr/>
+      </p:nvGrpSpPr>
+      <p:grpSpPr>
+        <a:xfrm>
+          <a:off x="0" y="0"/>
+          <a:ext cx="0" cy="0"/>
+          <a:chOff x="0" y="0"/>
+          <a:chExt cx="0" cy="0"/>
+        </a:xfrm>
+      </p:grpSpPr>
+      <p:sp>
+        <p:nvSpPr>
+          <p:cNvPr id="89090" name="Slide Number Placeholder 3">
+            <a:extLst>
+              <a:ext uri="{FF2B5EF4-FFF2-40B4-BE49-F238E27FC236}">
+                <a16:creationId xmlns:a16="http://schemas.microsoft.com/office/drawing/2014/main" id="{2C85448F-C29B-2D6D-3C6F-B35B5FD4D159}"/>
+              </a:ext>
+            </a:extLst>
+          </p:cNvPr>
+          <p:cNvSpPr>
+            <a:spLocks noGrp="1"/>
+          </p:cNvSpPr>
+          <p:nvPr>
+            <p:ph type="sldNum" sz="quarter" idx="10"/>
+          </p:nvPr>
+        </p:nvSpPr>
+        <p:spPr>
+          <a:noFill/>
+        </p:spPr>
+        <p:txBody>
+          <a:bodyPr/>
+          <a:lstStyle>
+            <a:lvl1pPr eaLnBrk="0" hangingPunct="0">
+              <a:defRPr sz="1600">
+                <a:solidFill>
+                  <a:schemeClr val="tx1"/>
+                </a:solidFill>
+                <a:latin typeface="Tahoma" panose="020B0604030504040204" pitchFamily="34" charset="0"/>
+                <a:ea typeface="SimSun" panose="02010600030101010101" pitchFamily="2" charset="-122"/>
+              </a:defRPr>
+            </a:lvl1pPr>
+            <a:lvl2pPr marL="742950" indent="-285750" eaLnBrk="0" hangingPunct="0">
+              <a:defRPr sz="1600">
+                <a:solidFill>
+                  <a:schemeClr val="tx1"/>
+                </a:solidFill>
+                <a:latin typeface="Tahoma" panose="020B0604030504040204" pitchFamily="34" charset="0"/>
+                <a:ea typeface="SimSun" panose="02010600030101010101" pitchFamily="2" charset="-122"/>
+              </a:defRPr>
+            </a:lvl2pPr>
+            <a:lvl3pPr marL="1143000" indent="-228600" eaLnBrk="0" hangingPunct="0">
+              <a:defRPr sz="1600">
+                <a:solidFill>
+                  <a:schemeClr val="tx1"/>
+                </a:solidFill>
+                <a:latin typeface="Tahoma" panose="020B0604030504040204" pitchFamily="34" charset="0"/>
+                <a:ea typeface="SimSun" panose="02010600030101010101" pitchFamily="2" charset="-122"/>
+              </a:defRPr>
+            </a:lvl3pPr>
+            <a:lvl4pPr marL="1600200" indent="-228600" eaLnBrk="0" hangingPunct="0">
+              <a:defRPr sz="1600">
+                <a:solidFill>
+                  <a:schemeClr val="tx1"/>
+                </a:solidFill>
+                <a:latin typeface="Tahoma" panose="020B0604030504040204" pitchFamily="34" charset="0"/>
+                <a:ea typeface="SimSun" panose="02010600030101010101" pitchFamily="2" charset="-122"/>
+              </a:defRPr>
+            </a:lvl4pPr>
+            <a:lvl5pPr marL="2057400" indent="-228600" eaLnBrk="0" hangingPunct="0">
+              <a:defRPr sz="1600">
+                <a:solidFill>
+                  <a:schemeClr val="tx1"/>
+                </a:solidFill>
+                <a:latin typeface="Tahoma" panose="020B0604030504040204" pitchFamily="34" charset="0"/>
+                <a:ea typeface="SimSun" panose="02010600030101010101" pitchFamily="2" charset="-122"/>
+              </a:defRPr>
+            </a:lvl5pPr>
+            <a:lvl6pPr marL="2514600" indent="-228600" algn="ctr" eaLnBrk="0" fontAlgn="base" hangingPunct="0">
+              <a:spcBef>
+                <a:spcPct val="0"/>
+              </a:spcBef>
+              <a:spcAft>
+                <a:spcPct val="0"/>
+              </a:spcAft>
+              <a:defRPr sz="1600">
+                <a:solidFill>
+                  <a:schemeClr val="tx1"/>
+                </a:solidFill>
+                <a:latin typeface="Tahoma" panose="020B0604030504040204" pitchFamily="34" charset="0"/>
+                <a:ea typeface="SimSun" panose="02010600030101010101" pitchFamily="2" charset="-122"/>
+              </a:defRPr>
+            </a:lvl6pPr>
+            <a:lvl7pPr marL="2971800" indent="-228600" algn="ctr" eaLnBrk="0" fontAlgn="base" hangingPunct="0">
+              <a:spcBef>
+                <a:spcPct val="0"/>
+              </a:spcBef>
+              <a:spcAft>
+                <a:spcPct val="0"/>
+              </a:spcAft>
+              <a:defRPr sz="1600">
+                <a:solidFill>
+                  <a:schemeClr val="tx1"/>
+                </a:solidFill>
+                <a:latin typeface="Tahoma" panose="020B0604030504040204" pitchFamily="34" charset="0"/>
+                <a:ea typeface="SimSun" panose="02010600030101010101" pitchFamily="2" charset="-122"/>
+              </a:defRPr>
+            </a:lvl7pPr>
+            <a:lvl8pPr marL="3429000" indent="-228600" algn="ctr" eaLnBrk="0" fontAlgn="base" hangingPunct="0">
+              <a:spcBef>
+                <a:spcPct val="0"/>
+              </a:spcBef>
+              <a:spcAft>
+                <a:spcPct val="0"/>
+              </a:spcAft>
+              <a:defRPr sz="1600">
+                <a:solidFill>
+                  <a:schemeClr val="tx1"/>
+                </a:solidFill>
+                <a:latin typeface="Tahoma" panose="020B0604030504040204" pitchFamily="34" charset="0"/>
+                <a:ea typeface="SimSun" panose="02010600030101010101" pitchFamily="2" charset="-122"/>
+              </a:defRPr>
+            </a:lvl8pPr>
+            <a:lvl9pPr marL="3886200" indent="-228600" algn="ctr" eaLnBrk="0" fontAlgn="base" hangingPunct="0">
+              <a:spcBef>
+                <a:spcPct val="0"/>
+              </a:spcBef>
+              <a:spcAft>
+                <a:spcPct val="0"/>
+              </a:spcAft>
+              <a:defRPr sz="1600">
+                <a:solidFill>
+                  <a:schemeClr val="tx1"/>
+                </a:solidFill>
+                <a:latin typeface="Tahoma" panose="020B0604030504040204" pitchFamily="34" charset="0"/>
+                <a:ea typeface="SimSun" panose="02010600030101010101" pitchFamily="2" charset="-122"/>
+              </a:defRPr>
+            </a:lvl9pPr>
+          </a:lstStyle>
+          <a:p>
+            <a:pPr marL="0" marR="0" lvl="0" indent="0" algn="r" defTabSz="914400" rtl="0" eaLnBrk="1" fontAlgn="base" latinLnBrk="0" hangingPunct="1">
+              <a:lnSpc>
+                <a:spcPct val="100000"/>
+              </a:lnSpc>
+              <a:spcBef>
+                <a:spcPct val="0"/>
+              </a:spcBef>
+              <a:spcAft>
+                <a:spcPct val="0"/>
+              </a:spcAft>
+              <a:buClrTx/>
+              <a:buSzTx/>
+              <a:buFontTx/>
+              <a:buNone/>
+              <a:tabLst/>
+              <a:defRPr/>
+            </a:pPr>
+            <a:fld id="{EFA775FB-0B1B-47C5-8D58-93522C5ED96C}" type="slidenum">
+              <a:rPr kumimoji="0" lang="zh-CN" altLang="en-GB" sz="1400" b="0" i="0" u="none" strike="noStrike" kern="1200" cap="none" spc="0" normalizeH="0" baseline="0" noProof="0">
+                <a:ln>
+                  <a:noFill/>
+                </a:ln>
+                <a:solidFill>
+                  <a:srgbClr val="000000"/>
+                </a:solidFill>
+                <a:effectLst/>
+                <a:uLnTx/>
+                <a:uFillTx/>
+                <a:latin typeface="Tahoma" panose="020B0604030504040204" pitchFamily="34" charset="0"/>
+                <a:ea typeface="SimSun" panose="02010600030101010101" pitchFamily="2" charset="-122"/>
+                <a:cs typeface="+mn-cs"/>
+              </a:rPr>
+              <a:pPr marL="0" marR="0" lvl="0" indent="0" algn="r" defTabSz="914400" rtl="0" eaLnBrk="1" fontAlgn="base" latinLnBrk="0" hangingPunct="1">
+                <a:lnSpc>
+                  <a:spcPct val="100000"/>
+                </a:lnSpc>
+                <a:spcBef>
+                  <a:spcPct val="0"/>
+                </a:spcBef>
+                <a:spcAft>
+                  <a:spcPct val="0"/>
+                </a:spcAft>
+                <a:buClrTx/>
+                <a:buSzTx/>
+                <a:buFontTx/>
+                <a:buNone/>
+                <a:tabLst/>
+                <a:defRPr/>
+              </a:pPr>
+              <a:t>11</a:t>
+            </a:fld>
+            <a:endParaRPr kumimoji="0" lang="en-GB" altLang="zh-CN" sz="1400" b="0" i="0" u="none" strike="noStrike" kern="1200" cap="none" spc="0" normalizeH="0" baseline="0" noProof="0">
+              <a:ln>
+                <a:noFill/>
+              </a:ln>
+              <a:solidFill>
+                <a:srgbClr val="000000"/>
+              </a:solidFill>
+              <a:effectLst/>
+              <a:uLnTx/>
+              <a:uFillTx/>
+              <a:latin typeface="Tahoma" panose="020B0604030504040204" pitchFamily="34" charset="0"/>
+              <a:ea typeface="SimSun" panose="02010600030101010101" pitchFamily="2" charset="-122"/>
+              <a:cs typeface="+mn-cs"/>
+            </a:endParaRPr>
+          </a:p>
+        </p:txBody>
+      </p:sp>
+      <p:sp>
+        <p:nvSpPr>
+          <p:cNvPr id="89091" name="Rectangle 4">
+            <a:extLst>
+              <a:ext uri="{FF2B5EF4-FFF2-40B4-BE49-F238E27FC236}">
+                <a16:creationId xmlns:a16="http://schemas.microsoft.com/office/drawing/2014/main" id="{E441AA11-8283-2F7C-7CAF-9B834B14ED43}"/>
+              </a:ext>
+            </a:extLst>
+          </p:cNvPr>
+          <p:cNvSpPr>
+            <a:spLocks noGrp="1" noChangeArrowheads="1"/>
+          </p:cNvSpPr>
+          <p:nvPr/>
+        </p:nvSpPr>
+        <p:spPr bwMode="auto">
+          <a:xfrm>
+            <a:off x="685800" y="304800"/>
+            <a:ext cx="7772400" cy="1143000"/>
+          </a:xfrm>
+          <a:prstGeom prst="rect">
+            <a:avLst/>
+          </a:prstGeom>
+          <a:noFill/>
+          <a:ln>
+            <a:noFill/>
+          </a:ln>
+          <a:effectLst/>
+          <a:extLst>
+            <a:ext uri="{909E8E84-426E-40DD-AFC4-6F175D3DCCD1}">
+              <a14:hiddenFill xmlns:a14="http://schemas.microsoft.com/office/drawing/2010/main">
+                <a:solidFill>
+                  <a:schemeClr val="accent1"/>
+                </a:solidFill>
+              </a14:hiddenFill>
+            </a:ext>
+            <a:ext uri="{91240B29-F687-4F45-9708-019B960494DF}">
+              <a14:hiddenLine xmlns:a14="http://schemas.microsoft.com/office/drawing/2010/main" w="9525">
+                <a:solidFill>
+                  <a:schemeClr val="tx1"/>
+                </a:solidFill>
+                <a:miter lim="800000"/>
+                <a:headEnd/>
+                <a:tailEnd/>
+              </a14:hiddenLine>
+            </a:ext>
+            <a:ext uri="{AF507438-7753-43E0-B8FC-AC1667EBCBE1}">
+              <a14:hiddenEffects xmlns:a14="http://schemas.microsoft.com/office/drawing/2010/main">
+                <a:effectLst>
+                  <a:outerShdw dist="35921" dir="2700000" algn="ctr" rotWithShape="0">
+                    <a:schemeClr val="bg2"/>
+                  </a:outerShdw>
+                </a:effectLst>
+              </a14:hiddenEffects>
+            </a:ext>
+          </a:extLst>
+        </p:spPr>
+        <p:txBody>
+          <a:bodyPr anchor="ctr"/>
+          <a:lstStyle>
+            <a:lvl1pPr eaLnBrk="0" hangingPunct="0">
+              <a:defRPr sz="1600">
+                <a:solidFill>
+                  <a:schemeClr val="tx1"/>
+                </a:solidFill>
+                <a:latin typeface="Tahoma" panose="020B0604030504040204" pitchFamily="34" charset="0"/>
+                <a:ea typeface="SimSun" panose="02010600030101010101" pitchFamily="2" charset="-122"/>
+              </a:defRPr>
+            </a:lvl1pPr>
+            <a:lvl2pPr marL="742950" indent="-285750" eaLnBrk="0" hangingPunct="0">
+              <a:defRPr sz="1600">
+                <a:solidFill>
+                  <a:schemeClr val="tx1"/>
+                </a:solidFill>
+                <a:latin typeface="Tahoma" panose="020B0604030504040204" pitchFamily="34" charset="0"/>
+                <a:ea typeface="SimSun" panose="02010600030101010101" pitchFamily="2" charset="-122"/>
+              </a:defRPr>
+            </a:lvl2pPr>
+            <a:lvl3pPr marL="1143000" indent="-228600" eaLnBrk="0" hangingPunct="0">
+              <a:defRPr sz="1600">
+                <a:solidFill>
+                  <a:schemeClr val="tx1"/>
+                </a:solidFill>
+                <a:latin typeface="Tahoma" panose="020B0604030504040204" pitchFamily="34" charset="0"/>
+                <a:ea typeface="SimSun" panose="02010600030101010101" pitchFamily="2" charset="-122"/>
+              </a:defRPr>
+            </a:lvl3pPr>
+            <a:lvl4pPr marL="1600200" indent="-228600" eaLnBrk="0" hangingPunct="0">
+              <a:defRPr sz="1600">
+                <a:solidFill>
+                  <a:schemeClr val="tx1"/>
+                </a:solidFill>
+                <a:latin typeface="Tahoma" panose="020B0604030504040204" pitchFamily="34" charset="0"/>
+                <a:ea typeface="SimSun" panose="02010600030101010101" pitchFamily="2" charset="-122"/>
+              </a:defRPr>
+            </a:lvl4pPr>
+            <a:lvl5pPr marL="2057400" indent="-228600" eaLnBrk="0" hangingPunct="0">
+              <a:defRPr sz="1600">
+                <a:solidFill>
+                  <a:schemeClr val="tx1"/>
+                </a:solidFill>
+                <a:latin typeface="Tahoma" panose="020B0604030504040204" pitchFamily="34" charset="0"/>
+                <a:ea typeface="SimSun" panose="02010600030101010101" pitchFamily="2" charset="-122"/>
+              </a:defRPr>
+            </a:lvl5pPr>
+            <a:lvl6pPr marL="2514600" indent="-228600" algn="ctr" eaLnBrk="0" fontAlgn="base" hangingPunct="0">
+              <a:spcBef>
+                <a:spcPct val="0"/>
+              </a:spcBef>
+              <a:spcAft>
+                <a:spcPct val="0"/>
+              </a:spcAft>
+              <a:defRPr sz="1600">
+                <a:solidFill>
+                  <a:schemeClr val="tx1"/>
+                </a:solidFill>
+                <a:latin typeface="Tahoma" panose="020B0604030504040204" pitchFamily="34" charset="0"/>
+                <a:ea typeface="SimSun" panose="02010600030101010101" pitchFamily="2" charset="-122"/>
+              </a:defRPr>
+            </a:lvl6pPr>
+            <a:lvl7pPr marL="2971800" indent="-228600" algn="ctr" eaLnBrk="0" fontAlgn="base" hangingPunct="0">
+              <a:spcBef>
+                <a:spcPct val="0"/>
+              </a:spcBef>
+              <a:spcAft>
+                <a:spcPct val="0"/>
+              </a:spcAft>
+              <a:defRPr sz="1600">
+                <a:solidFill>
+                  <a:schemeClr val="tx1"/>
+                </a:solidFill>
+                <a:latin typeface="Tahoma" panose="020B0604030504040204" pitchFamily="34" charset="0"/>
+                <a:ea typeface="SimSun" panose="02010600030101010101" pitchFamily="2" charset="-122"/>
+              </a:defRPr>
+            </a:lvl7pPr>
+            <a:lvl8pPr marL="3429000" indent="-228600" algn="ctr" eaLnBrk="0" fontAlgn="base" hangingPunct="0">
+              <a:spcBef>
+                <a:spcPct val="0"/>
+              </a:spcBef>
+              <a:spcAft>
+                <a:spcPct val="0"/>
+              </a:spcAft>
+              <a:defRPr sz="1600">
+                <a:solidFill>
+                  <a:schemeClr val="tx1"/>
+                </a:solidFill>
+                <a:latin typeface="Tahoma" panose="020B0604030504040204" pitchFamily="34" charset="0"/>
+                <a:ea typeface="SimSun" panose="02010600030101010101" pitchFamily="2" charset="-122"/>
+              </a:defRPr>
+            </a:lvl8pPr>
+            <a:lvl9pPr marL="3886200" indent="-228600" algn="ctr" eaLnBrk="0" fontAlgn="base" hangingPunct="0">
+              <a:spcBef>
+                <a:spcPct val="0"/>
+              </a:spcBef>
+              <a:spcAft>
+                <a:spcPct val="0"/>
+              </a:spcAft>
+              <a:defRPr sz="1600">
+                <a:solidFill>
+                  <a:schemeClr val="tx1"/>
+                </a:solidFill>
+                <a:latin typeface="Tahoma" panose="020B0604030504040204" pitchFamily="34" charset="0"/>
+                <a:ea typeface="SimSun" panose="02010600030101010101" pitchFamily="2" charset="-122"/>
+              </a:defRPr>
+            </a:lvl9pPr>
+          </a:lstStyle>
+          <a:p>
+            <a:pPr marL="0" marR="0" lvl="0" indent="0" algn="ctr" defTabSz="914400" rtl="0" eaLnBrk="1" fontAlgn="base" latinLnBrk="0" hangingPunct="1">
+              <a:lnSpc>
+                <a:spcPct val="100000"/>
+              </a:lnSpc>
+              <a:spcBef>
+                <a:spcPct val="0"/>
+              </a:spcBef>
+              <a:spcAft>
+                <a:spcPct val="0"/>
+              </a:spcAft>
+              <a:buClrTx/>
+              <a:buSzTx/>
+              <a:buFontTx/>
+              <a:buNone/>
+              <a:tabLst/>
+              <a:defRPr/>
+            </a:pPr>
+            <a:r>
+              <a:rPr kumimoji="0" lang="en-US" altLang="en-US" sz="4400" b="1" i="0" u="none" strike="noStrike" kern="1200" cap="none" spc="0" normalizeH="0" baseline="0" noProof="0" dirty="0">
+                <a:ln>
+                  <a:noFill/>
+                </a:ln>
+                <a:solidFill>
+                  <a:srgbClr val="333399"/>
+                </a:solidFill>
+                <a:effectLst/>
+                <a:uLnTx/>
+                <a:uFillTx/>
+                <a:latin typeface="Tahoma" panose="020B0604030504040204" pitchFamily="34" charset="0"/>
+                <a:ea typeface="SimSun" panose="02010600030101010101" pitchFamily="2" charset="-122"/>
+                <a:cs typeface="+mn-cs"/>
+              </a:rPr>
+              <a:t>Some Tips</a:t>
+            </a:r>
+          </a:p>
+        </p:txBody>
+      </p:sp>
+      <p:sp>
+        <p:nvSpPr>
+          <p:cNvPr id="89092" name="Rectangle 5">
+            <a:extLst>
+              <a:ext uri="{FF2B5EF4-FFF2-40B4-BE49-F238E27FC236}">
+                <a16:creationId xmlns:a16="http://schemas.microsoft.com/office/drawing/2014/main" id="{C485BCA1-8224-B435-8B15-341B10D89597}"/>
+              </a:ext>
+            </a:extLst>
+          </p:cNvPr>
+          <p:cNvSpPr>
+            <a:spLocks noGrp="1" noChangeArrowheads="1"/>
+          </p:cNvSpPr>
+          <p:nvPr/>
+        </p:nvSpPr>
+        <p:spPr bwMode="auto">
+          <a:xfrm>
+            <a:off x="685800" y="1676400"/>
+            <a:ext cx="7772400" cy="4114800"/>
+          </a:xfrm>
+          <a:prstGeom prst="rect">
+            <a:avLst/>
+          </a:prstGeom>
+          <a:noFill/>
+          <a:ln>
+            <a:noFill/>
+          </a:ln>
+          <a:effectLst/>
+          <a:extLst>
+            <a:ext uri="{909E8E84-426E-40DD-AFC4-6F175D3DCCD1}">
+              <a14:hiddenFill xmlns:a14="http://schemas.microsoft.com/office/drawing/2010/main">
+                <a:solidFill>
+                  <a:schemeClr val="accent1"/>
+                </a:solidFill>
+              </a14:hiddenFill>
+            </a:ext>
+            <a:ext uri="{91240B29-F687-4F45-9708-019B960494DF}">
+              <a14:hiddenLine xmlns:a14="http://schemas.microsoft.com/office/drawing/2010/main" w="9525">
+                <a:solidFill>
+                  <a:schemeClr val="tx1"/>
+                </a:solidFill>
+                <a:miter lim="800000"/>
+                <a:headEnd/>
+                <a:tailEnd/>
+              </a14:hiddenLine>
+            </a:ext>
+            <a:ext uri="{AF507438-7753-43E0-B8FC-AC1667EBCBE1}">
+              <a14:hiddenEffects xmlns:a14="http://schemas.microsoft.com/office/drawing/2010/main">
+                <a:effectLst>
+                  <a:outerShdw dist="35921" dir="2700000" algn="ctr" rotWithShape="0">
+                    <a:schemeClr val="bg2"/>
+                  </a:outerShdw>
+                </a:effectLst>
+              </a14:hiddenEffects>
+            </a:ext>
+          </a:extLst>
+        </p:spPr>
+        <p:txBody>
+          <a:bodyPr/>
+          <a:lstStyle>
+            <a:lvl1pPr marL="342900" indent="-342900" eaLnBrk="0" hangingPunct="0">
+              <a:defRPr sz="1600">
+                <a:solidFill>
+                  <a:schemeClr val="tx1"/>
+                </a:solidFill>
+                <a:latin typeface="Tahoma" panose="020B0604030504040204" pitchFamily="34" charset="0"/>
+                <a:ea typeface="SimSun" panose="02010600030101010101" pitchFamily="2" charset="-122"/>
+              </a:defRPr>
+            </a:lvl1pPr>
+            <a:lvl2pPr marL="742950" indent="-285750" eaLnBrk="0" hangingPunct="0">
+              <a:defRPr sz="1600">
+                <a:solidFill>
+                  <a:schemeClr val="tx1"/>
+                </a:solidFill>
+                <a:latin typeface="Tahoma" panose="020B0604030504040204" pitchFamily="34" charset="0"/>
+                <a:ea typeface="SimSun" panose="02010600030101010101" pitchFamily="2" charset="-122"/>
+              </a:defRPr>
+            </a:lvl2pPr>
+            <a:lvl3pPr marL="1143000" indent="-228600" eaLnBrk="0" hangingPunct="0">
+              <a:defRPr sz="1600">
+                <a:solidFill>
+                  <a:schemeClr val="tx1"/>
+                </a:solidFill>
+                <a:latin typeface="Tahoma" panose="020B0604030504040204" pitchFamily="34" charset="0"/>
+                <a:ea typeface="SimSun" panose="02010600030101010101" pitchFamily="2" charset="-122"/>
+              </a:defRPr>
+            </a:lvl3pPr>
+            <a:lvl4pPr marL="1600200" indent="-228600" eaLnBrk="0" hangingPunct="0">
+              <a:defRPr sz="1600">
+                <a:solidFill>
+                  <a:schemeClr val="tx1"/>
+                </a:solidFill>
+                <a:latin typeface="Tahoma" panose="020B0604030504040204" pitchFamily="34" charset="0"/>
+                <a:ea typeface="SimSun" panose="02010600030101010101" pitchFamily="2" charset="-122"/>
+              </a:defRPr>
+            </a:lvl4pPr>
+            <a:lvl5pPr marL="2057400" indent="-228600" eaLnBrk="0" hangingPunct="0">
+              <a:defRPr sz="1600">
+                <a:solidFill>
+                  <a:schemeClr val="tx1"/>
+                </a:solidFill>
+                <a:latin typeface="Tahoma" panose="020B0604030504040204" pitchFamily="34" charset="0"/>
+                <a:ea typeface="SimSun" panose="02010600030101010101" pitchFamily="2" charset="-122"/>
+              </a:defRPr>
+            </a:lvl5pPr>
+            <a:lvl6pPr marL="2514600" indent="-228600" algn="ctr" eaLnBrk="0" fontAlgn="base" hangingPunct="0">
+              <a:spcBef>
+                <a:spcPct val="0"/>
+              </a:spcBef>
+              <a:spcAft>
+                <a:spcPct val="0"/>
+              </a:spcAft>
+              <a:defRPr sz="1600">
+                <a:solidFill>
+                  <a:schemeClr val="tx1"/>
+                </a:solidFill>
+                <a:latin typeface="Tahoma" panose="020B0604030504040204" pitchFamily="34" charset="0"/>
+                <a:ea typeface="SimSun" panose="02010600030101010101" pitchFamily="2" charset="-122"/>
+              </a:defRPr>
+            </a:lvl6pPr>
+            <a:lvl7pPr marL="2971800" indent="-228600" algn="ctr" eaLnBrk="0" fontAlgn="base" hangingPunct="0">
+              <a:spcBef>
+                <a:spcPct val="0"/>
+              </a:spcBef>
+              <a:spcAft>
+                <a:spcPct val="0"/>
+              </a:spcAft>
+              <a:defRPr sz="1600">
+                <a:solidFill>
+                  <a:schemeClr val="tx1"/>
+                </a:solidFill>
+                <a:latin typeface="Tahoma" panose="020B0604030504040204" pitchFamily="34" charset="0"/>
+                <a:ea typeface="SimSun" panose="02010600030101010101" pitchFamily="2" charset="-122"/>
+              </a:defRPr>
+            </a:lvl7pPr>
+            <a:lvl8pPr marL="3429000" indent="-228600" algn="ctr" eaLnBrk="0" fontAlgn="base" hangingPunct="0">
+              <a:spcBef>
+                <a:spcPct val="0"/>
+              </a:spcBef>
+              <a:spcAft>
+                <a:spcPct val="0"/>
+              </a:spcAft>
+              <a:defRPr sz="1600">
+                <a:solidFill>
+                  <a:schemeClr val="tx1"/>
+                </a:solidFill>
+                <a:latin typeface="Tahoma" panose="020B0604030504040204" pitchFamily="34" charset="0"/>
+                <a:ea typeface="SimSun" panose="02010600030101010101" pitchFamily="2" charset="-122"/>
+              </a:defRPr>
+            </a:lvl8pPr>
+            <a:lvl9pPr marL="3886200" indent="-228600" algn="ctr" eaLnBrk="0" fontAlgn="base" hangingPunct="0">
+              <a:spcBef>
+                <a:spcPct val="0"/>
+              </a:spcBef>
+              <a:spcAft>
+                <a:spcPct val="0"/>
+              </a:spcAft>
+              <a:defRPr sz="1600">
+                <a:solidFill>
+                  <a:schemeClr val="tx1"/>
+                </a:solidFill>
+                <a:latin typeface="Tahoma" panose="020B0604030504040204" pitchFamily="34" charset="0"/>
+                <a:ea typeface="SimSun" panose="02010600030101010101" pitchFamily="2" charset="-122"/>
+              </a:defRPr>
+            </a:lvl9pPr>
+          </a:lstStyle>
+          <a:p>
+            <a:pPr marL="342900" marR="0" lvl="0" indent="-342900" algn="l" defTabSz="914400" rtl="0" eaLnBrk="1" fontAlgn="base" latinLnBrk="0" hangingPunct="1">
+              <a:lnSpc>
+                <a:spcPct val="100000"/>
+              </a:lnSpc>
+              <a:spcBef>
+                <a:spcPct val="20000"/>
+              </a:spcBef>
+              <a:spcAft>
+                <a:spcPct val="0"/>
+              </a:spcAft>
+              <a:buClrTx/>
+              <a:buSzTx/>
+              <a:buFontTx/>
+              <a:buChar char="•"/>
+              <a:tabLst/>
+              <a:defRPr/>
+            </a:pPr>
+            <a:r>
+              <a:rPr kumimoji="0" lang="en-US" altLang="en-US" sz="3200" b="0" i="0" u="none" strike="noStrike" kern="1200" cap="none" spc="0" normalizeH="0" baseline="0" noProof="0">
+                <a:ln>
+                  <a:noFill/>
+                </a:ln>
+                <a:solidFill>
+                  <a:srgbClr val="000000"/>
+                </a:solidFill>
+                <a:effectLst/>
+                <a:uLnTx/>
+                <a:uFillTx/>
+                <a:latin typeface="Tahoma" panose="020B0604030504040204" pitchFamily="34" charset="0"/>
+                <a:ea typeface="SimSun" panose="02010600030101010101" pitchFamily="2" charset="-122"/>
+                <a:cs typeface="+mn-cs"/>
+              </a:rPr>
+              <a:t>Every exception should be handled </a:t>
+            </a:r>
+            <a:r>
+              <a:rPr kumimoji="0" lang="en-US" altLang="en-US" sz="3200" b="0" i="1" u="none" strike="noStrike" kern="1200" cap="none" spc="0" normalizeH="0" baseline="0" noProof="0">
+                <a:ln>
+                  <a:noFill/>
+                </a:ln>
+                <a:solidFill>
+                  <a:srgbClr val="000000"/>
+                </a:solidFill>
+                <a:effectLst/>
+                <a:uLnTx/>
+                <a:uFillTx/>
+                <a:latin typeface="Tahoma" panose="020B0604030504040204" pitchFamily="34" charset="0"/>
+                <a:ea typeface="SimSun" panose="02010600030101010101" pitchFamily="2" charset="-122"/>
+                <a:cs typeface="+mn-cs"/>
+              </a:rPr>
+              <a:t>somewhere</a:t>
+            </a:r>
+            <a:r>
+              <a:rPr kumimoji="0" lang="en-US" altLang="en-US" sz="3200" b="0" i="0" u="none" strike="noStrike" kern="1200" cap="none" spc="0" normalizeH="0" baseline="0" noProof="0">
+                <a:ln>
+                  <a:noFill/>
+                </a:ln>
+                <a:solidFill>
+                  <a:srgbClr val="000000"/>
+                </a:solidFill>
+                <a:effectLst/>
+                <a:uLnTx/>
+                <a:uFillTx/>
+                <a:latin typeface="Tahoma" panose="020B0604030504040204" pitchFamily="34" charset="0"/>
+                <a:ea typeface="SimSun" panose="02010600030101010101" pitchFamily="2" charset="-122"/>
+                <a:cs typeface="+mn-cs"/>
+              </a:rPr>
+              <a:t> in your program.  If an exception has no handler, an error message is printed, and your program terminates.</a:t>
+            </a:r>
+          </a:p>
+        </p:txBody>
+      </p:sp>
+    </p:spTree>
+  </p:cSld>
+  <p:clrMapOvr>
+    <a:masterClrMapping/>
+  </p:clrMapOvr>
+  <p:transition advTm="1000"/>
+</p:sld>
+</file>
+
+<file path=ppt/slides/slide12.xml><?xml version="1.0" encoding="utf-8"?>
 <p:sld xmlns:a="http://schemas.openxmlformats.org/drawingml/2006/main" xmlns:r="http://schemas.openxmlformats.org/officeDocument/2006/relationships" xmlns:p="http://schemas.openxmlformats.org/presentationml/2006/main">
   <p:cSld>
     <p:spTree>
@@ -25658,7 +27430,7 @@
                 <a:tabLst/>
                 <a:defRPr/>
               </a:pPr>
-              <a:t>10</a:t>
+              <a:t>12</a:t>
             </a:fld>
             <a:endParaRPr kumimoji="0" lang="en-GB" altLang="zh-CN" sz="1400" b="0" i="0" u="none" strike="noStrike" kern="1200" cap="none" spc="0" normalizeH="0" baseline="0" noProof="0">
               <a:ln>
@@ -26223,7 +27995,7 @@
 </p:sld>
 </file>
 
-<file path=ppt/slides/slide11.xml><?xml version="1.0" encoding="utf-8"?>
+<file path=ppt/slides/slide13.xml><?xml version="1.0" encoding="utf-8"?>
 <p:sld xmlns:a="http://schemas.openxmlformats.org/drawingml/2006/main" xmlns:r="http://schemas.openxmlformats.org/officeDocument/2006/relationships" xmlns:p="http://schemas.openxmlformats.org/presentationml/2006/main">
   <p:cSld>
     <p:spTree>
@@ -26385,640 +28157,6 @@
               <a:defRPr/>
             </a:pPr>
             <a:fld id="{C2DD9192-2B9A-4E99-911B-46F529AF283E}" type="slidenum">
-              <a:rPr kumimoji="0" lang="en-US" altLang="en-US" sz="1400" b="0" i="0" u="none" strike="noStrike" kern="1200" cap="none" spc="0" normalizeH="0" baseline="0" noProof="0">
-                <a:ln>
-                  <a:noFill/>
-                </a:ln>
-                <a:solidFill>
-                  <a:srgbClr val="FFFFFF"/>
-                </a:solidFill>
-                <a:effectLst>
-                  <a:outerShdw blurRad="38100" dist="38100" dir="2700000" algn="tl">
-                    <a:srgbClr val="000000"/>
-                  </a:outerShdw>
-                </a:effectLst>
-                <a:uLnTx/>
-                <a:uFillTx/>
-                <a:latin typeface="Arial" panose="020B0604020202020204" pitchFamily="34" charset="0"/>
-                <a:ea typeface="SimSun" panose="02010600030101010101" pitchFamily="2" charset="-122"/>
-                <a:cs typeface="+mn-cs"/>
-              </a:rPr>
-              <a:pPr marL="0" marR="0" lvl="0" indent="0" algn="r" defTabSz="914400" rtl="0" eaLnBrk="1" fontAlgn="base" latinLnBrk="0" hangingPunct="1">
-                <a:lnSpc>
-                  <a:spcPct val="100000"/>
-                </a:lnSpc>
-                <a:spcBef>
-                  <a:spcPct val="0"/>
-                </a:spcBef>
-                <a:spcAft>
-                  <a:spcPct val="0"/>
-                </a:spcAft>
-                <a:buClrTx/>
-                <a:buSzTx/>
-                <a:buFontTx/>
-                <a:buNone/>
-                <a:tabLst/>
-                <a:defRPr/>
-              </a:pPr>
-              <a:t>11</a:t>
-            </a:fld>
-            <a:endParaRPr kumimoji="0" lang="en-US" altLang="en-US" sz="1400" b="0" i="0" u="none" strike="noStrike" kern="1200" cap="none" spc="0" normalizeH="0" baseline="0" noProof="0">
-              <a:ln>
-                <a:noFill/>
-              </a:ln>
-              <a:solidFill>
-                <a:srgbClr val="FFFFFF"/>
-              </a:solidFill>
-              <a:effectLst>
-                <a:outerShdw blurRad="38100" dist="38100" dir="2700000" algn="tl">
-                  <a:srgbClr val="000000"/>
-                </a:outerShdw>
-              </a:effectLst>
-              <a:uLnTx/>
-              <a:uFillTx/>
-              <a:latin typeface="Arial" panose="020B0604020202020204" pitchFamily="34" charset="0"/>
-              <a:ea typeface="SimSun" panose="02010600030101010101" pitchFamily="2" charset="-122"/>
-              <a:cs typeface="+mn-cs"/>
-            </a:endParaRPr>
-          </a:p>
-        </p:txBody>
-      </p:sp>
-      <p:sp>
-        <p:nvSpPr>
-          <p:cNvPr id="2" name="Title 1">
-            <a:extLst>
-              <a:ext uri="{FF2B5EF4-FFF2-40B4-BE49-F238E27FC236}">
-                <a16:creationId xmlns:a16="http://schemas.microsoft.com/office/drawing/2014/main" id="{3EF5874B-BD69-279D-69A9-DDF7155FF9AB}"/>
-              </a:ext>
-            </a:extLst>
-          </p:cNvPr>
-          <p:cNvSpPr>
-            <a:spLocks noGrp="1"/>
-          </p:cNvSpPr>
-          <p:nvPr>
-            <p:ph type="title"/>
-          </p:nvPr>
-        </p:nvSpPr>
-        <p:spPr>
-          <a:xfrm>
-            <a:off x="990600" y="2514600"/>
-            <a:ext cx="7623175" cy="1431925"/>
-          </a:xfrm>
-        </p:spPr>
-        <p:txBody>
-          <a:bodyPr/>
-          <a:lstStyle/>
-          <a:p>
-            <a:pPr algn="ctr">
-              <a:defRPr/>
-            </a:pPr>
-            <a:r>
-              <a:rPr lang="en-US" sz="7200" dirty="0">
-                <a:solidFill>
-                  <a:schemeClr val="tx1"/>
-                </a:solidFill>
-              </a:rPr>
-              <a:t>Exception Terminology</a:t>
-            </a:r>
-            <a:endParaRPr lang="en-US" sz="7200" dirty="0"/>
-          </a:p>
-        </p:txBody>
-      </p:sp>
-    </p:spTree>
-  </p:cSld>
-  <p:clrMapOvr>
-    <a:masterClrMapping/>
-  </p:clrMapOvr>
-</p:sld>
-</file>
-
-<file path=ppt/slides/slide12.xml><?xml version="1.0" encoding="utf-8"?>
-<p:sld xmlns:a="http://schemas.openxmlformats.org/drawingml/2006/main" xmlns:r="http://schemas.openxmlformats.org/officeDocument/2006/relationships" xmlns:p="http://schemas.openxmlformats.org/presentationml/2006/main">
-  <p:cSld>
-    <p:spTree>
-      <p:nvGrpSpPr>
-        <p:cNvPr id="1" name=""/>
-        <p:cNvGrpSpPr/>
-        <p:nvPr/>
-      </p:nvGrpSpPr>
-      <p:grpSpPr>
-        <a:xfrm>
-          <a:off x="0" y="0"/>
-          <a:ext cx="0" cy="0"/>
-          <a:chOff x="0" y="0"/>
-          <a:chExt cx="0" cy="0"/>
-        </a:xfrm>
-      </p:grpSpPr>
-      <p:sp>
-        <p:nvSpPr>
-          <p:cNvPr id="4" name="Slide Number Placeholder 5">
-            <a:extLst>
-              <a:ext uri="{FF2B5EF4-FFF2-40B4-BE49-F238E27FC236}">
-                <a16:creationId xmlns:a16="http://schemas.microsoft.com/office/drawing/2014/main" id="{D8448A49-BBB9-400F-7858-3567915021B3}"/>
-              </a:ext>
-            </a:extLst>
-          </p:cNvPr>
-          <p:cNvSpPr>
-            <a:spLocks noGrp="1"/>
-          </p:cNvSpPr>
-          <p:nvPr>
-            <p:ph type="sldNum" sz="quarter" idx="12"/>
-          </p:nvPr>
-        </p:nvSpPr>
-        <p:spPr/>
-        <p:txBody>
-          <a:bodyPr/>
-          <a:lstStyle>
-            <a:lvl1pPr eaLnBrk="0" hangingPunct="0">
-              <a:defRPr sz="1600">
-                <a:solidFill>
-                  <a:schemeClr val="tx1"/>
-                </a:solidFill>
-                <a:latin typeface="Tahoma" panose="020B0604030504040204" pitchFamily="34" charset="0"/>
-                <a:ea typeface="SimSun" panose="02010600030101010101" pitchFamily="2" charset="-122"/>
-              </a:defRPr>
-            </a:lvl1pPr>
-            <a:lvl2pPr marL="742950" indent="-285750" eaLnBrk="0" hangingPunct="0">
-              <a:defRPr sz="1600">
-                <a:solidFill>
-                  <a:schemeClr val="tx1"/>
-                </a:solidFill>
-                <a:latin typeface="Tahoma" panose="020B0604030504040204" pitchFamily="34" charset="0"/>
-                <a:ea typeface="SimSun" panose="02010600030101010101" pitchFamily="2" charset="-122"/>
-              </a:defRPr>
-            </a:lvl2pPr>
-            <a:lvl3pPr marL="1143000" indent="-228600" eaLnBrk="0" hangingPunct="0">
-              <a:defRPr sz="1600">
-                <a:solidFill>
-                  <a:schemeClr val="tx1"/>
-                </a:solidFill>
-                <a:latin typeface="Tahoma" panose="020B0604030504040204" pitchFamily="34" charset="0"/>
-                <a:ea typeface="SimSun" panose="02010600030101010101" pitchFamily="2" charset="-122"/>
-              </a:defRPr>
-            </a:lvl3pPr>
-            <a:lvl4pPr marL="1600200" indent="-228600" eaLnBrk="0" hangingPunct="0">
-              <a:defRPr sz="1600">
-                <a:solidFill>
-                  <a:schemeClr val="tx1"/>
-                </a:solidFill>
-                <a:latin typeface="Tahoma" panose="020B0604030504040204" pitchFamily="34" charset="0"/>
-                <a:ea typeface="SimSun" panose="02010600030101010101" pitchFamily="2" charset="-122"/>
-              </a:defRPr>
-            </a:lvl4pPr>
-            <a:lvl5pPr marL="2057400" indent="-228600" eaLnBrk="0" hangingPunct="0">
-              <a:defRPr sz="1600">
-                <a:solidFill>
-                  <a:schemeClr val="tx1"/>
-                </a:solidFill>
-                <a:latin typeface="Tahoma" panose="020B0604030504040204" pitchFamily="34" charset="0"/>
-                <a:ea typeface="SimSun" panose="02010600030101010101" pitchFamily="2" charset="-122"/>
-              </a:defRPr>
-            </a:lvl5pPr>
-            <a:lvl6pPr marL="2514600" indent="-228600" algn="ctr" eaLnBrk="0" fontAlgn="base" hangingPunct="0">
-              <a:spcBef>
-                <a:spcPct val="0"/>
-              </a:spcBef>
-              <a:spcAft>
-                <a:spcPct val="0"/>
-              </a:spcAft>
-              <a:defRPr sz="1600">
-                <a:solidFill>
-                  <a:schemeClr val="tx1"/>
-                </a:solidFill>
-                <a:latin typeface="Tahoma" panose="020B0604030504040204" pitchFamily="34" charset="0"/>
-                <a:ea typeface="SimSun" panose="02010600030101010101" pitchFamily="2" charset="-122"/>
-              </a:defRPr>
-            </a:lvl6pPr>
-            <a:lvl7pPr marL="2971800" indent="-228600" algn="ctr" eaLnBrk="0" fontAlgn="base" hangingPunct="0">
-              <a:spcBef>
-                <a:spcPct val="0"/>
-              </a:spcBef>
-              <a:spcAft>
-                <a:spcPct val="0"/>
-              </a:spcAft>
-              <a:defRPr sz="1600">
-                <a:solidFill>
-                  <a:schemeClr val="tx1"/>
-                </a:solidFill>
-                <a:latin typeface="Tahoma" panose="020B0604030504040204" pitchFamily="34" charset="0"/>
-                <a:ea typeface="SimSun" panose="02010600030101010101" pitchFamily="2" charset="-122"/>
-              </a:defRPr>
-            </a:lvl7pPr>
-            <a:lvl8pPr marL="3429000" indent="-228600" algn="ctr" eaLnBrk="0" fontAlgn="base" hangingPunct="0">
-              <a:spcBef>
-                <a:spcPct val="0"/>
-              </a:spcBef>
-              <a:spcAft>
-                <a:spcPct val="0"/>
-              </a:spcAft>
-              <a:defRPr sz="1600">
-                <a:solidFill>
-                  <a:schemeClr val="tx1"/>
-                </a:solidFill>
-                <a:latin typeface="Tahoma" panose="020B0604030504040204" pitchFamily="34" charset="0"/>
-                <a:ea typeface="SimSun" panose="02010600030101010101" pitchFamily="2" charset="-122"/>
-              </a:defRPr>
-            </a:lvl8pPr>
-            <a:lvl9pPr marL="3886200" indent="-228600" algn="ctr" eaLnBrk="0" fontAlgn="base" hangingPunct="0">
-              <a:spcBef>
-                <a:spcPct val="0"/>
-              </a:spcBef>
-              <a:spcAft>
-                <a:spcPct val="0"/>
-              </a:spcAft>
-              <a:defRPr sz="1600">
-                <a:solidFill>
-                  <a:schemeClr val="tx1"/>
-                </a:solidFill>
-                <a:latin typeface="Tahoma" panose="020B0604030504040204" pitchFamily="34" charset="0"/>
-                <a:ea typeface="SimSun" panose="02010600030101010101" pitchFamily="2" charset="-122"/>
-              </a:defRPr>
-            </a:lvl9pPr>
-          </a:lstStyle>
-          <a:p>
-            <a:pPr marL="0" marR="0" lvl="0" indent="0" algn="r" defTabSz="914400" rtl="0" eaLnBrk="1" fontAlgn="base" latinLnBrk="0" hangingPunct="1">
-              <a:lnSpc>
-                <a:spcPct val="100000"/>
-              </a:lnSpc>
-              <a:spcBef>
-                <a:spcPct val="0"/>
-              </a:spcBef>
-              <a:spcAft>
-                <a:spcPct val="0"/>
-              </a:spcAft>
-              <a:buClrTx/>
-              <a:buSzTx/>
-              <a:buFontTx/>
-              <a:buNone/>
-              <a:tabLst/>
-              <a:defRPr/>
-            </a:pPr>
-            <a:fld id="{EA451C56-ED17-496A-A234-4B3C2569951C}" type="slidenum">
-              <a:rPr kumimoji="0" lang="en-US" altLang="en-US" sz="1400" b="0" i="0" u="none" strike="noStrike" kern="1200" cap="none" spc="0" normalizeH="0" baseline="0" noProof="0">
-                <a:ln>
-                  <a:noFill/>
-                </a:ln>
-                <a:solidFill>
-                  <a:srgbClr val="FFFFFF"/>
-                </a:solidFill>
-                <a:effectLst>
-                  <a:outerShdw blurRad="38100" dist="38100" dir="2700000" algn="tl">
-                    <a:srgbClr val="000000"/>
-                  </a:outerShdw>
-                </a:effectLst>
-                <a:uLnTx/>
-                <a:uFillTx/>
-                <a:latin typeface="Arial" panose="020B0604020202020204" pitchFamily="34" charset="0"/>
-                <a:ea typeface="SimSun" panose="02010600030101010101" pitchFamily="2" charset="-122"/>
-                <a:cs typeface="+mn-cs"/>
-              </a:rPr>
-              <a:pPr marL="0" marR="0" lvl="0" indent="0" algn="r" defTabSz="914400" rtl="0" eaLnBrk="1" fontAlgn="base" latinLnBrk="0" hangingPunct="1">
-                <a:lnSpc>
-                  <a:spcPct val="100000"/>
-                </a:lnSpc>
-                <a:spcBef>
-                  <a:spcPct val="0"/>
-                </a:spcBef>
-                <a:spcAft>
-                  <a:spcPct val="0"/>
-                </a:spcAft>
-                <a:buClrTx/>
-                <a:buSzTx/>
-                <a:buFontTx/>
-                <a:buNone/>
-                <a:tabLst/>
-                <a:defRPr/>
-              </a:pPr>
-              <a:t>12</a:t>
-            </a:fld>
-            <a:endParaRPr kumimoji="0" lang="en-US" altLang="en-US" sz="1400" b="0" i="0" u="none" strike="noStrike" kern="1200" cap="none" spc="0" normalizeH="0" baseline="0" noProof="0">
-              <a:ln>
-                <a:noFill/>
-              </a:ln>
-              <a:solidFill>
-                <a:srgbClr val="FFFFFF"/>
-              </a:solidFill>
-              <a:effectLst>
-                <a:outerShdw blurRad="38100" dist="38100" dir="2700000" algn="tl">
-                  <a:srgbClr val="000000"/>
-                </a:outerShdw>
-              </a:effectLst>
-              <a:uLnTx/>
-              <a:uFillTx/>
-              <a:latin typeface="Arial" panose="020B0604020202020204" pitchFamily="34" charset="0"/>
-              <a:ea typeface="SimSun" panose="02010600030101010101" pitchFamily="2" charset="-122"/>
-              <a:cs typeface="+mn-cs"/>
-            </a:endParaRPr>
-          </a:p>
-        </p:txBody>
-      </p:sp>
-      <p:sp>
-        <p:nvSpPr>
-          <p:cNvPr id="81922" name="Rectangle 2">
-            <a:extLst>
-              <a:ext uri="{FF2B5EF4-FFF2-40B4-BE49-F238E27FC236}">
-                <a16:creationId xmlns:a16="http://schemas.microsoft.com/office/drawing/2014/main" id="{D6E00A1C-1295-0989-5753-4E25B1DDBFC3}"/>
-              </a:ext>
-            </a:extLst>
-          </p:cNvPr>
-          <p:cNvSpPr>
-            <a:spLocks noGrp="1" noRot="1" noChangeArrowheads="1"/>
-          </p:cNvSpPr>
-          <p:nvPr>
-            <p:ph type="title"/>
-          </p:nvPr>
-        </p:nvSpPr>
-        <p:spPr/>
-        <p:txBody>
-          <a:bodyPr/>
-          <a:lstStyle/>
-          <a:p>
-            <a:pPr eaLnBrk="1" hangingPunct="1">
-              <a:defRPr/>
-            </a:pPr>
-            <a:r>
-              <a:rPr lang="en-US" dirty="0"/>
-              <a:t>Terminology</a:t>
-            </a:r>
-          </a:p>
-        </p:txBody>
-      </p:sp>
-      <p:sp>
-        <p:nvSpPr>
-          <p:cNvPr id="81923" name="Rectangle 3">
-            <a:extLst>
-              <a:ext uri="{FF2B5EF4-FFF2-40B4-BE49-F238E27FC236}">
-                <a16:creationId xmlns:a16="http://schemas.microsoft.com/office/drawing/2014/main" id="{2A630D85-25D2-EC7B-9FC7-730784DEFF2B}"/>
-              </a:ext>
-            </a:extLst>
-          </p:cNvPr>
-          <p:cNvSpPr>
-            <a:spLocks noGrp="1" noRot="1" noChangeArrowheads="1"/>
-          </p:cNvSpPr>
-          <p:nvPr>
-            <p:ph type="body" idx="1"/>
-          </p:nvPr>
-        </p:nvSpPr>
-        <p:spPr>
-          <a:xfrm>
-            <a:off x="609600" y="1676400"/>
-            <a:ext cx="7924800" cy="4953000"/>
-          </a:xfrm>
-        </p:spPr>
-        <p:txBody>
-          <a:bodyPr/>
-          <a:lstStyle/>
-          <a:p>
-            <a:pPr eaLnBrk="1" hangingPunct="1">
-              <a:lnSpc>
-                <a:spcPct val="90000"/>
-              </a:lnSpc>
-              <a:defRPr/>
-            </a:pPr>
-            <a:r>
-              <a:rPr lang="en-US" b="1" dirty="0">
-                <a:solidFill>
-                  <a:srgbClr val="FFFF99"/>
-                </a:solidFill>
-                <a:latin typeface="Courier New" pitchFamily="49" charset="0"/>
-              </a:rPr>
-              <a:t>Exception - </a:t>
-            </a:r>
-            <a:r>
-              <a:rPr lang="en-US" sz="2800" dirty="0"/>
-              <a:t>a java class used to store error information.  </a:t>
-            </a:r>
-          </a:p>
-          <a:p>
-            <a:pPr eaLnBrk="1" hangingPunct="1">
-              <a:lnSpc>
-                <a:spcPct val="90000"/>
-              </a:lnSpc>
-              <a:defRPr/>
-            </a:pPr>
-            <a:r>
-              <a:rPr lang="en-US" b="1" dirty="0">
-                <a:solidFill>
-                  <a:srgbClr val="FFFF99"/>
-                </a:solidFill>
-                <a:latin typeface="Courier New" pitchFamily="49" charset="0"/>
-              </a:rPr>
-              <a:t>throws clause – </a:t>
-            </a:r>
-            <a:r>
-              <a:rPr lang="en-US" sz="2800" dirty="0">
-                <a:cs typeface="Times New Roman" pitchFamily="18" charset="0"/>
-              </a:rPr>
-              <a:t>included in the method definition.  It specifies which exceptions the method throws</a:t>
-            </a:r>
-          </a:p>
-          <a:p>
-            <a:pPr eaLnBrk="1" hangingPunct="1">
-              <a:buClr>
-                <a:srgbClr val="99F3FF"/>
-              </a:buClr>
-              <a:defRPr/>
-            </a:pPr>
-            <a:r>
-              <a:rPr lang="en-US" b="1" dirty="0">
-                <a:solidFill>
-                  <a:srgbClr val="FFFF99"/>
-                </a:solidFill>
-                <a:latin typeface="Courier New" pitchFamily="49" charset="0"/>
-              </a:rPr>
-              <a:t>Throw point –</a:t>
-            </a:r>
-            <a:r>
-              <a:rPr lang="en-US" sz="2800" dirty="0">
-                <a:solidFill>
-                  <a:srgbClr val="FFFFFF"/>
-                </a:solidFill>
-              </a:rPr>
-              <a:t> initial point at which the exception occurs, top row of call chain</a:t>
-            </a:r>
-            <a:endParaRPr lang="en-US" sz="2400" dirty="0"/>
-          </a:p>
-          <a:p>
-            <a:pPr eaLnBrk="1" hangingPunct="1">
-              <a:lnSpc>
-                <a:spcPct val="90000"/>
-              </a:lnSpc>
-              <a:defRPr/>
-            </a:pPr>
-            <a:endParaRPr lang="en-US" sz="2400" dirty="0"/>
-          </a:p>
-        </p:txBody>
-      </p:sp>
-    </p:spTree>
-  </p:cSld>
-  <p:clrMapOvr>
-    <a:masterClrMapping/>
-  </p:clrMapOvr>
-</p:sld>
-</file>
-
-<file path=ppt/slides/slide13.xml><?xml version="1.0" encoding="utf-8"?>
-<p:sld xmlns:a="http://schemas.openxmlformats.org/drawingml/2006/main" xmlns:r="http://schemas.openxmlformats.org/officeDocument/2006/relationships" xmlns:p="http://schemas.openxmlformats.org/presentationml/2006/main">
-  <p:cSld>
-    <p:spTree>
-      <p:nvGrpSpPr>
-        <p:cNvPr id="1" name=""/>
-        <p:cNvGrpSpPr/>
-        <p:nvPr/>
-      </p:nvGrpSpPr>
-      <p:grpSpPr>
-        <a:xfrm>
-          <a:off x="0" y="0"/>
-          <a:ext cx="0" cy="0"/>
-          <a:chOff x="0" y="0"/>
-          <a:chExt cx="0" cy="0"/>
-        </a:xfrm>
-      </p:grpSpPr>
-      <p:sp>
-        <p:nvSpPr>
-          <p:cNvPr id="4" name="Slide Number Placeholder 5">
-            <a:extLst>
-              <a:ext uri="{FF2B5EF4-FFF2-40B4-BE49-F238E27FC236}">
-                <a16:creationId xmlns:a16="http://schemas.microsoft.com/office/drawing/2014/main" id="{2C4FC456-D6C3-342C-CCDB-A47514A066F0}"/>
-              </a:ext>
-            </a:extLst>
-          </p:cNvPr>
-          <p:cNvSpPr>
-            <a:spLocks noGrp="1"/>
-          </p:cNvSpPr>
-          <p:nvPr>
-            <p:ph type="sldNum" sz="quarter" idx="12"/>
-          </p:nvPr>
-        </p:nvSpPr>
-        <p:spPr/>
-        <p:txBody>
-          <a:bodyPr/>
-          <a:lstStyle>
-            <a:lvl1pPr eaLnBrk="0" hangingPunct="0">
-              <a:defRPr sz="1600">
-                <a:solidFill>
-                  <a:schemeClr val="tx1"/>
-                </a:solidFill>
-                <a:latin typeface="Tahoma" panose="020B0604030504040204" pitchFamily="34" charset="0"/>
-                <a:ea typeface="SimSun" panose="02010600030101010101" pitchFamily="2" charset="-122"/>
-              </a:defRPr>
-            </a:lvl1pPr>
-            <a:lvl2pPr marL="742950" indent="-285750" eaLnBrk="0" hangingPunct="0">
-              <a:defRPr sz="1600">
-                <a:solidFill>
-                  <a:schemeClr val="tx1"/>
-                </a:solidFill>
-                <a:latin typeface="Tahoma" panose="020B0604030504040204" pitchFamily="34" charset="0"/>
-                <a:ea typeface="SimSun" panose="02010600030101010101" pitchFamily="2" charset="-122"/>
-              </a:defRPr>
-            </a:lvl2pPr>
-            <a:lvl3pPr marL="1143000" indent="-228600" eaLnBrk="0" hangingPunct="0">
-              <a:defRPr sz="1600">
-                <a:solidFill>
-                  <a:schemeClr val="tx1"/>
-                </a:solidFill>
-                <a:latin typeface="Tahoma" panose="020B0604030504040204" pitchFamily="34" charset="0"/>
-                <a:ea typeface="SimSun" panose="02010600030101010101" pitchFamily="2" charset="-122"/>
-              </a:defRPr>
-            </a:lvl3pPr>
-            <a:lvl4pPr marL="1600200" indent="-228600" eaLnBrk="0" hangingPunct="0">
-              <a:defRPr sz="1600">
-                <a:solidFill>
-                  <a:schemeClr val="tx1"/>
-                </a:solidFill>
-                <a:latin typeface="Tahoma" panose="020B0604030504040204" pitchFamily="34" charset="0"/>
-                <a:ea typeface="SimSun" panose="02010600030101010101" pitchFamily="2" charset="-122"/>
-              </a:defRPr>
-            </a:lvl4pPr>
-            <a:lvl5pPr marL="2057400" indent="-228600" eaLnBrk="0" hangingPunct="0">
-              <a:defRPr sz="1600">
-                <a:solidFill>
-                  <a:schemeClr val="tx1"/>
-                </a:solidFill>
-                <a:latin typeface="Tahoma" panose="020B0604030504040204" pitchFamily="34" charset="0"/>
-                <a:ea typeface="SimSun" panose="02010600030101010101" pitchFamily="2" charset="-122"/>
-              </a:defRPr>
-            </a:lvl5pPr>
-            <a:lvl6pPr marL="2514600" indent="-228600" algn="ctr" eaLnBrk="0" fontAlgn="base" hangingPunct="0">
-              <a:spcBef>
-                <a:spcPct val="0"/>
-              </a:spcBef>
-              <a:spcAft>
-                <a:spcPct val="0"/>
-              </a:spcAft>
-              <a:defRPr sz="1600">
-                <a:solidFill>
-                  <a:schemeClr val="tx1"/>
-                </a:solidFill>
-                <a:latin typeface="Tahoma" panose="020B0604030504040204" pitchFamily="34" charset="0"/>
-                <a:ea typeface="SimSun" panose="02010600030101010101" pitchFamily="2" charset="-122"/>
-              </a:defRPr>
-            </a:lvl6pPr>
-            <a:lvl7pPr marL="2971800" indent="-228600" algn="ctr" eaLnBrk="0" fontAlgn="base" hangingPunct="0">
-              <a:spcBef>
-                <a:spcPct val="0"/>
-              </a:spcBef>
-              <a:spcAft>
-                <a:spcPct val="0"/>
-              </a:spcAft>
-              <a:defRPr sz="1600">
-                <a:solidFill>
-                  <a:schemeClr val="tx1"/>
-                </a:solidFill>
-                <a:latin typeface="Tahoma" panose="020B0604030504040204" pitchFamily="34" charset="0"/>
-                <a:ea typeface="SimSun" panose="02010600030101010101" pitchFamily="2" charset="-122"/>
-              </a:defRPr>
-            </a:lvl7pPr>
-            <a:lvl8pPr marL="3429000" indent="-228600" algn="ctr" eaLnBrk="0" fontAlgn="base" hangingPunct="0">
-              <a:spcBef>
-                <a:spcPct val="0"/>
-              </a:spcBef>
-              <a:spcAft>
-                <a:spcPct val="0"/>
-              </a:spcAft>
-              <a:defRPr sz="1600">
-                <a:solidFill>
-                  <a:schemeClr val="tx1"/>
-                </a:solidFill>
-                <a:latin typeface="Tahoma" panose="020B0604030504040204" pitchFamily="34" charset="0"/>
-                <a:ea typeface="SimSun" panose="02010600030101010101" pitchFamily="2" charset="-122"/>
-              </a:defRPr>
-            </a:lvl8pPr>
-            <a:lvl9pPr marL="3886200" indent="-228600" algn="ctr" eaLnBrk="0" fontAlgn="base" hangingPunct="0">
-              <a:spcBef>
-                <a:spcPct val="0"/>
-              </a:spcBef>
-              <a:spcAft>
-                <a:spcPct val="0"/>
-              </a:spcAft>
-              <a:defRPr sz="1600">
-                <a:solidFill>
-                  <a:schemeClr val="tx1"/>
-                </a:solidFill>
-                <a:latin typeface="Tahoma" panose="020B0604030504040204" pitchFamily="34" charset="0"/>
-                <a:ea typeface="SimSun" panose="02010600030101010101" pitchFamily="2" charset="-122"/>
-              </a:defRPr>
-            </a:lvl9pPr>
-          </a:lstStyle>
-          <a:p>
-            <a:pPr marL="0" marR="0" lvl="0" indent="0" algn="r" defTabSz="914400" rtl="0" eaLnBrk="1" fontAlgn="base" latinLnBrk="0" hangingPunct="1">
-              <a:lnSpc>
-                <a:spcPct val="100000"/>
-              </a:lnSpc>
-              <a:spcBef>
-                <a:spcPct val="0"/>
-              </a:spcBef>
-              <a:spcAft>
-                <a:spcPct val="0"/>
-              </a:spcAft>
-              <a:buClrTx/>
-              <a:buSzTx/>
-              <a:buFontTx/>
-              <a:buNone/>
-              <a:tabLst/>
-              <a:defRPr/>
-            </a:pPr>
-            <a:fld id="{02B8AA2A-FF9A-4F2C-A754-47B1ACBEC786}" type="slidenum">
               <a:rPr kumimoji="0" lang="en-US" altLang="en-US" sz="1400" b="0" i="0" u="none" strike="noStrike" kern="1200" cap="none" spc="0" normalizeH="0" baseline="0" noProof="0">
                 <a:ln>
                   <a:noFill/>
@@ -27079,161 +28217,42 @@
       </p:sp>
       <p:sp>
         <p:nvSpPr>
-          <p:cNvPr id="82946" name="Rectangle 2">
+          <p:cNvPr id="2" name="Title 1">
             <a:extLst>
               <a:ext uri="{FF2B5EF4-FFF2-40B4-BE49-F238E27FC236}">
-                <a16:creationId xmlns:a16="http://schemas.microsoft.com/office/drawing/2014/main" id="{1E560EA2-9F30-1CF0-F39B-A01B6E5A7E7E}"/>
+                <a16:creationId xmlns:a16="http://schemas.microsoft.com/office/drawing/2014/main" id="{3EF5874B-BD69-279D-69A9-DDF7155FF9AB}"/>
               </a:ext>
             </a:extLst>
           </p:cNvPr>
           <p:cNvSpPr>
-            <a:spLocks noGrp="1" noRot="1" noChangeArrowheads="1"/>
+            <a:spLocks noGrp="1"/>
           </p:cNvSpPr>
           <p:nvPr>
             <p:ph type="title"/>
           </p:nvPr>
         </p:nvSpPr>
-        <p:spPr/>
-        <p:txBody>
-          <a:bodyPr/>
-          <a:lstStyle/>
-          <a:p>
-            <a:pPr eaLnBrk="1" hangingPunct="1">
-              <a:defRPr/>
-            </a:pPr>
-            <a:r>
-              <a:rPr lang="en-US" dirty="0"/>
-              <a:t>Terminology</a:t>
-            </a:r>
-          </a:p>
-        </p:txBody>
-      </p:sp>
-      <p:sp>
-        <p:nvSpPr>
-          <p:cNvPr id="82947" name="Rectangle 3">
-            <a:extLst>
-              <a:ext uri="{FF2B5EF4-FFF2-40B4-BE49-F238E27FC236}">
-                <a16:creationId xmlns:a16="http://schemas.microsoft.com/office/drawing/2014/main" id="{800D67E9-463B-EEE3-20F4-0FFA749C0F31}"/>
-              </a:ext>
-            </a:extLst>
-          </p:cNvPr>
-          <p:cNvSpPr>
-            <a:spLocks noGrp="1" noRot="1" noChangeArrowheads="1"/>
-          </p:cNvSpPr>
-          <p:nvPr>
-            <p:ph type="body" idx="1"/>
-          </p:nvPr>
-        </p:nvSpPr>
         <p:spPr>
           <a:xfrm>
-            <a:off x="609600" y="1828800"/>
-            <a:ext cx="8534400" cy="4953000"/>
+            <a:off x="990600" y="2514600"/>
+            <a:ext cx="7623175" cy="1431925"/>
           </a:xfrm>
         </p:spPr>
         <p:txBody>
           <a:bodyPr/>
           <a:lstStyle/>
           <a:p>
-            <a:pPr eaLnBrk="1" hangingPunct="1">
+            <a:pPr algn="ctr">
               <a:defRPr/>
             </a:pPr>
             <a:r>
-              <a:rPr lang="en-US" b="1" dirty="0">
-                <a:solidFill>
-                  <a:srgbClr val="FFFF99"/>
-                </a:solidFill>
-                <a:latin typeface="Courier New" pitchFamily="49" charset="0"/>
+              <a:rPr lang="en-US" sz="7200" dirty="0">
+                <a:solidFill>
+                  <a:schemeClr val="tx1"/>
+                </a:solidFill>
               </a:rPr>
-              <a:t>try statement – </a:t>
+              <a:t>Exception Terminology</a:t>
             </a:r>
-            <a:r>
-              <a:rPr lang="en-US" dirty="0"/>
-              <a:t>consists of </a:t>
-            </a:r>
-            <a:r>
-              <a:rPr lang="en-US" dirty="0">
-                <a:latin typeface="Lucida Console" pitchFamily="49" charset="0"/>
-              </a:rPr>
-              <a:t>try</a:t>
-            </a:r>
-            <a:r>
-              <a:rPr lang="en-US" dirty="0"/>
-              <a:t> block and corresponding </a:t>
-            </a:r>
-            <a:r>
-              <a:rPr lang="en-US" dirty="0">
-                <a:latin typeface="Lucida Console" pitchFamily="49" charset="0"/>
-              </a:rPr>
-              <a:t>catch</a:t>
-            </a:r>
-            <a:r>
-              <a:rPr lang="en-US" dirty="0"/>
-              <a:t> and/or </a:t>
-            </a:r>
-            <a:r>
-              <a:rPr lang="en-US" dirty="0">
-                <a:latin typeface="Lucida Console" pitchFamily="49" charset="0"/>
-              </a:rPr>
-              <a:t>finally</a:t>
-            </a:r>
-            <a:r>
-              <a:rPr lang="en-US" dirty="0"/>
-              <a:t> blocks</a:t>
-            </a:r>
-          </a:p>
-          <a:p>
-            <a:pPr eaLnBrk="1" hangingPunct="1">
-              <a:defRPr/>
-            </a:pPr>
-            <a:r>
-              <a:rPr lang="en-US" b="1" dirty="0">
-                <a:solidFill>
-                  <a:srgbClr val="FFFF99"/>
-                </a:solidFill>
-                <a:latin typeface="Courier New" pitchFamily="49" charset="0"/>
-              </a:rPr>
-              <a:t>try block </a:t>
-            </a:r>
-            <a:r>
-              <a:rPr lang="en-US" dirty="0"/>
-              <a:t>– contains code that could generate errors</a:t>
-            </a:r>
-          </a:p>
-          <a:p>
-            <a:pPr eaLnBrk="1" hangingPunct="1">
-              <a:defRPr/>
-            </a:pPr>
-            <a:r>
-              <a:rPr lang="en-US" b="1" dirty="0">
-                <a:solidFill>
-                  <a:srgbClr val="FFFF99"/>
-                </a:solidFill>
-                <a:latin typeface="Courier New" pitchFamily="49" charset="0"/>
-              </a:rPr>
-              <a:t>catch block </a:t>
-            </a:r>
-            <a:r>
-              <a:rPr lang="en-US" dirty="0"/>
-              <a:t>– contains code for error handling </a:t>
-            </a:r>
-          </a:p>
-          <a:p>
-            <a:pPr eaLnBrk="1" hangingPunct="1">
-              <a:defRPr/>
-            </a:pPr>
-            <a:r>
-              <a:rPr lang="en-US" b="1" dirty="0">
-                <a:solidFill>
-                  <a:srgbClr val="FFFF99"/>
-                </a:solidFill>
-                <a:latin typeface="Courier New" pitchFamily="49" charset="0"/>
-              </a:rPr>
-              <a:t>finally block </a:t>
-            </a:r>
-            <a:r>
-              <a:rPr lang="en-US" dirty="0"/>
-              <a:t>- always executes, whether an exception occurs or not.</a:t>
-            </a:r>
+            <a:endParaRPr lang="en-US" sz="7200" dirty="0"/>
           </a:p>
         </p:txBody>
       </p:sp>
@@ -27267,7 +28286,7 @@
           <p:cNvPr id="4" name="Slide Number Placeholder 5">
             <a:extLst>
               <a:ext uri="{FF2B5EF4-FFF2-40B4-BE49-F238E27FC236}">
-                <a16:creationId xmlns:a16="http://schemas.microsoft.com/office/drawing/2014/main" id="{0A181344-4EE5-431B-4EFA-EB43E84288ED}"/>
+                <a16:creationId xmlns:a16="http://schemas.microsoft.com/office/drawing/2014/main" id="{D8448A49-BBB9-400F-7858-3567915021B3}"/>
               </a:ext>
             </a:extLst>
           </p:cNvPr>
@@ -27406,7 +28425,7 @@
               <a:tabLst/>
               <a:defRPr/>
             </a:pPr>
-            <a:fld id="{04B1FAE9-F7B7-4769-A693-DD599102FBD3}" type="slidenum">
+            <a:fld id="{EA451C56-ED17-496A-A234-4B3C2569951C}" type="slidenum">
               <a:rPr kumimoji="0" lang="en-US" altLang="en-US" sz="1400" b="0" i="0" u="none" strike="noStrike" kern="1200" cap="none" spc="0" normalizeH="0" baseline="0" noProof="0">
                 <a:ln>
                   <a:noFill/>
@@ -27467,15 +28486,15 @@
       </p:sp>
       <p:sp>
         <p:nvSpPr>
-          <p:cNvPr id="121858" name="Rectangle 2">
+          <p:cNvPr id="81922" name="Rectangle 2">
             <a:extLst>
               <a:ext uri="{FF2B5EF4-FFF2-40B4-BE49-F238E27FC236}">
-                <a16:creationId xmlns:a16="http://schemas.microsoft.com/office/drawing/2014/main" id="{ADAD667B-B232-DDAE-021F-F9825716BFD8}"/>
+                <a16:creationId xmlns:a16="http://schemas.microsoft.com/office/drawing/2014/main" id="{D6E00A1C-1295-0989-5753-4E25B1DDBFC3}"/>
               </a:ext>
             </a:extLst>
           </p:cNvPr>
           <p:cNvSpPr>
-            <a:spLocks noGrp="1" noChangeArrowheads="1"/>
+            <a:spLocks noGrp="1" noRot="1" noChangeArrowheads="1"/>
           </p:cNvSpPr>
           <p:nvPr>
             <p:ph type="title"/>
@@ -27498,10 +28517,10 @@
       </p:sp>
       <p:sp>
         <p:nvSpPr>
-          <p:cNvPr id="121859" name="Rectangle 3">
+          <p:cNvPr id="81923" name="Rectangle 3">
             <a:extLst>
               <a:ext uri="{FF2B5EF4-FFF2-40B4-BE49-F238E27FC236}">
-                <a16:creationId xmlns:a16="http://schemas.microsoft.com/office/drawing/2014/main" id="{62D9583B-024D-9BBC-4DE7-33882606231C}"/>
+                <a16:creationId xmlns:a16="http://schemas.microsoft.com/office/drawing/2014/main" id="{2A630D85-25D2-EC7B-9FC7-730784DEFF2B}"/>
               </a:ext>
             </a:extLst>
           </p:cNvPr>
@@ -27512,36 +28531,17 @@
             <p:ph type="body" idx="1"/>
           </p:nvPr>
         </p:nvSpPr>
-        <p:spPr/>
+        <p:spPr>
+          <a:xfrm>
+            <a:off x="609600" y="1676400"/>
+            <a:ext cx="7924800" cy="4953000"/>
+          </a:xfrm>
+        </p:spPr>
         <p:txBody>
           <a:bodyPr/>
           <a:lstStyle/>
           <a:p>
-            <a:pPr marL="228600" indent="-228600" eaLnBrk="1" hangingPunct="1">
-              <a:lnSpc>
-                <a:spcPct val="90000"/>
-              </a:lnSpc>
-              <a:spcAft>
-                <a:spcPts val="1200"/>
-              </a:spcAft>
-              <a:defRPr/>
-            </a:pPr>
-            <a:r>
-              <a:rPr lang="en-US" b="1" dirty="0">
-                <a:solidFill>
-                  <a:srgbClr val="FFFF99"/>
-                </a:solidFill>
-                <a:latin typeface="Courier New" pitchFamily="49" charset="0"/>
-              </a:rPr>
-              <a:t>Thrown exception – </a:t>
-            </a:r>
-            <a:r>
-              <a:rPr lang="en-US" sz="2800" dirty="0"/>
-              <a:t>an exception that has occurred</a:t>
-            </a:r>
-          </a:p>
-          <a:p>
-            <a:pPr marL="228600" indent="-228600" eaLnBrk="1" hangingPunct="1">
+            <a:pPr eaLnBrk="1" hangingPunct="1">
               <a:lnSpc>
                 <a:spcPct val="90000"/>
               </a:lnSpc>
@@ -27554,35 +28554,70 @@
                 </a:solidFill>
                 <a:latin typeface="Courier New" pitchFamily="49" charset="0"/>
               </a:rPr>
-              <a:t>Stack trace</a:t>
+              <a:t>Exception - </a:t>
             </a:r>
-          </a:p>
-          <a:p>
-            <a:pPr marL="747713" lvl="1" indent="-290513" eaLnBrk="1" hangingPunct="1">
+            <a:r>
+              <a:rPr lang="en-US" sz="2800" dirty="0"/>
+              <a:t>a java class used to store error information.  </a:t>
+            </a:r>
+          </a:p>
+          <a:p>
+            <a:pPr eaLnBrk="1" hangingPunct="1">
               <a:lnSpc>
                 <a:spcPct val="90000"/>
               </a:lnSpc>
               <a:defRPr/>
             </a:pPr>
             <a:r>
-              <a:rPr lang="en-US" sz="2500" dirty="0"/>
-              <a:t>Name of the exception in a descriptive message that indicates the problem</a:t>
+              <a:rPr lang="en-US" b="1" dirty="0">
+                <a:solidFill>
+                  <a:srgbClr val="FFFF99"/>
+                </a:solidFill>
+                <a:latin typeface="Courier New" pitchFamily="49" charset="0"/>
+              </a:rPr>
+              <a:t>throws clause – </a:t>
             </a:r>
-          </a:p>
-          <a:p>
-            <a:pPr marL="747713" lvl="1" indent="-290513" eaLnBrk="1" hangingPunct="1">
+            <a:r>
+              <a:rPr lang="en-US" sz="2800" dirty="0">
+                <a:cs typeface="Times New Roman" pitchFamily="18" charset="0"/>
+              </a:rPr>
+              <a:t>included in the method definition.  It specifies which exceptions the method throws</a:t>
+            </a:r>
+          </a:p>
+          <a:p>
+            <a:pPr eaLnBrk="1" hangingPunct="1">
+              <a:buClr>
+                <a:srgbClr val="99F3FF"/>
+              </a:buClr>
+              <a:defRPr/>
+            </a:pPr>
+            <a:r>
+              <a:rPr lang="en-US" b="1" dirty="0">
+                <a:solidFill>
+                  <a:srgbClr val="FFFF99"/>
+                </a:solidFill>
+                <a:latin typeface="Courier New" pitchFamily="49" charset="0"/>
+              </a:rPr>
+              <a:t>Throw point –</a:t>
+            </a:r>
+            <a:r>
+              <a:rPr lang="en-US" sz="2800" dirty="0">
+                <a:solidFill>
+                  <a:srgbClr val="FFFFFF"/>
+                </a:solidFill>
+              </a:rPr>
+              <a:t> initial point at which the exception occurs, top row of call chain</a:t>
+            </a:r>
+            <a:endParaRPr lang="en-US" sz="2400" dirty="0"/>
+          </a:p>
+          <a:p>
+            <a:pPr eaLnBrk="1" hangingPunct="1">
               <a:lnSpc>
                 <a:spcPct val="90000"/>
               </a:lnSpc>
-              <a:spcAft>
-                <a:spcPts val="1200"/>
-              </a:spcAft>
               <a:defRPr/>
             </a:pPr>
-            <a:r>
-              <a:rPr lang="en-US" sz="2500" dirty="0"/>
-              <a:t>Complete method-call stack</a:t>
-            </a:r>
+            <a:endParaRPr lang="en-US" sz="2400" dirty="0"/>
           </a:p>
         </p:txBody>
       </p:sp>
@@ -27616,7 +28651,7 @@
           <p:cNvPr id="4" name="Slide Number Placeholder 5">
             <a:extLst>
               <a:ext uri="{FF2B5EF4-FFF2-40B4-BE49-F238E27FC236}">
-                <a16:creationId xmlns:a16="http://schemas.microsoft.com/office/drawing/2014/main" id="{772EB180-1F1A-8125-14E6-A5C7E94453F5}"/>
+                <a16:creationId xmlns:a16="http://schemas.microsoft.com/office/drawing/2014/main" id="{2C4FC456-D6C3-342C-CCDB-A47514A066F0}"/>
               </a:ext>
             </a:extLst>
           </p:cNvPr>
@@ -27755,7 +28790,7 @@
               <a:tabLst/>
               <a:defRPr/>
             </a:pPr>
-            <a:fld id="{2074971E-4522-467C-B761-DBC8EAAB1DFE}" type="slidenum">
+            <a:fld id="{02B8AA2A-FF9A-4F2C-A754-47B1ACBEC786}" type="slidenum">
               <a:rPr kumimoji="0" lang="en-US" altLang="en-US" sz="1400" b="0" i="0" u="none" strike="noStrike" kern="1200" cap="none" spc="0" normalizeH="0" baseline="0" noProof="0">
                 <a:ln>
                   <a:noFill/>
@@ -27816,10 +28851,10 @@
       </p:sp>
       <p:sp>
         <p:nvSpPr>
-          <p:cNvPr id="130050" name="Rectangle 2">
+          <p:cNvPr id="82946" name="Rectangle 2">
             <a:extLst>
               <a:ext uri="{FF2B5EF4-FFF2-40B4-BE49-F238E27FC236}">
-                <a16:creationId xmlns:a16="http://schemas.microsoft.com/office/drawing/2014/main" id="{594CF697-6723-9B05-9626-459B339CF5C2}"/>
+                <a16:creationId xmlns:a16="http://schemas.microsoft.com/office/drawing/2014/main" id="{1E560EA2-9F30-1CF0-F39B-A01B6E5A7E7E}"/>
               </a:ext>
             </a:extLst>
           </p:cNvPr>
@@ -27839,18 +28874,18 @@
               <a:defRPr/>
             </a:pPr>
             <a:r>
-              <a:rPr lang="en-US" sz="4000" i="1"/>
-              <a:t>Termination Model of Exception Handling</a:t>
+              <a:rPr lang="en-US" dirty="0"/>
+              <a:t>Terminology</a:t>
             </a:r>
           </a:p>
         </p:txBody>
       </p:sp>
       <p:sp>
         <p:nvSpPr>
-          <p:cNvPr id="130051" name="Rectangle 3">
+          <p:cNvPr id="82947" name="Rectangle 3">
             <a:extLst>
               <a:ext uri="{FF2B5EF4-FFF2-40B4-BE49-F238E27FC236}">
-                <a16:creationId xmlns:a16="http://schemas.microsoft.com/office/drawing/2014/main" id="{B351B9ED-F03F-C8BE-9A73-F1BF4E669674}"/>
+                <a16:creationId xmlns:a16="http://schemas.microsoft.com/office/drawing/2014/main" id="{800D67E9-463B-EEE3-20F4-0FFA749C0F31}"/>
               </a:ext>
             </a:extLst>
           </p:cNvPr>
@@ -27863,8 +28898,8 @@
         </p:nvSpPr>
         <p:spPr>
           <a:xfrm>
-            <a:off x="609600" y="1905000"/>
-            <a:ext cx="7696200" cy="4953000"/>
+            <a:off x="609600" y="1828800"/>
+            <a:ext cx="8534400" cy="4953000"/>
           </a:xfrm>
         </p:spPr>
         <p:txBody>
@@ -27881,31 +28916,11 @@
                 </a:solidFill>
                 <a:latin typeface="Courier New" pitchFamily="49" charset="0"/>
               </a:rPr>
-              <a:t>Termination model of exception handling</a:t>
+              <a:t>try statement – </a:t>
             </a:r>
             <a:r>
               <a:rPr lang="en-US" dirty="0"/>
-              <a:t>:</a:t>
-            </a:r>
-          </a:p>
-          <a:p>
-            <a:pPr marL="457200" lvl="1" indent="0" eaLnBrk="1" hangingPunct="1">
-              <a:buFont typeface="Wingdings" panose="05000000000000000000" pitchFamily="2" charset="2"/>
-              <a:buNone/>
-              <a:defRPr/>
-            </a:pPr>
-            <a:r>
-              <a:rPr lang="en-US" dirty="0"/>
-              <a:t>When an exception occurs,</a:t>
-            </a:r>
-          </a:p>
-          <a:p>
-            <a:pPr marL="747713" lvl="1" indent="-290513" eaLnBrk="1" hangingPunct="1">
-              <a:defRPr/>
-            </a:pPr>
-            <a:r>
-              <a:rPr lang="en-US" dirty="0"/>
-              <a:t>the </a:t>
+              <a:t>consists of </a:t>
             </a:r>
             <a:r>
               <a:rPr lang="en-US" dirty="0">
@@ -27915,19 +28930,7 @@
             </a:r>
             <a:r>
               <a:rPr lang="en-US" dirty="0"/>
-              <a:t> block terminates immediately</a:t>
-            </a:r>
-          </a:p>
-          <a:p>
-            <a:pPr marL="747713" lvl="1" indent="-290513" eaLnBrk="1" hangingPunct="1">
-              <a:spcAft>
-                <a:spcPts val="1200"/>
-              </a:spcAft>
-              <a:defRPr/>
-            </a:pPr>
-            <a:r>
-              <a:rPr lang="en-US" dirty="0"/>
-              <a:t>Program control transfers to first matching </a:t>
+              <a:t> block and corresponding </a:t>
             </a:r>
             <a:r>
               <a:rPr lang="en-US" dirty="0">
@@ -27937,7 +28940,71 @@
             </a:r>
             <a:r>
               <a:rPr lang="en-US" dirty="0"/>
-              <a:t> block</a:t>
+              <a:t> and/or </a:t>
+            </a:r>
+            <a:r>
+              <a:rPr lang="en-US" dirty="0">
+                <a:latin typeface="Lucida Console" pitchFamily="49" charset="0"/>
+              </a:rPr>
+              <a:t>finally</a:t>
+            </a:r>
+            <a:r>
+              <a:rPr lang="en-US" dirty="0"/>
+              <a:t> blocks</a:t>
+            </a:r>
+          </a:p>
+          <a:p>
+            <a:pPr eaLnBrk="1" hangingPunct="1">
+              <a:defRPr/>
+            </a:pPr>
+            <a:r>
+              <a:rPr lang="en-US" b="1" dirty="0">
+                <a:solidFill>
+                  <a:srgbClr val="FFFF99"/>
+                </a:solidFill>
+                <a:latin typeface="Courier New" pitchFamily="49" charset="0"/>
+              </a:rPr>
+              <a:t>try block </a:t>
+            </a:r>
+            <a:r>
+              <a:rPr lang="en-US" dirty="0"/>
+              <a:t>– contains code that could generate errors</a:t>
+            </a:r>
+          </a:p>
+          <a:p>
+            <a:pPr eaLnBrk="1" hangingPunct="1">
+              <a:defRPr/>
+            </a:pPr>
+            <a:r>
+              <a:rPr lang="en-US" b="1" dirty="0">
+                <a:solidFill>
+                  <a:srgbClr val="FFFF99"/>
+                </a:solidFill>
+                <a:latin typeface="Courier New" pitchFamily="49" charset="0"/>
+              </a:rPr>
+              <a:t>catch block </a:t>
+            </a:r>
+            <a:r>
+              <a:rPr lang="en-US" dirty="0"/>
+              <a:t>– contains code for error handling </a:t>
+            </a:r>
+          </a:p>
+          <a:p>
+            <a:pPr eaLnBrk="1" hangingPunct="1">
+              <a:defRPr/>
+            </a:pPr>
+            <a:r>
+              <a:rPr lang="en-US" b="1" dirty="0">
+                <a:solidFill>
+                  <a:srgbClr val="FFFF99"/>
+                </a:solidFill>
+                <a:latin typeface="Courier New" pitchFamily="49" charset="0"/>
+              </a:rPr>
+              <a:t>finally block </a:t>
+            </a:r>
+            <a:r>
+              <a:rPr lang="en-US" dirty="0"/>
+              <a:t>- always executes, whether an exception occurs or not.</a:t>
             </a:r>
           </a:p>
         </p:txBody>
@@ -27972,7 +29039,7 @@
           <p:cNvPr id="4" name="Slide Number Placeholder 5">
             <a:extLst>
               <a:ext uri="{FF2B5EF4-FFF2-40B4-BE49-F238E27FC236}">
-                <a16:creationId xmlns:a16="http://schemas.microsoft.com/office/drawing/2014/main" id="{13E5466E-8A84-FFE3-EB40-41B1ADB1FE47}"/>
+                <a16:creationId xmlns:a16="http://schemas.microsoft.com/office/drawing/2014/main" id="{0A181344-4EE5-431B-4EFA-EB43E84288ED}"/>
               </a:ext>
             </a:extLst>
           </p:cNvPr>
@@ -28111,7 +29178,7 @@
               <a:tabLst/>
               <a:defRPr/>
             </a:pPr>
-            <a:fld id="{9751A6B8-DD65-4DFD-837F-83AA51E45207}" type="slidenum">
+            <a:fld id="{04B1FAE9-F7B7-4769-A693-DD599102FBD3}" type="slidenum">
               <a:rPr kumimoji="0" lang="en-US" altLang="en-US" sz="1400" b="0" i="0" u="none" strike="noStrike" kern="1200" cap="none" spc="0" normalizeH="0" baseline="0" noProof="0">
                 <a:ln>
                   <a:noFill/>
@@ -28172,15 +29239,15 @@
       </p:sp>
       <p:sp>
         <p:nvSpPr>
-          <p:cNvPr id="134146" name="Rectangle 2">
+          <p:cNvPr id="121858" name="Rectangle 2">
             <a:extLst>
               <a:ext uri="{FF2B5EF4-FFF2-40B4-BE49-F238E27FC236}">
-                <a16:creationId xmlns:a16="http://schemas.microsoft.com/office/drawing/2014/main" id="{C84179B3-9E3A-002B-1A29-3EAA19DC6574}"/>
+                <a16:creationId xmlns:a16="http://schemas.microsoft.com/office/drawing/2014/main" id="{ADAD667B-B232-DDAE-021F-F9825716BFD8}"/>
               </a:ext>
             </a:extLst>
           </p:cNvPr>
           <p:cNvSpPr>
-            <a:spLocks noGrp="1" noRot="1" noChangeArrowheads="1"/>
+            <a:spLocks noGrp="1" noChangeArrowheads="1"/>
           </p:cNvSpPr>
           <p:nvPr>
             <p:ph type="title"/>
@@ -28195,18 +29262,18 @@
               <a:defRPr/>
             </a:pPr>
             <a:r>
-              <a:rPr lang="en-US" sz="4000"/>
-              <a:t>Contrast</a:t>
+              <a:rPr lang="en-US" dirty="0"/>
+              <a:t>Terminology</a:t>
             </a:r>
           </a:p>
         </p:txBody>
       </p:sp>
       <p:sp>
         <p:nvSpPr>
-          <p:cNvPr id="134147" name="Rectangle 3">
+          <p:cNvPr id="121859" name="Rectangle 3">
             <a:extLst>
               <a:ext uri="{FF2B5EF4-FFF2-40B4-BE49-F238E27FC236}">
-                <a16:creationId xmlns:a16="http://schemas.microsoft.com/office/drawing/2014/main" id="{A352A3C2-CBDB-7E58-A3BC-F70D02B5C9BA}"/>
+                <a16:creationId xmlns:a16="http://schemas.microsoft.com/office/drawing/2014/main" id="{62D9583B-024D-9BBC-4DE7-33882606231C}"/>
               </a:ext>
             </a:extLst>
           </p:cNvPr>
@@ -28223,58 +29290,12 @@
           <a:lstStyle/>
           <a:p>
             <a:pPr marL="228600" indent="-228600" eaLnBrk="1" hangingPunct="1">
-              <a:defRPr/>
-            </a:pPr>
-            <a:r>
-              <a:rPr lang="en-US" sz="3300" dirty="0"/>
-              <a:t>Termination model</a:t>
-            </a:r>
-          </a:p>
-          <a:p>
-            <a:pPr marL="747713" lvl="1" indent="-290513" eaLnBrk="1" hangingPunct="1">
-              <a:defRPr/>
-            </a:pPr>
-            <a:r>
-              <a:rPr lang="en-US" sz="2900" dirty="0"/>
-              <a:t>program control does not return to the throw point</a:t>
-            </a:r>
-          </a:p>
-          <a:p>
-            <a:pPr marL="747713" lvl="1" indent="-290513" eaLnBrk="1" hangingPunct="1">
-              <a:defRPr/>
-            </a:pPr>
-            <a:r>
-              <a:rPr lang="en-US" sz="2900" dirty="0">
-                <a:latin typeface="Lucida Console" pitchFamily="49" charset="0"/>
-              </a:rPr>
-              <a:t>try</a:t>
-            </a:r>
-            <a:r>
-              <a:rPr lang="en-US" sz="2900" dirty="0"/>
-              <a:t> block has expired; </a:t>
-            </a:r>
-          </a:p>
-          <a:p>
-            <a:pPr marL="747713" lvl="1" indent="-290513" eaLnBrk="1" hangingPunct="1">
-              <a:defRPr/>
-            </a:pPr>
-            <a:r>
-              <a:rPr lang="en-US" sz="2900" dirty="0"/>
-              <a:t>Flow of control proceeds to the first statement after the last </a:t>
-            </a:r>
-            <a:r>
-              <a:rPr lang="en-US" sz="2900" dirty="0">
-                <a:latin typeface="Lucida Console" pitchFamily="49" charset="0"/>
-              </a:rPr>
-              <a:t>catch</a:t>
-            </a:r>
-            <a:r>
-              <a:rPr lang="en-US" sz="2900" dirty="0"/>
-              <a:t> block</a:t>
-            </a:r>
-          </a:p>
-          <a:p>
-            <a:pPr marL="228600" indent="-228600" eaLnBrk="1" hangingPunct="1">
+              <a:lnSpc>
+                <a:spcPct val="90000"/>
+              </a:lnSpc>
+              <a:spcAft>
+                <a:spcPts val="1200"/>
+              </a:spcAft>
               <a:defRPr/>
             </a:pPr>
             <a:r>
@@ -28284,16 +29305,55 @@
                 </a:solidFill>
                 <a:latin typeface="Courier New" pitchFamily="49" charset="0"/>
               </a:rPr>
-              <a:t>Resumption model </a:t>
+              <a:t>Thrown exception – </a:t>
             </a:r>
-          </a:p>
-          <a:p>
-            <a:pPr marL="747713" lvl="1" indent="-290513" eaLnBrk="1" hangingPunct="1">
+            <a:r>
+              <a:rPr lang="en-US" sz="2800" dirty="0"/>
+              <a:t>an exception that has occurred</a:t>
+            </a:r>
+          </a:p>
+          <a:p>
+            <a:pPr marL="228600" indent="-228600" eaLnBrk="1" hangingPunct="1">
+              <a:lnSpc>
+                <a:spcPct val="90000"/>
+              </a:lnSpc>
               <a:defRPr/>
             </a:pPr>
             <a:r>
-              <a:rPr lang="en-US" sz="2900" dirty="0"/>
-              <a:t>program control resumes just after throw point</a:t>
+              <a:rPr lang="en-US" b="1" dirty="0">
+                <a:solidFill>
+                  <a:srgbClr val="FFFF99"/>
+                </a:solidFill>
+                <a:latin typeface="Courier New" pitchFamily="49" charset="0"/>
+              </a:rPr>
+              <a:t>Stack trace</a:t>
+            </a:r>
+          </a:p>
+          <a:p>
+            <a:pPr marL="747713" lvl="1" indent="-290513" eaLnBrk="1" hangingPunct="1">
+              <a:lnSpc>
+                <a:spcPct val="90000"/>
+              </a:lnSpc>
+              <a:defRPr/>
+            </a:pPr>
+            <a:r>
+              <a:rPr lang="en-US" sz="2500" dirty="0"/>
+              <a:t>Name of the exception in a descriptive message that indicates the problem</a:t>
+            </a:r>
+          </a:p>
+          <a:p>
+            <a:pPr marL="747713" lvl="1" indent="-290513" eaLnBrk="1" hangingPunct="1">
+              <a:lnSpc>
+                <a:spcPct val="90000"/>
+              </a:lnSpc>
+              <a:spcAft>
+                <a:spcPts val="1200"/>
+              </a:spcAft>
+              <a:defRPr/>
+            </a:pPr>
+            <a:r>
+              <a:rPr lang="en-US" sz="2500" dirty="0"/>
+              <a:t>Complete method-call stack</a:t>
             </a:r>
           </a:p>
         </p:txBody>
@@ -28328,7 +29388,7 @@
           <p:cNvPr id="4" name="Slide Number Placeholder 5">
             <a:extLst>
               <a:ext uri="{FF2B5EF4-FFF2-40B4-BE49-F238E27FC236}">
-                <a16:creationId xmlns:a16="http://schemas.microsoft.com/office/drawing/2014/main" id="{265FF3E6-8000-3D1A-AD58-0FFE2B277C23}"/>
+                <a16:creationId xmlns:a16="http://schemas.microsoft.com/office/drawing/2014/main" id="{772EB180-1F1A-8125-14E6-A5C7E94453F5}"/>
               </a:ext>
             </a:extLst>
           </p:cNvPr>
@@ -28467,7 +29527,7 @@
               <a:tabLst/>
               <a:defRPr/>
             </a:pPr>
-            <a:fld id="{65C4549D-C10D-4DAD-9A59-1F264D57555E}" type="slidenum">
+            <a:fld id="{2074971E-4522-467C-B761-DBC8EAAB1DFE}" type="slidenum">
               <a:rPr kumimoji="0" lang="en-US" altLang="en-US" sz="1400" b="0" i="0" u="none" strike="noStrike" kern="1200" cap="none" spc="0" normalizeH="0" baseline="0" noProof="0">
                 <a:ln>
                   <a:noFill/>
@@ -28528,10 +29588,10 @@
       </p:sp>
       <p:sp>
         <p:nvSpPr>
-          <p:cNvPr id="132098" name="Rectangle 2">
+          <p:cNvPr id="130050" name="Rectangle 2">
             <a:extLst>
               <a:ext uri="{FF2B5EF4-FFF2-40B4-BE49-F238E27FC236}">
-                <a16:creationId xmlns:a16="http://schemas.microsoft.com/office/drawing/2014/main" id="{5F79DAD0-08EF-ED1A-AD18-2A0EC34683CB}"/>
+                <a16:creationId xmlns:a16="http://schemas.microsoft.com/office/drawing/2014/main" id="{594CF697-6723-9B05-9626-459B339CF5C2}"/>
               </a:ext>
             </a:extLst>
           </p:cNvPr>
@@ -28551,28 +29611,18 @@
               <a:defRPr/>
             </a:pPr>
             <a:r>
-              <a:rPr lang="en-US" i="1"/>
-              <a:t>Using the </a:t>
-            </a:r>
-            <a:r>
-              <a:rPr lang="en-US" i="1">
-                <a:latin typeface="Lucida Console" pitchFamily="49" charset="0"/>
-              </a:rPr>
-              <a:t>throws</a:t>
-            </a:r>
-            <a:r>
-              <a:rPr lang="en-US" i="1"/>
-              <a:t> Clause</a:t>
+              <a:rPr lang="en-US" sz="4000" i="1"/>
+              <a:t>Termination Model of Exception Handling</a:t>
             </a:r>
           </a:p>
         </p:txBody>
       </p:sp>
       <p:sp>
         <p:nvSpPr>
-          <p:cNvPr id="132099" name="Rectangle 3">
+          <p:cNvPr id="130051" name="Rectangle 3">
             <a:extLst>
               <a:ext uri="{FF2B5EF4-FFF2-40B4-BE49-F238E27FC236}">
-                <a16:creationId xmlns:a16="http://schemas.microsoft.com/office/drawing/2014/main" id="{B1AC75B4-46BB-EEE7-FF06-BAFB2385B471}"/>
+                <a16:creationId xmlns:a16="http://schemas.microsoft.com/office/drawing/2014/main" id="{B351B9ED-F03F-C8BE-9A73-F1BF4E669674}"/>
               </a:ext>
             </a:extLst>
           </p:cNvPr>
@@ -28583,26 +29633,83 @@
             <p:ph type="body" idx="1"/>
           </p:nvPr>
         </p:nvSpPr>
-        <p:spPr/>
+        <p:spPr>
+          <a:xfrm>
+            <a:off x="609600" y="1905000"/>
+            <a:ext cx="7696200" cy="4953000"/>
+          </a:xfrm>
+        </p:spPr>
         <p:txBody>
           <a:bodyPr/>
           <a:lstStyle/>
           <a:p>
-            <a:pPr marL="228600" indent="-228600" eaLnBrk="1" hangingPunct="1">
+            <a:pPr eaLnBrk="1" hangingPunct="1">
               <a:defRPr/>
             </a:pPr>
             <a:r>
-              <a:rPr lang="en-US"/>
-              <a:t>Appears after method’s parameter list and before the method’s body</a:t>
+              <a:rPr lang="en-US" b="1" dirty="0">
+                <a:solidFill>
+                  <a:srgbClr val="FFFF99"/>
+                </a:solidFill>
+                <a:latin typeface="Courier New" pitchFamily="49" charset="0"/>
+              </a:rPr>
+              <a:t>Termination model of exception handling</a:t>
             </a:r>
-          </a:p>
-          <a:p>
-            <a:pPr marL="228600" indent="-228600" eaLnBrk="1" hangingPunct="1">
+            <a:r>
+              <a:rPr lang="en-US" dirty="0"/>
+              <a:t>:</a:t>
+            </a:r>
+          </a:p>
+          <a:p>
+            <a:pPr marL="457200" lvl="1" indent="0" eaLnBrk="1" hangingPunct="1">
+              <a:buFont typeface="Wingdings" panose="05000000000000000000" pitchFamily="2" charset="2"/>
+              <a:buNone/>
               <a:defRPr/>
             </a:pPr>
             <a:r>
-              <a:rPr lang="en-US"/>
-              <a:t>Contains a comma-separated list of exceptions</a:t>
+              <a:rPr lang="en-US" dirty="0"/>
+              <a:t>When an exception occurs,</a:t>
+            </a:r>
+          </a:p>
+          <a:p>
+            <a:pPr marL="747713" lvl="1" indent="-290513" eaLnBrk="1" hangingPunct="1">
+              <a:defRPr/>
+            </a:pPr>
+            <a:r>
+              <a:rPr lang="en-US" dirty="0"/>
+              <a:t>the </a:t>
+            </a:r>
+            <a:r>
+              <a:rPr lang="en-US" dirty="0">
+                <a:latin typeface="Lucida Console" pitchFamily="49" charset="0"/>
+              </a:rPr>
+              <a:t>try</a:t>
+            </a:r>
+            <a:r>
+              <a:rPr lang="en-US" dirty="0"/>
+              <a:t> block terminates immediately</a:t>
+            </a:r>
+          </a:p>
+          <a:p>
+            <a:pPr marL="747713" lvl="1" indent="-290513" eaLnBrk="1" hangingPunct="1">
+              <a:spcAft>
+                <a:spcPts val="1200"/>
+              </a:spcAft>
+              <a:defRPr/>
+            </a:pPr>
+            <a:r>
+              <a:rPr lang="en-US" dirty="0"/>
+              <a:t>Program control transfers to first matching </a:t>
+            </a:r>
+            <a:r>
+              <a:rPr lang="en-US" dirty="0">
+                <a:latin typeface="Lucida Console" pitchFamily="49" charset="0"/>
+              </a:rPr>
+              <a:t>catch</a:t>
+            </a:r>
+            <a:r>
+              <a:rPr lang="en-US" dirty="0"/>
+              <a:t> block</a:t>
             </a:r>
           </a:p>
         </p:txBody>
@@ -28637,7 +29744,7 @@
           <p:cNvPr id="4" name="Slide Number Placeholder 5">
             <a:extLst>
               <a:ext uri="{FF2B5EF4-FFF2-40B4-BE49-F238E27FC236}">
-                <a16:creationId xmlns:a16="http://schemas.microsoft.com/office/drawing/2014/main" id="{4B16DA44-B54B-867D-8F53-C12457375B39}"/>
+                <a16:creationId xmlns:a16="http://schemas.microsoft.com/office/drawing/2014/main" id="{13E5466E-8A84-FFE3-EB40-41B1ADB1FE47}"/>
               </a:ext>
             </a:extLst>
           </p:cNvPr>
@@ -28776,7 +29883,7 @@
               <a:tabLst/>
               <a:defRPr/>
             </a:pPr>
-            <a:fld id="{6B4A1482-E166-45E2-9CB9-0C2C4D97FEA3}" type="slidenum">
+            <a:fld id="{9751A6B8-DD65-4DFD-837F-83AA51E45207}" type="slidenum">
               <a:rPr kumimoji="0" lang="en-US" altLang="en-US" sz="1400" b="0" i="0" u="none" strike="noStrike" kern="1200" cap="none" spc="0" normalizeH="0" baseline="0" noProof="0">
                 <a:ln>
                   <a:noFill/>
@@ -28837,10 +29944,10 @@
       </p:sp>
       <p:sp>
         <p:nvSpPr>
-          <p:cNvPr id="136194" name="Rectangle 2">
+          <p:cNvPr id="134146" name="Rectangle 2">
             <a:extLst>
               <a:ext uri="{FF2B5EF4-FFF2-40B4-BE49-F238E27FC236}">
-                <a16:creationId xmlns:a16="http://schemas.microsoft.com/office/drawing/2014/main" id="{1A260215-472B-B60D-317A-B2AADD8E908E}"/>
+                <a16:creationId xmlns:a16="http://schemas.microsoft.com/office/drawing/2014/main" id="{C84179B3-9E3A-002B-1A29-3EAA19DC6574}"/>
               </a:ext>
             </a:extLst>
           </p:cNvPr>
@@ -28860,28 +29967,18 @@
               <a:defRPr/>
             </a:pPr>
             <a:r>
-              <a:rPr lang="en-US" i="1"/>
-              <a:t>Using the </a:t>
-            </a:r>
-            <a:r>
-              <a:rPr lang="en-US" i="1">
-                <a:latin typeface="Lucida Console" pitchFamily="49" charset="0"/>
-              </a:rPr>
-              <a:t>throws</a:t>
-            </a:r>
-            <a:r>
-              <a:rPr lang="en-US" i="1"/>
-              <a:t> Clause</a:t>
+              <a:rPr lang="en-US" sz="4000"/>
+              <a:t>Contrast</a:t>
             </a:r>
           </a:p>
         </p:txBody>
       </p:sp>
       <p:sp>
         <p:nvSpPr>
-          <p:cNvPr id="136195" name="Rectangle 3">
+          <p:cNvPr id="134147" name="Rectangle 3">
             <a:extLst>
               <a:ext uri="{FF2B5EF4-FFF2-40B4-BE49-F238E27FC236}">
-                <a16:creationId xmlns:a16="http://schemas.microsoft.com/office/drawing/2014/main" id="{7745AEFF-5CB6-7297-A6CB-DB1265A18EAA}"/>
+                <a16:creationId xmlns:a16="http://schemas.microsoft.com/office/drawing/2014/main" id="{A352A3C2-CBDB-7E58-A3BC-F70D02B5C9BA}"/>
               </a:ext>
             </a:extLst>
           </p:cNvPr>
@@ -28901,8 +29998,51 @@
               <a:defRPr/>
             </a:pPr>
             <a:r>
-              <a:rPr lang="en-US" dirty="0"/>
-              <a:t>Exceptions can be thrown by statements in method’s body or by methods called in method’s body</a:t>
+              <a:rPr lang="en-US" sz="3300" dirty="0"/>
+              <a:t>Termination model</a:t>
+            </a:r>
+          </a:p>
+          <a:p>
+            <a:pPr marL="747713" lvl="1" indent="-290513" eaLnBrk="1" hangingPunct="1">
+              <a:defRPr/>
+            </a:pPr>
+            <a:r>
+              <a:rPr lang="en-US" sz="2900" dirty="0"/>
+              <a:t>program control does not return to the throw point</a:t>
+            </a:r>
+          </a:p>
+          <a:p>
+            <a:pPr marL="747713" lvl="1" indent="-290513" eaLnBrk="1" hangingPunct="1">
+              <a:defRPr/>
+            </a:pPr>
+            <a:r>
+              <a:rPr lang="en-US" sz="2900" dirty="0">
+                <a:latin typeface="Lucida Console" pitchFamily="49" charset="0"/>
+              </a:rPr>
+              <a:t>try</a:t>
+            </a:r>
+            <a:r>
+              <a:rPr lang="en-US" sz="2900" dirty="0"/>
+              <a:t> block has expired; </a:t>
+            </a:r>
+          </a:p>
+          <a:p>
+            <a:pPr marL="747713" lvl="1" indent="-290513" eaLnBrk="1" hangingPunct="1">
+              <a:defRPr/>
+            </a:pPr>
+            <a:r>
+              <a:rPr lang="en-US" sz="2900" dirty="0"/>
+              <a:t>Flow of control proceeds to the first statement after the last </a:t>
+            </a:r>
+            <a:r>
+              <a:rPr lang="en-US" sz="2900" dirty="0">
+                <a:latin typeface="Lucida Console" pitchFamily="49" charset="0"/>
+              </a:rPr>
+              <a:t>catch</a:t>
+            </a:r>
+            <a:r>
+              <a:rPr lang="en-US" sz="2900" dirty="0"/>
+              <a:t> block</a:t>
             </a:r>
           </a:p>
           <a:p>
@@ -28910,18 +30050,22 @@
               <a:defRPr/>
             </a:pPr>
             <a:r>
-              <a:rPr lang="en-US" dirty="0"/>
-              <a:t>Exceptions can be of types listed in </a:t>
+              <a:rPr lang="en-US" b="1" dirty="0">
+                <a:solidFill>
+                  <a:srgbClr val="FFFF99"/>
+                </a:solidFill>
+                <a:latin typeface="Courier New" pitchFamily="49" charset="0"/>
+              </a:rPr>
+              <a:t>Resumption model </a:t>
             </a:r>
+          </a:p>
+          <a:p>
+            <a:pPr marL="747713" lvl="1" indent="-290513" eaLnBrk="1" hangingPunct="1">
+              <a:defRPr/>
+            </a:pPr>
             <a:r>
-              <a:rPr lang="en-US" dirty="0">
-                <a:latin typeface="Lucida Console" pitchFamily="49" charset="0"/>
-              </a:rPr>
-              <a:t>throws</a:t>
-            </a:r>
-            <a:r>
-              <a:rPr lang="en-US" dirty="0"/>
-              <a:t> clause or subclasses</a:t>
+              <a:rPr lang="en-US" sz="2900" dirty="0"/>
+              <a:t>program control resumes just after throw point</a:t>
             </a:r>
           </a:p>
         </p:txBody>
@@ -28953,10 +30097,10 @@
       </p:grpSpPr>
       <p:sp>
         <p:nvSpPr>
-          <p:cNvPr id="2" name="Title 1">
+          <p:cNvPr id="4" name="Slide Number Placeholder 5">
             <a:extLst>
               <a:ext uri="{FF2B5EF4-FFF2-40B4-BE49-F238E27FC236}">
-                <a16:creationId xmlns:a16="http://schemas.microsoft.com/office/drawing/2014/main" id="{7372A476-CFCB-A774-103C-5CC68D7A8C42}"/>
+                <a16:creationId xmlns:a16="http://schemas.microsoft.com/office/drawing/2014/main" id="{265FF3E6-8000-3D1A-AD58-0FFE2B277C23}"/>
               </a:ext>
             </a:extLst>
           </p:cNvPr>
@@ -28964,7 +30108,210 @@
             <a:spLocks noGrp="1"/>
           </p:cNvSpPr>
           <p:nvPr>
-            <p:ph type="ctrTitle"/>
+            <p:ph type="sldNum" sz="quarter" idx="12"/>
+          </p:nvPr>
+        </p:nvSpPr>
+        <p:spPr/>
+        <p:txBody>
+          <a:bodyPr/>
+          <a:lstStyle>
+            <a:lvl1pPr eaLnBrk="0" hangingPunct="0">
+              <a:defRPr sz="1600">
+                <a:solidFill>
+                  <a:schemeClr val="tx1"/>
+                </a:solidFill>
+                <a:latin typeface="Tahoma" panose="020B0604030504040204" pitchFamily="34" charset="0"/>
+                <a:ea typeface="SimSun" panose="02010600030101010101" pitchFamily="2" charset="-122"/>
+              </a:defRPr>
+            </a:lvl1pPr>
+            <a:lvl2pPr marL="742950" indent="-285750" eaLnBrk="0" hangingPunct="0">
+              <a:defRPr sz="1600">
+                <a:solidFill>
+                  <a:schemeClr val="tx1"/>
+                </a:solidFill>
+                <a:latin typeface="Tahoma" panose="020B0604030504040204" pitchFamily="34" charset="0"/>
+                <a:ea typeface="SimSun" panose="02010600030101010101" pitchFamily="2" charset="-122"/>
+              </a:defRPr>
+            </a:lvl2pPr>
+            <a:lvl3pPr marL="1143000" indent="-228600" eaLnBrk="0" hangingPunct="0">
+              <a:defRPr sz="1600">
+                <a:solidFill>
+                  <a:schemeClr val="tx1"/>
+                </a:solidFill>
+                <a:latin typeface="Tahoma" panose="020B0604030504040204" pitchFamily="34" charset="0"/>
+                <a:ea typeface="SimSun" panose="02010600030101010101" pitchFamily="2" charset="-122"/>
+              </a:defRPr>
+            </a:lvl3pPr>
+            <a:lvl4pPr marL="1600200" indent="-228600" eaLnBrk="0" hangingPunct="0">
+              <a:defRPr sz="1600">
+                <a:solidFill>
+                  <a:schemeClr val="tx1"/>
+                </a:solidFill>
+                <a:latin typeface="Tahoma" panose="020B0604030504040204" pitchFamily="34" charset="0"/>
+                <a:ea typeface="SimSun" panose="02010600030101010101" pitchFamily="2" charset="-122"/>
+              </a:defRPr>
+            </a:lvl4pPr>
+            <a:lvl5pPr marL="2057400" indent="-228600" eaLnBrk="0" hangingPunct="0">
+              <a:defRPr sz="1600">
+                <a:solidFill>
+                  <a:schemeClr val="tx1"/>
+                </a:solidFill>
+                <a:latin typeface="Tahoma" panose="020B0604030504040204" pitchFamily="34" charset="0"/>
+                <a:ea typeface="SimSun" panose="02010600030101010101" pitchFamily="2" charset="-122"/>
+              </a:defRPr>
+            </a:lvl5pPr>
+            <a:lvl6pPr marL="2514600" indent="-228600" algn="ctr" eaLnBrk="0" fontAlgn="base" hangingPunct="0">
+              <a:spcBef>
+                <a:spcPct val="0"/>
+              </a:spcBef>
+              <a:spcAft>
+                <a:spcPct val="0"/>
+              </a:spcAft>
+              <a:defRPr sz="1600">
+                <a:solidFill>
+                  <a:schemeClr val="tx1"/>
+                </a:solidFill>
+                <a:latin typeface="Tahoma" panose="020B0604030504040204" pitchFamily="34" charset="0"/>
+                <a:ea typeface="SimSun" panose="02010600030101010101" pitchFamily="2" charset="-122"/>
+              </a:defRPr>
+            </a:lvl6pPr>
+            <a:lvl7pPr marL="2971800" indent="-228600" algn="ctr" eaLnBrk="0" fontAlgn="base" hangingPunct="0">
+              <a:spcBef>
+                <a:spcPct val="0"/>
+              </a:spcBef>
+              <a:spcAft>
+                <a:spcPct val="0"/>
+              </a:spcAft>
+              <a:defRPr sz="1600">
+                <a:solidFill>
+                  <a:schemeClr val="tx1"/>
+                </a:solidFill>
+                <a:latin typeface="Tahoma" panose="020B0604030504040204" pitchFamily="34" charset="0"/>
+                <a:ea typeface="SimSun" panose="02010600030101010101" pitchFamily="2" charset="-122"/>
+              </a:defRPr>
+            </a:lvl7pPr>
+            <a:lvl8pPr marL="3429000" indent="-228600" algn="ctr" eaLnBrk="0" fontAlgn="base" hangingPunct="0">
+              <a:spcBef>
+                <a:spcPct val="0"/>
+              </a:spcBef>
+              <a:spcAft>
+                <a:spcPct val="0"/>
+              </a:spcAft>
+              <a:defRPr sz="1600">
+                <a:solidFill>
+                  <a:schemeClr val="tx1"/>
+                </a:solidFill>
+                <a:latin typeface="Tahoma" panose="020B0604030504040204" pitchFamily="34" charset="0"/>
+                <a:ea typeface="SimSun" panose="02010600030101010101" pitchFamily="2" charset="-122"/>
+              </a:defRPr>
+            </a:lvl8pPr>
+            <a:lvl9pPr marL="3886200" indent="-228600" algn="ctr" eaLnBrk="0" fontAlgn="base" hangingPunct="0">
+              <a:spcBef>
+                <a:spcPct val="0"/>
+              </a:spcBef>
+              <a:spcAft>
+                <a:spcPct val="0"/>
+              </a:spcAft>
+              <a:defRPr sz="1600">
+                <a:solidFill>
+                  <a:schemeClr val="tx1"/>
+                </a:solidFill>
+                <a:latin typeface="Tahoma" panose="020B0604030504040204" pitchFamily="34" charset="0"/>
+                <a:ea typeface="SimSun" panose="02010600030101010101" pitchFamily="2" charset="-122"/>
+              </a:defRPr>
+            </a:lvl9pPr>
+          </a:lstStyle>
+          <a:p>
+            <a:pPr marL="0" marR="0" lvl="0" indent="0" algn="r" defTabSz="914400" rtl="0" eaLnBrk="1" fontAlgn="base" latinLnBrk="0" hangingPunct="1">
+              <a:lnSpc>
+                <a:spcPct val="100000"/>
+              </a:lnSpc>
+              <a:spcBef>
+                <a:spcPct val="0"/>
+              </a:spcBef>
+              <a:spcAft>
+                <a:spcPct val="0"/>
+              </a:spcAft>
+              <a:buClrTx/>
+              <a:buSzTx/>
+              <a:buFontTx/>
+              <a:buNone/>
+              <a:tabLst/>
+              <a:defRPr/>
+            </a:pPr>
+            <a:fld id="{65C4549D-C10D-4DAD-9A59-1F264D57555E}" type="slidenum">
+              <a:rPr kumimoji="0" lang="en-US" altLang="en-US" sz="1400" b="0" i="0" u="none" strike="noStrike" kern="1200" cap="none" spc="0" normalizeH="0" baseline="0" noProof="0">
+                <a:ln>
+                  <a:noFill/>
+                </a:ln>
+                <a:solidFill>
+                  <a:srgbClr val="FFFFFF"/>
+                </a:solidFill>
+                <a:effectLst>
+                  <a:outerShdw blurRad="38100" dist="38100" dir="2700000" algn="tl">
+                    <a:srgbClr val="000000"/>
+                  </a:outerShdw>
+                </a:effectLst>
+                <a:uLnTx/>
+                <a:uFillTx/>
+                <a:latin typeface="Arial" panose="020B0604020202020204" pitchFamily="34" charset="0"/>
+                <a:ea typeface="SimSun" panose="02010600030101010101" pitchFamily="2" charset="-122"/>
+                <a:cs typeface="+mn-cs"/>
+              </a:rPr>
+              <a:pPr marL="0" marR="0" lvl="0" indent="0" algn="r" defTabSz="914400" rtl="0" eaLnBrk="1" fontAlgn="base" latinLnBrk="0" hangingPunct="1">
+                <a:lnSpc>
+                  <a:spcPct val="100000"/>
+                </a:lnSpc>
+                <a:spcBef>
+                  <a:spcPct val="0"/>
+                </a:spcBef>
+                <a:spcAft>
+                  <a:spcPct val="0"/>
+                </a:spcAft>
+                <a:buClrTx/>
+                <a:buSzTx/>
+                <a:buFontTx/>
+                <a:buNone/>
+                <a:tabLst/>
+                <a:defRPr/>
+              </a:pPr>
+              <a:t>19</a:t>
+            </a:fld>
+            <a:endParaRPr kumimoji="0" lang="en-US" altLang="en-US" sz="1400" b="0" i="0" u="none" strike="noStrike" kern="1200" cap="none" spc="0" normalizeH="0" baseline="0" noProof="0">
+              <a:ln>
+                <a:noFill/>
+              </a:ln>
+              <a:solidFill>
+                <a:srgbClr val="FFFFFF"/>
+              </a:solidFill>
+              <a:effectLst>
+                <a:outerShdw blurRad="38100" dist="38100" dir="2700000" algn="tl">
+                  <a:srgbClr val="000000"/>
+                </a:outerShdw>
+              </a:effectLst>
+              <a:uLnTx/>
+              <a:uFillTx/>
+              <a:latin typeface="Arial" panose="020B0604020202020204" pitchFamily="34" charset="0"/>
+              <a:ea typeface="SimSun" panose="02010600030101010101" pitchFamily="2" charset="-122"/>
+              <a:cs typeface="+mn-cs"/>
+            </a:endParaRPr>
+          </a:p>
+        </p:txBody>
+      </p:sp>
+      <p:sp>
+        <p:nvSpPr>
+          <p:cNvPr id="132098" name="Rectangle 2">
+            <a:extLst>
+              <a:ext uri="{FF2B5EF4-FFF2-40B4-BE49-F238E27FC236}">
+                <a16:creationId xmlns:a16="http://schemas.microsoft.com/office/drawing/2014/main" id="{5F79DAD0-08EF-ED1A-AD18-2A0EC34683CB}"/>
+              </a:ext>
+            </a:extLst>
+          </p:cNvPr>
+          <p:cNvSpPr>
+            <a:spLocks noGrp="1" noRot="1" noChangeArrowheads="1"/>
+          </p:cNvSpPr>
+          <p:nvPr>
+            <p:ph type="title"/>
           </p:nvPr>
         </p:nvSpPr>
         <p:spPr/>
@@ -28972,24 +30319,40 @@
           <a:bodyPr/>
           <a:lstStyle/>
           <a:p>
-            <a:endParaRPr lang="en-US"/>
+            <a:pPr eaLnBrk="1" hangingPunct="1">
+              <a:defRPr/>
+            </a:pPr>
+            <a:r>
+              <a:rPr lang="en-US" i="1"/>
+              <a:t>Using the </a:t>
+            </a:r>
+            <a:r>
+              <a:rPr lang="en-US" i="1">
+                <a:latin typeface="Lucida Console" pitchFamily="49" charset="0"/>
+              </a:rPr>
+              <a:t>throws</a:t>
+            </a:r>
+            <a:r>
+              <a:rPr lang="en-US" i="1"/>
+              <a:t> Clause</a:t>
+            </a:r>
           </a:p>
         </p:txBody>
       </p:sp>
       <p:sp>
         <p:nvSpPr>
-          <p:cNvPr id="3" name="Subtitle 2">
+          <p:cNvPr id="132099" name="Rectangle 3">
             <a:extLst>
               <a:ext uri="{FF2B5EF4-FFF2-40B4-BE49-F238E27FC236}">
-                <a16:creationId xmlns:a16="http://schemas.microsoft.com/office/drawing/2014/main" id="{F813319D-D9E4-1DDF-124E-A77B3F6B802E}"/>
+                <a16:creationId xmlns:a16="http://schemas.microsoft.com/office/drawing/2014/main" id="{B1AC75B4-46BB-EEE7-FF06-BAFB2385B471}"/>
               </a:ext>
             </a:extLst>
           </p:cNvPr>
           <p:cNvSpPr>
-            <a:spLocks noGrp="1"/>
+            <a:spLocks noGrp="1" noRot="1" noChangeArrowheads="1"/>
           </p:cNvSpPr>
           <p:nvPr>
-            <p:ph type="subTitle" idx="1"/>
+            <p:ph type="body" idx="1"/>
           </p:nvPr>
         </p:nvSpPr>
         <p:spPr/>
@@ -28997,112 +30360,26 @@
           <a:bodyPr/>
           <a:lstStyle/>
           <a:p>
-            <a:endParaRPr lang="en-US"/>
-          </a:p>
-        </p:txBody>
-      </p:sp>
-      <p:sp>
-        <p:nvSpPr>
-          <p:cNvPr id="4" name="Footer Placeholder 3">
-            <a:extLst>
-              <a:ext uri="{FF2B5EF4-FFF2-40B4-BE49-F238E27FC236}">
-                <a16:creationId xmlns:a16="http://schemas.microsoft.com/office/drawing/2014/main" id="{9012E03F-5F07-326E-FDB6-55FEAE88539E}"/>
-              </a:ext>
-            </a:extLst>
-          </p:cNvPr>
-          <p:cNvSpPr>
-            <a:spLocks noGrp="1"/>
-          </p:cNvSpPr>
-          <p:nvPr>
-            <p:ph type="ftr" sz="quarter" idx="12"/>
-          </p:nvPr>
-        </p:nvSpPr>
-        <p:spPr/>
-        <p:txBody>
-          <a:bodyPr/>
-          <a:lstStyle/>
-          <a:p>
-            <a:pPr>
-              <a:defRPr/>
-            </a:pPr>
-            <a:endParaRPr lang="en-US"/>
-          </a:p>
-          <a:p>
-            <a:pPr>
-              <a:defRPr/>
-            </a:pPr>
-            <a:endParaRPr lang="en-US"/>
-          </a:p>
-          <a:p>
-            <a:pPr>
-              <a:defRPr/>
-            </a:pPr>
-            <a:endParaRPr lang="en-US"/>
-          </a:p>
-          <a:p>
-            <a:pPr>
+            <a:pPr marL="228600" indent="-228600" eaLnBrk="1" hangingPunct="1">
               <a:defRPr/>
             </a:pPr>
             <a:r>
               <a:rPr lang="en-US"/>
-              <a:t>© A+ Computer Science  -  www.apluscompsci.com</a:t>
+              <a:t>Appears after method’s parameter list and before the method’s body</a:t>
+            </a:r>
+          </a:p>
+          <a:p>
+            <a:pPr marL="228600" indent="-228600" eaLnBrk="1" hangingPunct="1">
+              <a:defRPr/>
+            </a:pPr>
+            <a:r>
+              <a:rPr lang="en-US"/>
+              <a:t>Contains a comma-separated list of exceptions</a:t>
             </a:r>
           </a:p>
         </p:txBody>
       </p:sp>
-      <p:pic>
-        <p:nvPicPr>
-          <p:cNvPr id="1026" name="Picture 2" descr="Lightbox">
-            <a:extLst>
-              <a:ext uri="{FF2B5EF4-FFF2-40B4-BE49-F238E27FC236}">
-                <a16:creationId xmlns:a16="http://schemas.microsoft.com/office/drawing/2014/main" id="{04BAFA8B-6C1F-DB63-34A5-A0BBC1A3FF8E}"/>
-              </a:ext>
-            </a:extLst>
-          </p:cNvPr>
-          <p:cNvPicPr>
-            <a:picLocks noChangeAspect="1" noChangeArrowheads="1"/>
-          </p:cNvPicPr>
-          <p:nvPr/>
-        </p:nvPicPr>
-        <p:blipFill>
-          <a:blip r:embed="rId2">
-            <a:extLst>
-              <a:ext uri="{28A0092B-C50C-407E-A947-70E740481C1C}">
-                <a14:useLocalDpi xmlns:a14="http://schemas.microsoft.com/office/drawing/2010/main" val="0"/>
-              </a:ext>
-            </a:extLst>
-          </a:blip>
-          <a:srcRect/>
-          <a:stretch>
-            <a:fillRect/>
-          </a:stretch>
-        </p:blipFill>
-        <p:spPr bwMode="auto">
-          <a:xfrm>
-            <a:off x="2314575" y="2162175"/>
-            <a:ext cx="4514850" cy="2533650"/>
-          </a:xfrm>
-          <a:prstGeom prst="rect">
-            <a:avLst/>
-          </a:prstGeom>
-          <a:noFill/>
-          <a:extLst>
-            <a:ext uri="{909E8E84-426E-40DD-AFC4-6F175D3DCCD1}">
-              <a14:hiddenFill xmlns:a14="http://schemas.microsoft.com/office/drawing/2010/main">
-                <a:solidFill>
-                  <a:srgbClr val="FFFFFF"/>
-                </a:solidFill>
-              </a14:hiddenFill>
-            </a:ext>
-          </a:extLst>
-        </p:spPr>
-      </p:pic>
     </p:spTree>
-    <p:extLst>
-      <p:ext uri="{BB962C8B-B14F-4D97-AF65-F5344CB8AC3E}">
-        <p14:creationId xmlns:p14="http://schemas.microsoft.com/office/powerpoint/2010/main" val="4052467296"/>
-      </p:ext>
-    </p:extLst>
   </p:cSld>
   <p:clrMapOvr>
     <a:masterClrMapping/>
@@ -29434,6 +30711,501 @@
     <p:extLst>
       <p:ext uri="{BB962C8B-B14F-4D97-AF65-F5344CB8AC3E}">
         <p14:creationId xmlns:p14="http://schemas.microsoft.com/office/powerpoint/2010/main" val="3239852938"/>
+      </p:ext>
+    </p:extLst>
+  </p:cSld>
+  <p:clrMapOvr>
+    <a:masterClrMapping/>
+  </p:clrMapOvr>
+</p:sld>
+</file>
+
+<file path=ppt/slides/slide20.xml><?xml version="1.0" encoding="utf-8"?>
+<p:sld xmlns:a="http://schemas.openxmlformats.org/drawingml/2006/main" xmlns:r="http://schemas.openxmlformats.org/officeDocument/2006/relationships" xmlns:p="http://schemas.openxmlformats.org/presentationml/2006/main">
+  <p:cSld>
+    <p:spTree>
+      <p:nvGrpSpPr>
+        <p:cNvPr id="1" name=""/>
+        <p:cNvGrpSpPr/>
+        <p:nvPr/>
+      </p:nvGrpSpPr>
+      <p:grpSpPr>
+        <a:xfrm>
+          <a:off x="0" y="0"/>
+          <a:ext cx="0" cy="0"/>
+          <a:chOff x="0" y="0"/>
+          <a:chExt cx="0" cy="0"/>
+        </a:xfrm>
+      </p:grpSpPr>
+      <p:sp>
+        <p:nvSpPr>
+          <p:cNvPr id="4" name="Slide Number Placeholder 5">
+            <a:extLst>
+              <a:ext uri="{FF2B5EF4-FFF2-40B4-BE49-F238E27FC236}">
+                <a16:creationId xmlns:a16="http://schemas.microsoft.com/office/drawing/2014/main" id="{4B16DA44-B54B-867D-8F53-C12457375B39}"/>
+              </a:ext>
+            </a:extLst>
+          </p:cNvPr>
+          <p:cNvSpPr>
+            <a:spLocks noGrp="1"/>
+          </p:cNvSpPr>
+          <p:nvPr>
+            <p:ph type="sldNum" sz="quarter" idx="12"/>
+          </p:nvPr>
+        </p:nvSpPr>
+        <p:spPr/>
+        <p:txBody>
+          <a:bodyPr/>
+          <a:lstStyle>
+            <a:lvl1pPr eaLnBrk="0" hangingPunct="0">
+              <a:defRPr sz="1600">
+                <a:solidFill>
+                  <a:schemeClr val="tx1"/>
+                </a:solidFill>
+                <a:latin typeface="Tahoma" panose="020B0604030504040204" pitchFamily="34" charset="0"/>
+                <a:ea typeface="SimSun" panose="02010600030101010101" pitchFamily="2" charset="-122"/>
+              </a:defRPr>
+            </a:lvl1pPr>
+            <a:lvl2pPr marL="742950" indent="-285750" eaLnBrk="0" hangingPunct="0">
+              <a:defRPr sz="1600">
+                <a:solidFill>
+                  <a:schemeClr val="tx1"/>
+                </a:solidFill>
+                <a:latin typeface="Tahoma" panose="020B0604030504040204" pitchFamily="34" charset="0"/>
+                <a:ea typeface="SimSun" panose="02010600030101010101" pitchFamily="2" charset="-122"/>
+              </a:defRPr>
+            </a:lvl2pPr>
+            <a:lvl3pPr marL="1143000" indent="-228600" eaLnBrk="0" hangingPunct="0">
+              <a:defRPr sz="1600">
+                <a:solidFill>
+                  <a:schemeClr val="tx1"/>
+                </a:solidFill>
+                <a:latin typeface="Tahoma" panose="020B0604030504040204" pitchFamily="34" charset="0"/>
+                <a:ea typeface="SimSun" panose="02010600030101010101" pitchFamily="2" charset="-122"/>
+              </a:defRPr>
+            </a:lvl3pPr>
+            <a:lvl4pPr marL="1600200" indent="-228600" eaLnBrk="0" hangingPunct="0">
+              <a:defRPr sz="1600">
+                <a:solidFill>
+                  <a:schemeClr val="tx1"/>
+                </a:solidFill>
+                <a:latin typeface="Tahoma" panose="020B0604030504040204" pitchFamily="34" charset="0"/>
+                <a:ea typeface="SimSun" panose="02010600030101010101" pitchFamily="2" charset="-122"/>
+              </a:defRPr>
+            </a:lvl4pPr>
+            <a:lvl5pPr marL="2057400" indent="-228600" eaLnBrk="0" hangingPunct="0">
+              <a:defRPr sz="1600">
+                <a:solidFill>
+                  <a:schemeClr val="tx1"/>
+                </a:solidFill>
+                <a:latin typeface="Tahoma" panose="020B0604030504040204" pitchFamily="34" charset="0"/>
+                <a:ea typeface="SimSun" panose="02010600030101010101" pitchFamily="2" charset="-122"/>
+              </a:defRPr>
+            </a:lvl5pPr>
+            <a:lvl6pPr marL="2514600" indent="-228600" algn="ctr" eaLnBrk="0" fontAlgn="base" hangingPunct="0">
+              <a:spcBef>
+                <a:spcPct val="0"/>
+              </a:spcBef>
+              <a:spcAft>
+                <a:spcPct val="0"/>
+              </a:spcAft>
+              <a:defRPr sz="1600">
+                <a:solidFill>
+                  <a:schemeClr val="tx1"/>
+                </a:solidFill>
+                <a:latin typeface="Tahoma" panose="020B0604030504040204" pitchFamily="34" charset="0"/>
+                <a:ea typeface="SimSun" panose="02010600030101010101" pitchFamily="2" charset="-122"/>
+              </a:defRPr>
+            </a:lvl6pPr>
+            <a:lvl7pPr marL="2971800" indent="-228600" algn="ctr" eaLnBrk="0" fontAlgn="base" hangingPunct="0">
+              <a:spcBef>
+                <a:spcPct val="0"/>
+              </a:spcBef>
+              <a:spcAft>
+                <a:spcPct val="0"/>
+              </a:spcAft>
+              <a:defRPr sz="1600">
+                <a:solidFill>
+                  <a:schemeClr val="tx1"/>
+                </a:solidFill>
+                <a:latin typeface="Tahoma" panose="020B0604030504040204" pitchFamily="34" charset="0"/>
+                <a:ea typeface="SimSun" panose="02010600030101010101" pitchFamily="2" charset="-122"/>
+              </a:defRPr>
+            </a:lvl7pPr>
+            <a:lvl8pPr marL="3429000" indent="-228600" algn="ctr" eaLnBrk="0" fontAlgn="base" hangingPunct="0">
+              <a:spcBef>
+                <a:spcPct val="0"/>
+              </a:spcBef>
+              <a:spcAft>
+                <a:spcPct val="0"/>
+              </a:spcAft>
+              <a:defRPr sz="1600">
+                <a:solidFill>
+                  <a:schemeClr val="tx1"/>
+                </a:solidFill>
+                <a:latin typeface="Tahoma" panose="020B0604030504040204" pitchFamily="34" charset="0"/>
+                <a:ea typeface="SimSun" panose="02010600030101010101" pitchFamily="2" charset="-122"/>
+              </a:defRPr>
+            </a:lvl8pPr>
+            <a:lvl9pPr marL="3886200" indent="-228600" algn="ctr" eaLnBrk="0" fontAlgn="base" hangingPunct="0">
+              <a:spcBef>
+                <a:spcPct val="0"/>
+              </a:spcBef>
+              <a:spcAft>
+                <a:spcPct val="0"/>
+              </a:spcAft>
+              <a:defRPr sz="1600">
+                <a:solidFill>
+                  <a:schemeClr val="tx1"/>
+                </a:solidFill>
+                <a:latin typeface="Tahoma" panose="020B0604030504040204" pitchFamily="34" charset="0"/>
+                <a:ea typeface="SimSun" panose="02010600030101010101" pitchFamily="2" charset="-122"/>
+              </a:defRPr>
+            </a:lvl9pPr>
+          </a:lstStyle>
+          <a:p>
+            <a:pPr marL="0" marR="0" lvl="0" indent="0" algn="r" defTabSz="914400" rtl="0" eaLnBrk="1" fontAlgn="base" latinLnBrk="0" hangingPunct="1">
+              <a:lnSpc>
+                <a:spcPct val="100000"/>
+              </a:lnSpc>
+              <a:spcBef>
+                <a:spcPct val="0"/>
+              </a:spcBef>
+              <a:spcAft>
+                <a:spcPct val="0"/>
+              </a:spcAft>
+              <a:buClrTx/>
+              <a:buSzTx/>
+              <a:buFontTx/>
+              <a:buNone/>
+              <a:tabLst/>
+              <a:defRPr/>
+            </a:pPr>
+            <a:fld id="{6B4A1482-E166-45E2-9CB9-0C2C4D97FEA3}" type="slidenum">
+              <a:rPr kumimoji="0" lang="en-US" altLang="en-US" sz="1400" b="0" i="0" u="none" strike="noStrike" kern="1200" cap="none" spc="0" normalizeH="0" baseline="0" noProof="0">
+                <a:ln>
+                  <a:noFill/>
+                </a:ln>
+                <a:solidFill>
+                  <a:srgbClr val="FFFFFF"/>
+                </a:solidFill>
+                <a:effectLst>
+                  <a:outerShdw blurRad="38100" dist="38100" dir="2700000" algn="tl">
+                    <a:srgbClr val="000000"/>
+                  </a:outerShdw>
+                </a:effectLst>
+                <a:uLnTx/>
+                <a:uFillTx/>
+                <a:latin typeface="Arial" panose="020B0604020202020204" pitchFamily="34" charset="0"/>
+                <a:ea typeface="SimSun" panose="02010600030101010101" pitchFamily="2" charset="-122"/>
+                <a:cs typeface="+mn-cs"/>
+              </a:rPr>
+              <a:pPr marL="0" marR="0" lvl="0" indent="0" algn="r" defTabSz="914400" rtl="0" eaLnBrk="1" fontAlgn="base" latinLnBrk="0" hangingPunct="1">
+                <a:lnSpc>
+                  <a:spcPct val="100000"/>
+                </a:lnSpc>
+                <a:spcBef>
+                  <a:spcPct val="0"/>
+                </a:spcBef>
+                <a:spcAft>
+                  <a:spcPct val="0"/>
+                </a:spcAft>
+                <a:buClrTx/>
+                <a:buSzTx/>
+                <a:buFontTx/>
+                <a:buNone/>
+                <a:tabLst/>
+                <a:defRPr/>
+              </a:pPr>
+              <a:t>20</a:t>
+            </a:fld>
+            <a:endParaRPr kumimoji="0" lang="en-US" altLang="en-US" sz="1400" b="0" i="0" u="none" strike="noStrike" kern="1200" cap="none" spc="0" normalizeH="0" baseline="0" noProof="0">
+              <a:ln>
+                <a:noFill/>
+              </a:ln>
+              <a:solidFill>
+                <a:srgbClr val="FFFFFF"/>
+              </a:solidFill>
+              <a:effectLst>
+                <a:outerShdw blurRad="38100" dist="38100" dir="2700000" algn="tl">
+                  <a:srgbClr val="000000"/>
+                </a:outerShdw>
+              </a:effectLst>
+              <a:uLnTx/>
+              <a:uFillTx/>
+              <a:latin typeface="Arial" panose="020B0604020202020204" pitchFamily="34" charset="0"/>
+              <a:ea typeface="SimSun" panose="02010600030101010101" pitchFamily="2" charset="-122"/>
+              <a:cs typeface="+mn-cs"/>
+            </a:endParaRPr>
+          </a:p>
+        </p:txBody>
+      </p:sp>
+      <p:sp>
+        <p:nvSpPr>
+          <p:cNvPr id="136194" name="Rectangle 2">
+            <a:extLst>
+              <a:ext uri="{FF2B5EF4-FFF2-40B4-BE49-F238E27FC236}">
+                <a16:creationId xmlns:a16="http://schemas.microsoft.com/office/drawing/2014/main" id="{1A260215-472B-B60D-317A-B2AADD8E908E}"/>
+              </a:ext>
+            </a:extLst>
+          </p:cNvPr>
+          <p:cNvSpPr>
+            <a:spLocks noGrp="1" noRot="1" noChangeArrowheads="1"/>
+          </p:cNvSpPr>
+          <p:nvPr>
+            <p:ph type="title"/>
+          </p:nvPr>
+        </p:nvSpPr>
+        <p:spPr/>
+        <p:txBody>
+          <a:bodyPr/>
+          <a:lstStyle/>
+          <a:p>
+            <a:pPr eaLnBrk="1" hangingPunct="1">
+              <a:defRPr/>
+            </a:pPr>
+            <a:r>
+              <a:rPr lang="en-US" i="1"/>
+              <a:t>Using the </a:t>
+            </a:r>
+            <a:r>
+              <a:rPr lang="en-US" i="1">
+                <a:latin typeface="Lucida Console" pitchFamily="49" charset="0"/>
+              </a:rPr>
+              <a:t>throws</a:t>
+            </a:r>
+            <a:r>
+              <a:rPr lang="en-US" i="1"/>
+              <a:t> Clause</a:t>
+            </a:r>
+          </a:p>
+        </p:txBody>
+      </p:sp>
+      <p:sp>
+        <p:nvSpPr>
+          <p:cNvPr id="136195" name="Rectangle 3">
+            <a:extLst>
+              <a:ext uri="{FF2B5EF4-FFF2-40B4-BE49-F238E27FC236}">
+                <a16:creationId xmlns:a16="http://schemas.microsoft.com/office/drawing/2014/main" id="{7745AEFF-5CB6-7297-A6CB-DB1265A18EAA}"/>
+              </a:ext>
+            </a:extLst>
+          </p:cNvPr>
+          <p:cNvSpPr>
+            <a:spLocks noGrp="1" noRot="1" noChangeArrowheads="1"/>
+          </p:cNvSpPr>
+          <p:nvPr>
+            <p:ph type="body" idx="1"/>
+          </p:nvPr>
+        </p:nvSpPr>
+        <p:spPr/>
+        <p:txBody>
+          <a:bodyPr/>
+          <a:lstStyle/>
+          <a:p>
+            <a:pPr marL="228600" indent="-228600" eaLnBrk="1" hangingPunct="1">
+              <a:defRPr/>
+            </a:pPr>
+            <a:r>
+              <a:rPr lang="en-US" dirty="0"/>
+              <a:t>Exceptions can be thrown by statements in method’s body or by methods called in method’s body</a:t>
+            </a:r>
+          </a:p>
+          <a:p>
+            <a:pPr marL="228600" indent="-228600" eaLnBrk="1" hangingPunct="1">
+              <a:defRPr/>
+            </a:pPr>
+            <a:r>
+              <a:rPr lang="en-US" dirty="0"/>
+              <a:t>Exceptions can be of types listed in </a:t>
+            </a:r>
+            <a:r>
+              <a:rPr lang="en-US" dirty="0">
+                <a:latin typeface="Lucida Console" pitchFamily="49" charset="0"/>
+              </a:rPr>
+              <a:t>throws</a:t>
+            </a:r>
+            <a:r>
+              <a:rPr lang="en-US" dirty="0"/>
+              <a:t> clause or subclasses</a:t>
+            </a:r>
+          </a:p>
+        </p:txBody>
+      </p:sp>
+    </p:spTree>
+  </p:cSld>
+  <p:clrMapOvr>
+    <a:masterClrMapping/>
+  </p:clrMapOvr>
+</p:sld>
+</file>
+
+<file path=ppt/slides/slide21.xml><?xml version="1.0" encoding="utf-8"?>
+<p:sld xmlns:a="http://schemas.openxmlformats.org/drawingml/2006/main" xmlns:r="http://schemas.openxmlformats.org/officeDocument/2006/relationships" xmlns:p="http://schemas.openxmlformats.org/presentationml/2006/main">
+  <p:cSld>
+    <p:spTree>
+      <p:nvGrpSpPr>
+        <p:cNvPr id="1" name=""/>
+        <p:cNvGrpSpPr/>
+        <p:nvPr/>
+      </p:nvGrpSpPr>
+      <p:grpSpPr>
+        <a:xfrm>
+          <a:off x="0" y="0"/>
+          <a:ext cx="0" cy="0"/>
+          <a:chOff x="0" y="0"/>
+          <a:chExt cx="0" cy="0"/>
+        </a:xfrm>
+      </p:grpSpPr>
+      <p:sp>
+        <p:nvSpPr>
+          <p:cNvPr id="2" name="Title 1">
+            <a:extLst>
+              <a:ext uri="{FF2B5EF4-FFF2-40B4-BE49-F238E27FC236}">
+                <a16:creationId xmlns:a16="http://schemas.microsoft.com/office/drawing/2014/main" id="{7372A476-CFCB-A774-103C-5CC68D7A8C42}"/>
+              </a:ext>
+            </a:extLst>
+          </p:cNvPr>
+          <p:cNvSpPr>
+            <a:spLocks noGrp="1"/>
+          </p:cNvSpPr>
+          <p:nvPr>
+            <p:ph type="ctrTitle"/>
+          </p:nvPr>
+        </p:nvSpPr>
+        <p:spPr/>
+        <p:txBody>
+          <a:bodyPr/>
+          <a:lstStyle/>
+          <a:p>
+            <a:endParaRPr lang="en-US"/>
+          </a:p>
+        </p:txBody>
+      </p:sp>
+      <p:sp>
+        <p:nvSpPr>
+          <p:cNvPr id="3" name="Subtitle 2">
+            <a:extLst>
+              <a:ext uri="{FF2B5EF4-FFF2-40B4-BE49-F238E27FC236}">
+                <a16:creationId xmlns:a16="http://schemas.microsoft.com/office/drawing/2014/main" id="{F813319D-D9E4-1DDF-124E-A77B3F6B802E}"/>
+              </a:ext>
+            </a:extLst>
+          </p:cNvPr>
+          <p:cNvSpPr>
+            <a:spLocks noGrp="1"/>
+          </p:cNvSpPr>
+          <p:nvPr>
+            <p:ph type="subTitle" idx="1"/>
+          </p:nvPr>
+        </p:nvSpPr>
+        <p:spPr/>
+        <p:txBody>
+          <a:bodyPr/>
+          <a:lstStyle/>
+          <a:p>
+            <a:endParaRPr lang="en-US"/>
+          </a:p>
+        </p:txBody>
+      </p:sp>
+      <p:sp>
+        <p:nvSpPr>
+          <p:cNvPr id="4" name="Footer Placeholder 3">
+            <a:extLst>
+              <a:ext uri="{FF2B5EF4-FFF2-40B4-BE49-F238E27FC236}">
+                <a16:creationId xmlns:a16="http://schemas.microsoft.com/office/drawing/2014/main" id="{9012E03F-5F07-326E-FDB6-55FEAE88539E}"/>
+              </a:ext>
+            </a:extLst>
+          </p:cNvPr>
+          <p:cNvSpPr>
+            <a:spLocks noGrp="1"/>
+          </p:cNvSpPr>
+          <p:nvPr>
+            <p:ph type="ftr" sz="quarter" idx="12"/>
+          </p:nvPr>
+        </p:nvSpPr>
+        <p:spPr/>
+        <p:txBody>
+          <a:bodyPr/>
+          <a:lstStyle/>
+          <a:p>
+            <a:pPr>
+              <a:defRPr/>
+            </a:pPr>
+            <a:endParaRPr lang="en-US"/>
+          </a:p>
+          <a:p>
+            <a:pPr>
+              <a:defRPr/>
+            </a:pPr>
+            <a:endParaRPr lang="en-US"/>
+          </a:p>
+          <a:p>
+            <a:pPr>
+              <a:defRPr/>
+            </a:pPr>
+            <a:endParaRPr lang="en-US"/>
+          </a:p>
+          <a:p>
+            <a:pPr>
+              <a:defRPr/>
+            </a:pPr>
+            <a:r>
+              <a:rPr lang="en-US"/>
+              <a:t>© A+ Computer Science  -  www.apluscompsci.com</a:t>
+            </a:r>
+          </a:p>
+        </p:txBody>
+      </p:sp>
+      <p:pic>
+        <p:nvPicPr>
+          <p:cNvPr id="1026" name="Picture 2" descr="Lightbox">
+            <a:extLst>
+              <a:ext uri="{FF2B5EF4-FFF2-40B4-BE49-F238E27FC236}">
+                <a16:creationId xmlns:a16="http://schemas.microsoft.com/office/drawing/2014/main" id="{04BAFA8B-6C1F-DB63-34A5-A0BBC1A3FF8E}"/>
+              </a:ext>
+            </a:extLst>
+          </p:cNvPr>
+          <p:cNvPicPr>
+            <a:picLocks noChangeAspect="1" noChangeArrowheads="1"/>
+          </p:cNvPicPr>
+          <p:nvPr/>
+        </p:nvPicPr>
+        <p:blipFill>
+          <a:blip r:embed="rId2">
+            <a:extLst>
+              <a:ext uri="{28A0092B-C50C-407E-A947-70E740481C1C}">
+                <a14:useLocalDpi xmlns:a14="http://schemas.microsoft.com/office/drawing/2010/main" val="0"/>
+              </a:ext>
+            </a:extLst>
+          </a:blip>
+          <a:srcRect/>
+          <a:stretch>
+            <a:fillRect/>
+          </a:stretch>
+        </p:blipFill>
+        <p:spPr bwMode="auto">
+          <a:xfrm>
+            <a:off x="2314575" y="2162175"/>
+            <a:ext cx="4514850" cy="2533650"/>
+          </a:xfrm>
+          <a:prstGeom prst="rect">
+            <a:avLst/>
+          </a:prstGeom>
+          <a:noFill/>
+          <a:extLst>
+            <a:ext uri="{909E8E84-426E-40DD-AFC4-6F175D3DCCD1}">
+              <a14:hiddenFill xmlns:a14="http://schemas.microsoft.com/office/drawing/2010/main">
+                <a:solidFill>
+                  <a:srgbClr val="FFFFFF"/>
+                </a:solidFill>
+              </a14:hiddenFill>
+            </a:ext>
+          </a:extLst>
+        </p:spPr>
+      </p:pic>
+    </p:spTree>
+    <p:extLst>
+      <p:ext uri="{BB962C8B-B14F-4D97-AF65-F5344CB8AC3E}">
+        <p14:creationId xmlns:p14="http://schemas.microsoft.com/office/powerpoint/2010/main" val="4052467296"/>
       </p:ext>
     </p:extLst>
   </p:cSld>
@@ -29675,7 +31447,7 @@
         <p:spPr>
           <a:xfrm>
             <a:off x="381000" y="1492508"/>
-            <a:ext cx="8382000" cy="4478149"/>
+            <a:ext cx="8382000" cy="3616375"/>
           </a:xfrm>
           <a:prstGeom prst="rect">
             <a:avLst/>
@@ -29727,7 +31499,7 @@
             </a:r>
           </a:p>
           <a:p>
-            <a:pPr marL="290513" indent="-290513" algn="l" rtl="0">
+            <a:pPr marL="290513" indent="-290513">
               <a:spcAft>
                 <a:spcPts val="600"/>
               </a:spcAft>
@@ -29742,7 +31514,7 @@
                 <a:effectLst/>
                 <a:latin typeface="-apple-system"/>
               </a:rPr>
-              <a:t>If an entire class or module is hidden from the outside world, then all of its methods are effectively private, with regard to the boundaries of your system. You can use assertions freely and not bother with garbage checking.</a:t>
+              <a:t>Private methods don't require input checks. They are presumed safe because they are inside the defensive wall. </a:t>
             </a:r>
           </a:p>
         </p:txBody>
@@ -29992,7 +31764,7 @@
         <p:spPr>
           <a:xfrm>
             <a:off x="381000" y="1492508"/>
-            <a:ext cx="8382000" cy="6632585"/>
+            <a:ext cx="8382000" cy="2677656"/>
           </a:xfrm>
           <a:prstGeom prst="rect">
             <a:avLst/>
@@ -30005,7 +31777,7 @@
           </a:bodyPr>
           <a:lstStyle/>
           <a:p>
-            <a:pPr marL="290513" indent="-290513" algn="l" rtl="0">
+            <a:pPr marL="290513" indent="-290513">
               <a:spcAft>
                 <a:spcPts val="600"/>
               </a:spcAft>
@@ -30020,26 +31792,101 @@
                 <a:effectLst/>
                 <a:latin typeface="-apple-system"/>
               </a:rPr>
-              <a:t>Private methods don't require input checks. They are presumed safe because they are inside the defensive wall. Still, it can be useful to add assertions, which help ensure that your soldiers on the front line are keeping the garbage out and respecting the parameters of the private methods. Assertions go at the top of a private method, and can be removed automatically by the compiler so they don't end up in production.</a:t>
+              <a:t>If the exception that will be automatically thrown isn't at the right abstraction level, then it's a leaky abstraction if you throw it (reveals implementation details that the caller doesn't need to know). Instead, catch the exception and throw the one that makes more sense to the caller.</a:t>
             </a:r>
           </a:p>
-          <a:p>
-            <a:pPr marL="290513" indent="-290513" algn="l" rtl="0">
-              <a:spcAft>
-                <a:spcPts val="600"/>
-              </a:spcAft>
-              <a:buFont typeface="Arial" panose="020B0604020202020204" pitchFamily="34" charset="0"/>
-              <a:buChar char="•"/>
-            </a:pPr>
+        </p:txBody>
+      </p:sp>
+      <p:sp>
+        <p:nvSpPr>
+          <p:cNvPr id="2" name="TextBox 1">
+            <a:extLst>
+              <a:ext uri="{FF2B5EF4-FFF2-40B4-BE49-F238E27FC236}">
+                <a16:creationId xmlns:a16="http://schemas.microsoft.com/office/drawing/2014/main" id="{6C05329E-EFEE-3B81-69DD-108A819E29B9}"/>
+              </a:ext>
+            </a:extLst>
+          </p:cNvPr>
+          <p:cNvSpPr txBox="1"/>
+          <p:nvPr/>
+        </p:nvSpPr>
+        <p:spPr>
+          <a:xfrm>
+            <a:off x="5105400" y="6336268"/>
+            <a:ext cx="3634328" cy="369332"/>
+          </a:xfrm>
+          <a:prstGeom prst="rect">
+            <a:avLst/>
+          </a:prstGeom>
+          <a:noFill/>
+        </p:spPr>
+        <p:txBody>
+          <a:bodyPr wrap="none" rtlCol="0">
+            <a:spAutoFit/>
+          </a:bodyPr>
+          <a:lstStyle/>
+          <a:p>
             <a:r>
-              <a:rPr lang="en-US" sz="2800" b="0" i="0" dirty="0">
-                <a:solidFill>
-                  <a:srgbClr val="282829"/>
-                </a:solidFill>
-                <a:effectLst/>
-                <a:latin typeface="-apple-system"/>
+              <a:rPr lang="en-US" sz="1800" dirty="0">
+                <a:solidFill>
+                  <a:srgbClr val="0000CC"/>
+                </a:solidFill>
               </a:rPr>
-              <a:t>If the exception that will be automatically thrown isn't at the right abstraction level, then it's a leaky abstraction if you throw it (reveals implementation details that the caller doesn't need to know). Instead, catch the exception and throw the one that makes more sense to the caller.</a:t>
+              <a:t>Thanks to </a:t>
+            </a:r>
+            <a:r>
+              <a:rPr lang="en-US" sz="1800" dirty="0">
+                <a:solidFill>
+                  <a:srgbClr val="0000CC"/>
+                </a:solidFill>
+                <a:hlinkClick r:id="rId3">
+                  <a:extLst>
+                    <a:ext uri="{A12FA001-AC4F-418D-AE19-62706E023703}">
+                      <ahyp:hlinkClr xmlns:ahyp="http://schemas.microsoft.com/office/drawing/2018/hyperlinkcolor" val="tx"/>
+                    </a:ext>
+                  </a:extLst>
+                </a:hlinkClick>
+              </a:rPr>
+              <a:t>Ryan Cook on Quora</a:t>
+            </a:r>
+            <a:endParaRPr lang="en-US" sz="1800" dirty="0">
+              <a:solidFill>
+                <a:srgbClr val="0000CC"/>
+              </a:solidFill>
+            </a:endParaRPr>
+          </a:p>
+        </p:txBody>
+      </p:sp>
+      <p:sp>
+        <p:nvSpPr>
+          <p:cNvPr id="4" name="TextBox 3">
+            <a:extLst>
+              <a:ext uri="{FF2B5EF4-FFF2-40B4-BE49-F238E27FC236}">
+                <a16:creationId xmlns:a16="http://schemas.microsoft.com/office/drawing/2014/main" id="{277DC90A-D0D7-D55D-D8EB-A123667273DB}"/>
+              </a:ext>
+            </a:extLst>
+          </p:cNvPr>
+          <p:cNvSpPr txBox="1"/>
+          <p:nvPr/>
+        </p:nvSpPr>
+        <p:spPr>
+          <a:xfrm rot="19890769">
+            <a:off x="1943711" y="2369670"/>
+            <a:ext cx="4314001" cy="2215991"/>
+          </a:xfrm>
+          <a:prstGeom prst="rect">
+            <a:avLst/>
+          </a:prstGeom>
+          <a:noFill/>
+        </p:spPr>
+        <p:txBody>
+          <a:bodyPr wrap="none" rtlCol="0">
+            <a:spAutoFit/>
+          </a:bodyPr>
+          <a:lstStyle/>
+          <a:p>
+            <a:r>
+              <a:rPr lang="en-US" sz="13800" dirty="0"/>
+              <a:t>SKIP</a:t>
             </a:r>
           </a:p>
         </p:txBody>
@@ -30047,7 +31894,7 @@
     </p:spTree>
     <p:extLst>
       <p:ext uri="{BB962C8B-B14F-4D97-AF65-F5344CB8AC3E}">
-        <p14:creationId xmlns:p14="http://schemas.microsoft.com/office/powerpoint/2010/main" val="3200283641"/>
+        <p14:creationId xmlns:p14="http://schemas.microsoft.com/office/powerpoint/2010/main" val="2933813740"/>
       </p:ext>
     </p:extLst>
   </p:cSld>
@@ -30101,8 +31948,8 @@
         </p:nvSpPr>
         <p:spPr bwMode="auto">
           <a:xfrm>
-            <a:off x="762000" y="457200"/>
-            <a:ext cx="7772400" cy="707886"/>
+            <a:off x="152400" y="533400"/>
+            <a:ext cx="8839200" cy="646331"/>
           </a:xfrm>
           <a:prstGeom prst="rect">
             <a:avLst/>
@@ -30132,7 +31979,7 @@
           </a:extLst>
         </p:spPr>
         <p:txBody>
-          <a:bodyPr>
+          <a:bodyPr wrap="square">
             <a:spAutoFit/>
           </a:bodyPr>
           <a:lstStyle>
@@ -30266,10 +32113,10 @@
               <a:buNone/>
             </a:pPr>
             <a:r>
-              <a:rPr lang="en-US" altLang="en-US" sz="4000" dirty="0">
+              <a:rPr lang="en-US" altLang="en-US" sz="3600" dirty="0">
                 <a:latin typeface="Arial" panose="020B0604020202020204" pitchFamily="34" charset="0"/>
               </a:rPr>
-              <a:t>Validating Method Arguments</a:t>
+              <a:t>Exceptions in Defensive Programming</a:t>
             </a:r>
           </a:p>
         </p:txBody>
@@ -30288,8 +32135,8 @@
         </p:nvSpPr>
         <p:spPr>
           <a:xfrm>
-            <a:off x="304800" y="1676400"/>
-            <a:ext cx="8382000" cy="4693593"/>
+            <a:off x="381000" y="1492508"/>
+            <a:ext cx="8382000" cy="3970318"/>
           </a:xfrm>
           <a:prstGeom prst="rect">
             <a:avLst/>
@@ -30302,138 +32149,124 @@
           </a:bodyPr>
           <a:lstStyle/>
           <a:p>
-            <a:pPr marL="342900" indent="-342900" algn="l">
+            <a:pPr marL="290513" indent="-290513" algn="l" rtl="0">
               <a:spcAft>
-                <a:spcPts val="1800"/>
+                <a:spcPts val="600"/>
               </a:spcAft>
               <a:buFont typeface="Arial" panose="020B0604020202020204" pitchFamily="34" charset="0"/>
               <a:buChar char="•"/>
             </a:pPr>
             <a:r>
-              <a:rPr lang="en-US" sz="3200" b="1" i="0" dirty="0">
-                <a:solidFill>
-                  <a:srgbClr val="333333"/>
+              <a:rPr lang="en-US" sz="2800" b="0" i="0" dirty="0">
+                <a:solidFill>
+                  <a:srgbClr val="282829"/>
                 </a:solidFill>
                 <a:effectLst/>
-                <a:latin typeface="Arial" panose="020B0604020202020204" pitchFamily="34" charset="0"/>
+                <a:latin typeface="-apple-system"/>
               </a:rPr>
-              <a:t>Start a method with argument validation</a:t>
+              <a:t>Private methods don't require input checks. They are presumed safe because they are inside the defensive wall. Still, it can be useful to add assertions, which help ensure that your soldiers on the front line are keeping the garbage out and respecting the parameters of the private methods. Assertions go at the top of a private method and can be removed automatically by the compiler so they don't end up in production.</a:t>
             </a:r>
           </a:p>
-          <a:p>
-            <a:pPr marL="342900" indent="-342900" algn="l">
-              <a:spcAft>
-                <a:spcPts val="1800"/>
-              </a:spcAft>
-              <a:buFont typeface="Arial" panose="020B0604020202020204" pitchFamily="34" charset="0"/>
-              <a:buChar char="•"/>
-            </a:pPr>
+        </p:txBody>
+      </p:sp>
+      <p:sp>
+        <p:nvSpPr>
+          <p:cNvPr id="2" name="TextBox 1">
+            <a:extLst>
+              <a:ext uri="{FF2B5EF4-FFF2-40B4-BE49-F238E27FC236}">
+                <a16:creationId xmlns:a16="http://schemas.microsoft.com/office/drawing/2014/main" id="{6C05329E-EFEE-3B81-69DD-108A819E29B9}"/>
+              </a:ext>
+            </a:extLst>
+          </p:cNvPr>
+          <p:cNvSpPr txBox="1"/>
+          <p:nvPr/>
+        </p:nvSpPr>
+        <p:spPr>
+          <a:xfrm>
+            <a:off x="5105400" y="6336268"/>
+            <a:ext cx="3634328" cy="369332"/>
+          </a:xfrm>
+          <a:prstGeom prst="rect">
+            <a:avLst/>
+          </a:prstGeom>
+          <a:noFill/>
+        </p:spPr>
+        <p:txBody>
+          <a:bodyPr wrap="none" rtlCol="0">
+            <a:spAutoFit/>
+          </a:bodyPr>
+          <a:lstStyle/>
+          <a:p>
             <a:r>
-              <a:rPr lang="en-US" sz="3200" dirty="0">
-                <a:solidFill>
-                  <a:srgbClr val="333333"/>
+              <a:rPr lang="en-US" sz="1800" dirty="0">
+                <a:solidFill>
+                  <a:srgbClr val="0000CC"/>
                 </a:solidFill>
               </a:rPr>
-              <a:t>Throw an exception if a test fails</a:t>
+              <a:t>Thanks to </a:t>
             </a:r>
-          </a:p>
-          <a:p>
-            <a:pPr marL="342900" indent="-342900" algn="l">
-              <a:spcAft>
-                <a:spcPts val="1800"/>
-              </a:spcAft>
-              <a:buFont typeface="Arial" panose="020B0604020202020204" pitchFamily="34" charset="0"/>
-              <a:buChar char="•"/>
-            </a:pPr>
             <a:r>
-              <a:rPr lang="en-US" sz="3200" b="1" i="0" dirty="0">
-                <a:solidFill>
-                  <a:srgbClr val="333333"/>
-                </a:solidFill>
-                <a:effectLst/>
-                <a:latin typeface="Arial" panose="020B0604020202020204" pitchFamily="34" charset="0"/>
+              <a:rPr lang="en-US" sz="1800" dirty="0">
+                <a:solidFill>
+                  <a:srgbClr val="0000CC"/>
+                </a:solidFill>
+                <a:hlinkClick r:id="rId3">
+                  <a:extLst>
+                    <a:ext uri="{A12FA001-AC4F-418D-AE19-62706E023703}">
+                      <ahyp:hlinkClr xmlns:ahyp="http://schemas.microsoft.com/office/drawing/2018/hyperlinkcolor" val="tx"/>
+                    </a:ext>
+                  </a:extLst>
+                </a:hlinkClick>
               </a:rPr>
-              <a:t>Usually unchecked exceptions are thrown:</a:t>
+              <a:t>Ryan Cook on Quora</a:t>
             </a:r>
-          </a:p>
-          <a:p>
-            <a:pPr marL="800100" lvl="1" indent="-342900">
-              <a:spcAft>
-                <a:spcPts val="1800"/>
-              </a:spcAft>
-              <a:buFont typeface="Arial" panose="020B0604020202020204" pitchFamily="34" charset="0"/>
-              <a:buChar char="•"/>
-            </a:pPr>
-            <a:r>
-              <a:rPr lang="en-US" sz="3200" dirty="0" err="1">
-                <a:solidFill>
-                  <a:srgbClr val="333333"/>
-                </a:solidFill>
-              </a:rPr>
-              <a:t>IllegalArgumentException</a:t>
-            </a:r>
-            <a:endParaRPr lang="en-US" sz="3200" dirty="0">
+            <a:endParaRPr lang="en-US" sz="1800" dirty="0">
               <a:solidFill>
-                <a:srgbClr val="333333"/>
+                <a:srgbClr val="0000CC"/>
               </a:solidFill>
             </a:endParaRPr>
           </a:p>
-          <a:p>
-            <a:pPr marL="800100" lvl="1" indent="-342900">
-              <a:spcAft>
-                <a:spcPts val="1800"/>
-              </a:spcAft>
-              <a:buFont typeface="Arial" panose="020B0604020202020204" pitchFamily="34" charset="0"/>
-              <a:buChar char="•"/>
-            </a:pPr>
+        </p:txBody>
+      </p:sp>
+      <p:sp>
+        <p:nvSpPr>
+          <p:cNvPr id="4" name="TextBox 3">
+            <a:extLst>
+              <a:ext uri="{FF2B5EF4-FFF2-40B4-BE49-F238E27FC236}">
+                <a16:creationId xmlns:a16="http://schemas.microsoft.com/office/drawing/2014/main" id="{2B0F1023-8D72-4AED-26E6-26D70A53608D}"/>
+              </a:ext>
+            </a:extLst>
+          </p:cNvPr>
+          <p:cNvSpPr txBox="1"/>
+          <p:nvPr/>
+        </p:nvSpPr>
+        <p:spPr>
+          <a:xfrm rot="19890769">
+            <a:off x="1943711" y="2369670"/>
+            <a:ext cx="4314001" cy="2215991"/>
+          </a:xfrm>
+          <a:prstGeom prst="rect">
+            <a:avLst/>
+          </a:prstGeom>
+          <a:noFill/>
+        </p:spPr>
+        <p:txBody>
+          <a:bodyPr wrap="none" rtlCol="0">
+            <a:spAutoFit/>
+          </a:bodyPr>
+          <a:lstStyle/>
+          <a:p>
             <a:r>
-              <a:rPr lang="en-US" sz="3200" b="1" i="0" dirty="0" err="1">
-                <a:solidFill>
-                  <a:srgbClr val="333333"/>
-                </a:solidFill>
-                <a:effectLst/>
-                <a:latin typeface="Arial" panose="020B0604020202020204" pitchFamily="34" charset="0"/>
-              </a:rPr>
-              <a:t>NullPointerException</a:t>
+              <a:rPr lang="en-US" sz="13800" dirty="0"/>
+              <a:t>SKIP</a:t>
             </a:r>
-            <a:endParaRPr lang="en-US" sz="3200" b="1" i="0" dirty="0">
-              <a:solidFill>
-                <a:srgbClr val="333333"/>
-              </a:solidFill>
-              <a:effectLst/>
-              <a:latin typeface="Arial" panose="020B0604020202020204" pitchFamily="34" charset="0"/>
-            </a:endParaRPr>
-          </a:p>
-          <a:p>
-            <a:pPr marL="800100" lvl="1" indent="-342900">
-              <a:spcAft>
-                <a:spcPts val="1800"/>
-              </a:spcAft>
-              <a:buFont typeface="Arial" panose="020B0604020202020204" pitchFamily="34" charset="0"/>
-              <a:buChar char="•"/>
-            </a:pPr>
-            <a:r>
-              <a:rPr lang="en-US" sz="3200" dirty="0" err="1">
-                <a:solidFill>
-                  <a:srgbClr val="333333"/>
-                </a:solidFill>
-              </a:rPr>
-              <a:t>IllegalStateException</a:t>
-            </a:r>
-            <a:endParaRPr lang="en-US" sz="3200" b="1" i="0" dirty="0">
-              <a:solidFill>
-                <a:srgbClr val="333333"/>
-              </a:solidFill>
-              <a:effectLst/>
-              <a:latin typeface="Arial" panose="020B0604020202020204" pitchFamily="34" charset="0"/>
-            </a:endParaRPr>
           </a:p>
         </p:txBody>
       </p:sp>
     </p:spTree>
     <p:extLst>
       <p:ext uri="{BB962C8B-B14F-4D97-AF65-F5344CB8AC3E}">
-        <p14:creationId xmlns:p14="http://schemas.microsoft.com/office/powerpoint/2010/main" val="1847069436"/>
+        <p14:creationId xmlns:p14="http://schemas.microsoft.com/office/powerpoint/2010/main" val="439626835"/>
       </p:ext>
     </p:extLst>
   </p:cSld>
@@ -30487,8 +32320,8 @@
         </p:nvSpPr>
         <p:spPr bwMode="auto">
           <a:xfrm>
-            <a:off x="762000" y="457200"/>
-            <a:ext cx="7772400" cy="707886"/>
+            <a:off x="152400" y="533400"/>
+            <a:ext cx="8839200" cy="646331"/>
           </a:xfrm>
           <a:prstGeom prst="rect">
             <a:avLst/>
@@ -30518,7 +32351,7 @@
           </a:extLst>
         </p:spPr>
         <p:txBody>
-          <a:bodyPr>
+          <a:bodyPr wrap="square">
             <a:spAutoFit/>
           </a:bodyPr>
           <a:lstStyle>
@@ -30652,253 +32485,160 @@
               <a:buNone/>
             </a:pPr>
             <a:r>
-              <a:rPr lang="en-US" altLang="en-US" sz="4000" dirty="0">
+              <a:rPr lang="en-US" altLang="en-US" sz="3600" dirty="0">
                 <a:latin typeface="Arial" panose="020B0604020202020204" pitchFamily="34" charset="0"/>
               </a:rPr>
-              <a:t>Validating Method Arguments</a:t>
+              <a:t>Exceptions in Defensive Programming</a:t>
             </a:r>
           </a:p>
         </p:txBody>
       </p:sp>
       <p:sp>
         <p:nvSpPr>
-          <p:cNvPr id="4" name="Rectangle 2">
+          <p:cNvPr id="3" name="TextBox 2">
             <a:extLst>
               <a:ext uri="{FF2B5EF4-FFF2-40B4-BE49-F238E27FC236}">
-                <a16:creationId xmlns:a16="http://schemas.microsoft.com/office/drawing/2014/main" id="{00545DB6-0041-69A8-6CD5-B21EAD094964}"/>
+                <a16:creationId xmlns:a16="http://schemas.microsoft.com/office/drawing/2014/main" id="{D3E37CC0-2ED8-60AA-BEC8-92CF82A06B7D}"/>
               </a:ext>
             </a:extLst>
           </p:cNvPr>
-          <p:cNvSpPr>
-            <a:spLocks noChangeArrowheads="1"/>
-          </p:cNvSpPr>
+          <p:cNvSpPr txBox="1"/>
           <p:nvPr/>
         </p:nvSpPr>
-        <p:spPr bwMode="auto">
+        <p:spPr>
           <a:xfrm>
-            <a:off x="533400" y="1988895"/>
-            <a:ext cx="8077200" cy="3954929"/>
+            <a:off x="381000" y="1492508"/>
+            <a:ext cx="8382000" cy="2246769"/>
           </a:xfrm>
           <a:prstGeom prst="rect">
             <a:avLst/>
           </a:prstGeom>
           <a:noFill/>
-          <a:ln>
-            <a:noFill/>
-          </a:ln>
-          <a:effectLst/>
-          <a:extLst>
-            <a:ext uri="{909E8E84-426E-40DD-AFC4-6F175D3DCCD1}">
-              <a14:hiddenFill xmlns:a14="http://schemas.microsoft.com/office/drawing/2010/main">
-                <a:solidFill>
-                  <a:schemeClr val="accent1"/>
-                </a:solidFill>
-              </a14:hiddenFill>
-            </a:ext>
-            <a:ext uri="{91240B29-F687-4F45-9708-019B960494DF}">
-              <a14:hiddenLine xmlns:a14="http://schemas.microsoft.com/office/drawing/2010/main" w="9525">
-                <a:solidFill>
-                  <a:schemeClr val="tx1"/>
-                </a:solidFill>
-                <a:miter lim="800000"/>
-                <a:headEnd/>
-                <a:tailEnd/>
-              </a14:hiddenLine>
-            </a:ext>
-            <a:ext uri="{AF507438-7753-43E0-B8FC-AC1667EBCBE1}">
-              <a14:hiddenEffects xmlns:a14="http://schemas.microsoft.com/office/drawing/2010/main">
-                <a:effectLst>
-                  <a:outerShdw dist="35921" dir="2700000" algn="ctr" rotWithShape="0">
-                    <a:schemeClr val="bg2"/>
-                  </a:outerShdw>
-                </a:effectLst>
-              </a14:hiddenEffects>
-            </a:ext>
-          </a:extLst>
         </p:spPr>
         <p:txBody>
-          <a:bodyPr vert="horz" wrap="square" lIns="91440" tIns="45720" rIns="91440" bIns="45720" numCol="1" anchor="ctr" anchorCtr="0" compatLnSpc="1">
-            <a:prstTxWarp prst="textNoShape">
-              <a:avLst/>
-            </a:prstTxWarp>
+          <a:bodyPr wrap="square">
             <a:spAutoFit/>
           </a:bodyPr>
           <a:lstStyle/>
           <a:p>
-            <a:pPr marL="0" marR="0" lvl="0" indent="0" algn="l" defTabSz="914400" rtl="0" eaLnBrk="0" fontAlgn="base" latinLnBrk="0" hangingPunct="0">
-              <a:lnSpc>
-                <a:spcPct val="100000"/>
-              </a:lnSpc>
-              <a:spcBef>
-                <a:spcPct val="0"/>
-              </a:spcBef>
+            <a:pPr marL="290513" indent="-290513" algn="l" rtl="0">
               <a:spcAft>
-                <a:spcPts val="1800"/>
+                <a:spcPts val="600"/>
               </a:spcAft>
-              <a:buClrTx/>
-              <a:buSzTx/>
-              <a:buFontTx/>
-              <a:buNone/>
-              <a:tabLst/>
+              <a:buFont typeface="Arial" panose="020B0604020202020204" pitchFamily="34" charset="0"/>
+              <a:buChar char="•"/>
             </a:pPr>
             <a:r>
-              <a:rPr kumimoji="0" lang="en-US" altLang="en-US" sz="3600" b="0" i="0" u="none" strike="noStrike" cap="none" normalizeH="0" baseline="0" dirty="0">
-                <a:ln>
-                  <a:noFill/>
-                </a:ln>
-                <a:solidFill>
-                  <a:srgbClr val="000000"/>
+              <a:rPr lang="en-US" sz="2800" b="0" i="0" dirty="0">
+                <a:solidFill>
+                  <a:srgbClr val="282829"/>
                 </a:solidFill>
                 <a:effectLst/>
-                <a:latin typeface="Verdana" panose="020B0604030504040204" pitchFamily="34" charset="0"/>
-                <a:ea typeface="Times New Roman" panose="02020603050405020304" pitchFamily="18" charset="0"/>
+                <a:latin typeface="-apple-system"/>
               </a:rPr>
-              <a:t>Some common validations:</a:t>
+              <a:t>If an entire class or module is hidden from the outside world, then all of its methods are effectively private, with regard to the boundaries of your system. You can use assertions freely and not bother with garbage checking.</a:t>
             </a:r>
-            <a:endParaRPr kumimoji="0" lang="en-US" altLang="en-US" sz="1400" b="0" i="0" u="none" strike="noStrike" cap="none" normalizeH="0" baseline="0" dirty="0">
-              <a:ln>
-                <a:noFill/>
-              </a:ln>
-              <a:solidFill>
-                <a:schemeClr val="tx1"/>
-              </a:solidFill>
-              <a:effectLst/>
-            </a:endParaRPr>
-          </a:p>
-          <a:p>
-            <a:pPr marL="571500" marR="0" lvl="0" indent="-571500" algn="l" defTabSz="914400" rtl="0" eaLnBrk="0" fontAlgn="base" latinLnBrk="0" hangingPunct="0">
-              <a:lnSpc>
-                <a:spcPct val="100000"/>
-              </a:lnSpc>
-              <a:spcBef>
-                <a:spcPct val="0"/>
-              </a:spcBef>
-              <a:spcAft>
-                <a:spcPts val="1200"/>
-              </a:spcAft>
-              <a:buClrTx/>
-              <a:buSzTx/>
-              <a:buFont typeface="Arial" panose="020B0604020202020204" pitchFamily="34" charset="0"/>
-              <a:buChar char="•"/>
-              <a:tabLst/>
-            </a:pPr>
+          </a:p>
+        </p:txBody>
+      </p:sp>
+      <p:sp>
+        <p:nvSpPr>
+          <p:cNvPr id="2" name="TextBox 1">
+            <a:extLst>
+              <a:ext uri="{FF2B5EF4-FFF2-40B4-BE49-F238E27FC236}">
+                <a16:creationId xmlns:a16="http://schemas.microsoft.com/office/drawing/2014/main" id="{6C05329E-EFEE-3B81-69DD-108A819E29B9}"/>
+              </a:ext>
+            </a:extLst>
+          </p:cNvPr>
+          <p:cNvSpPr txBox="1"/>
+          <p:nvPr/>
+        </p:nvSpPr>
+        <p:spPr>
+          <a:xfrm>
+            <a:off x="5105400" y="6336268"/>
+            <a:ext cx="3634328" cy="369332"/>
+          </a:xfrm>
+          <a:prstGeom prst="rect">
+            <a:avLst/>
+          </a:prstGeom>
+          <a:noFill/>
+        </p:spPr>
+        <p:txBody>
+          <a:bodyPr wrap="none" rtlCol="0">
+            <a:spAutoFit/>
+          </a:bodyPr>
+          <a:lstStyle/>
+          <a:p>
             <a:r>
-              <a:rPr kumimoji="0" lang="en-US" altLang="en-US" sz="3600" b="0" i="0" u="none" strike="noStrike" cap="none" normalizeH="0" baseline="0" dirty="0">
-                <a:ln>
-                  <a:noFill/>
-                </a:ln>
-                <a:solidFill>
-                  <a:srgbClr val="000000"/>
-                </a:solidFill>
-                <a:effectLst/>
-                <a:latin typeface="Verdana" panose="020B0604030504040204" pitchFamily="34" charset="0"/>
-                <a:ea typeface="Times New Roman" panose="02020603050405020304" pitchFamily="18" charset="0"/>
+              <a:rPr lang="en-US" sz="1800" dirty="0">
+                <a:solidFill>
+                  <a:srgbClr val="0000CC"/>
+                </a:solidFill>
               </a:rPr>
-              <a:t>check for a null reference</a:t>
-            </a:r>
-            <a:endParaRPr kumimoji="0" lang="en-US" altLang="en-US" sz="1400" b="0" i="0" u="none" strike="noStrike" cap="none" normalizeH="0" baseline="0" dirty="0">
-              <a:ln>
-                <a:noFill/>
-              </a:ln>
-              <a:solidFill>
-                <a:schemeClr val="tx1"/>
-              </a:solidFill>
-              <a:effectLst/>
-            </a:endParaRPr>
-          </a:p>
-          <a:p>
-            <a:pPr marL="571500" marR="0" lvl="0" indent="-571500" algn="l" defTabSz="914400" rtl="0" eaLnBrk="0" fontAlgn="base" latinLnBrk="0" hangingPunct="0">
-              <a:lnSpc>
-                <a:spcPct val="100000"/>
-              </a:lnSpc>
-              <a:spcBef>
-                <a:spcPct val="0"/>
-              </a:spcBef>
-              <a:spcAft>
-                <a:spcPts val="1200"/>
-              </a:spcAft>
-              <a:buClrTx/>
-              <a:buSzTx/>
-              <a:buFont typeface="Arial" panose="020B0604020202020204" pitchFamily="34" charset="0"/>
-              <a:buChar char="•"/>
-              <a:tabLst/>
-            </a:pPr>
-            <a:r>
-              <a:rPr kumimoji="0" lang="en-US" altLang="en-US" sz="3600" b="0" i="0" u="none" strike="noStrike" cap="none" normalizeH="0" baseline="0" dirty="0">
-                <a:ln>
-                  <a:noFill/>
-                </a:ln>
-                <a:solidFill>
-                  <a:srgbClr val="000000"/>
-                </a:solidFill>
-                <a:effectLst/>
-                <a:latin typeface="Verdana" panose="020B0604030504040204" pitchFamily="34" charset="0"/>
-                <a:ea typeface="Times New Roman" panose="02020603050405020304" pitchFamily="18" charset="0"/>
-              </a:rPr>
-              <a:t>check that text has visible content</a:t>
-            </a:r>
-          </a:p>
-          <a:p>
-            <a:pPr marL="571500" marR="0" lvl="0" indent="-571500" algn="l" defTabSz="914400" rtl="0" eaLnBrk="0" fontAlgn="base" latinLnBrk="0" hangingPunct="0">
-              <a:lnSpc>
-                <a:spcPct val="100000"/>
-              </a:lnSpc>
-              <a:spcBef>
-                <a:spcPct val="0"/>
-              </a:spcBef>
-              <a:spcAft>
-                <a:spcPct val="0"/>
-              </a:spcAft>
-              <a:buClrTx/>
-              <a:buSzTx/>
-              <a:buFont typeface="Arial" panose="020B0604020202020204" pitchFamily="34" charset="0"/>
-              <a:buChar char="•"/>
-              <a:tabLst/>
-            </a:pPr>
-            <a:r>
-              <a:rPr kumimoji="0" lang="en-US" altLang="en-US" sz="3600" b="0" i="0" u="none" strike="noStrike" cap="none" normalizeH="0" baseline="0" dirty="0">
-                <a:ln>
-                  <a:noFill/>
-                </a:ln>
-                <a:solidFill>
-                  <a:srgbClr val="000000"/>
-                </a:solidFill>
-                <a:effectLst/>
-                <a:latin typeface="Verdana" panose="020B0604030504040204" pitchFamily="34" charset="0"/>
-                <a:ea typeface="Times New Roman" panose="02020603050405020304" pitchFamily="18" charset="0"/>
-                <a:cs typeface="Times New Roman" panose="02020603050405020304" pitchFamily="18" charset="0"/>
-              </a:rPr>
-              <a:t>check that a number is in some range</a:t>
+              <a:t>Thanks to </a:t>
             </a:r>
             <a:r>
-              <a:rPr kumimoji="0" lang="en-US" altLang="en-US" sz="1400" b="0" i="0" u="none" strike="noStrike" cap="none" normalizeH="0" baseline="0" dirty="0">
-                <a:ln>
-                  <a:noFill/>
-                </a:ln>
-                <a:solidFill>
-                  <a:schemeClr val="tx1"/>
-                </a:solidFill>
-                <a:effectLst/>
+              <a:rPr lang="en-US" sz="1800" dirty="0">
+                <a:solidFill>
+                  <a:srgbClr val="0000CC"/>
+                </a:solidFill>
+                <a:hlinkClick r:id="rId3">
+                  <a:extLst>
+                    <a:ext uri="{A12FA001-AC4F-418D-AE19-62706E023703}">
+                      <ahyp:hlinkClr xmlns:ahyp="http://schemas.microsoft.com/office/drawing/2018/hyperlinkcolor" val="tx"/>
+                    </a:ext>
+                  </a:extLst>
+                </a:hlinkClick>
               </a:rPr>
-              <a:t> </a:t>
+              <a:t>Ryan Cook on Quora</a:t>
             </a:r>
-            <a:endParaRPr kumimoji="0" lang="en-US" altLang="en-US" sz="4800" b="0" i="0" u="none" strike="noStrike" cap="none" normalizeH="0" baseline="0" dirty="0">
-              <a:ln>
-                <a:noFill/>
-              </a:ln>
+            <a:endParaRPr lang="en-US" sz="1800" dirty="0">
               <a:solidFill>
-                <a:schemeClr val="tx1"/>
+                <a:srgbClr val="0000CC"/>
               </a:solidFill>
-              <a:effectLst/>
-              <a:latin typeface="Arial" panose="020B0604020202020204" pitchFamily="34" charset="0"/>
             </a:endParaRPr>
+          </a:p>
+        </p:txBody>
+      </p:sp>
+      <p:sp>
+        <p:nvSpPr>
+          <p:cNvPr id="4" name="TextBox 3">
+            <a:extLst>
+              <a:ext uri="{FF2B5EF4-FFF2-40B4-BE49-F238E27FC236}">
+                <a16:creationId xmlns:a16="http://schemas.microsoft.com/office/drawing/2014/main" id="{A4F9B7C8-7E1A-DD3A-B088-DC3B82A8CB6D}"/>
+              </a:ext>
+            </a:extLst>
+          </p:cNvPr>
+          <p:cNvSpPr txBox="1"/>
+          <p:nvPr/>
+        </p:nvSpPr>
+        <p:spPr>
+          <a:xfrm rot="19890769">
+            <a:off x="1943711" y="2369670"/>
+            <a:ext cx="4314001" cy="2215991"/>
+          </a:xfrm>
+          <a:prstGeom prst="rect">
+            <a:avLst/>
+          </a:prstGeom>
+          <a:noFill/>
+        </p:spPr>
+        <p:txBody>
+          <a:bodyPr wrap="none" rtlCol="0">
+            <a:spAutoFit/>
+          </a:bodyPr>
+          <a:lstStyle/>
+          <a:p>
+            <a:r>
+              <a:rPr lang="en-US" sz="13800" dirty="0"/>
+              <a:t>SKIP</a:t>
+            </a:r>
           </a:p>
         </p:txBody>
       </p:sp>
     </p:spTree>
     <p:extLst>
       <p:ext uri="{BB962C8B-B14F-4D97-AF65-F5344CB8AC3E}">
-        <p14:creationId xmlns:p14="http://schemas.microsoft.com/office/powerpoint/2010/main" val="1938818918"/>
+        <p14:creationId xmlns:p14="http://schemas.microsoft.com/office/powerpoint/2010/main" val="802517998"/>
       </p:ext>
     </p:extLst>
   </p:cSld>
@@ -31127,6 +32867,857 @@
       </p:sp>
       <p:sp>
         <p:nvSpPr>
+          <p:cNvPr id="3" name="TextBox 2">
+            <a:extLst>
+              <a:ext uri="{FF2B5EF4-FFF2-40B4-BE49-F238E27FC236}">
+                <a16:creationId xmlns:a16="http://schemas.microsoft.com/office/drawing/2014/main" id="{D3E37CC0-2ED8-60AA-BEC8-92CF82A06B7D}"/>
+              </a:ext>
+            </a:extLst>
+          </p:cNvPr>
+          <p:cNvSpPr txBox="1"/>
+          <p:nvPr/>
+        </p:nvSpPr>
+        <p:spPr>
+          <a:xfrm>
+            <a:off x="304800" y="1676400"/>
+            <a:ext cx="8382000" cy="4693593"/>
+          </a:xfrm>
+          <a:prstGeom prst="rect">
+            <a:avLst/>
+          </a:prstGeom>
+          <a:noFill/>
+        </p:spPr>
+        <p:txBody>
+          <a:bodyPr wrap="square">
+            <a:spAutoFit/>
+          </a:bodyPr>
+          <a:lstStyle/>
+          <a:p>
+            <a:pPr marL="342900" indent="-342900" algn="l">
+              <a:spcAft>
+                <a:spcPts val="1800"/>
+              </a:spcAft>
+              <a:buFont typeface="Arial" panose="020B0604020202020204" pitchFamily="34" charset="0"/>
+              <a:buChar char="•"/>
+            </a:pPr>
+            <a:r>
+              <a:rPr lang="en-US" sz="3200" b="1" i="0" dirty="0">
+                <a:solidFill>
+                  <a:srgbClr val="333333"/>
+                </a:solidFill>
+                <a:effectLst/>
+                <a:latin typeface="Arial" panose="020B0604020202020204" pitchFamily="34" charset="0"/>
+              </a:rPr>
+              <a:t>Start a method with argument validation</a:t>
+            </a:r>
+          </a:p>
+          <a:p>
+            <a:pPr marL="342900" indent="-342900" algn="l">
+              <a:spcAft>
+                <a:spcPts val="1800"/>
+              </a:spcAft>
+              <a:buFont typeface="Arial" panose="020B0604020202020204" pitchFamily="34" charset="0"/>
+              <a:buChar char="•"/>
+            </a:pPr>
+            <a:r>
+              <a:rPr lang="en-US" sz="3200" dirty="0">
+                <a:solidFill>
+                  <a:srgbClr val="333333"/>
+                </a:solidFill>
+              </a:rPr>
+              <a:t>Throw an exception if a test fails</a:t>
+            </a:r>
+          </a:p>
+          <a:p>
+            <a:pPr marL="342900" indent="-342900" algn="l">
+              <a:spcAft>
+                <a:spcPts val="1800"/>
+              </a:spcAft>
+              <a:buFont typeface="Arial" panose="020B0604020202020204" pitchFamily="34" charset="0"/>
+              <a:buChar char="•"/>
+            </a:pPr>
+            <a:r>
+              <a:rPr lang="en-US" sz="3200" b="1" i="0" dirty="0">
+                <a:solidFill>
+                  <a:srgbClr val="333333"/>
+                </a:solidFill>
+                <a:effectLst/>
+                <a:latin typeface="Arial" panose="020B0604020202020204" pitchFamily="34" charset="0"/>
+              </a:rPr>
+              <a:t>Usually unchecked exceptions are thrown:</a:t>
+            </a:r>
+          </a:p>
+          <a:p>
+            <a:pPr marL="800100" lvl="1" indent="-342900">
+              <a:spcAft>
+                <a:spcPts val="1800"/>
+              </a:spcAft>
+              <a:buFont typeface="Arial" panose="020B0604020202020204" pitchFamily="34" charset="0"/>
+              <a:buChar char="•"/>
+            </a:pPr>
+            <a:r>
+              <a:rPr lang="en-US" sz="3200" dirty="0" err="1">
+                <a:solidFill>
+                  <a:srgbClr val="333333"/>
+                </a:solidFill>
+              </a:rPr>
+              <a:t>IllegalArgumentException</a:t>
+            </a:r>
+            <a:endParaRPr lang="en-US" sz="3200" dirty="0">
+              <a:solidFill>
+                <a:srgbClr val="333333"/>
+              </a:solidFill>
+            </a:endParaRPr>
+          </a:p>
+          <a:p>
+            <a:pPr marL="800100" lvl="1" indent="-342900">
+              <a:spcAft>
+                <a:spcPts val="1800"/>
+              </a:spcAft>
+              <a:buFont typeface="Arial" panose="020B0604020202020204" pitchFamily="34" charset="0"/>
+              <a:buChar char="•"/>
+            </a:pPr>
+            <a:r>
+              <a:rPr lang="en-US" sz="3200" b="1" i="0" dirty="0" err="1">
+                <a:solidFill>
+                  <a:srgbClr val="333333"/>
+                </a:solidFill>
+                <a:effectLst/>
+                <a:latin typeface="Arial" panose="020B0604020202020204" pitchFamily="34" charset="0"/>
+              </a:rPr>
+              <a:t>NullPointerException</a:t>
+            </a:r>
+            <a:endParaRPr lang="en-US" sz="3200" b="1" i="0" dirty="0">
+              <a:solidFill>
+                <a:srgbClr val="333333"/>
+              </a:solidFill>
+              <a:effectLst/>
+              <a:latin typeface="Arial" panose="020B0604020202020204" pitchFamily="34" charset="0"/>
+            </a:endParaRPr>
+          </a:p>
+          <a:p>
+            <a:pPr marL="800100" lvl="1" indent="-342900">
+              <a:spcAft>
+                <a:spcPts val="1800"/>
+              </a:spcAft>
+              <a:buFont typeface="Arial" panose="020B0604020202020204" pitchFamily="34" charset="0"/>
+              <a:buChar char="•"/>
+            </a:pPr>
+            <a:r>
+              <a:rPr lang="en-US" sz="3200" dirty="0" err="1">
+                <a:solidFill>
+                  <a:srgbClr val="333333"/>
+                </a:solidFill>
+              </a:rPr>
+              <a:t>IllegalStateException</a:t>
+            </a:r>
+            <a:endParaRPr lang="en-US" sz="3200" b="1" i="0" dirty="0">
+              <a:solidFill>
+                <a:srgbClr val="333333"/>
+              </a:solidFill>
+              <a:effectLst/>
+              <a:latin typeface="Arial" panose="020B0604020202020204" pitchFamily="34" charset="0"/>
+            </a:endParaRPr>
+          </a:p>
+        </p:txBody>
+      </p:sp>
+    </p:spTree>
+    <p:extLst>
+      <p:ext uri="{BB962C8B-B14F-4D97-AF65-F5344CB8AC3E}">
+        <p14:creationId xmlns:p14="http://schemas.microsoft.com/office/powerpoint/2010/main" val="1847069436"/>
+      </p:ext>
+    </p:extLst>
+  </p:cSld>
+  <p:clrMapOvr>
+    <a:masterClrMapping/>
+  </p:clrMapOvr>
+</p:sld>
+</file>
+
+<file path=ppt/slides/slide8.xml><?xml version="1.0" encoding="utf-8"?>
+<p:sld xmlns:a="http://schemas.openxmlformats.org/drawingml/2006/main" xmlns:r="http://schemas.openxmlformats.org/officeDocument/2006/relationships" xmlns:p="http://schemas.openxmlformats.org/presentationml/2006/main">
+  <p:cSld>
+    <p:bg>
+      <p:bgPr>
+        <a:solidFill>
+          <a:schemeClr val="accent5">
+            <a:lumMod val="20000"/>
+            <a:lumOff val="80000"/>
+          </a:schemeClr>
+        </a:solidFill>
+        <a:effectLst/>
+      </p:bgPr>
+    </p:bg>
+    <p:spTree>
+      <p:nvGrpSpPr>
+        <p:cNvPr id="1" name=""/>
+        <p:cNvGrpSpPr/>
+        <p:nvPr/>
+      </p:nvGrpSpPr>
+      <p:grpSpPr>
+        <a:xfrm>
+          <a:off x="0" y="0"/>
+          <a:ext cx="0" cy="0"/>
+          <a:chOff x="0" y="0"/>
+          <a:chExt cx="0" cy="0"/>
+        </a:xfrm>
+      </p:grpSpPr>
+      <p:sp>
+        <p:nvSpPr>
+          <p:cNvPr id="45059" name="Text Box 2">
+            <a:extLst>
+              <a:ext uri="{FF2B5EF4-FFF2-40B4-BE49-F238E27FC236}">
+                <a16:creationId xmlns:a16="http://schemas.microsoft.com/office/drawing/2014/main" id="{C60E9072-76D3-4878-B05C-DE3C7DF1F1D8}"/>
+              </a:ext>
+            </a:extLst>
+          </p:cNvPr>
+          <p:cNvSpPr txBox="1">
+            <a:spLocks noChangeArrowheads="1"/>
+          </p:cNvSpPr>
+          <p:nvPr/>
+        </p:nvSpPr>
+        <p:spPr bwMode="auto">
+          <a:xfrm>
+            <a:off x="762000" y="457200"/>
+            <a:ext cx="7772400" cy="707886"/>
+          </a:xfrm>
+          <a:prstGeom prst="rect">
+            <a:avLst/>
+          </a:prstGeom>
+          <a:noFill/>
+          <a:ln>
+            <a:noFill/>
+          </a:ln>
+          <a:extLst>
+            <a:ext uri="{909E8E84-426E-40DD-AFC4-6F175D3DCCD1}">
+              <a14:hiddenFill xmlns:a14="http://schemas.microsoft.com/office/drawing/2010/main">
+                <a:solidFill>
+                  <a:srgbClr val="FFFFFF"/>
+                </a:solidFill>
+              </a14:hiddenFill>
+            </a:ext>
+            <a:ext uri="{91240B29-F687-4F45-9708-019B960494DF}">
+              <a14:hiddenLine xmlns:a14="http://schemas.microsoft.com/office/drawing/2010/main" w="12700">
+                <a:solidFill>
+                  <a:srgbClr val="000000"/>
+                </a:solidFill>
+                <a:miter lim="800000"/>
+                <a:headEnd type="none" w="sm" len="sm"/>
+                <a:tailEnd type="none" w="sm" len="sm"/>
+              </a14:hiddenLine>
+            </a:ext>
+          </a:extLst>
+        </p:spPr>
+        <p:txBody>
+          <a:bodyPr>
+            <a:spAutoFit/>
+          </a:bodyPr>
+          <a:lstStyle>
+            <a:lvl1pPr>
+              <a:spcBef>
+                <a:spcPct val="20000"/>
+              </a:spcBef>
+              <a:buChar char="•"/>
+              <a:defRPr sz="3200">
+                <a:solidFill>
+                  <a:schemeClr val="tx1"/>
+                </a:solidFill>
+                <a:latin typeface="Times New Roman" panose="02020603050405020304" pitchFamily="18" charset="0"/>
+              </a:defRPr>
+            </a:lvl1pPr>
+            <a:lvl2pPr marL="742950" indent="-285750">
+              <a:spcBef>
+                <a:spcPct val="20000"/>
+              </a:spcBef>
+              <a:buChar char="–"/>
+              <a:defRPr sz="2800">
+                <a:solidFill>
+                  <a:schemeClr val="tx1"/>
+                </a:solidFill>
+                <a:latin typeface="Times New Roman" panose="02020603050405020304" pitchFamily="18" charset="0"/>
+              </a:defRPr>
+            </a:lvl2pPr>
+            <a:lvl3pPr marL="1143000" indent="-228600">
+              <a:spcBef>
+                <a:spcPct val="20000"/>
+              </a:spcBef>
+              <a:buChar char="•"/>
+              <a:defRPr sz="2400">
+                <a:solidFill>
+                  <a:schemeClr val="tx1"/>
+                </a:solidFill>
+                <a:latin typeface="Times New Roman" panose="02020603050405020304" pitchFamily="18" charset="0"/>
+              </a:defRPr>
+            </a:lvl3pPr>
+            <a:lvl4pPr marL="1600200" indent="-228600">
+              <a:spcBef>
+                <a:spcPct val="20000"/>
+              </a:spcBef>
+              <a:buChar char="–"/>
+              <a:defRPr sz="2000">
+                <a:solidFill>
+                  <a:schemeClr val="tx1"/>
+                </a:solidFill>
+                <a:latin typeface="Times New Roman" panose="02020603050405020304" pitchFamily="18" charset="0"/>
+              </a:defRPr>
+            </a:lvl4pPr>
+            <a:lvl5pPr marL="2057400" indent="-228600">
+              <a:spcBef>
+                <a:spcPct val="20000"/>
+              </a:spcBef>
+              <a:buChar char="•"/>
+              <a:defRPr sz="2000">
+                <a:solidFill>
+                  <a:schemeClr val="tx1"/>
+                </a:solidFill>
+                <a:latin typeface="Times New Roman" panose="02020603050405020304" pitchFamily="18" charset="0"/>
+              </a:defRPr>
+            </a:lvl5pPr>
+            <a:lvl6pPr marL="2514600" indent="-228600" eaLnBrk="0" fontAlgn="base" hangingPunct="0">
+              <a:spcBef>
+                <a:spcPct val="20000"/>
+              </a:spcBef>
+              <a:spcAft>
+                <a:spcPct val="0"/>
+              </a:spcAft>
+              <a:buChar char="•"/>
+              <a:defRPr sz="2000">
+                <a:solidFill>
+                  <a:schemeClr val="tx1"/>
+                </a:solidFill>
+                <a:latin typeface="Times New Roman" panose="02020603050405020304" pitchFamily="18" charset="0"/>
+              </a:defRPr>
+            </a:lvl6pPr>
+            <a:lvl7pPr marL="2971800" indent="-228600" eaLnBrk="0" fontAlgn="base" hangingPunct="0">
+              <a:spcBef>
+                <a:spcPct val="20000"/>
+              </a:spcBef>
+              <a:spcAft>
+                <a:spcPct val="0"/>
+              </a:spcAft>
+              <a:buChar char="•"/>
+              <a:defRPr sz="2000">
+                <a:solidFill>
+                  <a:schemeClr val="tx1"/>
+                </a:solidFill>
+                <a:latin typeface="Times New Roman" panose="02020603050405020304" pitchFamily="18" charset="0"/>
+              </a:defRPr>
+            </a:lvl7pPr>
+            <a:lvl8pPr marL="3429000" indent="-228600" eaLnBrk="0" fontAlgn="base" hangingPunct="0">
+              <a:spcBef>
+                <a:spcPct val="20000"/>
+              </a:spcBef>
+              <a:spcAft>
+                <a:spcPct val="0"/>
+              </a:spcAft>
+              <a:buChar char="•"/>
+              <a:defRPr sz="2000">
+                <a:solidFill>
+                  <a:schemeClr val="tx1"/>
+                </a:solidFill>
+                <a:latin typeface="Times New Roman" panose="02020603050405020304" pitchFamily="18" charset="0"/>
+              </a:defRPr>
+            </a:lvl8pPr>
+            <a:lvl9pPr marL="3886200" indent="-228600" eaLnBrk="0" fontAlgn="base" hangingPunct="0">
+              <a:spcBef>
+                <a:spcPct val="20000"/>
+              </a:spcBef>
+              <a:spcAft>
+                <a:spcPct val="0"/>
+              </a:spcAft>
+              <a:buChar char="•"/>
+              <a:defRPr sz="2000">
+                <a:solidFill>
+                  <a:schemeClr val="tx1"/>
+                </a:solidFill>
+                <a:latin typeface="Times New Roman" panose="02020603050405020304" pitchFamily="18" charset="0"/>
+              </a:defRPr>
+            </a:lvl9pPr>
+          </a:lstStyle>
+          <a:p>
+            <a:pPr algn="ctr">
+              <a:spcBef>
+                <a:spcPct val="0"/>
+              </a:spcBef>
+              <a:buFontTx/>
+              <a:buNone/>
+            </a:pPr>
+            <a:r>
+              <a:rPr lang="en-US" altLang="en-US" sz="4000" dirty="0">
+                <a:latin typeface="Arial" panose="020B0604020202020204" pitchFamily="34" charset="0"/>
+              </a:rPr>
+              <a:t>Validating Method Arguments</a:t>
+            </a:r>
+          </a:p>
+        </p:txBody>
+      </p:sp>
+      <p:sp>
+        <p:nvSpPr>
+          <p:cNvPr id="4" name="Rectangle 2">
+            <a:extLst>
+              <a:ext uri="{FF2B5EF4-FFF2-40B4-BE49-F238E27FC236}">
+                <a16:creationId xmlns:a16="http://schemas.microsoft.com/office/drawing/2014/main" id="{00545DB6-0041-69A8-6CD5-B21EAD094964}"/>
+              </a:ext>
+            </a:extLst>
+          </p:cNvPr>
+          <p:cNvSpPr>
+            <a:spLocks noChangeArrowheads="1"/>
+          </p:cNvSpPr>
+          <p:nvPr/>
+        </p:nvSpPr>
+        <p:spPr bwMode="auto">
+          <a:xfrm>
+            <a:off x="533400" y="1434898"/>
+            <a:ext cx="8077200" cy="5062924"/>
+          </a:xfrm>
+          <a:prstGeom prst="rect">
+            <a:avLst/>
+          </a:prstGeom>
+          <a:noFill/>
+          <a:ln>
+            <a:noFill/>
+          </a:ln>
+          <a:effectLst/>
+          <a:extLst>
+            <a:ext uri="{909E8E84-426E-40DD-AFC4-6F175D3DCCD1}">
+              <a14:hiddenFill xmlns:a14="http://schemas.microsoft.com/office/drawing/2010/main">
+                <a:solidFill>
+                  <a:schemeClr val="accent1"/>
+                </a:solidFill>
+              </a14:hiddenFill>
+            </a:ext>
+            <a:ext uri="{91240B29-F687-4F45-9708-019B960494DF}">
+              <a14:hiddenLine xmlns:a14="http://schemas.microsoft.com/office/drawing/2010/main" w="9525">
+                <a:solidFill>
+                  <a:schemeClr val="tx1"/>
+                </a:solidFill>
+                <a:miter lim="800000"/>
+                <a:headEnd/>
+                <a:tailEnd/>
+              </a14:hiddenLine>
+            </a:ext>
+            <a:ext uri="{AF507438-7753-43E0-B8FC-AC1667EBCBE1}">
+              <a14:hiddenEffects xmlns:a14="http://schemas.microsoft.com/office/drawing/2010/main">
+                <a:effectLst>
+                  <a:outerShdw dist="35921" dir="2700000" algn="ctr" rotWithShape="0">
+                    <a:schemeClr val="bg2"/>
+                  </a:outerShdw>
+                </a:effectLst>
+              </a14:hiddenEffects>
+            </a:ext>
+          </a:extLst>
+        </p:spPr>
+        <p:txBody>
+          <a:bodyPr vert="horz" wrap="square" lIns="91440" tIns="45720" rIns="91440" bIns="45720" numCol="1" anchor="ctr" anchorCtr="0" compatLnSpc="1">
+            <a:prstTxWarp prst="textNoShape">
+              <a:avLst/>
+            </a:prstTxWarp>
+            <a:spAutoFit/>
+          </a:bodyPr>
+          <a:lstStyle/>
+          <a:p>
+            <a:pPr marL="0" marR="0" lvl="0" indent="0" algn="l" defTabSz="914400" rtl="0" eaLnBrk="0" fontAlgn="base" latinLnBrk="0" hangingPunct="0">
+              <a:lnSpc>
+                <a:spcPct val="100000"/>
+              </a:lnSpc>
+              <a:spcBef>
+                <a:spcPct val="0"/>
+              </a:spcBef>
+              <a:spcAft>
+                <a:spcPts val="1800"/>
+              </a:spcAft>
+              <a:buClrTx/>
+              <a:buSzTx/>
+              <a:buFontTx/>
+              <a:buNone/>
+              <a:tabLst/>
+            </a:pPr>
+            <a:r>
+              <a:rPr kumimoji="0" lang="en-US" altLang="en-US" sz="3600" b="0" i="0" u="none" strike="noStrike" cap="none" normalizeH="0" baseline="0" dirty="0">
+                <a:ln>
+                  <a:noFill/>
+                </a:ln>
+                <a:solidFill>
+                  <a:srgbClr val="000000"/>
+                </a:solidFill>
+                <a:effectLst/>
+                <a:latin typeface="Verdana" panose="020B0604030504040204" pitchFamily="34" charset="0"/>
+                <a:ea typeface="Times New Roman" panose="02020603050405020304" pitchFamily="18" charset="0"/>
+              </a:rPr>
+              <a:t>Some common validations:</a:t>
+            </a:r>
+            <a:endParaRPr kumimoji="0" lang="en-US" altLang="en-US" sz="1400" b="0" i="0" u="none" strike="noStrike" cap="none" normalizeH="0" baseline="0" dirty="0">
+              <a:ln>
+                <a:noFill/>
+              </a:ln>
+              <a:solidFill>
+                <a:schemeClr val="tx1"/>
+              </a:solidFill>
+              <a:effectLst/>
+            </a:endParaRPr>
+          </a:p>
+          <a:p>
+            <a:pPr marL="571500" marR="0" lvl="0" indent="-571500" algn="l" defTabSz="914400" rtl="0" eaLnBrk="0" fontAlgn="base" latinLnBrk="0" hangingPunct="0">
+              <a:lnSpc>
+                <a:spcPct val="100000"/>
+              </a:lnSpc>
+              <a:spcBef>
+                <a:spcPct val="0"/>
+              </a:spcBef>
+              <a:spcAft>
+                <a:spcPts val="1200"/>
+              </a:spcAft>
+              <a:buClrTx/>
+              <a:buSzTx/>
+              <a:buFont typeface="Arial" panose="020B0604020202020204" pitchFamily="34" charset="0"/>
+              <a:buChar char="•"/>
+              <a:tabLst/>
+            </a:pPr>
+            <a:r>
+              <a:rPr kumimoji="0" lang="en-US" altLang="en-US" sz="3600" b="0" i="0" u="none" strike="noStrike" cap="none" normalizeH="0" baseline="0" dirty="0">
+                <a:ln>
+                  <a:noFill/>
+                </a:ln>
+                <a:solidFill>
+                  <a:srgbClr val="000000"/>
+                </a:solidFill>
+                <a:effectLst/>
+                <a:latin typeface="Verdana" panose="020B0604030504040204" pitchFamily="34" charset="0"/>
+                <a:ea typeface="Times New Roman" panose="02020603050405020304" pitchFamily="18" charset="0"/>
+              </a:rPr>
+              <a:t>check that text has visible content</a:t>
+            </a:r>
+          </a:p>
+          <a:p>
+            <a:pPr marL="571500" marR="0" lvl="0" indent="-571500" algn="l" defTabSz="914400" rtl="0" eaLnBrk="0" fontAlgn="base" latinLnBrk="0" hangingPunct="0">
+              <a:lnSpc>
+                <a:spcPct val="100000"/>
+              </a:lnSpc>
+              <a:spcBef>
+                <a:spcPct val="0"/>
+              </a:spcBef>
+              <a:spcAft>
+                <a:spcPts val="1200"/>
+              </a:spcAft>
+              <a:buClrTx/>
+              <a:buSzTx/>
+              <a:buFont typeface="Arial" panose="020B0604020202020204" pitchFamily="34" charset="0"/>
+              <a:buChar char="•"/>
+              <a:tabLst/>
+            </a:pPr>
+            <a:r>
+              <a:rPr kumimoji="0" lang="en-US" altLang="en-US" sz="3600" b="0" i="0" u="none" strike="noStrike" cap="none" normalizeH="0" baseline="0" dirty="0">
+                <a:ln>
+                  <a:noFill/>
+                </a:ln>
+                <a:solidFill>
+                  <a:srgbClr val="000000"/>
+                </a:solidFill>
+                <a:effectLst/>
+                <a:latin typeface="Verdana" panose="020B0604030504040204" pitchFamily="34" charset="0"/>
+                <a:ea typeface="Times New Roman" panose="02020603050405020304" pitchFamily="18" charset="0"/>
+                <a:cs typeface="Times New Roman" panose="02020603050405020304" pitchFamily="18" charset="0"/>
+              </a:rPr>
+              <a:t>check that a number is in some range</a:t>
+            </a:r>
+            <a:r>
+              <a:rPr kumimoji="0" lang="en-US" altLang="en-US" sz="1400" b="0" i="0" u="none" strike="noStrike" cap="none" normalizeH="0" baseline="0" dirty="0">
+                <a:ln>
+                  <a:noFill/>
+                </a:ln>
+                <a:solidFill>
+                  <a:schemeClr val="tx1"/>
+                </a:solidFill>
+                <a:effectLst/>
+              </a:rPr>
+              <a:t> </a:t>
+            </a:r>
+            <a:endParaRPr kumimoji="0" lang="en-US" altLang="en-US" sz="4800" b="0" i="0" u="none" strike="noStrike" cap="none" normalizeH="0" baseline="0" dirty="0">
+              <a:ln>
+                <a:noFill/>
+              </a:ln>
+              <a:solidFill>
+                <a:schemeClr val="tx1"/>
+              </a:solidFill>
+              <a:effectLst/>
+              <a:latin typeface="Arial" panose="020B0604020202020204" pitchFamily="34" charset="0"/>
+            </a:endParaRPr>
+          </a:p>
+          <a:p>
+            <a:pPr marL="571500" marR="0" lvl="0" indent="-571500" algn="l" defTabSz="914400" rtl="0" eaLnBrk="0" fontAlgn="base" latinLnBrk="0" hangingPunct="0">
+              <a:lnSpc>
+                <a:spcPct val="100000"/>
+              </a:lnSpc>
+              <a:spcBef>
+                <a:spcPct val="0"/>
+              </a:spcBef>
+              <a:spcAft>
+                <a:spcPts val="1200"/>
+              </a:spcAft>
+              <a:buClrTx/>
+              <a:buSzTx/>
+              <a:buFont typeface="Arial" panose="020B0604020202020204" pitchFamily="34" charset="0"/>
+              <a:buChar char="•"/>
+              <a:tabLst/>
+            </a:pPr>
+            <a:r>
+              <a:rPr kumimoji="0" lang="en-US" altLang="en-US" sz="3600" b="0" i="0" u="none" strike="noStrike" cap="none" normalizeH="0" baseline="0" dirty="0">
+                <a:ln>
+                  <a:noFill/>
+                </a:ln>
+                <a:solidFill>
+                  <a:srgbClr val="000000"/>
+                </a:solidFill>
+                <a:effectLst/>
+                <a:latin typeface="Verdana" panose="020B0604030504040204" pitchFamily="34" charset="0"/>
+                <a:ea typeface="Times New Roman" panose="02020603050405020304" pitchFamily="18" charset="0"/>
+              </a:rPr>
+              <a:t>check for a null reference (but only necessary if NPE would pop up later)</a:t>
+            </a:r>
+            <a:endParaRPr kumimoji="0" lang="en-US" altLang="en-US" sz="1400" b="0" i="0" u="none" strike="noStrike" cap="none" normalizeH="0" baseline="0" dirty="0">
+              <a:ln>
+                <a:noFill/>
+              </a:ln>
+              <a:solidFill>
+                <a:schemeClr val="tx1"/>
+              </a:solidFill>
+              <a:effectLst/>
+            </a:endParaRPr>
+          </a:p>
+        </p:txBody>
+      </p:sp>
+    </p:spTree>
+    <p:extLst>
+      <p:ext uri="{BB962C8B-B14F-4D97-AF65-F5344CB8AC3E}">
+        <p14:creationId xmlns:p14="http://schemas.microsoft.com/office/powerpoint/2010/main" val="1938818918"/>
+      </p:ext>
+    </p:extLst>
+  </p:cSld>
+  <p:clrMapOvr>
+    <a:masterClrMapping/>
+  </p:clrMapOvr>
+</p:sld>
+</file>
+
+<file path=ppt/slides/slide9.xml><?xml version="1.0" encoding="utf-8"?>
+<p:sld xmlns:a="http://schemas.openxmlformats.org/drawingml/2006/main" xmlns:r="http://schemas.openxmlformats.org/officeDocument/2006/relationships" xmlns:p="http://schemas.openxmlformats.org/presentationml/2006/main">
+  <p:cSld>
+    <p:bg>
+      <p:bgPr>
+        <a:solidFill>
+          <a:schemeClr val="accent5">
+            <a:lumMod val="20000"/>
+            <a:lumOff val="80000"/>
+          </a:schemeClr>
+        </a:solidFill>
+        <a:effectLst/>
+      </p:bgPr>
+    </p:bg>
+    <p:spTree>
+      <p:nvGrpSpPr>
+        <p:cNvPr id="1" name=""/>
+        <p:cNvGrpSpPr/>
+        <p:nvPr/>
+      </p:nvGrpSpPr>
+      <p:grpSpPr>
+        <a:xfrm>
+          <a:off x="0" y="0"/>
+          <a:ext cx="0" cy="0"/>
+          <a:chOff x="0" y="0"/>
+          <a:chExt cx="0" cy="0"/>
+        </a:xfrm>
+      </p:grpSpPr>
+      <p:sp>
+        <p:nvSpPr>
+          <p:cNvPr id="45059" name="Text Box 2">
+            <a:extLst>
+              <a:ext uri="{FF2B5EF4-FFF2-40B4-BE49-F238E27FC236}">
+                <a16:creationId xmlns:a16="http://schemas.microsoft.com/office/drawing/2014/main" id="{C60E9072-76D3-4878-B05C-DE3C7DF1F1D8}"/>
+              </a:ext>
+            </a:extLst>
+          </p:cNvPr>
+          <p:cNvSpPr txBox="1">
+            <a:spLocks noChangeArrowheads="1"/>
+          </p:cNvSpPr>
+          <p:nvPr/>
+        </p:nvSpPr>
+        <p:spPr bwMode="auto">
+          <a:xfrm>
+            <a:off x="762000" y="457200"/>
+            <a:ext cx="7772400" cy="707886"/>
+          </a:xfrm>
+          <a:prstGeom prst="rect">
+            <a:avLst/>
+          </a:prstGeom>
+          <a:noFill/>
+          <a:ln>
+            <a:noFill/>
+          </a:ln>
+          <a:extLst>
+            <a:ext uri="{909E8E84-426E-40DD-AFC4-6F175D3DCCD1}">
+              <a14:hiddenFill xmlns:a14="http://schemas.microsoft.com/office/drawing/2010/main">
+                <a:solidFill>
+                  <a:srgbClr val="FFFFFF"/>
+                </a:solidFill>
+              </a14:hiddenFill>
+            </a:ext>
+            <a:ext uri="{91240B29-F687-4F45-9708-019B960494DF}">
+              <a14:hiddenLine xmlns:a14="http://schemas.microsoft.com/office/drawing/2010/main" w="12700">
+                <a:solidFill>
+                  <a:srgbClr val="000000"/>
+                </a:solidFill>
+                <a:miter lim="800000"/>
+                <a:headEnd type="none" w="sm" len="sm"/>
+                <a:tailEnd type="none" w="sm" len="sm"/>
+              </a14:hiddenLine>
+            </a:ext>
+          </a:extLst>
+        </p:spPr>
+        <p:txBody>
+          <a:bodyPr>
+            <a:spAutoFit/>
+          </a:bodyPr>
+          <a:lstStyle>
+            <a:lvl1pPr>
+              <a:spcBef>
+                <a:spcPct val="20000"/>
+              </a:spcBef>
+              <a:buChar char="•"/>
+              <a:defRPr sz="3200">
+                <a:solidFill>
+                  <a:schemeClr val="tx1"/>
+                </a:solidFill>
+                <a:latin typeface="Times New Roman" panose="02020603050405020304" pitchFamily="18" charset="0"/>
+              </a:defRPr>
+            </a:lvl1pPr>
+            <a:lvl2pPr marL="742950" indent="-285750">
+              <a:spcBef>
+                <a:spcPct val="20000"/>
+              </a:spcBef>
+              <a:buChar char="–"/>
+              <a:defRPr sz="2800">
+                <a:solidFill>
+                  <a:schemeClr val="tx1"/>
+                </a:solidFill>
+                <a:latin typeface="Times New Roman" panose="02020603050405020304" pitchFamily="18" charset="0"/>
+              </a:defRPr>
+            </a:lvl2pPr>
+            <a:lvl3pPr marL="1143000" indent="-228600">
+              <a:spcBef>
+                <a:spcPct val="20000"/>
+              </a:spcBef>
+              <a:buChar char="•"/>
+              <a:defRPr sz="2400">
+                <a:solidFill>
+                  <a:schemeClr val="tx1"/>
+                </a:solidFill>
+                <a:latin typeface="Times New Roman" panose="02020603050405020304" pitchFamily="18" charset="0"/>
+              </a:defRPr>
+            </a:lvl3pPr>
+            <a:lvl4pPr marL="1600200" indent="-228600">
+              <a:spcBef>
+                <a:spcPct val="20000"/>
+              </a:spcBef>
+              <a:buChar char="–"/>
+              <a:defRPr sz="2000">
+                <a:solidFill>
+                  <a:schemeClr val="tx1"/>
+                </a:solidFill>
+                <a:latin typeface="Times New Roman" panose="02020603050405020304" pitchFamily="18" charset="0"/>
+              </a:defRPr>
+            </a:lvl4pPr>
+            <a:lvl5pPr marL="2057400" indent="-228600">
+              <a:spcBef>
+                <a:spcPct val="20000"/>
+              </a:spcBef>
+              <a:buChar char="•"/>
+              <a:defRPr sz="2000">
+                <a:solidFill>
+                  <a:schemeClr val="tx1"/>
+                </a:solidFill>
+                <a:latin typeface="Times New Roman" panose="02020603050405020304" pitchFamily="18" charset="0"/>
+              </a:defRPr>
+            </a:lvl5pPr>
+            <a:lvl6pPr marL="2514600" indent="-228600" eaLnBrk="0" fontAlgn="base" hangingPunct="0">
+              <a:spcBef>
+                <a:spcPct val="20000"/>
+              </a:spcBef>
+              <a:spcAft>
+                <a:spcPct val="0"/>
+              </a:spcAft>
+              <a:buChar char="•"/>
+              <a:defRPr sz="2000">
+                <a:solidFill>
+                  <a:schemeClr val="tx1"/>
+                </a:solidFill>
+                <a:latin typeface="Times New Roman" panose="02020603050405020304" pitchFamily="18" charset="0"/>
+              </a:defRPr>
+            </a:lvl6pPr>
+            <a:lvl7pPr marL="2971800" indent="-228600" eaLnBrk="0" fontAlgn="base" hangingPunct="0">
+              <a:spcBef>
+                <a:spcPct val="20000"/>
+              </a:spcBef>
+              <a:spcAft>
+                <a:spcPct val="0"/>
+              </a:spcAft>
+              <a:buChar char="•"/>
+              <a:defRPr sz="2000">
+                <a:solidFill>
+                  <a:schemeClr val="tx1"/>
+                </a:solidFill>
+                <a:latin typeface="Times New Roman" panose="02020603050405020304" pitchFamily="18" charset="0"/>
+              </a:defRPr>
+            </a:lvl7pPr>
+            <a:lvl8pPr marL="3429000" indent="-228600" eaLnBrk="0" fontAlgn="base" hangingPunct="0">
+              <a:spcBef>
+                <a:spcPct val="20000"/>
+              </a:spcBef>
+              <a:spcAft>
+                <a:spcPct val="0"/>
+              </a:spcAft>
+              <a:buChar char="•"/>
+              <a:defRPr sz="2000">
+                <a:solidFill>
+                  <a:schemeClr val="tx1"/>
+                </a:solidFill>
+                <a:latin typeface="Times New Roman" panose="02020603050405020304" pitchFamily="18" charset="0"/>
+              </a:defRPr>
+            </a:lvl8pPr>
+            <a:lvl9pPr marL="3886200" indent="-228600" eaLnBrk="0" fontAlgn="base" hangingPunct="0">
+              <a:spcBef>
+                <a:spcPct val="20000"/>
+              </a:spcBef>
+              <a:spcAft>
+                <a:spcPct val="0"/>
+              </a:spcAft>
+              <a:buChar char="•"/>
+              <a:defRPr sz="2000">
+                <a:solidFill>
+                  <a:schemeClr val="tx1"/>
+                </a:solidFill>
+                <a:latin typeface="Times New Roman" panose="02020603050405020304" pitchFamily="18" charset="0"/>
+              </a:defRPr>
+            </a:lvl9pPr>
+          </a:lstStyle>
+          <a:p>
+            <a:pPr algn="ctr">
+              <a:spcBef>
+                <a:spcPct val="0"/>
+              </a:spcBef>
+              <a:buFontTx/>
+              <a:buNone/>
+            </a:pPr>
+            <a:r>
+              <a:rPr lang="en-US" altLang="en-US" sz="4000" dirty="0">
+                <a:latin typeface="Arial" panose="020B0604020202020204" pitchFamily="34" charset="0"/>
+              </a:rPr>
+              <a:t>Validating Method Arguments</a:t>
+            </a:r>
+          </a:p>
+        </p:txBody>
+      </p:sp>
+      <p:sp>
+        <p:nvSpPr>
           <p:cNvPr id="2" name="Rectangle 1">
             <a:extLst>
               <a:ext uri="{FF2B5EF4-FFF2-40B4-BE49-F238E27FC236}">
@@ -32187,1472 +34778,6 @@
   <p:clrMapOvr>
     <a:masterClrMapping/>
   </p:clrMapOvr>
-</p:sld>
-</file>
-
-<file path=ppt/slides/slide8.xml><?xml version="1.0" encoding="utf-8"?>
-<p:sld xmlns:a="http://schemas.openxmlformats.org/drawingml/2006/main" xmlns:r="http://schemas.openxmlformats.org/officeDocument/2006/relationships" xmlns:p="http://schemas.openxmlformats.org/presentationml/2006/main">
-  <p:cSld>
-    <p:spTree>
-      <p:nvGrpSpPr>
-        <p:cNvPr id="1" name=""/>
-        <p:cNvGrpSpPr/>
-        <p:nvPr/>
-      </p:nvGrpSpPr>
-      <p:grpSpPr>
-        <a:xfrm>
-          <a:off x="0" y="0"/>
-          <a:ext cx="0" cy="0"/>
-          <a:chOff x="0" y="0"/>
-          <a:chExt cx="0" cy="0"/>
-        </a:xfrm>
-      </p:grpSpPr>
-      <p:sp>
-        <p:nvSpPr>
-          <p:cNvPr id="88066" name="Slide Number Placeholder 3">
-            <a:extLst>
-              <a:ext uri="{FF2B5EF4-FFF2-40B4-BE49-F238E27FC236}">
-                <a16:creationId xmlns:a16="http://schemas.microsoft.com/office/drawing/2014/main" id="{5BBDB527-D5DF-E0E6-B818-3DFB4405023F}"/>
-              </a:ext>
-            </a:extLst>
-          </p:cNvPr>
-          <p:cNvSpPr>
-            <a:spLocks noGrp="1"/>
-          </p:cNvSpPr>
-          <p:nvPr>
-            <p:ph type="sldNum" sz="quarter" idx="10"/>
-          </p:nvPr>
-        </p:nvSpPr>
-        <p:spPr>
-          <a:noFill/>
-        </p:spPr>
-        <p:txBody>
-          <a:bodyPr/>
-          <a:lstStyle>
-            <a:lvl1pPr eaLnBrk="0" hangingPunct="0">
-              <a:defRPr sz="1600">
-                <a:solidFill>
-                  <a:schemeClr val="tx1"/>
-                </a:solidFill>
-                <a:latin typeface="Tahoma" panose="020B0604030504040204" pitchFamily="34" charset="0"/>
-                <a:ea typeface="SimSun" panose="02010600030101010101" pitchFamily="2" charset="-122"/>
-              </a:defRPr>
-            </a:lvl1pPr>
-            <a:lvl2pPr marL="742950" indent="-285750" eaLnBrk="0" hangingPunct="0">
-              <a:defRPr sz="1600">
-                <a:solidFill>
-                  <a:schemeClr val="tx1"/>
-                </a:solidFill>
-                <a:latin typeface="Tahoma" panose="020B0604030504040204" pitchFamily="34" charset="0"/>
-                <a:ea typeface="SimSun" panose="02010600030101010101" pitchFamily="2" charset="-122"/>
-              </a:defRPr>
-            </a:lvl2pPr>
-            <a:lvl3pPr marL="1143000" indent="-228600" eaLnBrk="0" hangingPunct="0">
-              <a:defRPr sz="1600">
-                <a:solidFill>
-                  <a:schemeClr val="tx1"/>
-                </a:solidFill>
-                <a:latin typeface="Tahoma" panose="020B0604030504040204" pitchFamily="34" charset="0"/>
-                <a:ea typeface="SimSun" panose="02010600030101010101" pitchFamily="2" charset="-122"/>
-              </a:defRPr>
-            </a:lvl3pPr>
-            <a:lvl4pPr marL="1600200" indent="-228600" eaLnBrk="0" hangingPunct="0">
-              <a:defRPr sz="1600">
-                <a:solidFill>
-                  <a:schemeClr val="tx1"/>
-                </a:solidFill>
-                <a:latin typeface="Tahoma" panose="020B0604030504040204" pitchFamily="34" charset="0"/>
-                <a:ea typeface="SimSun" panose="02010600030101010101" pitchFamily="2" charset="-122"/>
-              </a:defRPr>
-            </a:lvl4pPr>
-            <a:lvl5pPr marL="2057400" indent="-228600" eaLnBrk="0" hangingPunct="0">
-              <a:defRPr sz="1600">
-                <a:solidFill>
-                  <a:schemeClr val="tx1"/>
-                </a:solidFill>
-                <a:latin typeface="Tahoma" panose="020B0604030504040204" pitchFamily="34" charset="0"/>
-                <a:ea typeface="SimSun" panose="02010600030101010101" pitchFamily="2" charset="-122"/>
-              </a:defRPr>
-            </a:lvl5pPr>
-            <a:lvl6pPr marL="2514600" indent="-228600" algn="ctr" eaLnBrk="0" fontAlgn="base" hangingPunct="0">
-              <a:spcBef>
-                <a:spcPct val="0"/>
-              </a:spcBef>
-              <a:spcAft>
-                <a:spcPct val="0"/>
-              </a:spcAft>
-              <a:defRPr sz="1600">
-                <a:solidFill>
-                  <a:schemeClr val="tx1"/>
-                </a:solidFill>
-                <a:latin typeface="Tahoma" panose="020B0604030504040204" pitchFamily="34" charset="0"/>
-                <a:ea typeface="SimSun" panose="02010600030101010101" pitchFamily="2" charset="-122"/>
-              </a:defRPr>
-            </a:lvl6pPr>
-            <a:lvl7pPr marL="2971800" indent="-228600" algn="ctr" eaLnBrk="0" fontAlgn="base" hangingPunct="0">
-              <a:spcBef>
-                <a:spcPct val="0"/>
-              </a:spcBef>
-              <a:spcAft>
-                <a:spcPct val="0"/>
-              </a:spcAft>
-              <a:defRPr sz="1600">
-                <a:solidFill>
-                  <a:schemeClr val="tx1"/>
-                </a:solidFill>
-                <a:latin typeface="Tahoma" panose="020B0604030504040204" pitchFamily="34" charset="0"/>
-                <a:ea typeface="SimSun" panose="02010600030101010101" pitchFamily="2" charset="-122"/>
-              </a:defRPr>
-            </a:lvl7pPr>
-            <a:lvl8pPr marL="3429000" indent="-228600" algn="ctr" eaLnBrk="0" fontAlgn="base" hangingPunct="0">
-              <a:spcBef>
-                <a:spcPct val="0"/>
-              </a:spcBef>
-              <a:spcAft>
-                <a:spcPct val="0"/>
-              </a:spcAft>
-              <a:defRPr sz="1600">
-                <a:solidFill>
-                  <a:schemeClr val="tx1"/>
-                </a:solidFill>
-                <a:latin typeface="Tahoma" panose="020B0604030504040204" pitchFamily="34" charset="0"/>
-                <a:ea typeface="SimSun" panose="02010600030101010101" pitchFamily="2" charset="-122"/>
-              </a:defRPr>
-            </a:lvl8pPr>
-            <a:lvl9pPr marL="3886200" indent="-228600" algn="ctr" eaLnBrk="0" fontAlgn="base" hangingPunct="0">
-              <a:spcBef>
-                <a:spcPct val="0"/>
-              </a:spcBef>
-              <a:spcAft>
-                <a:spcPct val="0"/>
-              </a:spcAft>
-              <a:defRPr sz="1600">
-                <a:solidFill>
-                  <a:schemeClr val="tx1"/>
-                </a:solidFill>
-                <a:latin typeface="Tahoma" panose="020B0604030504040204" pitchFamily="34" charset="0"/>
-                <a:ea typeface="SimSun" panose="02010600030101010101" pitchFamily="2" charset="-122"/>
-              </a:defRPr>
-            </a:lvl9pPr>
-          </a:lstStyle>
-          <a:p>
-            <a:pPr marL="0" marR="0" lvl="0" indent="0" algn="r" defTabSz="914400" rtl="0" eaLnBrk="1" fontAlgn="base" latinLnBrk="0" hangingPunct="1">
-              <a:lnSpc>
-                <a:spcPct val="100000"/>
-              </a:lnSpc>
-              <a:spcBef>
-                <a:spcPct val="0"/>
-              </a:spcBef>
-              <a:spcAft>
-                <a:spcPct val="0"/>
-              </a:spcAft>
-              <a:buClrTx/>
-              <a:buSzTx/>
-              <a:buFontTx/>
-              <a:buNone/>
-              <a:tabLst/>
-              <a:defRPr/>
-            </a:pPr>
-            <a:fld id="{F8F3E389-CFBC-4E83-949E-FA40F624B7E5}" type="slidenum">
-              <a:rPr kumimoji="0" lang="zh-CN" altLang="en-GB" sz="1400" b="0" i="0" u="none" strike="noStrike" kern="1200" cap="none" spc="0" normalizeH="0" baseline="0" noProof="0">
-                <a:ln>
-                  <a:noFill/>
-                </a:ln>
-                <a:solidFill>
-                  <a:srgbClr val="000000"/>
-                </a:solidFill>
-                <a:effectLst/>
-                <a:uLnTx/>
-                <a:uFillTx/>
-                <a:latin typeface="Tahoma" panose="020B0604030504040204" pitchFamily="34" charset="0"/>
-                <a:ea typeface="SimSun" panose="02010600030101010101" pitchFamily="2" charset="-122"/>
-                <a:cs typeface="+mn-cs"/>
-              </a:rPr>
-              <a:pPr marL="0" marR="0" lvl="0" indent="0" algn="r" defTabSz="914400" rtl="0" eaLnBrk="1" fontAlgn="base" latinLnBrk="0" hangingPunct="1">
-                <a:lnSpc>
-                  <a:spcPct val="100000"/>
-                </a:lnSpc>
-                <a:spcBef>
-                  <a:spcPct val="0"/>
-                </a:spcBef>
-                <a:spcAft>
-                  <a:spcPct val="0"/>
-                </a:spcAft>
-                <a:buClrTx/>
-                <a:buSzTx/>
-                <a:buFontTx/>
-                <a:buNone/>
-                <a:tabLst/>
-                <a:defRPr/>
-              </a:pPr>
-              <a:t>8</a:t>
-            </a:fld>
-            <a:endParaRPr kumimoji="0" lang="en-GB" altLang="zh-CN" sz="1400" b="0" i="0" u="none" strike="noStrike" kern="1200" cap="none" spc="0" normalizeH="0" baseline="0" noProof="0">
-              <a:ln>
-                <a:noFill/>
-              </a:ln>
-              <a:solidFill>
-                <a:srgbClr val="000000"/>
-              </a:solidFill>
-              <a:effectLst/>
-              <a:uLnTx/>
-              <a:uFillTx/>
-              <a:latin typeface="Tahoma" panose="020B0604030504040204" pitchFamily="34" charset="0"/>
-              <a:ea typeface="SimSun" panose="02010600030101010101" pitchFamily="2" charset="-122"/>
-              <a:cs typeface="+mn-cs"/>
-            </a:endParaRPr>
-          </a:p>
-        </p:txBody>
-      </p:sp>
-      <p:sp>
-        <p:nvSpPr>
-          <p:cNvPr id="88067" name="Rectangle 4">
-            <a:extLst>
-              <a:ext uri="{FF2B5EF4-FFF2-40B4-BE49-F238E27FC236}">
-                <a16:creationId xmlns:a16="http://schemas.microsoft.com/office/drawing/2014/main" id="{AF674103-C0F1-A9D4-7768-382304AFC3EE}"/>
-              </a:ext>
-            </a:extLst>
-          </p:cNvPr>
-          <p:cNvSpPr>
-            <a:spLocks noGrp="1" noChangeArrowheads="1"/>
-          </p:cNvSpPr>
-          <p:nvPr/>
-        </p:nvSpPr>
-        <p:spPr bwMode="auto">
-          <a:xfrm>
-            <a:off x="685800" y="457200"/>
-            <a:ext cx="7772400" cy="1143000"/>
-          </a:xfrm>
-          <a:prstGeom prst="rect">
-            <a:avLst/>
-          </a:prstGeom>
-          <a:noFill/>
-          <a:ln>
-            <a:noFill/>
-          </a:ln>
-          <a:effectLst/>
-          <a:extLst>
-            <a:ext uri="{909E8E84-426E-40DD-AFC4-6F175D3DCCD1}">
-              <a14:hiddenFill xmlns:a14="http://schemas.microsoft.com/office/drawing/2010/main">
-                <a:solidFill>
-                  <a:schemeClr val="accent1"/>
-                </a:solidFill>
-              </a14:hiddenFill>
-            </a:ext>
-            <a:ext uri="{91240B29-F687-4F45-9708-019B960494DF}">
-              <a14:hiddenLine xmlns:a14="http://schemas.microsoft.com/office/drawing/2010/main" w="9525">
-                <a:solidFill>
-                  <a:schemeClr val="tx1"/>
-                </a:solidFill>
-                <a:miter lim="800000"/>
-                <a:headEnd/>
-                <a:tailEnd/>
-              </a14:hiddenLine>
-            </a:ext>
-            <a:ext uri="{AF507438-7753-43E0-B8FC-AC1667EBCBE1}">
-              <a14:hiddenEffects xmlns:a14="http://schemas.microsoft.com/office/drawing/2010/main">
-                <a:effectLst>
-                  <a:outerShdw dist="35921" dir="2700000" algn="ctr" rotWithShape="0">
-                    <a:schemeClr val="bg2"/>
-                  </a:outerShdw>
-                </a:effectLst>
-              </a14:hiddenEffects>
-            </a:ext>
-          </a:extLst>
-        </p:spPr>
-        <p:txBody>
-          <a:bodyPr anchor="ctr"/>
-          <a:lstStyle>
-            <a:lvl1pPr eaLnBrk="0" hangingPunct="0">
-              <a:defRPr sz="1600">
-                <a:solidFill>
-                  <a:schemeClr val="tx1"/>
-                </a:solidFill>
-                <a:latin typeface="Tahoma" panose="020B0604030504040204" pitchFamily="34" charset="0"/>
-                <a:ea typeface="SimSun" panose="02010600030101010101" pitchFamily="2" charset="-122"/>
-              </a:defRPr>
-            </a:lvl1pPr>
-            <a:lvl2pPr marL="742950" indent="-285750" eaLnBrk="0" hangingPunct="0">
-              <a:defRPr sz="1600">
-                <a:solidFill>
-                  <a:schemeClr val="tx1"/>
-                </a:solidFill>
-                <a:latin typeface="Tahoma" panose="020B0604030504040204" pitchFamily="34" charset="0"/>
-                <a:ea typeface="SimSun" panose="02010600030101010101" pitchFamily="2" charset="-122"/>
-              </a:defRPr>
-            </a:lvl2pPr>
-            <a:lvl3pPr marL="1143000" indent="-228600" eaLnBrk="0" hangingPunct="0">
-              <a:defRPr sz="1600">
-                <a:solidFill>
-                  <a:schemeClr val="tx1"/>
-                </a:solidFill>
-                <a:latin typeface="Tahoma" panose="020B0604030504040204" pitchFamily="34" charset="0"/>
-                <a:ea typeface="SimSun" panose="02010600030101010101" pitchFamily="2" charset="-122"/>
-              </a:defRPr>
-            </a:lvl3pPr>
-            <a:lvl4pPr marL="1600200" indent="-228600" eaLnBrk="0" hangingPunct="0">
-              <a:defRPr sz="1600">
-                <a:solidFill>
-                  <a:schemeClr val="tx1"/>
-                </a:solidFill>
-                <a:latin typeface="Tahoma" panose="020B0604030504040204" pitchFamily="34" charset="0"/>
-                <a:ea typeface="SimSun" panose="02010600030101010101" pitchFamily="2" charset="-122"/>
-              </a:defRPr>
-            </a:lvl4pPr>
-            <a:lvl5pPr marL="2057400" indent="-228600" eaLnBrk="0" hangingPunct="0">
-              <a:defRPr sz="1600">
-                <a:solidFill>
-                  <a:schemeClr val="tx1"/>
-                </a:solidFill>
-                <a:latin typeface="Tahoma" panose="020B0604030504040204" pitchFamily="34" charset="0"/>
-                <a:ea typeface="SimSun" panose="02010600030101010101" pitchFamily="2" charset="-122"/>
-              </a:defRPr>
-            </a:lvl5pPr>
-            <a:lvl6pPr marL="2514600" indent="-228600" algn="ctr" eaLnBrk="0" fontAlgn="base" hangingPunct="0">
-              <a:spcBef>
-                <a:spcPct val="0"/>
-              </a:spcBef>
-              <a:spcAft>
-                <a:spcPct val="0"/>
-              </a:spcAft>
-              <a:defRPr sz="1600">
-                <a:solidFill>
-                  <a:schemeClr val="tx1"/>
-                </a:solidFill>
-                <a:latin typeface="Tahoma" panose="020B0604030504040204" pitchFamily="34" charset="0"/>
-                <a:ea typeface="SimSun" panose="02010600030101010101" pitchFamily="2" charset="-122"/>
-              </a:defRPr>
-            </a:lvl6pPr>
-            <a:lvl7pPr marL="2971800" indent="-228600" algn="ctr" eaLnBrk="0" fontAlgn="base" hangingPunct="0">
-              <a:spcBef>
-                <a:spcPct val="0"/>
-              </a:spcBef>
-              <a:spcAft>
-                <a:spcPct val="0"/>
-              </a:spcAft>
-              <a:defRPr sz="1600">
-                <a:solidFill>
-                  <a:schemeClr val="tx1"/>
-                </a:solidFill>
-                <a:latin typeface="Tahoma" panose="020B0604030504040204" pitchFamily="34" charset="0"/>
-                <a:ea typeface="SimSun" panose="02010600030101010101" pitchFamily="2" charset="-122"/>
-              </a:defRPr>
-            </a:lvl7pPr>
-            <a:lvl8pPr marL="3429000" indent="-228600" algn="ctr" eaLnBrk="0" fontAlgn="base" hangingPunct="0">
-              <a:spcBef>
-                <a:spcPct val="0"/>
-              </a:spcBef>
-              <a:spcAft>
-                <a:spcPct val="0"/>
-              </a:spcAft>
-              <a:defRPr sz="1600">
-                <a:solidFill>
-                  <a:schemeClr val="tx1"/>
-                </a:solidFill>
-                <a:latin typeface="Tahoma" panose="020B0604030504040204" pitchFamily="34" charset="0"/>
-                <a:ea typeface="SimSun" panose="02010600030101010101" pitchFamily="2" charset="-122"/>
-              </a:defRPr>
-            </a:lvl8pPr>
-            <a:lvl9pPr marL="3886200" indent="-228600" algn="ctr" eaLnBrk="0" fontAlgn="base" hangingPunct="0">
-              <a:spcBef>
-                <a:spcPct val="0"/>
-              </a:spcBef>
-              <a:spcAft>
-                <a:spcPct val="0"/>
-              </a:spcAft>
-              <a:defRPr sz="1600">
-                <a:solidFill>
-                  <a:schemeClr val="tx1"/>
-                </a:solidFill>
-                <a:latin typeface="Tahoma" panose="020B0604030504040204" pitchFamily="34" charset="0"/>
-                <a:ea typeface="SimSun" panose="02010600030101010101" pitchFamily="2" charset="-122"/>
-              </a:defRPr>
-            </a:lvl9pPr>
-          </a:lstStyle>
-          <a:p>
-            <a:pPr marL="0" marR="0" lvl="0" indent="0" algn="ctr" defTabSz="914400" rtl="0" eaLnBrk="1" fontAlgn="base" latinLnBrk="0" hangingPunct="1">
-              <a:lnSpc>
-                <a:spcPct val="100000"/>
-              </a:lnSpc>
-              <a:spcBef>
-                <a:spcPct val="0"/>
-              </a:spcBef>
-              <a:spcAft>
-                <a:spcPct val="0"/>
-              </a:spcAft>
-              <a:buClrTx/>
-              <a:buSzTx/>
-              <a:buFontTx/>
-              <a:buNone/>
-              <a:tabLst/>
-              <a:defRPr/>
-            </a:pPr>
-            <a:r>
-              <a:rPr kumimoji="0" lang="en-US" altLang="en-US" sz="4400" b="1" i="0" u="none" strike="noStrike" kern="1200" cap="none" spc="0" normalizeH="0" baseline="0" noProof="0">
-                <a:ln>
-                  <a:noFill/>
-                </a:ln>
-                <a:solidFill>
-                  <a:srgbClr val="333399"/>
-                </a:solidFill>
-                <a:effectLst/>
-                <a:uLnTx/>
-                <a:uFillTx/>
-                <a:latin typeface="Tahoma" panose="020B0604030504040204" pitchFamily="34" charset="0"/>
-                <a:ea typeface="SimSun" panose="02010600030101010101" pitchFamily="2" charset="-122"/>
-                <a:cs typeface="+mn-cs"/>
-              </a:rPr>
-              <a:t>Some Tips</a:t>
-            </a:r>
-          </a:p>
-        </p:txBody>
-      </p:sp>
-      <p:sp>
-        <p:nvSpPr>
-          <p:cNvPr id="88068" name="Rectangle 5">
-            <a:extLst>
-              <a:ext uri="{FF2B5EF4-FFF2-40B4-BE49-F238E27FC236}">
-                <a16:creationId xmlns:a16="http://schemas.microsoft.com/office/drawing/2014/main" id="{8028C472-940C-C58E-E459-7BEBDC8D6D13}"/>
-              </a:ext>
-            </a:extLst>
-          </p:cNvPr>
-          <p:cNvSpPr>
-            <a:spLocks noGrp="1" noChangeArrowheads="1"/>
-          </p:cNvSpPr>
-          <p:nvPr/>
-        </p:nvSpPr>
-        <p:spPr bwMode="auto">
-          <a:xfrm>
-            <a:off x="685800" y="1828800"/>
-            <a:ext cx="7772400" cy="4114800"/>
-          </a:xfrm>
-          <a:prstGeom prst="rect">
-            <a:avLst/>
-          </a:prstGeom>
-          <a:noFill/>
-          <a:ln>
-            <a:noFill/>
-          </a:ln>
-          <a:effectLst/>
-          <a:extLst>
-            <a:ext uri="{909E8E84-426E-40DD-AFC4-6F175D3DCCD1}">
-              <a14:hiddenFill xmlns:a14="http://schemas.microsoft.com/office/drawing/2010/main">
-                <a:solidFill>
-                  <a:schemeClr val="accent1"/>
-                </a:solidFill>
-              </a14:hiddenFill>
-            </a:ext>
-            <a:ext uri="{91240B29-F687-4F45-9708-019B960494DF}">
-              <a14:hiddenLine xmlns:a14="http://schemas.microsoft.com/office/drawing/2010/main" w="9525">
-                <a:solidFill>
-                  <a:schemeClr val="tx1"/>
-                </a:solidFill>
-                <a:miter lim="800000"/>
-                <a:headEnd/>
-                <a:tailEnd/>
-              </a14:hiddenLine>
-            </a:ext>
-            <a:ext uri="{AF507438-7753-43E0-B8FC-AC1667EBCBE1}">
-              <a14:hiddenEffects xmlns:a14="http://schemas.microsoft.com/office/drawing/2010/main">
-                <a:effectLst>
-                  <a:outerShdw dist="35921" dir="2700000" algn="ctr" rotWithShape="0">
-                    <a:schemeClr val="bg2"/>
-                  </a:outerShdw>
-                </a:effectLst>
-              </a14:hiddenEffects>
-            </a:ext>
-          </a:extLst>
-        </p:spPr>
-        <p:txBody>
-          <a:bodyPr/>
-          <a:lstStyle>
-            <a:lvl1pPr marL="342900" indent="-342900" eaLnBrk="0" hangingPunct="0">
-              <a:defRPr sz="1600">
-                <a:solidFill>
-                  <a:schemeClr val="tx1"/>
-                </a:solidFill>
-                <a:latin typeface="Tahoma" panose="020B0604030504040204" pitchFamily="34" charset="0"/>
-                <a:ea typeface="SimSun" panose="02010600030101010101" pitchFamily="2" charset="-122"/>
-              </a:defRPr>
-            </a:lvl1pPr>
-            <a:lvl2pPr marL="742950" indent="-285750" eaLnBrk="0" hangingPunct="0">
-              <a:defRPr sz="1600">
-                <a:solidFill>
-                  <a:schemeClr val="tx1"/>
-                </a:solidFill>
-                <a:latin typeface="Tahoma" panose="020B0604030504040204" pitchFamily="34" charset="0"/>
-                <a:ea typeface="SimSun" panose="02010600030101010101" pitchFamily="2" charset="-122"/>
-              </a:defRPr>
-            </a:lvl2pPr>
-            <a:lvl3pPr marL="1143000" indent="-228600" eaLnBrk="0" hangingPunct="0">
-              <a:defRPr sz="1600">
-                <a:solidFill>
-                  <a:schemeClr val="tx1"/>
-                </a:solidFill>
-                <a:latin typeface="Tahoma" panose="020B0604030504040204" pitchFamily="34" charset="0"/>
-                <a:ea typeface="SimSun" panose="02010600030101010101" pitchFamily="2" charset="-122"/>
-              </a:defRPr>
-            </a:lvl3pPr>
-            <a:lvl4pPr marL="1600200" indent="-228600" eaLnBrk="0" hangingPunct="0">
-              <a:defRPr sz="1600">
-                <a:solidFill>
-                  <a:schemeClr val="tx1"/>
-                </a:solidFill>
-                <a:latin typeface="Tahoma" panose="020B0604030504040204" pitchFamily="34" charset="0"/>
-                <a:ea typeface="SimSun" panose="02010600030101010101" pitchFamily="2" charset="-122"/>
-              </a:defRPr>
-            </a:lvl4pPr>
-            <a:lvl5pPr marL="2057400" indent="-228600" eaLnBrk="0" hangingPunct="0">
-              <a:defRPr sz="1600">
-                <a:solidFill>
-                  <a:schemeClr val="tx1"/>
-                </a:solidFill>
-                <a:latin typeface="Tahoma" panose="020B0604030504040204" pitchFamily="34" charset="0"/>
-                <a:ea typeface="SimSun" panose="02010600030101010101" pitchFamily="2" charset="-122"/>
-              </a:defRPr>
-            </a:lvl5pPr>
-            <a:lvl6pPr marL="2514600" indent="-228600" algn="ctr" eaLnBrk="0" fontAlgn="base" hangingPunct="0">
-              <a:spcBef>
-                <a:spcPct val="0"/>
-              </a:spcBef>
-              <a:spcAft>
-                <a:spcPct val="0"/>
-              </a:spcAft>
-              <a:defRPr sz="1600">
-                <a:solidFill>
-                  <a:schemeClr val="tx1"/>
-                </a:solidFill>
-                <a:latin typeface="Tahoma" panose="020B0604030504040204" pitchFamily="34" charset="0"/>
-                <a:ea typeface="SimSun" panose="02010600030101010101" pitchFamily="2" charset="-122"/>
-              </a:defRPr>
-            </a:lvl6pPr>
-            <a:lvl7pPr marL="2971800" indent="-228600" algn="ctr" eaLnBrk="0" fontAlgn="base" hangingPunct="0">
-              <a:spcBef>
-                <a:spcPct val="0"/>
-              </a:spcBef>
-              <a:spcAft>
-                <a:spcPct val="0"/>
-              </a:spcAft>
-              <a:defRPr sz="1600">
-                <a:solidFill>
-                  <a:schemeClr val="tx1"/>
-                </a:solidFill>
-                <a:latin typeface="Tahoma" panose="020B0604030504040204" pitchFamily="34" charset="0"/>
-                <a:ea typeface="SimSun" panose="02010600030101010101" pitchFamily="2" charset="-122"/>
-              </a:defRPr>
-            </a:lvl7pPr>
-            <a:lvl8pPr marL="3429000" indent="-228600" algn="ctr" eaLnBrk="0" fontAlgn="base" hangingPunct="0">
-              <a:spcBef>
-                <a:spcPct val="0"/>
-              </a:spcBef>
-              <a:spcAft>
-                <a:spcPct val="0"/>
-              </a:spcAft>
-              <a:defRPr sz="1600">
-                <a:solidFill>
-                  <a:schemeClr val="tx1"/>
-                </a:solidFill>
-                <a:latin typeface="Tahoma" panose="020B0604030504040204" pitchFamily="34" charset="0"/>
-                <a:ea typeface="SimSun" panose="02010600030101010101" pitchFamily="2" charset="-122"/>
-              </a:defRPr>
-            </a:lvl8pPr>
-            <a:lvl9pPr marL="3886200" indent="-228600" algn="ctr" eaLnBrk="0" fontAlgn="base" hangingPunct="0">
-              <a:spcBef>
-                <a:spcPct val="0"/>
-              </a:spcBef>
-              <a:spcAft>
-                <a:spcPct val="0"/>
-              </a:spcAft>
-              <a:defRPr sz="1600">
-                <a:solidFill>
-                  <a:schemeClr val="tx1"/>
-                </a:solidFill>
-                <a:latin typeface="Tahoma" panose="020B0604030504040204" pitchFamily="34" charset="0"/>
-                <a:ea typeface="SimSun" panose="02010600030101010101" pitchFamily="2" charset="-122"/>
-              </a:defRPr>
-            </a:lvl9pPr>
-          </a:lstStyle>
-          <a:p>
-            <a:pPr marL="342900" marR="0" lvl="0" indent="-342900" algn="l" defTabSz="914400" rtl="0" eaLnBrk="1" fontAlgn="base" latinLnBrk="0" hangingPunct="1">
-              <a:lnSpc>
-                <a:spcPct val="100000"/>
-              </a:lnSpc>
-              <a:spcBef>
-                <a:spcPct val="20000"/>
-              </a:spcBef>
-              <a:spcAft>
-                <a:spcPct val="0"/>
-              </a:spcAft>
-              <a:buClrTx/>
-              <a:buSzTx/>
-              <a:buFontTx/>
-              <a:buChar char="•"/>
-              <a:tabLst/>
-              <a:defRPr/>
-            </a:pPr>
-            <a:r>
-              <a:rPr kumimoji="0" lang="en-US" altLang="en-US" sz="3200" b="0" i="0" u="none" strike="noStrike" kern="1200" cap="none" spc="0" normalizeH="0" baseline="0" noProof="0">
-                <a:ln>
-                  <a:noFill/>
-                </a:ln>
-                <a:solidFill>
-                  <a:srgbClr val="000000"/>
-                </a:solidFill>
-                <a:effectLst/>
-                <a:uLnTx/>
-                <a:uFillTx/>
-                <a:latin typeface="Tahoma" panose="020B0604030504040204" pitchFamily="34" charset="0"/>
-                <a:ea typeface="SimSun" panose="02010600030101010101" pitchFamily="2" charset="-122"/>
-                <a:cs typeface="+mn-cs"/>
-              </a:rPr>
-              <a:t>Don’t use exception handling to replace testing – </a:t>
-            </a:r>
-            <a:r>
-              <a:rPr kumimoji="0" lang="en-US" altLang="en-US" sz="3200" b="1" i="0" u="none" strike="noStrike" kern="1200" cap="none" spc="0" normalizeH="0" baseline="0" noProof="0">
-                <a:ln>
-                  <a:noFill/>
-                </a:ln>
-                <a:solidFill>
-                  <a:srgbClr val="000000"/>
-                </a:solidFill>
-                <a:effectLst/>
-                <a:uLnTx/>
-                <a:uFillTx/>
-                <a:latin typeface="Tahoma" panose="020B0604030504040204" pitchFamily="34" charset="0"/>
-                <a:ea typeface="SimSun" panose="02010600030101010101" pitchFamily="2" charset="-122"/>
-                <a:cs typeface="+mn-cs"/>
-              </a:rPr>
-              <a:t>Reason</a:t>
-            </a:r>
-            <a:r>
-              <a:rPr kumimoji="0" lang="en-US" altLang="en-US" sz="3200" b="0" i="0" u="none" strike="noStrike" kern="1200" cap="none" spc="0" normalizeH="0" baseline="0" noProof="0">
-                <a:ln>
-                  <a:noFill/>
-                </a:ln>
-                <a:solidFill>
-                  <a:srgbClr val="000000"/>
-                </a:solidFill>
-                <a:effectLst/>
-                <a:uLnTx/>
-                <a:uFillTx/>
-                <a:latin typeface="Tahoma" panose="020B0604030504040204" pitchFamily="34" charset="0"/>
-                <a:ea typeface="SimSun" panose="02010600030101010101" pitchFamily="2" charset="-122"/>
-                <a:cs typeface="+mn-cs"/>
-              </a:rPr>
-              <a:t>: it’s much slower!</a:t>
-            </a:r>
-          </a:p>
-          <a:p>
-            <a:pPr marL="342900" marR="0" lvl="0" indent="-342900" algn="l" defTabSz="914400" rtl="0" eaLnBrk="1" fontAlgn="base" latinLnBrk="0" hangingPunct="1">
-              <a:lnSpc>
-                <a:spcPct val="100000"/>
-              </a:lnSpc>
-              <a:spcBef>
-                <a:spcPct val="20000"/>
-              </a:spcBef>
-              <a:spcAft>
-                <a:spcPct val="0"/>
-              </a:spcAft>
-              <a:buClrTx/>
-              <a:buSzTx/>
-              <a:buFontTx/>
-              <a:buChar char="•"/>
-              <a:tabLst/>
-              <a:defRPr/>
-            </a:pPr>
-            <a:r>
-              <a:rPr kumimoji="0" lang="en-US" altLang="en-US" sz="3200" b="0" i="0" u="none" strike="noStrike" kern="1200" cap="none" spc="0" normalizeH="0" baseline="0" noProof="0">
-                <a:ln>
-                  <a:noFill/>
-                </a:ln>
-                <a:solidFill>
-                  <a:srgbClr val="000000"/>
-                </a:solidFill>
-                <a:effectLst/>
-                <a:uLnTx/>
-                <a:uFillTx/>
-                <a:latin typeface="Tahoma" panose="020B0604030504040204" pitchFamily="34" charset="0"/>
-                <a:ea typeface="SimSun" panose="02010600030101010101" pitchFamily="2" charset="-122"/>
-                <a:cs typeface="+mn-cs"/>
-              </a:rPr>
-              <a:t>Don’t wrap every code statement in a try block. Put the </a:t>
-            </a:r>
-            <a:r>
-              <a:rPr kumimoji="0" lang="en-US" altLang="en-US" sz="3200" b="1" i="0" u="none" strike="noStrike" kern="1200" cap="none" spc="0" normalizeH="0" baseline="0" noProof="0">
-                <a:ln>
-                  <a:noFill/>
-                </a:ln>
-                <a:solidFill>
-                  <a:srgbClr val="000000"/>
-                </a:solidFill>
-                <a:effectLst/>
-                <a:uLnTx/>
-                <a:uFillTx/>
-                <a:latin typeface="Tahoma" panose="020B0604030504040204" pitchFamily="34" charset="0"/>
-                <a:ea typeface="SimSun" panose="02010600030101010101" pitchFamily="2" charset="-122"/>
-                <a:cs typeface="+mn-cs"/>
-              </a:rPr>
-              <a:t>whole task</a:t>
-            </a:r>
-            <a:r>
-              <a:rPr kumimoji="0" lang="en-US" altLang="en-US" sz="3200" b="0" i="0" u="none" strike="noStrike" kern="1200" cap="none" spc="0" normalizeH="0" baseline="0" noProof="0">
-                <a:ln>
-                  <a:noFill/>
-                </a:ln>
-                <a:solidFill>
-                  <a:srgbClr val="000000"/>
-                </a:solidFill>
-                <a:effectLst/>
-                <a:uLnTx/>
-                <a:uFillTx/>
-                <a:latin typeface="Tahoma" panose="020B0604030504040204" pitchFamily="34" charset="0"/>
-                <a:ea typeface="SimSun" panose="02010600030101010101" pitchFamily="2" charset="-122"/>
-                <a:cs typeface="+mn-cs"/>
-              </a:rPr>
-              <a:t> in a try block.</a:t>
-            </a:r>
-          </a:p>
-          <a:p>
-            <a:pPr marL="342900" marR="0" lvl="0" indent="-342900" algn="l" defTabSz="914400" rtl="0" eaLnBrk="1" fontAlgn="base" latinLnBrk="0" hangingPunct="1">
-              <a:lnSpc>
-                <a:spcPct val="100000"/>
-              </a:lnSpc>
-              <a:spcBef>
-                <a:spcPct val="20000"/>
-              </a:spcBef>
-              <a:spcAft>
-                <a:spcPct val="0"/>
-              </a:spcAft>
-              <a:buClrTx/>
-              <a:buSzTx/>
-              <a:buFontTx/>
-              <a:buChar char="•"/>
-              <a:tabLst/>
-              <a:defRPr/>
-            </a:pPr>
-            <a:r>
-              <a:rPr kumimoji="0" lang="en-US" altLang="en-US" sz="3200" b="0" i="0" u="none" strike="noStrike" kern="1200" cap="none" spc="0" normalizeH="0" baseline="0" noProof="0">
-                <a:ln>
-                  <a:noFill/>
-                </a:ln>
-                <a:solidFill>
-                  <a:srgbClr val="000000"/>
-                </a:solidFill>
-                <a:effectLst/>
-                <a:uLnTx/>
-                <a:uFillTx/>
-                <a:latin typeface="Tahoma" panose="020B0604030504040204" pitchFamily="34" charset="0"/>
-                <a:ea typeface="SimSun" panose="02010600030101010101" pitchFamily="2" charset="-122"/>
-                <a:cs typeface="+mn-cs"/>
-              </a:rPr>
-              <a:t>Don’t </a:t>
-            </a:r>
-            <a:r>
-              <a:rPr kumimoji="0" lang="en-US" altLang="en-US" sz="3200" b="1" i="0" u="none" strike="noStrike" kern="1200" cap="none" spc="0" normalizeH="0" baseline="0" noProof="0">
-                <a:ln>
-                  <a:noFill/>
-                </a:ln>
-                <a:solidFill>
-                  <a:srgbClr val="000000"/>
-                </a:solidFill>
-                <a:effectLst/>
-                <a:uLnTx/>
-                <a:uFillTx/>
-                <a:latin typeface="Tahoma" panose="020B0604030504040204" pitchFamily="34" charset="0"/>
-                <a:ea typeface="SimSun" panose="02010600030101010101" pitchFamily="2" charset="-122"/>
-                <a:cs typeface="+mn-cs"/>
-              </a:rPr>
-              <a:t>ignore</a:t>
-            </a:r>
-            <a:r>
-              <a:rPr kumimoji="0" lang="en-US" altLang="en-US" sz="3200" b="0" i="0" u="none" strike="noStrike" kern="1200" cap="none" spc="0" normalizeH="0" baseline="0" noProof="0">
-                <a:ln>
-                  <a:noFill/>
-                </a:ln>
-                <a:solidFill>
-                  <a:srgbClr val="000000"/>
-                </a:solidFill>
-                <a:effectLst/>
-                <a:uLnTx/>
-                <a:uFillTx/>
-                <a:latin typeface="Tahoma" panose="020B0604030504040204" pitchFamily="34" charset="0"/>
-                <a:ea typeface="SimSun" panose="02010600030101010101" pitchFamily="2" charset="-122"/>
-                <a:cs typeface="+mn-cs"/>
-              </a:rPr>
-              <a:t> exceptions with null actions (just to shut the compiler up). They will come back and bite you!</a:t>
-            </a:r>
-          </a:p>
-        </p:txBody>
-      </p:sp>
-    </p:spTree>
-  </p:cSld>
-  <p:clrMapOvr>
-    <a:masterClrMapping/>
-  </p:clrMapOvr>
-  <p:transition advTm="1000"/>
-</p:sld>
-</file>
-
-<file path=ppt/slides/slide9.xml><?xml version="1.0" encoding="utf-8"?>
-<p:sld xmlns:a="http://schemas.openxmlformats.org/drawingml/2006/main" xmlns:r="http://schemas.openxmlformats.org/officeDocument/2006/relationships" xmlns:p="http://schemas.openxmlformats.org/presentationml/2006/main">
-  <p:cSld>
-    <p:spTree>
-      <p:nvGrpSpPr>
-        <p:cNvPr id="1" name=""/>
-        <p:cNvGrpSpPr/>
-        <p:nvPr/>
-      </p:nvGrpSpPr>
-      <p:grpSpPr>
-        <a:xfrm>
-          <a:off x="0" y="0"/>
-          <a:ext cx="0" cy="0"/>
-          <a:chOff x="0" y="0"/>
-          <a:chExt cx="0" cy="0"/>
-        </a:xfrm>
-      </p:grpSpPr>
-      <p:sp>
-        <p:nvSpPr>
-          <p:cNvPr id="89090" name="Slide Number Placeholder 3">
-            <a:extLst>
-              <a:ext uri="{FF2B5EF4-FFF2-40B4-BE49-F238E27FC236}">
-                <a16:creationId xmlns:a16="http://schemas.microsoft.com/office/drawing/2014/main" id="{2C85448F-C29B-2D6D-3C6F-B35B5FD4D159}"/>
-              </a:ext>
-            </a:extLst>
-          </p:cNvPr>
-          <p:cNvSpPr>
-            <a:spLocks noGrp="1"/>
-          </p:cNvSpPr>
-          <p:nvPr>
-            <p:ph type="sldNum" sz="quarter" idx="10"/>
-          </p:nvPr>
-        </p:nvSpPr>
-        <p:spPr>
-          <a:noFill/>
-        </p:spPr>
-        <p:txBody>
-          <a:bodyPr/>
-          <a:lstStyle>
-            <a:lvl1pPr eaLnBrk="0" hangingPunct="0">
-              <a:defRPr sz="1600">
-                <a:solidFill>
-                  <a:schemeClr val="tx1"/>
-                </a:solidFill>
-                <a:latin typeface="Tahoma" panose="020B0604030504040204" pitchFamily="34" charset="0"/>
-                <a:ea typeface="SimSun" panose="02010600030101010101" pitchFamily="2" charset="-122"/>
-              </a:defRPr>
-            </a:lvl1pPr>
-            <a:lvl2pPr marL="742950" indent="-285750" eaLnBrk="0" hangingPunct="0">
-              <a:defRPr sz="1600">
-                <a:solidFill>
-                  <a:schemeClr val="tx1"/>
-                </a:solidFill>
-                <a:latin typeface="Tahoma" panose="020B0604030504040204" pitchFamily="34" charset="0"/>
-                <a:ea typeface="SimSun" panose="02010600030101010101" pitchFamily="2" charset="-122"/>
-              </a:defRPr>
-            </a:lvl2pPr>
-            <a:lvl3pPr marL="1143000" indent="-228600" eaLnBrk="0" hangingPunct="0">
-              <a:defRPr sz="1600">
-                <a:solidFill>
-                  <a:schemeClr val="tx1"/>
-                </a:solidFill>
-                <a:latin typeface="Tahoma" panose="020B0604030504040204" pitchFamily="34" charset="0"/>
-                <a:ea typeface="SimSun" panose="02010600030101010101" pitchFamily="2" charset="-122"/>
-              </a:defRPr>
-            </a:lvl3pPr>
-            <a:lvl4pPr marL="1600200" indent="-228600" eaLnBrk="0" hangingPunct="0">
-              <a:defRPr sz="1600">
-                <a:solidFill>
-                  <a:schemeClr val="tx1"/>
-                </a:solidFill>
-                <a:latin typeface="Tahoma" panose="020B0604030504040204" pitchFamily="34" charset="0"/>
-                <a:ea typeface="SimSun" panose="02010600030101010101" pitchFamily="2" charset="-122"/>
-              </a:defRPr>
-            </a:lvl4pPr>
-            <a:lvl5pPr marL="2057400" indent="-228600" eaLnBrk="0" hangingPunct="0">
-              <a:defRPr sz="1600">
-                <a:solidFill>
-                  <a:schemeClr val="tx1"/>
-                </a:solidFill>
-                <a:latin typeface="Tahoma" panose="020B0604030504040204" pitchFamily="34" charset="0"/>
-                <a:ea typeface="SimSun" panose="02010600030101010101" pitchFamily="2" charset="-122"/>
-              </a:defRPr>
-            </a:lvl5pPr>
-            <a:lvl6pPr marL="2514600" indent="-228600" algn="ctr" eaLnBrk="0" fontAlgn="base" hangingPunct="0">
-              <a:spcBef>
-                <a:spcPct val="0"/>
-              </a:spcBef>
-              <a:spcAft>
-                <a:spcPct val="0"/>
-              </a:spcAft>
-              <a:defRPr sz="1600">
-                <a:solidFill>
-                  <a:schemeClr val="tx1"/>
-                </a:solidFill>
-                <a:latin typeface="Tahoma" panose="020B0604030504040204" pitchFamily="34" charset="0"/>
-                <a:ea typeface="SimSun" panose="02010600030101010101" pitchFamily="2" charset="-122"/>
-              </a:defRPr>
-            </a:lvl6pPr>
-            <a:lvl7pPr marL="2971800" indent="-228600" algn="ctr" eaLnBrk="0" fontAlgn="base" hangingPunct="0">
-              <a:spcBef>
-                <a:spcPct val="0"/>
-              </a:spcBef>
-              <a:spcAft>
-                <a:spcPct val="0"/>
-              </a:spcAft>
-              <a:defRPr sz="1600">
-                <a:solidFill>
-                  <a:schemeClr val="tx1"/>
-                </a:solidFill>
-                <a:latin typeface="Tahoma" panose="020B0604030504040204" pitchFamily="34" charset="0"/>
-                <a:ea typeface="SimSun" panose="02010600030101010101" pitchFamily="2" charset="-122"/>
-              </a:defRPr>
-            </a:lvl7pPr>
-            <a:lvl8pPr marL="3429000" indent="-228600" algn="ctr" eaLnBrk="0" fontAlgn="base" hangingPunct="0">
-              <a:spcBef>
-                <a:spcPct val="0"/>
-              </a:spcBef>
-              <a:spcAft>
-                <a:spcPct val="0"/>
-              </a:spcAft>
-              <a:defRPr sz="1600">
-                <a:solidFill>
-                  <a:schemeClr val="tx1"/>
-                </a:solidFill>
-                <a:latin typeface="Tahoma" panose="020B0604030504040204" pitchFamily="34" charset="0"/>
-                <a:ea typeface="SimSun" panose="02010600030101010101" pitchFamily="2" charset="-122"/>
-              </a:defRPr>
-            </a:lvl8pPr>
-            <a:lvl9pPr marL="3886200" indent="-228600" algn="ctr" eaLnBrk="0" fontAlgn="base" hangingPunct="0">
-              <a:spcBef>
-                <a:spcPct val="0"/>
-              </a:spcBef>
-              <a:spcAft>
-                <a:spcPct val="0"/>
-              </a:spcAft>
-              <a:defRPr sz="1600">
-                <a:solidFill>
-                  <a:schemeClr val="tx1"/>
-                </a:solidFill>
-                <a:latin typeface="Tahoma" panose="020B0604030504040204" pitchFamily="34" charset="0"/>
-                <a:ea typeface="SimSun" panose="02010600030101010101" pitchFamily="2" charset="-122"/>
-              </a:defRPr>
-            </a:lvl9pPr>
-          </a:lstStyle>
-          <a:p>
-            <a:pPr marL="0" marR="0" lvl="0" indent="0" algn="r" defTabSz="914400" rtl="0" eaLnBrk="1" fontAlgn="base" latinLnBrk="0" hangingPunct="1">
-              <a:lnSpc>
-                <a:spcPct val="100000"/>
-              </a:lnSpc>
-              <a:spcBef>
-                <a:spcPct val="0"/>
-              </a:spcBef>
-              <a:spcAft>
-                <a:spcPct val="0"/>
-              </a:spcAft>
-              <a:buClrTx/>
-              <a:buSzTx/>
-              <a:buFontTx/>
-              <a:buNone/>
-              <a:tabLst/>
-              <a:defRPr/>
-            </a:pPr>
-            <a:fld id="{EFA775FB-0B1B-47C5-8D58-93522C5ED96C}" type="slidenum">
-              <a:rPr kumimoji="0" lang="zh-CN" altLang="en-GB" sz="1400" b="0" i="0" u="none" strike="noStrike" kern="1200" cap="none" spc="0" normalizeH="0" baseline="0" noProof="0">
-                <a:ln>
-                  <a:noFill/>
-                </a:ln>
-                <a:solidFill>
-                  <a:srgbClr val="000000"/>
-                </a:solidFill>
-                <a:effectLst/>
-                <a:uLnTx/>
-                <a:uFillTx/>
-                <a:latin typeface="Tahoma" panose="020B0604030504040204" pitchFamily="34" charset="0"/>
-                <a:ea typeface="SimSun" panose="02010600030101010101" pitchFamily="2" charset="-122"/>
-                <a:cs typeface="+mn-cs"/>
-              </a:rPr>
-              <a:pPr marL="0" marR="0" lvl="0" indent="0" algn="r" defTabSz="914400" rtl="0" eaLnBrk="1" fontAlgn="base" latinLnBrk="0" hangingPunct="1">
-                <a:lnSpc>
-                  <a:spcPct val="100000"/>
-                </a:lnSpc>
-                <a:spcBef>
-                  <a:spcPct val="0"/>
-                </a:spcBef>
-                <a:spcAft>
-                  <a:spcPct val="0"/>
-                </a:spcAft>
-                <a:buClrTx/>
-                <a:buSzTx/>
-                <a:buFontTx/>
-                <a:buNone/>
-                <a:tabLst/>
-                <a:defRPr/>
-              </a:pPr>
-              <a:t>9</a:t>
-            </a:fld>
-            <a:endParaRPr kumimoji="0" lang="en-GB" altLang="zh-CN" sz="1400" b="0" i="0" u="none" strike="noStrike" kern="1200" cap="none" spc="0" normalizeH="0" baseline="0" noProof="0">
-              <a:ln>
-                <a:noFill/>
-              </a:ln>
-              <a:solidFill>
-                <a:srgbClr val="000000"/>
-              </a:solidFill>
-              <a:effectLst/>
-              <a:uLnTx/>
-              <a:uFillTx/>
-              <a:latin typeface="Tahoma" panose="020B0604030504040204" pitchFamily="34" charset="0"/>
-              <a:ea typeface="SimSun" panose="02010600030101010101" pitchFamily="2" charset="-122"/>
-              <a:cs typeface="+mn-cs"/>
-            </a:endParaRPr>
-          </a:p>
-        </p:txBody>
-      </p:sp>
-      <p:sp>
-        <p:nvSpPr>
-          <p:cNvPr id="89091" name="Rectangle 4">
-            <a:extLst>
-              <a:ext uri="{FF2B5EF4-FFF2-40B4-BE49-F238E27FC236}">
-                <a16:creationId xmlns:a16="http://schemas.microsoft.com/office/drawing/2014/main" id="{E441AA11-8283-2F7C-7CAF-9B834B14ED43}"/>
-              </a:ext>
-            </a:extLst>
-          </p:cNvPr>
-          <p:cNvSpPr>
-            <a:spLocks noGrp="1" noChangeArrowheads="1"/>
-          </p:cNvSpPr>
-          <p:nvPr/>
-        </p:nvSpPr>
-        <p:spPr bwMode="auto">
-          <a:xfrm>
-            <a:off x="685800" y="457200"/>
-            <a:ext cx="7772400" cy="1143000"/>
-          </a:xfrm>
-          <a:prstGeom prst="rect">
-            <a:avLst/>
-          </a:prstGeom>
-          <a:noFill/>
-          <a:ln>
-            <a:noFill/>
-          </a:ln>
-          <a:effectLst/>
-          <a:extLst>
-            <a:ext uri="{909E8E84-426E-40DD-AFC4-6F175D3DCCD1}">
-              <a14:hiddenFill xmlns:a14="http://schemas.microsoft.com/office/drawing/2010/main">
-                <a:solidFill>
-                  <a:schemeClr val="accent1"/>
-                </a:solidFill>
-              </a14:hiddenFill>
-            </a:ext>
-            <a:ext uri="{91240B29-F687-4F45-9708-019B960494DF}">
-              <a14:hiddenLine xmlns:a14="http://schemas.microsoft.com/office/drawing/2010/main" w="9525">
-                <a:solidFill>
-                  <a:schemeClr val="tx1"/>
-                </a:solidFill>
-                <a:miter lim="800000"/>
-                <a:headEnd/>
-                <a:tailEnd/>
-              </a14:hiddenLine>
-            </a:ext>
-            <a:ext uri="{AF507438-7753-43E0-B8FC-AC1667EBCBE1}">
-              <a14:hiddenEffects xmlns:a14="http://schemas.microsoft.com/office/drawing/2010/main">
-                <a:effectLst>
-                  <a:outerShdw dist="35921" dir="2700000" algn="ctr" rotWithShape="0">
-                    <a:schemeClr val="bg2"/>
-                  </a:outerShdw>
-                </a:effectLst>
-              </a14:hiddenEffects>
-            </a:ext>
-          </a:extLst>
-        </p:spPr>
-        <p:txBody>
-          <a:bodyPr anchor="ctr"/>
-          <a:lstStyle>
-            <a:lvl1pPr eaLnBrk="0" hangingPunct="0">
-              <a:defRPr sz="1600">
-                <a:solidFill>
-                  <a:schemeClr val="tx1"/>
-                </a:solidFill>
-                <a:latin typeface="Tahoma" panose="020B0604030504040204" pitchFamily="34" charset="0"/>
-                <a:ea typeface="SimSun" panose="02010600030101010101" pitchFamily="2" charset="-122"/>
-              </a:defRPr>
-            </a:lvl1pPr>
-            <a:lvl2pPr marL="742950" indent="-285750" eaLnBrk="0" hangingPunct="0">
-              <a:defRPr sz="1600">
-                <a:solidFill>
-                  <a:schemeClr val="tx1"/>
-                </a:solidFill>
-                <a:latin typeface="Tahoma" panose="020B0604030504040204" pitchFamily="34" charset="0"/>
-                <a:ea typeface="SimSun" panose="02010600030101010101" pitchFamily="2" charset="-122"/>
-              </a:defRPr>
-            </a:lvl2pPr>
-            <a:lvl3pPr marL="1143000" indent="-228600" eaLnBrk="0" hangingPunct="0">
-              <a:defRPr sz="1600">
-                <a:solidFill>
-                  <a:schemeClr val="tx1"/>
-                </a:solidFill>
-                <a:latin typeface="Tahoma" panose="020B0604030504040204" pitchFamily="34" charset="0"/>
-                <a:ea typeface="SimSun" panose="02010600030101010101" pitchFamily="2" charset="-122"/>
-              </a:defRPr>
-            </a:lvl3pPr>
-            <a:lvl4pPr marL="1600200" indent="-228600" eaLnBrk="0" hangingPunct="0">
-              <a:defRPr sz="1600">
-                <a:solidFill>
-                  <a:schemeClr val="tx1"/>
-                </a:solidFill>
-                <a:latin typeface="Tahoma" panose="020B0604030504040204" pitchFamily="34" charset="0"/>
-                <a:ea typeface="SimSun" panose="02010600030101010101" pitchFamily="2" charset="-122"/>
-              </a:defRPr>
-            </a:lvl4pPr>
-            <a:lvl5pPr marL="2057400" indent="-228600" eaLnBrk="0" hangingPunct="0">
-              <a:defRPr sz="1600">
-                <a:solidFill>
-                  <a:schemeClr val="tx1"/>
-                </a:solidFill>
-                <a:latin typeface="Tahoma" panose="020B0604030504040204" pitchFamily="34" charset="0"/>
-                <a:ea typeface="SimSun" panose="02010600030101010101" pitchFamily="2" charset="-122"/>
-              </a:defRPr>
-            </a:lvl5pPr>
-            <a:lvl6pPr marL="2514600" indent="-228600" algn="ctr" eaLnBrk="0" fontAlgn="base" hangingPunct="0">
-              <a:spcBef>
-                <a:spcPct val="0"/>
-              </a:spcBef>
-              <a:spcAft>
-                <a:spcPct val="0"/>
-              </a:spcAft>
-              <a:defRPr sz="1600">
-                <a:solidFill>
-                  <a:schemeClr val="tx1"/>
-                </a:solidFill>
-                <a:latin typeface="Tahoma" panose="020B0604030504040204" pitchFamily="34" charset="0"/>
-                <a:ea typeface="SimSun" panose="02010600030101010101" pitchFamily="2" charset="-122"/>
-              </a:defRPr>
-            </a:lvl6pPr>
-            <a:lvl7pPr marL="2971800" indent="-228600" algn="ctr" eaLnBrk="0" fontAlgn="base" hangingPunct="0">
-              <a:spcBef>
-                <a:spcPct val="0"/>
-              </a:spcBef>
-              <a:spcAft>
-                <a:spcPct val="0"/>
-              </a:spcAft>
-              <a:defRPr sz="1600">
-                <a:solidFill>
-                  <a:schemeClr val="tx1"/>
-                </a:solidFill>
-                <a:latin typeface="Tahoma" panose="020B0604030504040204" pitchFamily="34" charset="0"/>
-                <a:ea typeface="SimSun" panose="02010600030101010101" pitchFamily="2" charset="-122"/>
-              </a:defRPr>
-            </a:lvl7pPr>
-            <a:lvl8pPr marL="3429000" indent="-228600" algn="ctr" eaLnBrk="0" fontAlgn="base" hangingPunct="0">
-              <a:spcBef>
-                <a:spcPct val="0"/>
-              </a:spcBef>
-              <a:spcAft>
-                <a:spcPct val="0"/>
-              </a:spcAft>
-              <a:defRPr sz="1600">
-                <a:solidFill>
-                  <a:schemeClr val="tx1"/>
-                </a:solidFill>
-                <a:latin typeface="Tahoma" panose="020B0604030504040204" pitchFamily="34" charset="0"/>
-                <a:ea typeface="SimSun" panose="02010600030101010101" pitchFamily="2" charset="-122"/>
-              </a:defRPr>
-            </a:lvl8pPr>
-            <a:lvl9pPr marL="3886200" indent="-228600" algn="ctr" eaLnBrk="0" fontAlgn="base" hangingPunct="0">
-              <a:spcBef>
-                <a:spcPct val="0"/>
-              </a:spcBef>
-              <a:spcAft>
-                <a:spcPct val="0"/>
-              </a:spcAft>
-              <a:defRPr sz="1600">
-                <a:solidFill>
-                  <a:schemeClr val="tx1"/>
-                </a:solidFill>
-                <a:latin typeface="Tahoma" panose="020B0604030504040204" pitchFamily="34" charset="0"/>
-                <a:ea typeface="SimSun" panose="02010600030101010101" pitchFamily="2" charset="-122"/>
-              </a:defRPr>
-            </a:lvl9pPr>
-          </a:lstStyle>
-          <a:p>
-            <a:pPr marL="0" marR="0" lvl="0" indent="0" algn="ctr" defTabSz="914400" rtl="0" eaLnBrk="1" fontAlgn="base" latinLnBrk="0" hangingPunct="1">
-              <a:lnSpc>
-                <a:spcPct val="100000"/>
-              </a:lnSpc>
-              <a:spcBef>
-                <a:spcPct val="0"/>
-              </a:spcBef>
-              <a:spcAft>
-                <a:spcPct val="0"/>
-              </a:spcAft>
-              <a:buClrTx/>
-              <a:buSzTx/>
-              <a:buFontTx/>
-              <a:buNone/>
-              <a:tabLst/>
-              <a:defRPr/>
-            </a:pPr>
-            <a:r>
-              <a:rPr kumimoji="0" lang="en-US" altLang="en-US" sz="4400" b="1" i="0" u="none" strike="noStrike" kern="1200" cap="none" spc="0" normalizeH="0" baseline="0" noProof="0">
-                <a:ln>
-                  <a:noFill/>
-                </a:ln>
-                <a:solidFill>
-                  <a:srgbClr val="333399"/>
-                </a:solidFill>
-                <a:effectLst/>
-                <a:uLnTx/>
-                <a:uFillTx/>
-                <a:latin typeface="Tahoma" panose="020B0604030504040204" pitchFamily="34" charset="0"/>
-                <a:ea typeface="SimSun" panose="02010600030101010101" pitchFamily="2" charset="-122"/>
-                <a:cs typeface="+mn-cs"/>
-              </a:rPr>
-              <a:t>Some Tips</a:t>
-            </a:r>
-          </a:p>
-        </p:txBody>
-      </p:sp>
-      <p:sp>
-        <p:nvSpPr>
-          <p:cNvPr id="89092" name="Rectangle 5">
-            <a:extLst>
-              <a:ext uri="{FF2B5EF4-FFF2-40B4-BE49-F238E27FC236}">
-                <a16:creationId xmlns:a16="http://schemas.microsoft.com/office/drawing/2014/main" id="{C485BCA1-8224-B435-8B15-341B10D89597}"/>
-              </a:ext>
-            </a:extLst>
-          </p:cNvPr>
-          <p:cNvSpPr>
-            <a:spLocks noGrp="1" noChangeArrowheads="1"/>
-          </p:cNvSpPr>
-          <p:nvPr/>
-        </p:nvSpPr>
-        <p:spPr bwMode="auto">
-          <a:xfrm>
-            <a:off x="685800" y="1828800"/>
-            <a:ext cx="7772400" cy="4114800"/>
-          </a:xfrm>
-          <a:prstGeom prst="rect">
-            <a:avLst/>
-          </a:prstGeom>
-          <a:noFill/>
-          <a:ln>
-            <a:noFill/>
-          </a:ln>
-          <a:effectLst/>
-          <a:extLst>
-            <a:ext uri="{909E8E84-426E-40DD-AFC4-6F175D3DCCD1}">
-              <a14:hiddenFill xmlns:a14="http://schemas.microsoft.com/office/drawing/2010/main">
-                <a:solidFill>
-                  <a:schemeClr val="accent1"/>
-                </a:solidFill>
-              </a14:hiddenFill>
-            </a:ext>
-            <a:ext uri="{91240B29-F687-4F45-9708-019B960494DF}">
-              <a14:hiddenLine xmlns:a14="http://schemas.microsoft.com/office/drawing/2010/main" w="9525">
-                <a:solidFill>
-                  <a:schemeClr val="tx1"/>
-                </a:solidFill>
-                <a:miter lim="800000"/>
-                <a:headEnd/>
-                <a:tailEnd/>
-              </a14:hiddenLine>
-            </a:ext>
-            <a:ext uri="{AF507438-7753-43E0-B8FC-AC1667EBCBE1}">
-              <a14:hiddenEffects xmlns:a14="http://schemas.microsoft.com/office/drawing/2010/main">
-                <a:effectLst>
-                  <a:outerShdw dist="35921" dir="2700000" algn="ctr" rotWithShape="0">
-                    <a:schemeClr val="bg2"/>
-                  </a:outerShdw>
-                </a:effectLst>
-              </a14:hiddenEffects>
-            </a:ext>
-          </a:extLst>
-        </p:spPr>
-        <p:txBody>
-          <a:bodyPr/>
-          <a:lstStyle>
-            <a:lvl1pPr marL="342900" indent="-342900" eaLnBrk="0" hangingPunct="0">
-              <a:defRPr sz="1600">
-                <a:solidFill>
-                  <a:schemeClr val="tx1"/>
-                </a:solidFill>
-                <a:latin typeface="Tahoma" panose="020B0604030504040204" pitchFamily="34" charset="0"/>
-                <a:ea typeface="SimSun" panose="02010600030101010101" pitchFamily="2" charset="-122"/>
-              </a:defRPr>
-            </a:lvl1pPr>
-            <a:lvl2pPr marL="742950" indent="-285750" eaLnBrk="0" hangingPunct="0">
-              <a:defRPr sz="1600">
-                <a:solidFill>
-                  <a:schemeClr val="tx1"/>
-                </a:solidFill>
-                <a:latin typeface="Tahoma" panose="020B0604030504040204" pitchFamily="34" charset="0"/>
-                <a:ea typeface="SimSun" panose="02010600030101010101" pitchFamily="2" charset="-122"/>
-              </a:defRPr>
-            </a:lvl2pPr>
-            <a:lvl3pPr marL="1143000" indent="-228600" eaLnBrk="0" hangingPunct="0">
-              <a:defRPr sz="1600">
-                <a:solidFill>
-                  <a:schemeClr val="tx1"/>
-                </a:solidFill>
-                <a:latin typeface="Tahoma" panose="020B0604030504040204" pitchFamily="34" charset="0"/>
-                <a:ea typeface="SimSun" panose="02010600030101010101" pitchFamily="2" charset="-122"/>
-              </a:defRPr>
-            </a:lvl3pPr>
-            <a:lvl4pPr marL="1600200" indent="-228600" eaLnBrk="0" hangingPunct="0">
-              <a:defRPr sz="1600">
-                <a:solidFill>
-                  <a:schemeClr val="tx1"/>
-                </a:solidFill>
-                <a:latin typeface="Tahoma" panose="020B0604030504040204" pitchFamily="34" charset="0"/>
-                <a:ea typeface="SimSun" panose="02010600030101010101" pitchFamily="2" charset="-122"/>
-              </a:defRPr>
-            </a:lvl4pPr>
-            <a:lvl5pPr marL="2057400" indent="-228600" eaLnBrk="0" hangingPunct="0">
-              <a:defRPr sz="1600">
-                <a:solidFill>
-                  <a:schemeClr val="tx1"/>
-                </a:solidFill>
-                <a:latin typeface="Tahoma" panose="020B0604030504040204" pitchFamily="34" charset="0"/>
-                <a:ea typeface="SimSun" panose="02010600030101010101" pitchFamily="2" charset="-122"/>
-              </a:defRPr>
-            </a:lvl5pPr>
-            <a:lvl6pPr marL="2514600" indent="-228600" algn="ctr" eaLnBrk="0" fontAlgn="base" hangingPunct="0">
-              <a:spcBef>
-                <a:spcPct val="0"/>
-              </a:spcBef>
-              <a:spcAft>
-                <a:spcPct val="0"/>
-              </a:spcAft>
-              <a:defRPr sz="1600">
-                <a:solidFill>
-                  <a:schemeClr val="tx1"/>
-                </a:solidFill>
-                <a:latin typeface="Tahoma" panose="020B0604030504040204" pitchFamily="34" charset="0"/>
-                <a:ea typeface="SimSun" panose="02010600030101010101" pitchFamily="2" charset="-122"/>
-              </a:defRPr>
-            </a:lvl6pPr>
-            <a:lvl7pPr marL="2971800" indent="-228600" algn="ctr" eaLnBrk="0" fontAlgn="base" hangingPunct="0">
-              <a:spcBef>
-                <a:spcPct val="0"/>
-              </a:spcBef>
-              <a:spcAft>
-                <a:spcPct val="0"/>
-              </a:spcAft>
-              <a:defRPr sz="1600">
-                <a:solidFill>
-                  <a:schemeClr val="tx1"/>
-                </a:solidFill>
-                <a:latin typeface="Tahoma" panose="020B0604030504040204" pitchFamily="34" charset="0"/>
-                <a:ea typeface="SimSun" panose="02010600030101010101" pitchFamily="2" charset="-122"/>
-              </a:defRPr>
-            </a:lvl7pPr>
-            <a:lvl8pPr marL="3429000" indent="-228600" algn="ctr" eaLnBrk="0" fontAlgn="base" hangingPunct="0">
-              <a:spcBef>
-                <a:spcPct val="0"/>
-              </a:spcBef>
-              <a:spcAft>
-                <a:spcPct val="0"/>
-              </a:spcAft>
-              <a:defRPr sz="1600">
-                <a:solidFill>
-                  <a:schemeClr val="tx1"/>
-                </a:solidFill>
-                <a:latin typeface="Tahoma" panose="020B0604030504040204" pitchFamily="34" charset="0"/>
-                <a:ea typeface="SimSun" panose="02010600030101010101" pitchFamily="2" charset="-122"/>
-              </a:defRPr>
-            </a:lvl8pPr>
-            <a:lvl9pPr marL="3886200" indent="-228600" algn="ctr" eaLnBrk="0" fontAlgn="base" hangingPunct="0">
-              <a:spcBef>
-                <a:spcPct val="0"/>
-              </a:spcBef>
-              <a:spcAft>
-                <a:spcPct val="0"/>
-              </a:spcAft>
-              <a:defRPr sz="1600">
-                <a:solidFill>
-                  <a:schemeClr val="tx1"/>
-                </a:solidFill>
-                <a:latin typeface="Tahoma" panose="020B0604030504040204" pitchFamily="34" charset="0"/>
-                <a:ea typeface="SimSun" panose="02010600030101010101" pitchFamily="2" charset="-122"/>
-              </a:defRPr>
-            </a:lvl9pPr>
-          </a:lstStyle>
-          <a:p>
-            <a:pPr marL="342900" marR="0" lvl="0" indent="-342900" algn="l" defTabSz="914400" rtl="0" eaLnBrk="1" fontAlgn="base" latinLnBrk="0" hangingPunct="1">
-              <a:lnSpc>
-                <a:spcPct val="100000"/>
-              </a:lnSpc>
-              <a:spcBef>
-                <a:spcPct val="20000"/>
-              </a:spcBef>
-              <a:spcAft>
-                <a:spcPct val="0"/>
-              </a:spcAft>
-              <a:buClrTx/>
-              <a:buSzTx/>
-              <a:buFontTx/>
-              <a:buChar char="•"/>
-              <a:tabLst/>
-              <a:defRPr/>
-            </a:pPr>
-            <a:r>
-              <a:rPr kumimoji="0" lang="en-US" altLang="en-US" sz="3200" b="0" i="0" u="none" strike="noStrike" kern="1200" cap="none" spc="0" normalizeH="0" baseline="0" noProof="0">
-                <a:ln>
-                  <a:noFill/>
-                </a:ln>
-                <a:solidFill>
-                  <a:srgbClr val="000000"/>
-                </a:solidFill>
-                <a:effectLst/>
-                <a:uLnTx/>
-                <a:uFillTx/>
-                <a:latin typeface="Tahoma" panose="020B0604030504040204" pitchFamily="34" charset="0"/>
-                <a:ea typeface="SimSun" panose="02010600030101010101" pitchFamily="2" charset="-122"/>
-                <a:cs typeface="+mn-cs"/>
-              </a:rPr>
-              <a:t>Every exception should be handled </a:t>
-            </a:r>
-            <a:r>
-              <a:rPr kumimoji="0" lang="en-US" altLang="en-US" sz="3200" b="0" i="1" u="none" strike="noStrike" kern="1200" cap="none" spc="0" normalizeH="0" baseline="0" noProof="0">
-                <a:ln>
-                  <a:noFill/>
-                </a:ln>
-                <a:solidFill>
-                  <a:srgbClr val="000000"/>
-                </a:solidFill>
-                <a:effectLst/>
-                <a:uLnTx/>
-                <a:uFillTx/>
-                <a:latin typeface="Tahoma" panose="020B0604030504040204" pitchFamily="34" charset="0"/>
-                <a:ea typeface="SimSun" panose="02010600030101010101" pitchFamily="2" charset="-122"/>
-                <a:cs typeface="+mn-cs"/>
-              </a:rPr>
-              <a:t>somewhere</a:t>
-            </a:r>
-            <a:r>
-              <a:rPr kumimoji="0" lang="en-US" altLang="en-US" sz="3200" b="0" i="0" u="none" strike="noStrike" kern="1200" cap="none" spc="0" normalizeH="0" baseline="0" noProof="0">
-                <a:ln>
-                  <a:noFill/>
-                </a:ln>
-                <a:solidFill>
-                  <a:srgbClr val="000000"/>
-                </a:solidFill>
-                <a:effectLst/>
-                <a:uLnTx/>
-                <a:uFillTx/>
-                <a:latin typeface="Tahoma" panose="020B0604030504040204" pitchFamily="34" charset="0"/>
-                <a:ea typeface="SimSun" panose="02010600030101010101" pitchFamily="2" charset="-122"/>
-                <a:cs typeface="+mn-cs"/>
-              </a:rPr>
-              <a:t> in your program.  If an exception has no handler, an error message is printed, and your program terminates.</a:t>
-            </a:r>
-          </a:p>
-        </p:txBody>
-      </p:sp>
-    </p:spTree>
-  </p:cSld>
-  <p:clrMapOvr>
-    <a:masterClrMapping/>
-  </p:clrMapOvr>
-  <p:transition advTm="1000"/>
 </p:sld>
 </file>
 
